--- a/Curso Gas B/09 - UNE 60670 - Generalidades y terminologia/09 - UNE 60670 - Generalidades y terminologia - Vídeo 1.pptx
+++ b/Curso Gas B/09 - UNE 60670 - Generalidades y terminologia/09 - UNE 60670 - Generalidades y terminologia - Vídeo 1.pptx
@@ -19,6 +19,7 @@
     <p:sldId id="267" r:id="rId19"/>
     <p:sldId id="268" r:id="rId20"/>
     <p:sldId id="269" r:id="rId21"/>
+    <p:sldId id="270" r:id="rId22"/>
   </p:sldIdLst>
   <p:sldSz cx="12191695" cy="6858000" type="screen4x3"/>
   <p:notesSz cx="6858000" cy="9144000"/>
@@ -590,12 +591,12 @@
           <a:lstStyle/>
           <a:p>
             <a:r>
-              <a:t>N1: ¿Y por qué importa de dónde venga el gas?</a:t>
-            </a:r>
-          </a:p>
-          <a:p>
-            <a:r>
-              <a:t>N2: Porque cambia con quién hablas y dónde empieza lo tuyo. Hay tres clases. Canalizado: el gas llega por una red de distribución, como el agua del grifo; ahí el gas y la llave de acometida los pone la compañía distribuidora. Granel: el gas está en un depósito fijo en la parcela, o en envases grandes de más de quince kilos; tu punto de partida es la salida del depósito. Y envases: bombonas pequeñas de menos de quince kilos; empiezas en el regulador acoplado a la bombona. No es una etiqueta de adorno: equivocarte de clase es equivocarte de interlocutor y del punto donde arranca tu instalación.</a:t>
+              <a:t>N1: Entonces la estufa de butano de casa, ¿no cuenta?</a:t>
+            </a:r>
+          </a:p>
+          <a:p>
+            <a:r>
+              <a:t>N2: Buen ejemplo. Esa estufa, con una sola bombona pequeña, por debajo de quince kilos, conectada a un solo aparato, no es instalación receptora: no se legaliza como tal. Es lo que la norma llama aparato móvil. Y hay una versión todavía más pequeña, el aparato popular, que es el infiernillo de camping: solo admite envase de hasta tres kilos. Pero ojo, que no valga todo: aunque no sea instalación receptora, la norma sí manda en cómo la conectas, dónde la pones, cómo la ventilas y cómo la enciendes. Frase de examen: no es instalación receptora, pero su conexión, ubicación, ventilación y puesta en marcha sí se rigen por la norma. El número que separa móvil de popular son tres kilos.</a:t>
             </a:r>
           </a:p>
         </p:txBody>
@@ -665,12 +666,12 @@
           <a:lstStyle/>
           <a:p>
             <a:r>
-              <a:t>N1: ¿Por dónde va el gas una vez dentro?</a:t>
-            </a:r>
-          </a:p>
-          <a:p>
-            <a:r>
-              <a:t>N2: Sigue el camino y lo entiendes de un tirón. El gas entra por la acometida interior, el primer tramo tras la llave de acometida. Luego sube por la instalación común, que es el montante que comparten los vecinos. Y termina en la instalación individual, lo que entra en cada vivienda hasta los aparatos. Ahora bien, no siempre están las tres. En un chalé con el contador en la valla puede que solo haya instalación individual; por eso la norma dice en general. Y esto importa en la práctica: la parte común es de la comunidad y la individual es del usuario, así que sabes qué tramo certificas y a quién avisas cuando algo falla. Las definiciones exactas de cada tramo las vemos en el vídeo dos.</a:t>
+              <a:t>N1: ¿Y por qué importa de dónde venga el gas?</a:t>
+            </a:r>
+          </a:p>
+          <a:p>
+            <a:r>
+              <a:t>N2: Porque cambia con quién hablas y dónde empieza lo tuyo. Hay tres clases. Canalizado: el gas llega por una red de distribución, como el agua del grifo; ahí el gas y la llave de acometida los pone la compañía distribuidora. Granel: el gas está en un depósito fijo en la parcela, o en envases grandes de más de quince kilos; tu punto de partida es la salida del depósito. Y envases: bombonas pequeñas de menos de quince kilos; empiezas en el regulador acoplado a la bombona. No es una etiqueta de adorno: equivocarte de clase es equivocarte de interlocutor y del punto donde arranca tu instalación.</a:t>
             </a:r>
           </a:p>
         </p:txBody>
@@ -740,12 +741,12 @@
           <a:lstStyle/>
           <a:p>
             <a:r>
-              <a:t>N1: Con tantas exigencias, ¿hay alguna idea que las resuma?</a:t>
-            </a:r>
-          </a:p>
-          <a:p>
-            <a:r>
-              <a:t>N2: Sí, y es muy útil tenerla clara. Todo lo que la norma te va a pedir después, materiales, uniones, pruebas, ventilación, persigue solo dos cosas. Una: que llegue gas suficiente a los aparatos, para que no se ahoguen. Dos: que llegue con seguridad, sin fugas ni riesgos. Nada más. Cuando dudes por qué la norma exige algo, casi siempre la respuesta es una de esas dos. Y en avería es igual de útil: si un aparato da mala combustión y se apaga, seguramente falla la aportación, el tubo va justo; si hueles gas, falla la conducción, hay fuga. Estos dos objetivos son la causa raíz de media avería.</a:t>
+              <a:t>N1: ¿Por dónde va el gas una vez dentro?</a:t>
+            </a:r>
+          </a:p>
+          <a:p>
+            <a:r>
+              <a:t>N2: Sigue el camino y lo entiendes de un tirón. El gas entra por la acometida interior, el primer tramo tras la llave de acometida. Luego sube por la instalación común, que es el montante que comparten los vecinos. Y termina en la instalación individual, lo que entra en cada vivienda hasta los aparatos. Ahora bien, no siempre están las tres. En un chalé con el contador en la valla puede que solo haya instalación individual; por eso la norma dice en general. Y esto importa en la práctica: la parte común es de la comunidad y la individual es del usuario, así que sabes qué tramo certificas y a quién avisas cuando algo falla. Las definiciones exactas de cada tramo las vemos en el vídeo dos.</a:t>
             </a:r>
           </a:p>
         </p:txBody>
@@ -815,12 +816,12 @@
           <a:lstStyle/>
           <a:p>
             <a:r>
-              <a:t>N1: Y saber si es receptora o no, ¿para qué me sirve en el día a día?</a:t>
-            </a:r>
-          </a:p>
-          <a:p>
-            <a:r>
-              <a:t>N2: Para lo más importante: decide si hay papeleo o no. En cuanto hay tubería fija, varios aparatos o más carga de gas, ya es instalación receptora, y eso obliga a un certificado de instalación, lo que todos llamamos el boletín, en los modelos oficiales tipo I R G. Ese papel lo firma la empresa instaladora habilitada de categoría B, la tuya, y se entrega a la empresa distribuidora, con copia para el titular. Sin ese documento, la distribuidora no da gas. La chapuza típica es justo esa: una instalación fija montada como si fuera camping-gas, sin boletín y sin prueba de estanquidad. Ahí tienes la fuga esperando a pasar.</a:t>
+              <a:t>N1: Con tantas exigencias, ¿hay alguna idea que las resuma?</a:t>
+            </a:r>
+          </a:p>
+          <a:p>
+            <a:r>
+              <a:t>N2: Sí, y es muy útil tenerla clara. Todo lo que la norma te va a pedir después, materiales, uniones, pruebas, ventilación, persigue solo dos cosas. Una: que llegue gas suficiente a los aparatos, para que no se ahoguen. Dos: que llegue con seguridad, sin fugas ni riesgos. Nada más. Cuando dudes por qué la norma exige algo, casi siempre la respuesta es una de esas dos. Y en avería es igual de útil: si un aparato da mala combustión y se apaga, seguramente falla la aportación, el tubo va justo; si hueles gas, falla la conducción, hay fuga. Estos dos objetivos son la causa raíz de media avería.</a:t>
             </a:r>
           </a:p>
         </p:txBody>
@@ -890,6 +891,81 @@
           <a:lstStyle/>
           <a:p>
             <a:r>
+              <a:t>N1: Y saber si es receptora o no, ¿para qué me sirve en el día a día?</a:t>
+            </a:r>
+          </a:p>
+          <a:p>
+            <a:r>
+              <a:t>N2: Para lo más importante: decide si hay papeleo o no. En cuanto hay tubería fija, varios aparatos o más carga de gas, ya es instalación receptora, y eso obliga a un certificado de instalación, lo que todos llamamos el boletín, en los modelos oficiales tipo I R G. Ese papel lo firma la empresa instaladora habilitada de categoría B, la tuya, y se entrega a la empresa distribuidora, con copia para el titular. Sin ese documento, la distribuidora no da gas. La chapuza típica es justo esa: una instalación fija montada como si fuera camping-gas, sin boletín y sin prueba de estanquidad. Ahí tienes la fuga esperando a pasar.</a:t>
+            </a:r>
+          </a:p>
+        </p:txBody>
+      </p:sp>
+      <p:sp>
+        <p:nvSpPr>
+          <p:cNvPr id="4" name="Slide Number Placeholder 3"/>
+          <p:cNvSpPr>
+            <a:spLocks noGrp="1"/>
+          </p:cNvSpPr>
+          <p:nvPr>
+            <p:ph type="sldNum" idx="5" sz="quarter"/>
+          </p:nvPr>
+        </p:nvSpPr>
+        <p:spPr/>
+      </p:sp>
+    </p:spTree>
+  </p:cSld>
+  <p:clrMapOvr>
+    <a:masterClrMapping/>
+  </p:clrMapOvr>
+</p:notes>
+</file>
+
+<file path=ppt/notesSlides/notesSlide15.xml><?xml version="1.0" encoding="utf-8"?>
+<p:notes xmlns:a="http://schemas.openxmlformats.org/drawingml/2006/main" xmlns:p="http://schemas.openxmlformats.org/presentationml/2006/main" xmlns:r="http://schemas.openxmlformats.org/officeDocument/2006/relationships">
+  <p:cSld>
+    <p:spTree>
+      <p:nvGrpSpPr>
+        <p:cNvPr id="1" name=""/>
+        <p:cNvGrpSpPr/>
+        <p:nvPr/>
+      </p:nvGrpSpPr>
+      <p:grpSpPr>
+        <a:xfrm>
+          <a:off x="0" y="0"/>
+          <a:ext cx="0" cy="0"/>
+          <a:chOff x="0" y="0"/>
+          <a:chExt cx="0" cy="0"/>
+        </a:xfrm>
+      </p:grpSpPr>
+      <p:sp>
+        <p:nvSpPr>
+          <p:cNvPr id="2" name="Slide Image Placeholder 1"/>
+          <p:cNvSpPr>
+            <a:spLocks noGrp="1"/>
+          </p:cNvSpPr>
+          <p:nvPr>
+            <p:ph type="sldImg" idx="2"/>
+          </p:nvPr>
+        </p:nvSpPr>
+        <p:spPr/>
+      </p:sp>
+      <p:sp>
+        <p:nvSpPr>
+          <p:cNvPr id="3" name="Notes Placeholder 2"/>
+          <p:cNvSpPr>
+            <a:spLocks noGrp="1"/>
+          </p:cNvSpPr>
+          <p:nvPr>
+            <p:ph type="body" idx="3" sz="quarter"/>
+          </p:nvPr>
+        </p:nvSpPr>
+        <p:spPr/>
+        <p:txBody>
+          <a:bodyPr/>
+          <a:lstStyle/>
+          <a:p>
+            <a:r>
               <a:t>N1: Cerramos. Si me quedo con lo esencial, ¿qué me llevo?</a:t>
             </a:r>
           </a:p>
@@ -1048,16 +1124,7 @@
         <p:txBody>
           <a:bodyPr/>
           <a:lstStyle/>
-          <a:p>
-            <a:r>
-              <a:t>N1: ¿Todo eso lo dice una sola norma?</a:t>
-            </a:r>
-          </a:p>
-          <a:p>
-            <a:r>
-              <a:t>N2: Sí, y por eso es tan importante. Vamos de lo sencillo a lo preciso. Una instalación de gas tiene una vida: primero se piensa y se dibuja, eso es el diseño; luego se monta, la construcción; después se comprueba que no se escapa nada, las pruebas; se le mete gas por primera vez, la puesta en servicio; y con los años se revisa, el control periódico. Pues la UNE sesenta mil seiscientos setenta manda en toda esa vida, de principio a fin, siempre que la presión máxima de operación, o sea, la presión más alta a la que trabaja de forma continua, no pase de cinco bar. Y ojo, también dice dónde y cómo se colocan y se conectan los aparatos. Ejemplo de obra: cuando montas una caldera nueva y luego rellenas el boletín, estás pisando esta norma en cada paso.</a:t>
-            </a:r>
-          </a:p>
+          <a:p/>
         </p:txBody>
       </p:sp>
       <p:sp>
@@ -1125,12 +1192,12 @@
           <a:lstStyle/>
           <a:p>
             <a:r>
-              <a:t>N1: ¿Y me tengo que aprender las trece de memoria?</a:t>
-            </a:r>
-          </a:p>
-          <a:p>
-            <a:r>
-              <a:t>N2: No, tranquilo. Pero sí saber que existen y para qué sirve cada bloque, porque en obra vas directo a la que necesitas sin perder la mañana buscando. Imagina un manual gordo con trece capítulos. Los dos primeros son la introducción: la parte uno, generalidades, que es esta, y la parte dos, el diccionario de términos. Esos dos te colocan todo. De la tres a la trece está el detalle: tuberías, diseño, contadores, ventilación, pruebas, puesta en servicio, revisiones. Regla práctica: dominas primero la uno y la dos, y las demás las consultas cuando toca.</a:t>
+              <a:t>N1: ¿Todo eso lo dice una sola norma?</a:t>
+            </a:r>
+          </a:p>
+          <a:p>
+            <a:r>
+              <a:t>N2: Sí, y por eso es tan importante. Vamos de lo sencillo a lo preciso. Una instalación de gas tiene una vida: primero se piensa y se dibuja, eso es el diseño; luego se monta, la construcción; después se comprueba que no se escapa nada, las pruebas; se le mete gas por primera vez, la puesta en servicio; y con los años se revisa, el control periódico. Pues la UNE sesenta mil seiscientos setenta manda en toda esa vida, de principio a fin, siempre que la presión máxima de operación, o sea, la presión más alta a la que trabaja de forma continua, no pase de cinco bar. Y ojo, también dice dónde y cómo se colocan y se conectan los aparatos. Ejemplo de obra: cuando montas una caldera nueva y luego rellenas el boletín, estás pisando esta norma en cada paso.</a:t>
             </a:r>
           </a:p>
         </p:txBody>
@@ -1200,12 +1267,12 @@
           <a:lstStyle/>
           <a:p>
             <a:r>
-              <a:t>N1: Vale, pero en el examen o en obra, ¿cómo sé a qué parte ir?</a:t>
-            </a:r>
-          </a:p>
-          <a:p>
-            <a:r>
-              <a:t>N2: Aquí va un truco que vale oro. Cuando pienses en pruebas de estanquidad para entregar la instalación, o sea, comprobar que no se escapa gas antes de entregarla, esa es la parte ocho. Cuando pienses en meter gas por primera vez, la puesta en servicio, esa es la nueve. Y cuando pienses en las revisiones cada cierto tiempo, el control periódico, son dos: la doce para la instalación y la trece para los aparatos. Si te preguntan en qué parte se trata algo, colócalo en su bloque y aciertas. En obra es igual: sabes exactamente qué capítulo abrir sin dar vueltas.</a:t>
+              <a:t>N1: ¿Y me tengo que aprender las trece de memoria?</a:t>
+            </a:r>
+          </a:p>
+          <a:p>
+            <a:r>
+              <a:t>N2: No, tranquilo. Pero sí saber que existen y para qué sirve cada bloque, porque en obra vas directo a la que necesitas sin perder la mañana buscando. Imagina un manual gordo con trece capítulos. Los dos primeros son la introducción: la parte uno, generalidades, que es esta, y la parte dos, el diccionario de términos. Esos dos te colocan todo. De la tres a la trece está el detalle: tuberías, diseño, contadores, ventilación, pruebas, puesta en servicio, revisiones. Regla práctica: dominas primero la uno y la dos, y las demás las consultas cuando toca.</a:t>
             </a:r>
           </a:p>
         </p:txBody>
@@ -1275,12 +1342,12 @@
           <a:lstStyle/>
           <a:p>
             <a:r>
-              <a:t>N1: ¿Qué es eso del Anexo A? ¿Hay que empollárselo?</a:t>
-            </a:r>
-          </a:p>
-          <a:p>
-            <a:r>
-              <a:t>N2: Nada de empollar. El único cambio de fondo de esta parte uno es que se ha actualizado ese anexo. Y es simplemente una lista: todas las otras normas que se citan a lo largo de las trece partes, tubos, llaves, reguladores, contadores, chimeneas, detectores. Es como la bibliografía al final de un libro: te dice dónde mirar cada cosa, pero no manda nada por sí mismo; por eso decimos que es informativo. Lo que tienes que saber para el examen es solo eso: que existe y que es informativo. Punto.</a:t>
+              <a:t>N1: Vale, pero en el examen o en obra, ¿cómo sé a qué parte ir?</a:t>
+            </a:r>
+          </a:p>
+          <a:p>
+            <a:r>
+              <a:t>N2: Aquí va un truco que vale oro. Cuando pienses en pruebas de estanquidad para entregar la instalación, o sea, comprobar que no se escapa gas antes de entregarla, esa es la parte ocho. Cuando pienses en meter gas por primera vez, la puesta en servicio, esa es la nueve. Y cuando pienses en las revisiones cada cierto tiempo, el control periódico, son dos: la doce para la instalación y la trece para los aparatos. Si te preguntan en qué parte se trata algo, colócalo en su bloque y aciertas. En obra es igual: sabes exactamente qué capítulo abrir sin dar vueltas.</a:t>
             </a:r>
           </a:p>
         </p:txBody>
@@ -1350,12 +1417,12 @@
           <a:lstStyle/>
           <a:p>
             <a:r>
-              <a:t>N1: Y esta parte uno concreta, ¿de qué se ocupa?</a:t>
-            </a:r>
-          </a:p>
-          <a:p>
-            <a:r>
-              <a:t>N2: De tres cosas muy claras, y te las digo en orden. Primero, define: pone negro sobre blanco qué es una instalación receptora, para que todos hablemos de lo mismo. Segundo, clasifica: la ordena en grupos según cómo llega el gas. Y tercero, marca los requisitos generales, las reglas de mínimos que debe cumplir cualquier instalación. Además, no se lo inventa: desarrolla una norma europea, la UNE-EN mil setecientos setenta y cinco, que da las recomendaciones de fondo para las redes de gas en edificios. O sea, la europea pone la idea general y la nuestra pone el detalle para España.</a:t>
+              <a:t>N1: ¿Qué es eso del Anexo A? ¿Hay que empollárselo?</a:t>
+            </a:r>
+          </a:p>
+          <a:p>
+            <a:r>
+              <a:t>N2: Nada de empollar. El único cambio de fondo de esta parte uno es que se ha actualizado ese anexo. Y es simplemente una lista: todas las otras normas que se citan a lo largo de las trece partes, tubos, llaves, reguladores, contadores, chimeneas, detectores. Es como la bibliografía al final de un libro: te dice dónde mirar cada cosa, pero no manda nada por sí mismo; por eso decimos que es informativo. Lo que tienes que saber para el examen es solo eso: que existe y que es informativo. Punto.</a:t>
             </a:r>
           </a:p>
         </p:txBody>
@@ -1425,12 +1492,12 @@
           <a:lstStyle/>
           <a:p>
             <a:r>
-              <a:t>N1: ¿Cualquier tubo de gas es una instalación receptora?</a:t>
-            </a:r>
-          </a:p>
-          <a:p>
-            <a:r>
-              <a:t>N2: No, y esto es clave. Tienen que darse tres condiciones a la vez, como las tres patas de un taburete: si falta una, se cae. Una, que use un gas de los normalizados, de las familias reconocidas en la norma UNE-EN cuatrocientos treinta y siete. Dos, que la presión máxima de operación no pase de cinco bar. Y tres, que esté hecha para dar servicio a aparatos de gas, sea una cocina, una caldera o un calentador. Regla de bolsillo: gas normalizado, poca presión y para dar de comer a aparatos. Si se cumplen las tres, es instalación receptora; si falla una, no lo es a efectos de esta norma.</a:t>
+              <a:t>N1: Y esta parte uno concreta, ¿de qué se ocupa?</a:t>
+            </a:r>
+          </a:p>
+          <a:p>
+            <a:r>
+              <a:t>N2: De tres cosas muy claras, y te las digo en orden. Primero, define: pone negro sobre blanco qué es una instalación receptora, para que todos hablemos de lo mismo. Segundo, clasifica: la ordena en grupos según cómo llega el gas. Y tercero, marca los requisitos generales, las reglas de mínimos que debe cumplir cualquier instalación. Además, no se lo inventa: desarrolla una norma europea, la UNE-EN mil setecientos setenta y cinco, que da las recomendaciones de fondo para las redes de gas en edificios. O sea, la europea pone la idea general y la nuestra pone el detalle para España.</a:t>
             </a:r>
           </a:p>
         </p:txBody>
@@ -1500,12 +1567,12 @@
           <a:lstStyle/>
           <a:p>
             <a:r>
-              <a:t>N1: Entonces la estufa de butano de casa, ¿no cuenta?</a:t>
-            </a:r>
-          </a:p>
-          <a:p>
-            <a:r>
-              <a:t>N2: Buen ejemplo. Esa estufa, con una sola bombona pequeña, por debajo de quince kilos, conectada a un solo aparato, no es instalación receptora: no se legaliza como tal. Es lo que la norma llama aparato móvil. Y hay una versión todavía más pequeña, el aparato popular, que es el infiernillo de camping: solo admite envase de hasta tres kilos. Pero ojo, que no valga todo: aunque no sea instalación receptora, la norma sí manda en cómo la conectas, dónde la pones, cómo la ventilas y cómo la enciendes. Frase de examen: no es instalación receptora, pero su conexión, ubicación, ventilación y puesta en marcha sí se rigen por la norma. El número que separa móvil de popular son tres kilos.</a:t>
+              <a:t>N1: ¿Cualquier tubo de gas es una instalación receptora?</a:t>
+            </a:r>
+          </a:p>
+          <a:p>
+            <a:r>
+              <a:t>N2: No, y esto es clave. Tienen que darse tres condiciones a la vez, como las tres patas de un taburete: si falta una, se cae. Una, que use un gas de los normalizados, de las familias reconocidas en la norma UNE-EN cuatrocientos treinta y siete. Dos, que la presión máxima de operación no pase de cinco bar. Y tres, que esté hecha para dar servicio a aparatos de gas, sea una cocina, una caldera o un calentador. Regla de bolsillo: gas normalizado, poca presión y para dar de comer a aparatos. Si se cumplen las tres, es instalación receptora; si falla una, no lo es a efectos de esta norma.</a:t>
             </a:r>
           </a:p>
         </p:txBody>
@@ -4580,7 +4647,7 @@
             <a:r>
               <a:rPr sz="1400" b="1" i="0">
                 <a:solidFill>
-                  <a:srgbClr val="CADCFC"/>
+                  <a:srgbClr val="F4A24C"/>
                 </a:solidFill>
                 <a:latin typeface="Montserrat"/>
               </a:rPr>
@@ -4591,13 +4658,57 @@
       </p:sp>
       <p:sp>
         <p:nvSpPr>
-          <p:cNvPr id="4" name="TextBox 3"/>
+          <p:cNvPr id="4" name="Rounded Rectangle 3"/>
+          <p:cNvSpPr/>
+          <p:nvPr/>
+        </p:nvSpPr>
+        <p:spPr>
+          <a:xfrm>
+            <a:off x="868680" y="2057400"/>
+            <a:ext cx="1463040" cy="82296"/>
+          </a:xfrm>
+          <a:prstGeom prst="roundRect">
+            <a:avLst/>
+          </a:prstGeom>
+          <a:solidFill>
+            <a:srgbClr val="E8801A"/>
+          </a:solidFill>
+          <a:ln>
+            <a:noFill/>
+          </a:ln>
+          <a:effectLst/>
+        </p:spPr>
+        <p:style>
+          <a:lnRef idx="1">
+            <a:schemeClr val="accent1"/>
+          </a:lnRef>
+          <a:fillRef idx="3">
+            <a:schemeClr val="accent1"/>
+          </a:fillRef>
+          <a:effectRef idx="2">
+            <a:schemeClr val="accent1"/>
+          </a:effectRef>
+          <a:fontRef idx="minor">
+            <a:schemeClr val="lt1"/>
+          </a:fontRef>
+        </p:style>
+        <p:txBody>
+          <a:bodyPr rtlCol="0" anchor="ctr"/>
+          <a:lstStyle/>
+          <a:p>
+            <a:pPr algn="ctr"/>
+          </a:p>
+        </p:txBody>
+      </p:sp>
+      <p:sp>
+        <p:nvSpPr>
+          <p:cNvPr id="5" name="TextBox 4"/>
           <p:cNvSpPr txBox="1"/>
           <p:nvPr/>
         </p:nvSpPr>
         <p:spPr>
           <a:xfrm>
-            <a:off x="822960" y="2194560"/>
+            <a:off x="822960" y="2286000"/>
             <a:ext cx="10515600" cy="2011680"/>
           </a:xfrm>
           <a:prstGeom prst="rect">
@@ -4636,7 +4747,7 @@
       </p:sp>
       <p:sp>
         <p:nvSpPr>
-          <p:cNvPr id="5" name="TextBox 4"/>
+          <p:cNvPr id="6" name="TextBox 5"/>
           <p:cNvSpPr txBox="1"/>
           <p:nvPr/>
         </p:nvSpPr>
@@ -4760,7 +4871,7 @@
                 </a:solidFill>
                 <a:latin typeface="Montserrat"/>
               </a:rPr>
-              <a:t>010 / 014</a:t>
+              <a:t>010 / 015</a:t>
             </a:r>
           </a:p>
         </p:txBody>
@@ -4808,7 +4919,7 @@
         <p:spPr>
           <a:xfrm>
             <a:off x="822960" y="457200"/>
-            <a:ext cx="8229600" cy="365760"/>
+            <a:ext cx="10058400" cy="365760"/>
           </a:xfrm>
           <a:prstGeom prst="rect">
             <a:avLst/>
@@ -4822,13 +4933,13 @@
           <a:lstStyle/>
           <a:p>
             <a:r>
-              <a:rPr sz="1200" b="1" i="0">
-                <a:solidFill>
-                  <a:srgbClr val="64748B"/>
-                </a:solidFill>
-                <a:latin typeface="Montserrat"/>
-              </a:rPr>
-              <a:t>CLASIFICACIÓN · SUMINISTRO</a:t>
+              <a:rPr sz="1300" b="1" i="0">
+                <a:solidFill>
+                  <a:srgbClr val="E8801A"/>
+                </a:solidFill>
+                <a:latin typeface="Montserrat"/>
+              </a:rPr>
+              <a:t>DEFINICIÓN · EXCEPCIONES</a:t>
             </a:r>
           </a:p>
         </p:txBody>
@@ -4856,26 +4967,70 @@
           <a:lstStyle/>
           <a:p>
             <a:r>
-              <a:rPr sz="2700" b="1" i="0">
+              <a:rPr sz="2800" b="1" i="0">
                 <a:solidFill>
                   <a:srgbClr val="1E2761"/>
                 </a:solidFill>
                 <a:latin typeface="Montserrat"/>
               </a:rPr>
-              <a:t>Tres clases según el gas</a:t>
-            </a:r>
-          </a:p>
-        </p:txBody>
-      </p:sp>
-      <p:sp>
-        <p:nvSpPr>
-          <p:cNvPr id="7" name="TextBox 6"/>
+              <a:t>Qué NO es instalación receptora</a:t>
+            </a:r>
+          </a:p>
+        </p:txBody>
+      </p:sp>
+      <p:sp>
+        <p:nvSpPr>
+          <p:cNvPr id="7" name="Rounded Rectangle 6"/>
+          <p:cNvSpPr/>
+          <p:nvPr/>
+        </p:nvSpPr>
+        <p:spPr>
+          <a:xfrm>
+            <a:off x="868680" y="1627632"/>
+            <a:ext cx="2011680" cy="73152"/>
+          </a:xfrm>
+          <a:prstGeom prst="roundRect">
+            <a:avLst/>
+          </a:prstGeom>
+          <a:solidFill>
+            <a:srgbClr val="E8801A"/>
+          </a:solidFill>
+          <a:ln>
+            <a:noFill/>
+          </a:ln>
+          <a:effectLst/>
+        </p:spPr>
+        <p:style>
+          <a:lnRef idx="1">
+            <a:schemeClr val="accent1"/>
+          </a:lnRef>
+          <a:fillRef idx="3">
+            <a:schemeClr val="accent1"/>
+          </a:fillRef>
+          <a:effectRef idx="2">
+            <a:schemeClr val="accent1"/>
+          </a:effectRef>
+          <a:fontRef idx="minor">
+            <a:schemeClr val="lt1"/>
+          </a:fontRef>
+        </p:style>
+        <p:txBody>
+          <a:bodyPr rtlCol="0" anchor="ctr"/>
+          <a:lstStyle/>
+          <a:p>
+            <a:pPr algn="ctr"/>
+          </a:p>
+        </p:txBody>
+      </p:sp>
+      <p:sp>
+        <p:nvSpPr>
+          <p:cNvPr id="8" name="TextBox 7"/>
           <p:cNvSpPr txBox="1"/>
           <p:nvPr/>
         </p:nvSpPr>
         <p:spPr>
           <a:xfrm>
-            <a:off x="822960" y="1920240"/>
+            <a:off x="822960" y="1965960"/>
             <a:ext cx="4983480" cy="4206240"/>
           </a:xfrm>
           <a:prstGeom prst="rect">
@@ -4891,17 +5046,17 @@
           <a:p>
             <a:pPr>
               <a:spcAft>
-                <a:spcPts val="1000"/>
+                <a:spcPts val="1100"/>
               </a:spcAft>
             </a:pPr>
             <a:r>
               <a:rPr sz="1600" b="1" i="0">
                 <a:solidFill>
-                  <a:srgbClr val="2E3A80"/>
-                </a:solidFill>
-                <a:latin typeface="Montserrat"/>
-              </a:rPr>
-              <a:t>•  </a:t>
+                  <a:srgbClr val="E8801A"/>
+                </a:solidFill>
+                <a:latin typeface="Montserrat"/>
+              </a:rPr>
+              <a:t>▸  </a:t>
             </a:r>
             <a:r>
               <a:rPr sz="1600" b="0" i="0">
@@ -4910,23 +5065,23 @@
                 </a:solidFill>
                 <a:latin typeface="Montserrat"/>
               </a:rPr>
-              <a:t>Canalizado: red de distribución</a:t>
+              <a:t>Aparato móvil: envase &lt; 15 kg</a:t>
             </a:r>
           </a:p>
           <a:p>
             <a:pPr>
               <a:spcAft>
-                <a:spcPts val="1000"/>
+                <a:spcPts val="1100"/>
               </a:spcAft>
             </a:pPr>
             <a:r>
               <a:rPr sz="1600" b="1" i="0">
                 <a:solidFill>
-                  <a:srgbClr val="2E3A80"/>
-                </a:solidFill>
-                <a:latin typeface="Montserrat"/>
-              </a:rPr>
-              <a:t>•  </a:t>
+                  <a:srgbClr val="E8801A"/>
+                </a:solidFill>
+                <a:latin typeface="Montserrat"/>
+              </a:rPr>
+              <a:t>▸  </a:t>
             </a:r>
             <a:r>
               <a:rPr sz="1600" b="0" i="0">
@@ -4935,23 +5090,23 @@
                 </a:solidFill>
                 <a:latin typeface="Montserrat"/>
               </a:rPr>
-              <a:t>Granel: depósito fijo o &gt; 15 kg</a:t>
+              <a:t>Aparato popular: envase ≤ 3 kg</a:t>
             </a:r>
           </a:p>
           <a:p>
             <a:pPr>
               <a:spcAft>
-                <a:spcPts val="1000"/>
+                <a:spcPts val="1100"/>
               </a:spcAft>
             </a:pPr>
             <a:r>
               <a:rPr sz="1600" b="1" i="0">
                 <a:solidFill>
-                  <a:srgbClr val="2E3A80"/>
-                </a:solidFill>
-                <a:latin typeface="Montserrat"/>
-              </a:rPr>
-              <a:t>•  </a:t>
+                  <a:srgbClr val="E8801A"/>
+                </a:solidFill>
+                <a:latin typeface="Montserrat"/>
+              </a:rPr>
+              <a:t>▸  </a:t>
             </a:r>
             <a:r>
               <a:rPr sz="1600" b="0" i="0">
@@ -4960,14 +5115,39 @@
                 </a:solidFill>
                 <a:latin typeface="Montserrat"/>
               </a:rPr>
-              <a:t>Envases: envase &lt; 15 kg</a:t>
-            </a:r>
-          </a:p>
-        </p:txBody>
-      </p:sp>
-      <p:sp>
-        <p:nvSpPr>
-          <p:cNvPr id="8" name="imgph" descr="IMGQ:outdoor LPG storage tank in garden"/>
+              <a:t>Conectado a un solo aparato</a:t>
+            </a:r>
+          </a:p>
+          <a:p>
+            <a:pPr>
+              <a:spcAft>
+                <a:spcPts val="1100"/>
+              </a:spcAft>
+            </a:pPr>
+            <a:r>
+              <a:rPr sz="1600" b="1" i="0">
+                <a:solidFill>
+                  <a:srgbClr val="E8801A"/>
+                </a:solidFill>
+                <a:latin typeface="Montserrat"/>
+              </a:rPr>
+              <a:t>▸  </a:t>
+            </a:r>
+            <a:r>
+              <a:rPr sz="1600" b="0" i="0">
+                <a:solidFill>
+                  <a:srgbClr val="1B2330"/>
+                </a:solidFill>
+                <a:latin typeface="Montserrat"/>
+              </a:rPr>
+              <a:t>Pero: su conexión sí se regula</a:t>
+            </a:r>
+          </a:p>
+        </p:txBody>
+      </p:sp>
+      <p:sp>
+        <p:nvSpPr>
+          <p:cNvPr id="9" name="imgph" descr="IMGQ:portable butane gas heater with cylinder"/>
           <p:cNvSpPr/>
           <p:nvPr/>
         </p:nvSpPr>
@@ -5013,7 +5193,7 @@
       </p:sp>
       <p:sp>
         <p:nvSpPr>
-          <p:cNvPr id="9" name="TextBox 8"/>
+          <p:cNvPr id="10" name="TextBox 9"/>
           <p:cNvSpPr txBox="1"/>
           <p:nvPr/>
         </p:nvSpPr>
@@ -5053,7 +5233,7 @@
                 </a:solidFill>
                 <a:latin typeface="Montserrat"/>
               </a:rPr>
-              <a:t>outdoor LPG storage tank in garden</a:t>
+              <a:t>portable butane gas heater with cylinder</a:t>
             </a:r>
           </a:p>
         </p:txBody>
@@ -5150,7 +5330,7 @@
                 </a:solidFill>
                 <a:latin typeface="Montserrat"/>
               </a:rPr>
-              <a:t>011 / 014</a:t>
+              <a:t>011 / 015</a:t>
             </a:r>
           </a:p>
         </p:txBody>
@@ -5198,7 +5378,7 @@
         <p:spPr>
           <a:xfrm>
             <a:off x="822960" y="457200"/>
-            <a:ext cx="8229600" cy="365760"/>
+            <a:ext cx="10058400" cy="365760"/>
           </a:xfrm>
           <a:prstGeom prst="rect">
             <a:avLst/>
@@ -5212,13 +5392,13 @@
           <a:lstStyle/>
           <a:p>
             <a:r>
-              <a:rPr sz="1200" b="1" i="0">
-                <a:solidFill>
-                  <a:srgbClr val="64748B"/>
-                </a:solidFill>
-                <a:latin typeface="Montserrat"/>
-              </a:rPr>
-              <a:t>PARTES · ESTRUCTURA FÍSICA</a:t>
+              <a:rPr sz="1300" b="1" i="0">
+                <a:solidFill>
+                  <a:srgbClr val="E8801A"/>
+                </a:solidFill>
+                <a:latin typeface="Montserrat"/>
+              </a:rPr>
+              <a:t>CLASIFICACIÓN · SUMINISTRO</a:t>
             </a:r>
           </a:p>
         </p:txBody>
@@ -5246,26 +5426,70 @@
           <a:lstStyle/>
           <a:p>
             <a:r>
-              <a:rPr sz="2700" b="1" i="0">
+              <a:rPr sz="2800" b="1" i="0">
                 <a:solidFill>
                   <a:srgbClr val="1E2761"/>
                 </a:solidFill>
                 <a:latin typeface="Montserrat"/>
               </a:rPr>
-              <a:t>Las tres partes, en fila</a:t>
-            </a:r>
-          </a:p>
-        </p:txBody>
-      </p:sp>
-      <p:sp>
-        <p:nvSpPr>
-          <p:cNvPr id="7" name="TextBox 6"/>
+              <a:t>Tres clases según el gas</a:t>
+            </a:r>
+          </a:p>
+        </p:txBody>
+      </p:sp>
+      <p:sp>
+        <p:nvSpPr>
+          <p:cNvPr id="7" name="Rounded Rectangle 6"/>
+          <p:cNvSpPr/>
+          <p:nvPr/>
+        </p:nvSpPr>
+        <p:spPr>
+          <a:xfrm>
+            <a:off x="868680" y="1627632"/>
+            <a:ext cx="2011680" cy="73152"/>
+          </a:xfrm>
+          <a:prstGeom prst="roundRect">
+            <a:avLst/>
+          </a:prstGeom>
+          <a:solidFill>
+            <a:srgbClr val="E8801A"/>
+          </a:solidFill>
+          <a:ln>
+            <a:noFill/>
+          </a:ln>
+          <a:effectLst/>
+        </p:spPr>
+        <p:style>
+          <a:lnRef idx="1">
+            <a:schemeClr val="accent1"/>
+          </a:lnRef>
+          <a:fillRef idx="3">
+            <a:schemeClr val="accent1"/>
+          </a:fillRef>
+          <a:effectRef idx="2">
+            <a:schemeClr val="accent1"/>
+          </a:effectRef>
+          <a:fontRef idx="minor">
+            <a:schemeClr val="lt1"/>
+          </a:fontRef>
+        </p:style>
+        <p:txBody>
+          <a:bodyPr rtlCol="0" anchor="ctr"/>
+          <a:lstStyle/>
+          <a:p>
+            <a:pPr algn="ctr"/>
+          </a:p>
+        </p:txBody>
+      </p:sp>
+      <p:sp>
+        <p:nvSpPr>
+          <p:cNvPr id="8" name="TextBox 7"/>
           <p:cNvSpPr txBox="1"/>
           <p:nvPr/>
         </p:nvSpPr>
         <p:spPr>
           <a:xfrm>
-            <a:off x="822960" y="1920240"/>
+            <a:off x="822960" y="1965960"/>
             <a:ext cx="4983480" cy="4206240"/>
           </a:xfrm>
           <a:prstGeom prst="rect">
@@ -5281,17 +5505,17 @@
           <a:p>
             <a:pPr>
               <a:spcAft>
-                <a:spcPts val="1000"/>
+                <a:spcPts val="1100"/>
               </a:spcAft>
             </a:pPr>
             <a:r>
               <a:rPr sz="1600" b="1" i="0">
                 <a:solidFill>
-                  <a:srgbClr val="2E3A80"/>
-                </a:solidFill>
-                <a:latin typeface="Montserrat"/>
-              </a:rPr>
-              <a:t>•  </a:t>
+                  <a:srgbClr val="E8801A"/>
+                </a:solidFill>
+                <a:latin typeface="Montserrat"/>
+              </a:rPr>
+              <a:t>▸  </a:t>
             </a:r>
             <a:r>
               <a:rPr sz="1600" b="0" i="0">
@@ -5300,23 +5524,23 @@
                 </a:solidFill>
                 <a:latin typeface="Montserrat"/>
               </a:rPr>
-              <a:t>Acometida interior</a:t>
+              <a:t>Canalizado: red de distribución</a:t>
             </a:r>
           </a:p>
           <a:p>
             <a:pPr>
               <a:spcAft>
-                <a:spcPts val="1000"/>
+                <a:spcPts val="1100"/>
               </a:spcAft>
             </a:pPr>
             <a:r>
               <a:rPr sz="1600" b="1" i="0">
                 <a:solidFill>
-                  <a:srgbClr val="2E3A80"/>
-                </a:solidFill>
-                <a:latin typeface="Montserrat"/>
-              </a:rPr>
-              <a:t>•  </a:t>
+                  <a:srgbClr val="E8801A"/>
+                </a:solidFill>
+                <a:latin typeface="Montserrat"/>
+              </a:rPr>
+              <a:t>▸  </a:t>
             </a:r>
             <a:r>
               <a:rPr sz="1600" b="0" i="0">
@@ -5325,23 +5549,23 @@
                 </a:solidFill>
                 <a:latin typeface="Montserrat"/>
               </a:rPr>
-              <a:t>Instalación común</a:t>
+              <a:t>Granel: depósito fijo o &gt; 15 kg</a:t>
             </a:r>
           </a:p>
           <a:p>
             <a:pPr>
               <a:spcAft>
-                <a:spcPts val="1000"/>
+                <a:spcPts val="1100"/>
               </a:spcAft>
             </a:pPr>
             <a:r>
               <a:rPr sz="1600" b="1" i="0">
                 <a:solidFill>
-                  <a:srgbClr val="2E3A80"/>
-                </a:solidFill>
-                <a:latin typeface="Montserrat"/>
-              </a:rPr>
-              <a:t>•  </a:t>
+                  <a:srgbClr val="E8801A"/>
+                </a:solidFill>
+                <a:latin typeface="Montserrat"/>
+              </a:rPr>
+              <a:t>▸  </a:t>
             </a:r>
             <a:r>
               <a:rPr sz="1600" b="0" i="0">
@@ -5350,39 +5574,14 @@
                 </a:solidFill>
                 <a:latin typeface="Montserrat"/>
               </a:rPr>
-              <a:t>Instalación individual</a:t>
-            </a:r>
-          </a:p>
-          <a:p>
-            <a:pPr>
-              <a:spcAft>
-                <a:spcPts val="1000"/>
-              </a:spcAft>
-            </a:pPr>
-            <a:r>
-              <a:rPr sz="1600" b="1" i="0">
-                <a:solidFill>
-                  <a:srgbClr val="2E3A80"/>
-                </a:solidFill>
-                <a:latin typeface="Montserrat"/>
-              </a:rPr>
-              <a:t>•  </a:t>
-            </a:r>
-            <a:r>
-              <a:rPr sz="1600" b="0" i="0">
-                <a:solidFill>
-                  <a:srgbClr val="1B2330"/>
-                </a:solidFill>
-                <a:latin typeface="Montserrat"/>
-              </a:rPr>
-              <a:t>No siempre están las tres</a:t>
-            </a:r>
-          </a:p>
-        </p:txBody>
-      </p:sp>
-      <p:sp>
-        <p:nvSpPr>
-          <p:cNvPr id="8" name="imgph" descr="IMGQ:gas meter cabinet in apartment building"/>
+              <a:t>Envases: envase &lt; 15 kg</a:t>
+            </a:r>
+          </a:p>
+        </p:txBody>
+      </p:sp>
+      <p:sp>
+        <p:nvSpPr>
+          <p:cNvPr id="9" name="imgph" descr="IMGQ:outdoor LPG storage tank in garden"/>
           <p:cNvSpPr/>
           <p:nvPr/>
         </p:nvSpPr>
@@ -5428,7 +5627,7 @@
       </p:sp>
       <p:sp>
         <p:nvSpPr>
-          <p:cNvPr id="9" name="TextBox 8"/>
+          <p:cNvPr id="10" name="TextBox 9"/>
           <p:cNvSpPr txBox="1"/>
           <p:nvPr/>
         </p:nvSpPr>
@@ -5468,7 +5667,7 @@
                 </a:solidFill>
                 <a:latin typeface="Montserrat"/>
               </a:rPr>
-              <a:t>gas meter cabinet in apartment building</a:t>
+              <a:t>outdoor LPG storage tank in garden</a:t>
             </a:r>
           </a:p>
         </p:txBody>
@@ -5565,7 +5764,7 @@
                 </a:solidFill>
                 <a:latin typeface="Montserrat"/>
               </a:rPr>
-              <a:t>012 / 014</a:t>
+              <a:t>012 / 015</a:t>
             </a:r>
           </a:p>
         </p:txBody>
@@ -5613,7 +5812,7 @@
         <p:spPr>
           <a:xfrm>
             <a:off x="822960" y="457200"/>
-            <a:ext cx="8229600" cy="365760"/>
+            <a:ext cx="10058400" cy="365760"/>
           </a:xfrm>
           <a:prstGeom prst="rect">
             <a:avLst/>
@@ -5627,13 +5826,13 @@
           <a:lstStyle/>
           <a:p>
             <a:r>
-              <a:rPr sz="1200" b="1" i="0">
-                <a:solidFill>
-                  <a:srgbClr val="64748B"/>
-                </a:solidFill>
-                <a:latin typeface="Montserrat"/>
-              </a:rPr>
-              <a:t>REQUISITOS · OBJETIVOS</a:t>
+              <a:rPr sz="1300" b="1" i="0">
+                <a:solidFill>
+                  <a:srgbClr val="E8801A"/>
+                </a:solidFill>
+                <a:latin typeface="Montserrat"/>
+              </a:rPr>
+              <a:t>PARTES · ESTRUCTURA FÍSICA</a:t>
             </a:r>
           </a:p>
         </p:txBody>
@@ -5661,26 +5860,70 @@
           <a:lstStyle/>
           <a:p>
             <a:r>
-              <a:rPr sz="2700" b="1" i="0">
+              <a:rPr sz="2800" b="1" i="0">
                 <a:solidFill>
                   <a:srgbClr val="1E2761"/>
                 </a:solidFill>
                 <a:latin typeface="Montserrat"/>
               </a:rPr>
-              <a:t>Dos objetivos de fondo</a:t>
-            </a:r>
-          </a:p>
-        </p:txBody>
-      </p:sp>
-      <p:sp>
-        <p:nvSpPr>
-          <p:cNvPr id="7" name="TextBox 6"/>
+              <a:t>Las tres partes, en fila</a:t>
+            </a:r>
+          </a:p>
+        </p:txBody>
+      </p:sp>
+      <p:sp>
+        <p:nvSpPr>
+          <p:cNvPr id="7" name="Rounded Rectangle 6"/>
+          <p:cNvSpPr/>
+          <p:nvPr/>
+        </p:nvSpPr>
+        <p:spPr>
+          <a:xfrm>
+            <a:off x="868680" y="1627632"/>
+            <a:ext cx="2011680" cy="73152"/>
+          </a:xfrm>
+          <a:prstGeom prst="roundRect">
+            <a:avLst/>
+          </a:prstGeom>
+          <a:solidFill>
+            <a:srgbClr val="E8801A"/>
+          </a:solidFill>
+          <a:ln>
+            <a:noFill/>
+          </a:ln>
+          <a:effectLst/>
+        </p:spPr>
+        <p:style>
+          <a:lnRef idx="1">
+            <a:schemeClr val="accent1"/>
+          </a:lnRef>
+          <a:fillRef idx="3">
+            <a:schemeClr val="accent1"/>
+          </a:fillRef>
+          <a:effectRef idx="2">
+            <a:schemeClr val="accent1"/>
+          </a:effectRef>
+          <a:fontRef idx="minor">
+            <a:schemeClr val="lt1"/>
+          </a:fontRef>
+        </p:style>
+        <p:txBody>
+          <a:bodyPr rtlCol="0" anchor="ctr"/>
+          <a:lstStyle/>
+          <a:p>
+            <a:pPr algn="ctr"/>
+          </a:p>
+        </p:txBody>
+      </p:sp>
+      <p:sp>
+        <p:nvSpPr>
+          <p:cNvPr id="8" name="TextBox 7"/>
           <p:cNvSpPr txBox="1"/>
           <p:nvPr/>
         </p:nvSpPr>
         <p:spPr>
           <a:xfrm>
-            <a:off x="822960" y="1920240"/>
+            <a:off x="822960" y="1965960"/>
             <a:ext cx="4983480" cy="4206240"/>
           </a:xfrm>
           <a:prstGeom prst="rect">
@@ -5696,17 +5939,17 @@
           <a:p>
             <a:pPr>
               <a:spcAft>
-                <a:spcPts val="1000"/>
+                <a:spcPts val="1100"/>
               </a:spcAft>
             </a:pPr>
             <a:r>
               <a:rPr sz="1600" b="1" i="0">
                 <a:solidFill>
-                  <a:srgbClr val="2E3A80"/>
-                </a:solidFill>
-                <a:latin typeface="Montserrat"/>
-              </a:rPr>
-              <a:t>•  </a:t>
+                  <a:srgbClr val="E8801A"/>
+                </a:solidFill>
+                <a:latin typeface="Montserrat"/>
+              </a:rPr>
+              <a:t>▸  </a:t>
             </a:r>
             <a:r>
               <a:rPr sz="1600" b="0" i="0">
@@ -5715,23 +5958,23 @@
                 </a:solidFill>
                 <a:latin typeface="Montserrat"/>
               </a:rPr>
-              <a:t>Aportación adecuada de gas</a:t>
+              <a:t>Acometida interior</a:t>
             </a:r>
           </a:p>
           <a:p>
             <a:pPr>
               <a:spcAft>
-                <a:spcPts val="1000"/>
+                <a:spcPts val="1100"/>
               </a:spcAft>
             </a:pPr>
             <a:r>
               <a:rPr sz="1600" b="1" i="0">
                 <a:solidFill>
-                  <a:srgbClr val="2E3A80"/>
-                </a:solidFill>
-                <a:latin typeface="Montserrat"/>
-              </a:rPr>
-              <a:t>•  </a:t>
+                  <a:srgbClr val="E8801A"/>
+                </a:solidFill>
+                <a:latin typeface="Montserrat"/>
+              </a:rPr>
+              <a:t>▸  </a:t>
             </a:r>
             <a:r>
               <a:rPr sz="1600" b="0" i="0">
@@ -5740,23 +5983,23 @@
                 </a:solidFill>
                 <a:latin typeface="Montserrat"/>
               </a:rPr>
-              <a:t>Seguridad en la conducción</a:t>
+              <a:t>Instalación común</a:t>
             </a:r>
           </a:p>
           <a:p>
             <a:pPr>
               <a:spcAft>
-                <a:spcPts val="1000"/>
+                <a:spcPts val="1100"/>
               </a:spcAft>
             </a:pPr>
             <a:r>
               <a:rPr sz="1600" b="1" i="0">
                 <a:solidFill>
-                  <a:srgbClr val="2E3A80"/>
-                </a:solidFill>
-                <a:latin typeface="Montserrat"/>
-              </a:rPr>
-              <a:t>•  </a:t>
+                  <a:srgbClr val="E8801A"/>
+                </a:solidFill>
+                <a:latin typeface="Montserrat"/>
+              </a:rPr>
+              <a:t>▸  </a:t>
             </a:r>
             <a:r>
               <a:rPr sz="1600" b="0" i="0">
@@ -5765,14 +6008,39 @@
                 </a:solidFill>
                 <a:latin typeface="Montserrat"/>
               </a:rPr>
-              <a:t>Todo lo demás sale de aquí</a:t>
-            </a:r>
-          </a:p>
-        </p:txBody>
-      </p:sp>
-      <p:sp>
-        <p:nvSpPr>
-          <p:cNvPr id="8" name="imgph" descr="IMGQ:blue gas flame on burner"/>
+              <a:t>Instalación individual</a:t>
+            </a:r>
+          </a:p>
+          <a:p>
+            <a:pPr>
+              <a:spcAft>
+                <a:spcPts val="1100"/>
+              </a:spcAft>
+            </a:pPr>
+            <a:r>
+              <a:rPr sz="1600" b="1" i="0">
+                <a:solidFill>
+                  <a:srgbClr val="E8801A"/>
+                </a:solidFill>
+                <a:latin typeface="Montserrat"/>
+              </a:rPr>
+              <a:t>▸  </a:t>
+            </a:r>
+            <a:r>
+              <a:rPr sz="1600" b="0" i="0">
+                <a:solidFill>
+                  <a:srgbClr val="1B2330"/>
+                </a:solidFill>
+                <a:latin typeface="Montserrat"/>
+              </a:rPr>
+              <a:t>No siempre están las tres</a:t>
+            </a:r>
+          </a:p>
+        </p:txBody>
+      </p:sp>
+      <p:sp>
+        <p:nvSpPr>
+          <p:cNvPr id="9" name="imgph" descr="IMGQ:gas meter cabinet in apartment building"/>
           <p:cNvSpPr/>
           <p:nvPr/>
         </p:nvSpPr>
@@ -5818,7 +6086,7 @@
       </p:sp>
       <p:sp>
         <p:nvSpPr>
-          <p:cNvPr id="9" name="TextBox 8"/>
+          <p:cNvPr id="10" name="TextBox 9"/>
           <p:cNvSpPr txBox="1"/>
           <p:nvPr/>
         </p:nvSpPr>
@@ -5858,7 +6126,7 @@
                 </a:solidFill>
                 <a:latin typeface="Montserrat"/>
               </a:rPr>
-              <a:t>blue gas flame on burner</a:t>
+              <a:t>gas meter cabinet in apartment building</a:t>
             </a:r>
           </a:p>
         </p:txBody>
@@ -5955,7 +6223,7 @@
                 </a:solidFill>
                 <a:latin typeface="Montserrat"/>
               </a:rPr>
-              <a:t>013 / 014</a:t>
+              <a:t>013 / 015</a:t>
             </a:r>
           </a:p>
         </p:txBody>
@@ -6003,7 +6271,7 @@
         <p:spPr>
           <a:xfrm>
             <a:off x="822960" y="457200"/>
-            <a:ext cx="8229600" cy="365760"/>
+            <a:ext cx="10058400" cy="365760"/>
           </a:xfrm>
           <a:prstGeom prst="rect">
             <a:avLst/>
@@ -6017,13 +6285,13 @@
           <a:lstStyle/>
           <a:p>
             <a:r>
-              <a:rPr sz="1200" b="1" i="0">
-                <a:solidFill>
-                  <a:srgbClr val="64748B"/>
-                </a:solidFill>
-                <a:latin typeface="Montserrat"/>
-              </a:rPr>
-              <a:t>OBRA · LEGALIZACIÓN</a:t>
+              <a:rPr sz="1300" b="1" i="0">
+                <a:solidFill>
+                  <a:srgbClr val="E8801A"/>
+                </a:solidFill>
+                <a:latin typeface="Montserrat"/>
+              </a:rPr>
+              <a:t>REQUISITOS · OBJETIVOS</a:t>
             </a:r>
           </a:p>
         </p:txBody>
@@ -6051,26 +6319,70 @@
           <a:lstStyle/>
           <a:p>
             <a:r>
-              <a:rPr sz="2700" b="1" i="0">
+              <a:rPr sz="2800" b="1" i="0">
                 <a:solidFill>
                   <a:srgbClr val="1E2761"/>
                 </a:solidFill>
                 <a:latin typeface="Montserrat"/>
               </a:rPr>
-              <a:t>¿Hay boletín o no?</a:t>
-            </a:r>
-          </a:p>
-        </p:txBody>
-      </p:sp>
-      <p:sp>
-        <p:nvSpPr>
-          <p:cNvPr id="7" name="TextBox 6"/>
+              <a:t>Dos objetivos de fondo</a:t>
+            </a:r>
+          </a:p>
+        </p:txBody>
+      </p:sp>
+      <p:sp>
+        <p:nvSpPr>
+          <p:cNvPr id="7" name="Rounded Rectangle 6"/>
+          <p:cNvSpPr/>
+          <p:nvPr/>
+        </p:nvSpPr>
+        <p:spPr>
+          <a:xfrm>
+            <a:off x="868680" y="1627632"/>
+            <a:ext cx="2011680" cy="73152"/>
+          </a:xfrm>
+          <a:prstGeom prst="roundRect">
+            <a:avLst/>
+          </a:prstGeom>
+          <a:solidFill>
+            <a:srgbClr val="E8801A"/>
+          </a:solidFill>
+          <a:ln>
+            <a:noFill/>
+          </a:ln>
+          <a:effectLst/>
+        </p:spPr>
+        <p:style>
+          <a:lnRef idx="1">
+            <a:schemeClr val="accent1"/>
+          </a:lnRef>
+          <a:fillRef idx="3">
+            <a:schemeClr val="accent1"/>
+          </a:fillRef>
+          <a:effectRef idx="2">
+            <a:schemeClr val="accent1"/>
+          </a:effectRef>
+          <a:fontRef idx="minor">
+            <a:schemeClr val="lt1"/>
+          </a:fontRef>
+        </p:style>
+        <p:txBody>
+          <a:bodyPr rtlCol="0" anchor="ctr"/>
+          <a:lstStyle/>
+          <a:p>
+            <a:pPr algn="ctr"/>
+          </a:p>
+        </p:txBody>
+      </p:sp>
+      <p:sp>
+        <p:nvSpPr>
+          <p:cNvPr id="8" name="TextBox 7"/>
           <p:cNvSpPr txBox="1"/>
           <p:nvPr/>
         </p:nvSpPr>
         <p:spPr>
           <a:xfrm>
-            <a:off x="822960" y="1920240"/>
+            <a:off x="822960" y="1965960"/>
             <a:ext cx="4983480" cy="4206240"/>
           </a:xfrm>
           <a:prstGeom prst="rect">
@@ -6086,17 +6398,17 @@
           <a:p>
             <a:pPr>
               <a:spcAft>
-                <a:spcPts val="1000"/>
+                <a:spcPts val="1100"/>
               </a:spcAft>
             </a:pPr>
             <a:r>
               <a:rPr sz="1600" b="1" i="0">
                 <a:solidFill>
-                  <a:srgbClr val="2E3A80"/>
-                </a:solidFill>
-                <a:latin typeface="Montserrat"/>
-              </a:rPr>
-              <a:t>•  </a:t>
+                  <a:srgbClr val="E8801A"/>
+                </a:solidFill>
+                <a:latin typeface="Montserrat"/>
+              </a:rPr>
+              <a:t>▸  </a:t>
             </a:r>
             <a:r>
               <a:rPr sz="1600" b="0" i="0">
@@ -6105,23 +6417,23 @@
                 </a:solidFill>
                 <a:latin typeface="Montserrat"/>
               </a:rPr>
-              <a:t>Receptora → certificado obligatorio</a:t>
+              <a:t>Aportación adecuada de gas</a:t>
             </a:r>
           </a:p>
           <a:p>
             <a:pPr>
               <a:spcAft>
-                <a:spcPts val="1000"/>
+                <a:spcPts val="1100"/>
               </a:spcAft>
             </a:pPr>
             <a:r>
               <a:rPr sz="1600" b="1" i="0">
                 <a:solidFill>
-                  <a:srgbClr val="2E3A80"/>
-                </a:solidFill>
-                <a:latin typeface="Montserrat"/>
-              </a:rPr>
-              <a:t>•  </a:t>
+                  <a:srgbClr val="E8801A"/>
+                </a:solidFill>
+                <a:latin typeface="Montserrat"/>
+              </a:rPr>
+              <a:t>▸  </a:t>
             </a:r>
             <a:r>
               <a:rPr sz="1600" b="0" i="0">
@@ -6130,23 +6442,23 @@
                 </a:solidFill>
                 <a:latin typeface="Montserrat"/>
               </a:rPr>
-              <a:t>Lo firma la empresa de categoría B</a:t>
+              <a:t>Seguridad en la conducción</a:t>
             </a:r>
           </a:p>
           <a:p>
             <a:pPr>
               <a:spcAft>
-                <a:spcPts val="1000"/>
+                <a:spcPts val="1100"/>
               </a:spcAft>
             </a:pPr>
             <a:r>
               <a:rPr sz="1600" b="1" i="0">
                 <a:solidFill>
-                  <a:srgbClr val="2E3A80"/>
-                </a:solidFill>
-                <a:latin typeface="Montserrat"/>
-              </a:rPr>
-              <a:t>•  </a:t>
+                  <a:srgbClr val="E8801A"/>
+                </a:solidFill>
+                <a:latin typeface="Montserrat"/>
+              </a:rPr>
+              <a:t>▸  </a:t>
             </a:r>
             <a:r>
               <a:rPr sz="1600" b="0" i="0">
@@ -6155,39 +6467,14 @@
                 </a:solidFill>
                 <a:latin typeface="Montserrat"/>
               </a:rPr>
-              <a:t>Se entrega a la distribuidora</a:t>
-            </a:r>
-          </a:p>
-          <a:p>
-            <a:pPr>
-              <a:spcAft>
-                <a:spcPts val="1000"/>
-              </a:spcAft>
-            </a:pPr>
-            <a:r>
-              <a:rPr sz="1600" b="1" i="0">
-                <a:solidFill>
-                  <a:srgbClr val="2E3A80"/>
-                </a:solidFill>
-                <a:latin typeface="Montserrat"/>
-              </a:rPr>
-              <a:t>•  </a:t>
-            </a:r>
-            <a:r>
-              <a:rPr sz="1600" b="0" i="0">
-                <a:solidFill>
-                  <a:srgbClr val="1B2330"/>
-                </a:solidFill>
-                <a:latin typeface="Montserrat"/>
-              </a:rPr>
-              <a:t>Sin él, no hay suministro</a:t>
-            </a:r>
-          </a:p>
-        </p:txBody>
-      </p:sp>
-      <p:sp>
-        <p:nvSpPr>
-          <p:cNvPr id="8" name="imgph" descr="IMGQ:technician filling installation certificate paperwork"/>
+              <a:t>Todo lo demás sale de aquí</a:t>
+            </a:r>
+          </a:p>
+        </p:txBody>
+      </p:sp>
+      <p:sp>
+        <p:nvSpPr>
+          <p:cNvPr id="9" name="imgph" descr="IMGQ:blue gas flame on burner"/>
           <p:cNvSpPr/>
           <p:nvPr/>
         </p:nvSpPr>
@@ -6233,7 +6520,7 @@
       </p:sp>
       <p:sp>
         <p:nvSpPr>
-          <p:cNvPr id="9" name="TextBox 8"/>
+          <p:cNvPr id="10" name="TextBox 9"/>
           <p:cNvSpPr txBox="1"/>
           <p:nvPr/>
         </p:nvSpPr>
@@ -6273,7 +6560,7 @@
                 </a:solidFill>
                 <a:latin typeface="Montserrat"/>
               </a:rPr>
-              <a:t>technician filling installation certificate paperwork</a:t>
+              <a:t>blue gas flame on burner</a:t>
             </a:r>
           </a:p>
         </p:txBody>
@@ -6311,6 +6598,465 @@
             <a:avLst/>
           </a:prstGeom>
           <a:solidFill>
+            <a:srgbClr val="FFFFFF"/>
+          </a:solidFill>
+          <a:ln>
+            <a:noFill/>
+          </a:ln>
+          <a:effectLst/>
+        </p:spPr>
+        <p:style>
+          <a:lnRef idx="1">
+            <a:schemeClr val="accent1"/>
+          </a:lnRef>
+          <a:fillRef idx="3">
+            <a:schemeClr val="accent1"/>
+          </a:fillRef>
+          <a:effectRef idx="2">
+            <a:schemeClr val="accent1"/>
+          </a:effectRef>
+          <a:fontRef idx="minor">
+            <a:schemeClr val="lt1"/>
+          </a:fontRef>
+        </p:style>
+        <p:txBody>
+          <a:bodyPr rtlCol="0" anchor="ctr"/>
+          <a:lstStyle/>
+          <a:p>
+            <a:pPr algn="ctr"/>
+          </a:p>
+        </p:txBody>
+      </p:sp>
+      <p:sp>
+        <p:nvSpPr>
+          <p:cNvPr id="3" name="TextBox 2"/>
+          <p:cNvSpPr txBox="1"/>
+          <p:nvPr/>
+        </p:nvSpPr>
+        <p:spPr>
+          <a:xfrm>
+            <a:off x="10607040" y="320040"/>
+            <a:ext cx="1371600" cy="365760"/>
+          </a:xfrm>
+          <a:prstGeom prst="rect">
+            <a:avLst/>
+          </a:prstGeom>
+          <a:noFill/>
+        </p:spPr>
+        <p:txBody>
+          <a:bodyPr wrap="square">
+            <a:spAutoFit/>
+          </a:bodyPr>
+          <a:lstStyle/>
+          <a:p>
+            <a:pPr algn="r"/>
+            <a:r>
+              <a:rPr sz="1000" b="1" i="0">
+                <a:solidFill>
+                  <a:srgbClr val="64748B"/>
+                </a:solidFill>
+                <a:latin typeface="Montserrat"/>
+              </a:rPr>
+              <a:t>014 / 015</a:t>
+            </a:r>
+          </a:p>
+        </p:txBody>
+      </p:sp>
+      <p:sp>
+        <p:nvSpPr>
+          <p:cNvPr id="4" name="TextBox 3"/>
+          <p:cNvSpPr txBox="1"/>
+          <p:nvPr/>
+        </p:nvSpPr>
+        <p:spPr>
+          <a:xfrm>
+            <a:off x="457200" y="6419088"/>
+            <a:ext cx="8229600" cy="365760"/>
+          </a:xfrm>
+          <a:prstGeom prst="rect">
+            <a:avLst/>
+          </a:prstGeom>
+          <a:noFill/>
+        </p:spPr>
+        <p:txBody>
+          <a:bodyPr wrap="square">
+            <a:spAutoFit/>
+          </a:bodyPr>
+          <a:lstStyle/>
+          <a:p>
+            <a:r>
+              <a:rPr sz="900" b="0" i="0">
+                <a:solidFill>
+                  <a:srgbClr val="64748B"/>
+                </a:solidFill>
+                <a:latin typeface="Montserrat"/>
+              </a:rPr>
+              <a:t>Curso Gas B · Tema 09 · UNE 60670-1 y -2</a:t>
+            </a:r>
+          </a:p>
+        </p:txBody>
+      </p:sp>
+      <p:sp>
+        <p:nvSpPr>
+          <p:cNvPr id="5" name="TextBox 4"/>
+          <p:cNvSpPr txBox="1"/>
+          <p:nvPr/>
+        </p:nvSpPr>
+        <p:spPr>
+          <a:xfrm>
+            <a:off x="822960" y="457200"/>
+            <a:ext cx="10058400" cy="365760"/>
+          </a:xfrm>
+          <a:prstGeom prst="rect">
+            <a:avLst/>
+          </a:prstGeom>
+          <a:noFill/>
+        </p:spPr>
+        <p:txBody>
+          <a:bodyPr wrap="square">
+            <a:spAutoFit/>
+          </a:bodyPr>
+          <a:lstStyle/>
+          <a:p>
+            <a:r>
+              <a:rPr sz="1300" b="1" i="0">
+                <a:solidFill>
+                  <a:srgbClr val="E8801A"/>
+                </a:solidFill>
+                <a:latin typeface="Montserrat"/>
+              </a:rPr>
+              <a:t>OBRA · LEGALIZACIÓN</a:t>
+            </a:r>
+          </a:p>
+        </p:txBody>
+      </p:sp>
+      <p:sp>
+        <p:nvSpPr>
+          <p:cNvPr id="6" name="TextBox 5"/>
+          <p:cNvSpPr txBox="1"/>
+          <p:nvPr/>
+        </p:nvSpPr>
+        <p:spPr>
+          <a:xfrm>
+            <a:off x="822960" y="868680"/>
+            <a:ext cx="10515600" cy="914400"/>
+          </a:xfrm>
+          <a:prstGeom prst="rect">
+            <a:avLst/>
+          </a:prstGeom>
+          <a:noFill/>
+        </p:spPr>
+        <p:txBody>
+          <a:bodyPr wrap="square">
+            <a:spAutoFit/>
+          </a:bodyPr>
+          <a:lstStyle/>
+          <a:p>
+            <a:r>
+              <a:rPr sz="2800" b="1" i="0">
+                <a:solidFill>
+                  <a:srgbClr val="1E2761"/>
+                </a:solidFill>
+                <a:latin typeface="Montserrat"/>
+              </a:rPr>
+              <a:t>¿Hay boletín o no?</a:t>
+            </a:r>
+          </a:p>
+        </p:txBody>
+      </p:sp>
+      <p:sp>
+        <p:nvSpPr>
+          <p:cNvPr id="7" name="Rounded Rectangle 6"/>
+          <p:cNvSpPr/>
+          <p:nvPr/>
+        </p:nvSpPr>
+        <p:spPr>
+          <a:xfrm>
+            <a:off x="868680" y="1627632"/>
+            <a:ext cx="2011680" cy="73152"/>
+          </a:xfrm>
+          <a:prstGeom prst="roundRect">
+            <a:avLst/>
+          </a:prstGeom>
+          <a:solidFill>
+            <a:srgbClr val="E8801A"/>
+          </a:solidFill>
+          <a:ln>
+            <a:noFill/>
+          </a:ln>
+          <a:effectLst/>
+        </p:spPr>
+        <p:style>
+          <a:lnRef idx="1">
+            <a:schemeClr val="accent1"/>
+          </a:lnRef>
+          <a:fillRef idx="3">
+            <a:schemeClr val="accent1"/>
+          </a:fillRef>
+          <a:effectRef idx="2">
+            <a:schemeClr val="accent1"/>
+          </a:effectRef>
+          <a:fontRef idx="minor">
+            <a:schemeClr val="lt1"/>
+          </a:fontRef>
+        </p:style>
+        <p:txBody>
+          <a:bodyPr rtlCol="0" anchor="ctr"/>
+          <a:lstStyle/>
+          <a:p>
+            <a:pPr algn="ctr"/>
+          </a:p>
+        </p:txBody>
+      </p:sp>
+      <p:sp>
+        <p:nvSpPr>
+          <p:cNvPr id="8" name="TextBox 7"/>
+          <p:cNvSpPr txBox="1"/>
+          <p:nvPr/>
+        </p:nvSpPr>
+        <p:spPr>
+          <a:xfrm>
+            <a:off x="822960" y="1965960"/>
+            <a:ext cx="4983480" cy="4206240"/>
+          </a:xfrm>
+          <a:prstGeom prst="rect">
+            <a:avLst/>
+          </a:prstGeom>
+          <a:noFill/>
+        </p:spPr>
+        <p:txBody>
+          <a:bodyPr wrap="square">
+            <a:spAutoFit/>
+          </a:bodyPr>
+          <a:lstStyle/>
+          <a:p>
+            <a:pPr>
+              <a:spcAft>
+                <a:spcPts val="1100"/>
+              </a:spcAft>
+            </a:pPr>
+            <a:r>
+              <a:rPr sz="1600" b="1" i="0">
+                <a:solidFill>
+                  <a:srgbClr val="E8801A"/>
+                </a:solidFill>
+                <a:latin typeface="Montserrat"/>
+              </a:rPr>
+              <a:t>▸  </a:t>
+            </a:r>
+            <a:r>
+              <a:rPr sz="1600" b="0" i="0">
+                <a:solidFill>
+                  <a:srgbClr val="1B2330"/>
+                </a:solidFill>
+                <a:latin typeface="Montserrat"/>
+              </a:rPr>
+              <a:t>Receptora → certificado obligatorio</a:t>
+            </a:r>
+          </a:p>
+          <a:p>
+            <a:pPr>
+              <a:spcAft>
+                <a:spcPts val="1100"/>
+              </a:spcAft>
+            </a:pPr>
+            <a:r>
+              <a:rPr sz="1600" b="1" i="0">
+                <a:solidFill>
+                  <a:srgbClr val="E8801A"/>
+                </a:solidFill>
+                <a:latin typeface="Montserrat"/>
+              </a:rPr>
+              <a:t>▸  </a:t>
+            </a:r>
+            <a:r>
+              <a:rPr sz="1600" b="0" i="0">
+                <a:solidFill>
+                  <a:srgbClr val="1B2330"/>
+                </a:solidFill>
+                <a:latin typeface="Montserrat"/>
+              </a:rPr>
+              <a:t>Lo firma la empresa de categoría B</a:t>
+            </a:r>
+          </a:p>
+          <a:p>
+            <a:pPr>
+              <a:spcAft>
+                <a:spcPts val="1100"/>
+              </a:spcAft>
+            </a:pPr>
+            <a:r>
+              <a:rPr sz="1600" b="1" i="0">
+                <a:solidFill>
+                  <a:srgbClr val="E8801A"/>
+                </a:solidFill>
+                <a:latin typeface="Montserrat"/>
+              </a:rPr>
+              <a:t>▸  </a:t>
+            </a:r>
+            <a:r>
+              <a:rPr sz="1600" b="0" i="0">
+                <a:solidFill>
+                  <a:srgbClr val="1B2330"/>
+                </a:solidFill>
+                <a:latin typeface="Montserrat"/>
+              </a:rPr>
+              <a:t>Se entrega a la distribuidora</a:t>
+            </a:r>
+          </a:p>
+          <a:p>
+            <a:pPr>
+              <a:spcAft>
+                <a:spcPts val="1100"/>
+              </a:spcAft>
+            </a:pPr>
+            <a:r>
+              <a:rPr sz="1600" b="1" i="0">
+                <a:solidFill>
+                  <a:srgbClr val="E8801A"/>
+                </a:solidFill>
+                <a:latin typeface="Montserrat"/>
+              </a:rPr>
+              <a:t>▸  </a:t>
+            </a:r>
+            <a:r>
+              <a:rPr sz="1600" b="0" i="0">
+                <a:solidFill>
+                  <a:srgbClr val="1B2330"/>
+                </a:solidFill>
+                <a:latin typeface="Montserrat"/>
+              </a:rPr>
+              <a:t>Sin él, no hay suministro</a:t>
+            </a:r>
+          </a:p>
+        </p:txBody>
+      </p:sp>
+      <p:sp>
+        <p:nvSpPr>
+          <p:cNvPr id="9" name="imgph" descr="IMGQ:technician filling installation certificate paperwork"/>
+          <p:cNvSpPr/>
+          <p:nvPr/>
+        </p:nvSpPr>
+        <p:spPr>
+          <a:xfrm>
+            <a:off x="5806440" y="1051560"/>
+            <a:ext cx="5298947" cy="4629150"/>
+          </a:xfrm>
+          <a:prstGeom prst="roundRect">
+            <a:avLst/>
+          </a:prstGeom>
+          <a:solidFill>
+            <a:srgbClr val="F3F6FB"/>
+          </a:solidFill>
+          <a:ln w="12700">
+            <a:solidFill>
+              <a:srgbClr val="C7D2E6"/>
+            </a:solidFill>
+          </a:ln>
+          <a:effectLst/>
+        </p:spPr>
+        <p:style>
+          <a:lnRef idx="1">
+            <a:schemeClr val="accent1"/>
+          </a:lnRef>
+          <a:fillRef idx="3">
+            <a:schemeClr val="accent1"/>
+          </a:fillRef>
+          <a:effectRef idx="2">
+            <a:schemeClr val="accent1"/>
+          </a:effectRef>
+          <a:fontRef idx="minor">
+            <a:schemeClr val="lt1"/>
+          </a:fontRef>
+        </p:style>
+        <p:txBody>
+          <a:bodyPr rtlCol="0" anchor="ctr"/>
+          <a:lstStyle/>
+          <a:p>
+            <a:pPr algn="ctr"/>
+          </a:p>
+        </p:txBody>
+      </p:sp>
+      <p:sp>
+        <p:nvSpPr>
+          <p:cNvPr id="10" name="TextBox 9"/>
+          <p:cNvSpPr txBox="1"/>
+          <p:nvPr/>
+        </p:nvSpPr>
+        <p:spPr>
+          <a:xfrm>
+            <a:off x="6080760" y="2726055"/>
+            <a:ext cx="4750307" cy="1280160"/>
+          </a:xfrm>
+          <a:prstGeom prst="rect">
+            <a:avLst/>
+          </a:prstGeom>
+          <a:noFill/>
+        </p:spPr>
+        <p:txBody>
+          <a:bodyPr wrap="square">
+            <a:spAutoFit/>
+          </a:bodyPr>
+          <a:lstStyle/>
+          <a:p>
+            <a:pPr algn="ctr"/>
+            <a:r>
+              <a:rPr sz="1400" b="1" i="0">
+                <a:solidFill>
+                  <a:srgbClr val="64748B"/>
+                </a:solidFill>
+                <a:latin typeface="Montserrat"/>
+              </a:rPr>
+              <a:t>IMAGEN REALISTA</a:t>
+            </a:r>
+          </a:p>
+          <a:p>
+            <a:pPr algn="ctr"/>
+            <a:r>
+              <a:rPr sz="1100" b="0" i="1">
+                <a:solidFill>
+                  <a:srgbClr val="64748B"/>
+                </a:solidFill>
+                <a:latin typeface="Montserrat"/>
+              </a:rPr>
+              <a:t>technician filling installation certificate paperwork</a:t>
+            </a:r>
+          </a:p>
+        </p:txBody>
+      </p:sp>
+    </p:spTree>
+  </p:cSld>
+  <p:clrMapOvr>
+    <a:masterClrMapping/>
+  </p:clrMapOvr>
+</p:sld>
+</file>
+
+<file path=ppt/slides/slide15.xml><?xml version="1.0" encoding="utf-8"?>
+<p:sld xmlns:a="http://schemas.openxmlformats.org/drawingml/2006/main" xmlns:p="http://schemas.openxmlformats.org/presentationml/2006/main" xmlns:r="http://schemas.openxmlformats.org/officeDocument/2006/relationships">
+  <p:cSld>
+    <p:spTree>
+      <p:nvGrpSpPr>
+        <p:cNvPr id="1" name=""/>
+        <p:cNvGrpSpPr/>
+        <p:nvPr/>
+      </p:nvGrpSpPr>
+      <p:grpSpPr/>
+      <p:sp>
+        <p:nvSpPr>
+          <p:cNvPr id="2" name="Rectangle 1"/>
+          <p:cNvSpPr/>
+          <p:nvPr/>
+        </p:nvSpPr>
+        <p:spPr>
+          <a:xfrm>
+            <a:off x="0" y="0"/>
+            <a:ext cx="12191695" cy="6858000"/>
+          </a:xfrm>
+          <a:prstGeom prst="rect">
+            <a:avLst/>
+          </a:prstGeom>
+          <a:solidFill>
             <a:srgbClr val="1E2761"/>
           </a:solidFill>
           <a:ln>
@@ -6365,7 +7111,7 @@
             <a:r>
               <a:rPr sz="1400" b="1" i="0">
                 <a:solidFill>
-                  <a:srgbClr val="CADCFC"/>
+                  <a:srgbClr val="F4A24C"/>
                 </a:solidFill>
                 <a:latin typeface="Montserrat"/>
               </a:rPr>
@@ -6376,13 +7122,57 @@
       </p:sp>
       <p:sp>
         <p:nvSpPr>
-          <p:cNvPr id="4" name="TextBox 3"/>
+          <p:cNvPr id="4" name="Rounded Rectangle 3"/>
+          <p:cNvSpPr/>
+          <p:nvPr/>
+        </p:nvSpPr>
+        <p:spPr>
+          <a:xfrm>
+            <a:off x="868680" y="1051560"/>
+            <a:ext cx="1463040" cy="82296"/>
+          </a:xfrm>
+          <a:prstGeom prst="roundRect">
+            <a:avLst/>
+          </a:prstGeom>
+          <a:solidFill>
+            <a:srgbClr val="E8801A"/>
+          </a:solidFill>
+          <a:ln>
+            <a:noFill/>
+          </a:ln>
+          <a:effectLst/>
+        </p:spPr>
+        <p:style>
+          <a:lnRef idx="1">
+            <a:schemeClr val="accent1"/>
+          </a:lnRef>
+          <a:fillRef idx="3">
+            <a:schemeClr val="accent1"/>
+          </a:fillRef>
+          <a:effectRef idx="2">
+            <a:schemeClr val="accent1"/>
+          </a:effectRef>
+          <a:fontRef idx="minor">
+            <a:schemeClr val="lt1"/>
+          </a:fontRef>
+        </p:style>
+        <p:txBody>
+          <a:bodyPr rtlCol="0" anchor="ctr"/>
+          <a:lstStyle/>
+          <a:p>
+            <a:pPr algn="ctr"/>
+          </a:p>
+        </p:txBody>
+      </p:sp>
+      <p:sp>
+        <p:nvSpPr>
+          <p:cNvPr id="5" name="TextBox 4"/>
           <p:cNvSpPr txBox="1"/>
           <p:nvPr/>
         </p:nvSpPr>
         <p:spPr>
           <a:xfrm>
-            <a:off x="822960" y="1143000"/>
+            <a:off x="822960" y="1234440"/>
             <a:ext cx="10515600" cy="1097280"/>
           </a:xfrm>
           <a:prstGeom prst="rect">
@@ -6410,14 +7200,14 @@
       </p:sp>
       <p:sp>
         <p:nvSpPr>
-          <p:cNvPr id="5" name="TextBox 4"/>
+          <p:cNvPr id="6" name="TextBox 5"/>
           <p:cNvSpPr txBox="1"/>
           <p:nvPr/>
         </p:nvSpPr>
         <p:spPr>
           <a:xfrm>
-            <a:off x="822960" y="2514600"/>
-            <a:ext cx="10515600" cy="2834640"/>
+            <a:off x="822960" y="2606040"/>
+            <a:ext cx="10515600" cy="2743200"/>
           </a:xfrm>
           <a:prstGeom prst="rect">
             <a:avLst/>
@@ -6438,7 +7228,7 @@
             <a:r>
               <a:rPr sz="2000" b="1" i="0">
                 <a:solidFill>
-                  <a:srgbClr val="CADCFC"/>
+                  <a:srgbClr val="F4A24C"/>
                 </a:solidFill>
                 <a:latin typeface="Montserrat"/>
               </a:rPr>
@@ -6463,7 +7253,7 @@
             <a:r>
               <a:rPr sz="2000" b="1" i="0">
                 <a:solidFill>
-                  <a:srgbClr val="CADCFC"/>
+                  <a:srgbClr val="F4A24C"/>
                 </a:solidFill>
                 <a:latin typeface="Montserrat"/>
               </a:rPr>
@@ -6488,7 +7278,7 @@
             <a:r>
               <a:rPr sz="2000" b="1" i="0">
                 <a:solidFill>
-                  <a:srgbClr val="CADCFC"/>
+                  <a:srgbClr val="F4A24C"/>
                 </a:solidFill>
                 <a:latin typeface="Montserrat"/>
               </a:rPr>
@@ -6513,7 +7303,7 @@
             <a:r>
               <a:rPr sz="2000" b="1" i="0">
                 <a:solidFill>
-                  <a:srgbClr val="CADCFC"/>
+                  <a:srgbClr val="F4A24C"/>
                 </a:solidFill>
                 <a:latin typeface="Montserrat"/>
               </a:rPr>
@@ -6533,20 +7323,20 @@
       </p:sp>
       <p:sp>
         <p:nvSpPr>
-          <p:cNvPr id="6" name="Rounded Rectangle 5"/>
+          <p:cNvPr id="7" name="Rounded Rectangle 6"/>
           <p:cNvSpPr/>
           <p:nvPr/>
         </p:nvSpPr>
         <p:spPr>
           <a:xfrm>
             <a:off x="822960" y="5532120"/>
-            <a:ext cx="10515600" cy="777240"/>
+            <a:ext cx="10515600" cy="822960"/>
           </a:xfrm>
           <a:prstGeom prst="roundRect">
             <a:avLst/>
           </a:prstGeom>
           <a:solidFill>
-            <a:srgbClr val="2E3A80"/>
+            <a:srgbClr val="E8801A"/>
           </a:solidFill>
           <a:ln>
             <a:noFill/>
@@ -6577,13 +7367,13 @@
       </p:sp>
       <p:sp>
         <p:nvSpPr>
-          <p:cNvPr id="7" name="TextBox 6"/>
+          <p:cNvPr id="8" name="TextBox 7"/>
           <p:cNvSpPr txBox="1"/>
           <p:nvPr/>
         </p:nvSpPr>
         <p:spPr>
           <a:xfrm>
-            <a:off x="1051560" y="5605272"/>
+            <a:off x="1051560" y="5623560"/>
             <a:ext cx="10058400" cy="640080"/>
           </a:xfrm>
           <a:prstGeom prst="rect">
@@ -6600,7 +7390,7 @@
             <a:r>
               <a:rPr sz="1500" b="1" i="1">
                 <a:solidFill>
-                  <a:srgbClr val="CADCFC"/>
+                  <a:srgbClr val="1E2761"/>
                 </a:solidFill>
                 <a:latin typeface="Montserrat"/>
               </a:rPr>
@@ -6701,7 +7491,7 @@
                 </a:solidFill>
                 <a:latin typeface="Montserrat"/>
               </a:rPr>
-              <a:t>002 / 014</a:t>
+              <a:t>002 / 015</a:t>
             </a:r>
           </a:p>
         </p:txBody>
@@ -6765,7 +7555,7 @@
             <a:r>
               <a:rPr sz="2700" b="1" i="0">
                 <a:solidFill>
-                  <a:srgbClr val="1E2761"/>
+                  <a:srgbClr val="E8801A"/>
                 </a:solidFill>
                 <a:latin typeface="Montserrat"/>
               </a:rPr>
@@ -6777,6 +7567,50 @@
       <p:sp>
         <p:nvSpPr>
           <p:cNvPr id="6" name="Rounded Rectangle 5"/>
+          <p:cNvSpPr/>
+          <p:nvPr/>
+        </p:nvSpPr>
+        <p:spPr>
+          <a:xfrm>
+            <a:off x="868680" y="1234440"/>
+            <a:ext cx="1463040" cy="73152"/>
+          </a:xfrm>
+          <a:prstGeom prst="roundRect">
+            <a:avLst/>
+          </a:prstGeom>
+          <a:solidFill>
+            <a:srgbClr val="1E2761"/>
+          </a:solidFill>
+          <a:ln>
+            <a:noFill/>
+          </a:ln>
+          <a:effectLst/>
+        </p:spPr>
+        <p:style>
+          <a:lnRef idx="1">
+            <a:schemeClr val="accent1"/>
+          </a:lnRef>
+          <a:fillRef idx="3">
+            <a:schemeClr val="accent1"/>
+          </a:fillRef>
+          <a:effectRef idx="2">
+            <a:schemeClr val="accent1"/>
+          </a:effectRef>
+          <a:fontRef idx="minor">
+            <a:schemeClr val="lt1"/>
+          </a:fontRef>
+        </p:style>
+        <p:txBody>
+          <a:bodyPr rtlCol="0" anchor="ctr"/>
+          <a:lstStyle/>
+          <a:p>
+            <a:pPr algn="ctr"/>
+          </a:p>
+        </p:txBody>
+      </p:sp>
+      <p:sp>
+        <p:nvSpPr>
+          <p:cNvPr id="7" name="Rounded Rectangle 6"/>
           <p:cNvSpPr/>
           <p:nvPr/>
         </p:nvSpPr>
@@ -6822,7 +7656,7 @@
       </p:sp>
       <p:sp>
         <p:nvSpPr>
-          <p:cNvPr id="7" name="TextBox 6"/>
+          <p:cNvPr id="8" name="TextBox 7"/>
           <p:cNvSpPr txBox="1"/>
           <p:nvPr/>
         </p:nvSpPr>
@@ -6857,7 +7691,7 @@
       </p:sp>
       <p:sp>
         <p:nvSpPr>
-          <p:cNvPr id="8" name="TextBox 7"/>
+          <p:cNvPr id="9" name="TextBox 8"/>
           <p:cNvSpPr txBox="1"/>
           <p:nvPr/>
         </p:nvSpPr>
@@ -6892,7 +7726,7 @@
       </p:sp>
       <p:sp>
         <p:nvSpPr>
-          <p:cNvPr id="9" name="Rounded Rectangle 8"/>
+          <p:cNvPr id="10" name="Rounded Rectangle 9"/>
           <p:cNvSpPr/>
           <p:nvPr/>
         </p:nvSpPr>
@@ -6938,7 +7772,7 @@
       </p:sp>
       <p:sp>
         <p:nvSpPr>
-          <p:cNvPr id="10" name="TextBox 9"/>
+          <p:cNvPr id="11" name="TextBox 10"/>
           <p:cNvSpPr txBox="1"/>
           <p:nvPr/>
         </p:nvSpPr>
@@ -6973,7 +7807,7 @@
       </p:sp>
       <p:sp>
         <p:nvSpPr>
-          <p:cNvPr id="11" name="TextBox 10"/>
+          <p:cNvPr id="12" name="TextBox 11"/>
           <p:cNvSpPr txBox="1"/>
           <p:nvPr/>
         </p:nvSpPr>
@@ -7008,7 +7842,7 @@
       </p:sp>
       <p:sp>
         <p:nvSpPr>
-          <p:cNvPr id="12" name="Rounded Rectangle 11"/>
+          <p:cNvPr id="13" name="Rounded Rectangle 12"/>
           <p:cNvSpPr/>
           <p:nvPr/>
         </p:nvSpPr>
@@ -7054,7 +7888,7 @@
       </p:sp>
       <p:sp>
         <p:nvSpPr>
-          <p:cNvPr id="13" name="TextBox 12"/>
+          <p:cNvPr id="14" name="TextBox 13"/>
           <p:cNvSpPr txBox="1"/>
           <p:nvPr/>
         </p:nvSpPr>
@@ -7089,7 +7923,7 @@
       </p:sp>
       <p:sp>
         <p:nvSpPr>
-          <p:cNvPr id="14" name="TextBox 13"/>
+          <p:cNvPr id="15" name="TextBox 14"/>
           <p:cNvSpPr txBox="1"/>
           <p:nvPr/>
         </p:nvSpPr>
@@ -7214,7 +8048,7 @@
                 </a:solidFill>
                 <a:latin typeface="Montserrat"/>
               </a:rPr>
-              <a:t>003 / 014</a:t>
+              <a:t>003 / 015</a:t>
             </a:r>
           </a:p>
         </p:txBody>
@@ -7261,7 +8095,7 @@
         </p:nvSpPr>
         <p:spPr>
           <a:xfrm>
-            <a:off x="822960" y="457200"/>
+            <a:off x="822960" y="502920"/>
             <a:ext cx="8229600" cy="365760"/>
           </a:xfrm>
           <a:prstGeom prst="rect">
@@ -7276,13 +8110,13 @@
           <a:lstStyle/>
           <a:p>
             <a:r>
-              <a:rPr sz="1200" b="1" i="0">
-                <a:solidFill>
-                  <a:srgbClr val="64748B"/>
-                </a:solidFill>
-                <a:latin typeface="Montserrat"/>
-              </a:rPr>
-              <a:t>UNE 60670 · OBJETO</a:t>
+              <a:rPr sz="1300" b="1" i="0">
+                <a:solidFill>
+                  <a:srgbClr val="E8801A"/>
+                </a:solidFill>
+                <a:latin typeface="Montserrat"/>
+              </a:rPr>
+              <a:t>PARTES DE ESTE VÍDEO</a:t>
             </a:r>
           </a:p>
         </p:txBody>
@@ -7295,7 +8129,7 @@
         </p:nvSpPr>
         <p:spPr>
           <a:xfrm>
-            <a:off x="822960" y="868680"/>
+            <a:off x="822960" y="914400"/>
             <a:ext cx="10515600" cy="914400"/>
           </a:xfrm>
           <a:prstGeom prst="rect">
@@ -7316,155 +8150,30 @@
                 </a:solidFill>
                 <a:latin typeface="Montserrat"/>
               </a:rPr>
-              <a:t>¿Qué regula esta norma?</a:t>
-            </a:r>
-          </a:p>
-        </p:txBody>
-      </p:sp>
-      <p:sp>
-        <p:nvSpPr>
-          <p:cNvPr id="7" name="TextBox 6"/>
-          <p:cNvSpPr txBox="1"/>
-          <p:nvPr/>
-        </p:nvSpPr>
-        <p:spPr>
-          <a:xfrm>
-            <a:off x="822960" y="1920240"/>
-            <a:ext cx="4983480" cy="4206240"/>
-          </a:xfrm>
-          <a:prstGeom prst="rect">
-            <a:avLst/>
-          </a:prstGeom>
-          <a:noFill/>
-        </p:spPr>
-        <p:txBody>
-          <a:bodyPr wrap="square">
-            <a:spAutoFit/>
-          </a:bodyPr>
-          <a:lstStyle/>
-          <a:p>
-            <a:pPr>
-              <a:spcAft>
-                <a:spcPts val="1000"/>
-              </a:spcAft>
-            </a:pPr>
-            <a:r>
-              <a:rPr sz="1600" b="1" i="0">
-                <a:solidFill>
-                  <a:srgbClr val="2E3A80"/>
-                </a:solidFill>
-                <a:latin typeface="Montserrat"/>
-              </a:rPr>
-              <a:t>•  </a:t>
-            </a:r>
-            <a:r>
-              <a:rPr sz="1600" b="0" i="0">
-                <a:solidFill>
-                  <a:srgbClr val="1B2330"/>
-                </a:solidFill>
-                <a:latin typeface="Montserrat"/>
-              </a:rPr>
-              <a:t>Diseño, construcción y pruebas</a:t>
-            </a:r>
-          </a:p>
-          <a:p>
-            <a:pPr>
-              <a:spcAft>
-                <a:spcPts val="1000"/>
-              </a:spcAft>
-            </a:pPr>
-            <a:r>
-              <a:rPr sz="1600" b="1" i="0">
-                <a:solidFill>
-                  <a:srgbClr val="2E3A80"/>
-                </a:solidFill>
-                <a:latin typeface="Montserrat"/>
-              </a:rPr>
-              <a:t>•  </a:t>
-            </a:r>
-            <a:r>
-              <a:rPr sz="1600" b="0" i="0">
-                <a:solidFill>
-                  <a:srgbClr val="1B2330"/>
-                </a:solidFill>
-                <a:latin typeface="Montserrat"/>
-              </a:rPr>
-              <a:t>Puesta en servicio y revisiones</a:t>
-            </a:r>
-          </a:p>
-          <a:p>
-            <a:pPr>
-              <a:spcAft>
-                <a:spcPts val="1000"/>
-              </a:spcAft>
-            </a:pPr>
-            <a:r>
-              <a:rPr sz="1600" b="1" i="0">
-                <a:solidFill>
-                  <a:srgbClr val="2E3A80"/>
-                </a:solidFill>
-                <a:latin typeface="Montserrat"/>
-              </a:rPr>
-              <a:t>•  </a:t>
-            </a:r>
-            <a:r>
-              <a:rPr sz="1600" b="0" i="0">
-                <a:solidFill>
-                  <a:srgbClr val="1B2330"/>
-                </a:solidFill>
-                <a:latin typeface="Montserrat"/>
-              </a:rPr>
-              <a:t>Instalaciones con MOP ≤ 5 bar</a:t>
-            </a:r>
-          </a:p>
-          <a:p>
-            <a:pPr>
-              <a:spcAft>
-                <a:spcPts val="1000"/>
-              </a:spcAft>
-            </a:pPr>
-            <a:r>
-              <a:rPr sz="1600" b="1" i="0">
-                <a:solidFill>
-                  <a:srgbClr val="2E3A80"/>
-                </a:solidFill>
-                <a:latin typeface="Montserrat"/>
-              </a:rPr>
-              <a:t>•  </a:t>
-            </a:r>
-            <a:r>
-              <a:rPr sz="1600" b="0" i="0">
-                <a:solidFill>
-                  <a:srgbClr val="1B2330"/>
-                </a:solidFill>
-                <a:latin typeface="Montserrat"/>
-              </a:rPr>
-              <a:t>Ubicación y conexión de aparatos</a:t>
-            </a:r>
-          </a:p>
-        </p:txBody>
-      </p:sp>
-      <p:sp>
-        <p:nvSpPr>
-          <p:cNvPr id="8" name="imgph" descr="IMGQ:gas boiler installation in kitchen"/>
+              <a:t>En este vídeo</a:t>
+            </a:r>
+          </a:p>
+        </p:txBody>
+      </p:sp>
+      <p:sp>
+        <p:nvSpPr>
+          <p:cNvPr id="7" name="Rounded Rectangle 6"/>
           <p:cNvSpPr/>
           <p:nvPr/>
         </p:nvSpPr>
         <p:spPr>
           <a:xfrm>
-            <a:off x="5806440" y="1051560"/>
-            <a:ext cx="5298947" cy="4629150"/>
+            <a:off x="868680" y="1673352"/>
+            <a:ext cx="2011680" cy="73152"/>
           </a:xfrm>
           <a:prstGeom prst="roundRect">
             <a:avLst/>
           </a:prstGeom>
           <a:solidFill>
-            <a:srgbClr val="F3F6FB"/>
+            <a:srgbClr val="E8801A"/>
           </a:solidFill>
-          <a:ln w="12700">
-            <a:solidFill>
-              <a:srgbClr val="C7D2E6"/>
-            </a:solidFill>
+          <a:ln>
+            <a:noFill/>
           </a:ln>
           <a:effectLst/>
         </p:spPr>
@@ -7492,14 +8201,14 @@
       </p:sp>
       <p:sp>
         <p:nvSpPr>
-          <p:cNvPr id="9" name="TextBox 8"/>
+          <p:cNvPr id="8" name="TextBox 7"/>
           <p:cNvSpPr txBox="1"/>
           <p:nvPr/>
         </p:nvSpPr>
         <p:spPr>
           <a:xfrm>
-            <a:off x="6080760" y="2726055"/>
-            <a:ext cx="4750307" cy="1280160"/>
+            <a:off x="822960" y="2103120"/>
+            <a:ext cx="10515600" cy="4023360"/>
           </a:xfrm>
           <a:prstGeom prst="rect">
             <a:avLst/>
@@ -7512,27 +8221,178 @@
           </a:bodyPr>
           <a:lstStyle/>
           <a:p>
-            <a:pPr algn="ctr"/>
-            <a:r>
-              <a:rPr sz="1400" b="1" i="0">
-                <a:solidFill>
-                  <a:srgbClr val="64748B"/>
-                </a:solidFill>
-                <a:latin typeface="Montserrat"/>
-              </a:rPr>
-              <a:t>IMAGEN REALISTA</a:t>
-            </a:r>
-          </a:p>
-          <a:p>
-            <a:pPr algn="ctr"/>
-            <a:r>
-              <a:rPr sz="1100" b="0" i="1">
-                <a:solidFill>
-                  <a:srgbClr val="64748B"/>
-                </a:solidFill>
-                <a:latin typeface="Montserrat"/>
-              </a:rPr>
-              <a:t>gas boiler installation in kitchen</a:t>
+            <a:pPr>
+              <a:spcAft>
+                <a:spcPts val="900"/>
+              </a:spcAft>
+            </a:pPr>
+            <a:r>
+              <a:rPr sz="1800" b="1" i="0">
+                <a:solidFill>
+                  <a:srgbClr val="E8801A"/>
+                </a:solidFill>
+                <a:latin typeface="Montserrat"/>
+              </a:rPr>
+              <a:t>01   </a:t>
+            </a:r>
+            <a:r>
+              <a:rPr sz="1700" b="0" i="0">
+                <a:solidFill>
+                  <a:srgbClr val="1B2330"/>
+                </a:solidFill>
+                <a:latin typeface="Montserrat"/>
+              </a:rPr>
+              <a:t>UNE 60670</a:t>
+            </a:r>
+          </a:p>
+          <a:p>
+            <a:pPr>
+              <a:spcAft>
+                <a:spcPts val="900"/>
+              </a:spcAft>
+            </a:pPr>
+            <a:r>
+              <a:rPr sz="1800" b="1" i="0">
+                <a:solidFill>
+                  <a:srgbClr val="E8801A"/>
+                </a:solidFill>
+                <a:latin typeface="Montserrat"/>
+              </a:rPr>
+              <a:t>02   </a:t>
+            </a:r>
+            <a:r>
+              <a:rPr sz="1700" b="0" i="0">
+                <a:solidFill>
+                  <a:srgbClr val="1B2330"/>
+                </a:solidFill>
+                <a:latin typeface="Montserrat"/>
+              </a:rPr>
+              <a:t>Parte 1</a:t>
+            </a:r>
+          </a:p>
+          <a:p>
+            <a:pPr>
+              <a:spcAft>
+                <a:spcPts val="900"/>
+              </a:spcAft>
+            </a:pPr>
+            <a:r>
+              <a:rPr sz="1800" b="1" i="0">
+                <a:solidFill>
+                  <a:srgbClr val="E8801A"/>
+                </a:solidFill>
+                <a:latin typeface="Montserrat"/>
+              </a:rPr>
+              <a:t>03   </a:t>
+            </a:r>
+            <a:r>
+              <a:rPr sz="1700" b="0" i="0">
+                <a:solidFill>
+                  <a:srgbClr val="1B2330"/>
+                </a:solidFill>
+                <a:latin typeface="Montserrat"/>
+              </a:rPr>
+              <a:t>Definición</a:t>
+            </a:r>
+          </a:p>
+          <a:p>
+            <a:pPr>
+              <a:spcAft>
+                <a:spcPts val="900"/>
+              </a:spcAft>
+            </a:pPr>
+            <a:r>
+              <a:rPr sz="1800" b="1" i="0">
+                <a:solidFill>
+                  <a:srgbClr val="E8801A"/>
+                </a:solidFill>
+                <a:latin typeface="Montserrat"/>
+              </a:rPr>
+              <a:t>04   </a:t>
+            </a:r>
+            <a:r>
+              <a:rPr sz="1700" b="0" i="0">
+                <a:solidFill>
+                  <a:srgbClr val="1B2330"/>
+                </a:solidFill>
+                <a:latin typeface="Montserrat"/>
+              </a:rPr>
+              <a:t>Clasificación</a:t>
+            </a:r>
+          </a:p>
+          <a:p>
+            <a:pPr>
+              <a:spcAft>
+                <a:spcPts val="900"/>
+              </a:spcAft>
+            </a:pPr>
+            <a:r>
+              <a:rPr sz="1800" b="1" i="0">
+                <a:solidFill>
+                  <a:srgbClr val="E8801A"/>
+                </a:solidFill>
+                <a:latin typeface="Montserrat"/>
+              </a:rPr>
+              <a:t>05   </a:t>
+            </a:r>
+            <a:r>
+              <a:rPr sz="1700" b="0" i="0">
+                <a:solidFill>
+                  <a:srgbClr val="1B2330"/>
+                </a:solidFill>
+                <a:latin typeface="Montserrat"/>
+              </a:rPr>
+              <a:t>Partes</a:t>
+            </a:r>
+          </a:p>
+          <a:p>
+            <a:pPr>
+              <a:spcAft>
+                <a:spcPts val="900"/>
+              </a:spcAft>
+            </a:pPr>
+            <a:r>
+              <a:rPr sz="1800" b="1" i="0">
+                <a:solidFill>
+                  <a:srgbClr val="E8801A"/>
+                </a:solidFill>
+                <a:latin typeface="Montserrat"/>
+              </a:rPr>
+              <a:t>06   </a:t>
+            </a:r>
+            <a:r>
+              <a:rPr sz="1700" b="0" i="0">
+                <a:solidFill>
+                  <a:srgbClr val="1B2330"/>
+                </a:solidFill>
+                <a:latin typeface="Montserrat"/>
+              </a:rPr>
+              <a:t>Requisitos</a:t>
+            </a:r>
+          </a:p>
+          <a:p>
+            <a:pPr>
+              <a:spcAft>
+                <a:spcPts val="900"/>
+              </a:spcAft>
+            </a:pPr>
+            <a:r>
+              <a:rPr sz="1800" b="1" i="0">
+                <a:solidFill>
+                  <a:srgbClr val="E8801A"/>
+                </a:solidFill>
+                <a:latin typeface="Montserrat"/>
+              </a:rPr>
+              <a:t>07   </a:t>
+            </a:r>
+            <a:r>
+              <a:rPr sz="1700" b="0" i="0">
+                <a:solidFill>
+                  <a:srgbClr val="1B2330"/>
+                </a:solidFill>
+                <a:latin typeface="Montserrat"/>
+              </a:rPr>
+              <a:t>Obra</a:t>
             </a:r>
           </a:p>
         </p:txBody>
@@ -7629,7 +8489,7 @@
                 </a:solidFill>
                 <a:latin typeface="Montserrat"/>
               </a:rPr>
-              <a:t>004 / 014</a:t>
+              <a:t>004 / 015</a:t>
             </a:r>
           </a:p>
         </p:txBody>
@@ -7677,7 +8537,7 @@
         <p:spPr>
           <a:xfrm>
             <a:off x="822960" y="457200"/>
-            <a:ext cx="8229600" cy="365760"/>
+            <a:ext cx="10058400" cy="365760"/>
           </a:xfrm>
           <a:prstGeom prst="rect">
             <a:avLst/>
@@ -7691,13 +8551,13 @@
           <a:lstStyle/>
           <a:p>
             <a:r>
-              <a:rPr sz="1200" b="1" i="0">
-                <a:solidFill>
-                  <a:srgbClr val="64748B"/>
-                </a:solidFill>
-                <a:latin typeface="Montserrat"/>
-              </a:rPr>
-              <a:t>UNE 60670 · ESTRUCTURA</a:t>
+              <a:rPr sz="1300" b="1" i="0">
+                <a:solidFill>
+                  <a:srgbClr val="E8801A"/>
+                </a:solidFill>
+                <a:latin typeface="Montserrat"/>
+              </a:rPr>
+              <a:t>UNE 60670 · OBJETO</a:t>
             </a:r>
           </a:p>
         </p:txBody>
@@ -7725,26 +8585,70 @@
           <a:lstStyle/>
           <a:p>
             <a:r>
-              <a:rPr sz="2700" b="1" i="0">
+              <a:rPr sz="2800" b="1" i="0">
                 <a:solidFill>
                   <a:srgbClr val="1E2761"/>
                 </a:solidFill>
                 <a:latin typeface="Montserrat"/>
               </a:rPr>
-              <a:t>Un manual de 13 partes</a:t>
-            </a:r>
-          </a:p>
-        </p:txBody>
-      </p:sp>
-      <p:sp>
-        <p:nvSpPr>
-          <p:cNvPr id="7" name="TextBox 6"/>
+              <a:t>¿Qué regula esta norma?</a:t>
+            </a:r>
+          </a:p>
+        </p:txBody>
+      </p:sp>
+      <p:sp>
+        <p:nvSpPr>
+          <p:cNvPr id="7" name="Rounded Rectangle 6"/>
+          <p:cNvSpPr/>
+          <p:nvPr/>
+        </p:nvSpPr>
+        <p:spPr>
+          <a:xfrm>
+            <a:off x="868680" y="1627632"/>
+            <a:ext cx="2011680" cy="73152"/>
+          </a:xfrm>
+          <a:prstGeom prst="roundRect">
+            <a:avLst/>
+          </a:prstGeom>
+          <a:solidFill>
+            <a:srgbClr val="E8801A"/>
+          </a:solidFill>
+          <a:ln>
+            <a:noFill/>
+          </a:ln>
+          <a:effectLst/>
+        </p:spPr>
+        <p:style>
+          <a:lnRef idx="1">
+            <a:schemeClr val="accent1"/>
+          </a:lnRef>
+          <a:fillRef idx="3">
+            <a:schemeClr val="accent1"/>
+          </a:fillRef>
+          <a:effectRef idx="2">
+            <a:schemeClr val="accent1"/>
+          </a:effectRef>
+          <a:fontRef idx="minor">
+            <a:schemeClr val="lt1"/>
+          </a:fontRef>
+        </p:style>
+        <p:txBody>
+          <a:bodyPr rtlCol="0" anchor="ctr"/>
+          <a:lstStyle/>
+          <a:p>
+            <a:pPr algn="ctr"/>
+          </a:p>
+        </p:txBody>
+      </p:sp>
+      <p:sp>
+        <p:nvSpPr>
+          <p:cNvPr id="8" name="TextBox 7"/>
           <p:cNvSpPr txBox="1"/>
           <p:nvPr/>
         </p:nvSpPr>
         <p:spPr>
           <a:xfrm>
-            <a:off x="822960" y="1920240"/>
+            <a:off x="822960" y="1965960"/>
             <a:ext cx="4983480" cy="4206240"/>
           </a:xfrm>
           <a:prstGeom prst="rect">
@@ -7760,17 +8664,17 @@
           <a:p>
             <a:pPr>
               <a:spcAft>
-                <a:spcPts val="1000"/>
+                <a:spcPts val="1100"/>
               </a:spcAft>
             </a:pPr>
             <a:r>
               <a:rPr sz="1600" b="1" i="0">
                 <a:solidFill>
-                  <a:srgbClr val="2E3A80"/>
-                </a:solidFill>
-                <a:latin typeface="Montserrat"/>
-              </a:rPr>
-              <a:t>•  </a:t>
+                  <a:srgbClr val="E8801A"/>
+                </a:solidFill>
+                <a:latin typeface="Montserrat"/>
+              </a:rPr>
+              <a:t>▸  </a:t>
             </a:r>
             <a:r>
               <a:rPr sz="1600" b="0" i="0">
@@ -7779,23 +8683,23 @@
                 </a:solidFill>
                 <a:latin typeface="Montserrat"/>
               </a:rPr>
-              <a:t>Parte 1: generalidades</a:t>
+              <a:t>Diseño, construcción y pruebas</a:t>
             </a:r>
           </a:p>
           <a:p>
             <a:pPr>
               <a:spcAft>
-                <a:spcPts val="1000"/>
+                <a:spcPts val="1100"/>
               </a:spcAft>
             </a:pPr>
             <a:r>
               <a:rPr sz="1600" b="1" i="0">
                 <a:solidFill>
-                  <a:srgbClr val="2E3A80"/>
-                </a:solidFill>
-                <a:latin typeface="Montserrat"/>
-              </a:rPr>
-              <a:t>•  </a:t>
+                  <a:srgbClr val="E8801A"/>
+                </a:solidFill>
+                <a:latin typeface="Montserrat"/>
+              </a:rPr>
+              <a:t>▸  </a:t>
             </a:r>
             <a:r>
               <a:rPr sz="1600" b="0" i="0">
@@ -7804,23 +8708,23 @@
                 </a:solidFill>
                 <a:latin typeface="Montserrat"/>
               </a:rPr>
-              <a:t>Parte 2: terminología</a:t>
+              <a:t>Puesta en servicio y revisiones</a:t>
             </a:r>
           </a:p>
           <a:p>
             <a:pPr>
               <a:spcAft>
-                <a:spcPts val="1000"/>
+                <a:spcPts val="1100"/>
               </a:spcAft>
             </a:pPr>
             <a:r>
               <a:rPr sz="1600" b="1" i="0">
                 <a:solidFill>
-                  <a:srgbClr val="2E3A80"/>
-                </a:solidFill>
-                <a:latin typeface="Montserrat"/>
-              </a:rPr>
-              <a:t>•  </a:t>
+                  <a:srgbClr val="E8801A"/>
+                </a:solidFill>
+                <a:latin typeface="Montserrat"/>
+              </a:rPr>
+              <a:t>▸  </a:t>
             </a:r>
             <a:r>
               <a:rPr sz="1600" b="0" i="0">
@@ -7829,23 +8733,23 @@
                 </a:solidFill>
                 <a:latin typeface="Montserrat"/>
               </a:rPr>
-              <a:t>Partes 3 a 13: el detalle técnico</a:t>
+              <a:t>Instalaciones con MOP ≤ 5 bar</a:t>
             </a:r>
           </a:p>
           <a:p>
             <a:pPr>
               <a:spcAft>
-                <a:spcPts val="1000"/>
+                <a:spcPts val="1100"/>
               </a:spcAft>
             </a:pPr>
             <a:r>
               <a:rPr sz="1600" b="1" i="0">
                 <a:solidFill>
-                  <a:srgbClr val="2E3A80"/>
-                </a:solidFill>
-                <a:latin typeface="Montserrat"/>
-              </a:rPr>
-              <a:t>•  </a:t>
+                  <a:srgbClr val="E8801A"/>
+                </a:solidFill>
+                <a:latin typeface="Montserrat"/>
+              </a:rPr>
+              <a:t>▸  </a:t>
             </a:r>
             <a:r>
               <a:rPr sz="1600" b="0" i="0">
@@ -7854,14 +8758,14 @@
                 </a:solidFill>
                 <a:latin typeface="Montserrat"/>
               </a:rPr>
-              <a:t>La 1 y la 2 son el mapa</a:t>
-            </a:r>
-          </a:p>
-        </p:txBody>
-      </p:sp>
-      <p:sp>
-        <p:nvSpPr>
-          <p:cNvPr id="8" name="imgph" descr="IMGQ:stack of technical standard manuals on desk"/>
+              <a:t>Ubicación y conexión de aparatos</a:t>
+            </a:r>
+          </a:p>
+        </p:txBody>
+      </p:sp>
+      <p:sp>
+        <p:nvSpPr>
+          <p:cNvPr id="9" name="imgph" descr="IMGQ:gas boiler installation in kitchen"/>
           <p:cNvSpPr/>
           <p:nvPr/>
         </p:nvSpPr>
@@ -7907,7 +8811,7 @@
       </p:sp>
       <p:sp>
         <p:nvSpPr>
-          <p:cNvPr id="9" name="TextBox 8"/>
+          <p:cNvPr id="10" name="TextBox 9"/>
           <p:cNvSpPr txBox="1"/>
           <p:nvPr/>
         </p:nvSpPr>
@@ -7947,7 +8851,7 @@
                 </a:solidFill>
                 <a:latin typeface="Montserrat"/>
               </a:rPr>
-              <a:t>stack of technical standard manuals on desk</a:t>
+              <a:t>gas boiler installation in kitchen</a:t>
             </a:r>
           </a:p>
         </p:txBody>
@@ -8044,7 +8948,7 @@
                 </a:solidFill>
                 <a:latin typeface="Montserrat"/>
               </a:rPr>
-              <a:t>005 / 014</a:t>
+              <a:t>005 / 015</a:t>
             </a:r>
           </a:p>
         </p:txBody>
@@ -8092,7 +8996,7 @@
         <p:spPr>
           <a:xfrm>
             <a:off x="822960" y="457200"/>
-            <a:ext cx="8229600" cy="365760"/>
+            <a:ext cx="10058400" cy="365760"/>
           </a:xfrm>
           <a:prstGeom prst="rect">
             <a:avLst/>
@@ -8106,13 +9010,13 @@
           <a:lstStyle/>
           <a:p>
             <a:r>
-              <a:rPr sz="1200" b="1" i="0">
-                <a:solidFill>
-                  <a:srgbClr val="64748B"/>
-                </a:solidFill>
-                <a:latin typeface="Montserrat"/>
-              </a:rPr>
-              <a:t>UNE 60670 · GUÍA RÁPIDA</a:t>
+              <a:rPr sz="1300" b="1" i="0">
+                <a:solidFill>
+                  <a:srgbClr val="E8801A"/>
+                </a:solidFill>
+                <a:latin typeface="Montserrat"/>
+              </a:rPr>
+              <a:t>UNE 60670 · ESTRUCTURA</a:t>
             </a:r>
           </a:p>
         </p:txBody>
@@ -8140,26 +9044,70 @@
           <a:lstStyle/>
           <a:p>
             <a:r>
-              <a:rPr sz="2700" b="1" i="0">
+              <a:rPr sz="2800" b="1" i="0">
                 <a:solidFill>
                   <a:srgbClr val="1E2761"/>
                 </a:solidFill>
                 <a:latin typeface="Montserrat"/>
               </a:rPr>
-              <a:t>Dónde mirar cada cosa</a:t>
-            </a:r>
-          </a:p>
-        </p:txBody>
-      </p:sp>
-      <p:sp>
-        <p:nvSpPr>
-          <p:cNvPr id="7" name="TextBox 6"/>
+              <a:t>Un manual de 13 partes</a:t>
+            </a:r>
+          </a:p>
+        </p:txBody>
+      </p:sp>
+      <p:sp>
+        <p:nvSpPr>
+          <p:cNvPr id="7" name="Rounded Rectangle 6"/>
+          <p:cNvSpPr/>
+          <p:nvPr/>
+        </p:nvSpPr>
+        <p:spPr>
+          <a:xfrm>
+            <a:off x="868680" y="1627632"/>
+            <a:ext cx="2011680" cy="73152"/>
+          </a:xfrm>
+          <a:prstGeom prst="roundRect">
+            <a:avLst/>
+          </a:prstGeom>
+          <a:solidFill>
+            <a:srgbClr val="E8801A"/>
+          </a:solidFill>
+          <a:ln>
+            <a:noFill/>
+          </a:ln>
+          <a:effectLst/>
+        </p:spPr>
+        <p:style>
+          <a:lnRef idx="1">
+            <a:schemeClr val="accent1"/>
+          </a:lnRef>
+          <a:fillRef idx="3">
+            <a:schemeClr val="accent1"/>
+          </a:fillRef>
+          <a:effectRef idx="2">
+            <a:schemeClr val="accent1"/>
+          </a:effectRef>
+          <a:fontRef idx="minor">
+            <a:schemeClr val="lt1"/>
+          </a:fontRef>
+        </p:style>
+        <p:txBody>
+          <a:bodyPr rtlCol="0" anchor="ctr"/>
+          <a:lstStyle/>
+          <a:p>
+            <a:pPr algn="ctr"/>
+          </a:p>
+        </p:txBody>
+      </p:sp>
+      <p:sp>
+        <p:nvSpPr>
+          <p:cNvPr id="8" name="TextBox 7"/>
           <p:cNvSpPr txBox="1"/>
           <p:nvPr/>
         </p:nvSpPr>
         <p:spPr>
           <a:xfrm>
-            <a:off x="822960" y="1920240"/>
+            <a:off x="822960" y="1965960"/>
             <a:ext cx="4983480" cy="4206240"/>
           </a:xfrm>
           <a:prstGeom prst="rect">
@@ -8175,17 +9123,17 @@
           <a:p>
             <a:pPr>
               <a:spcAft>
-                <a:spcPts val="1000"/>
+                <a:spcPts val="1100"/>
               </a:spcAft>
             </a:pPr>
             <a:r>
               <a:rPr sz="1600" b="1" i="0">
                 <a:solidFill>
-                  <a:srgbClr val="2E3A80"/>
-                </a:solidFill>
-                <a:latin typeface="Montserrat"/>
-              </a:rPr>
-              <a:t>•  </a:t>
+                  <a:srgbClr val="E8801A"/>
+                </a:solidFill>
+                <a:latin typeface="Montserrat"/>
+              </a:rPr>
+              <a:t>▸  </a:t>
             </a:r>
             <a:r>
               <a:rPr sz="1600" b="0" i="0">
@@ -8194,23 +9142,23 @@
                 </a:solidFill>
                 <a:latin typeface="Montserrat"/>
               </a:rPr>
-              <a:t>Estanquidad de entrega → parte 8</a:t>
+              <a:t>Parte 1: generalidades</a:t>
             </a:r>
           </a:p>
           <a:p>
             <a:pPr>
               <a:spcAft>
-                <a:spcPts val="1000"/>
+                <a:spcPts val="1100"/>
               </a:spcAft>
             </a:pPr>
             <a:r>
               <a:rPr sz="1600" b="1" i="0">
                 <a:solidFill>
-                  <a:srgbClr val="2E3A80"/>
-                </a:solidFill>
-                <a:latin typeface="Montserrat"/>
-              </a:rPr>
-              <a:t>•  </a:t>
+                  <a:srgbClr val="E8801A"/>
+                </a:solidFill>
+                <a:latin typeface="Montserrat"/>
+              </a:rPr>
+              <a:t>▸  </a:t>
             </a:r>
             <a:r>
               <a:rPr sz="1600" b="0" i="0">
@@ -8219,23 +9167,23 @@
                 </a:solidFill>
                 <a:latin typeface="Montserrat"/>
               </a:rPr>
-              <a:t>Puesta en servicio → parte 9</a:t>
+              <a:t>Parte 2: terminología</a:t>
             </a:r>
           </a:p>
           <a:p>
             <a:pPr>
               <a:spcAft>
-                <a:spcPts val="1000"/>
+                <a:spcPts val="1100"/>
               </a:spcAft>
             </a:pPr>
             <a:r>
               <a:rPr sz="1600" b="1" i="0">
                 <a:solidFill>
-                  <a:srgbClr val="2E3A80"/>
-                </a:solidFill>
-                <a:latin typeface="Montserrat"/>
-              </a:rPr>
-              <a:t>•  </a:t>
+                  <a:srgbClr val="E8801A"/>
+                </a:solidFill>
+                <a:latin typeface="Montserrat"/>
+              </a:rPr>
+              <a:t>▸  </a:t>
             </a:r>
             <a:r>
               <a:rPr sz="1600" b="0" i="0">
@@ -8244,14 +9192,39 @@
                 </a:solidFill>
                 <a:latin typeface="Montserrat"/>
               </a:rPr>
-              <a:t>Control periódico → partes 12 y 13</a:t>
-            </a:r>
-          </a:p>
-        </p:txBody>
-      </p:sp>
-      <p:sp>
-        <p:nvSpPr>
-          <p:cNvPr id="8" name="imgph" descr="IMGQ:technician reading manual next to gas meter"/>
+              <a:t>Partes 3 a 13: el detalle técnico</a:t>
+            </a:r>
+          </a:p>
+          <a:p>
+            <a:pPr>
+              <a:spcAft>
+                <a:spcPts val="1100"/>
+              </a:spcAft>
+            </a:pPr>
+            <a:r>
+              <a:rPr sz="1600" b="1" i="0">
+                <a:solidFill>
+                  <a:srgbClr val="E8801A"/>
+                </a:solidFill>
+                <a:latin typeface="Montserrat"/>
+              </a:rPr>
+              <a:t>▸  </a:t>
+            </a:r>
+            <a:r>
+              <a:rPr sz="1600" b="0" i="0">
+                <a:solidFill>
+                  <a:srgbClr val="1B2330"/>
+                </a:solidFill>
+                <a:latin typeface="Montserrat"/>
+              </a:rPr>
+              <a:t>La 1 y la 2 son el mapa</a:t>
+            </a:r>
+          </a:p>
+        </p:txBody>
+      </p:sp>
+      <p:sp>
+        <p:nvSpPr>
+          <p:cNvPr id="9" name="imgph" descr="IMGQ:stack of technical standard manuals on desk"/>
           <p:cNvSpPr/>
           <p:nvPr/>
         </p:nvSpPr>
@@ -8297,7 +9270,7 @@
       </p:sp>
       <p:sp>
         <p:nvSpPr>
-          <p:cNvPr id="9" name="TextBox 8"/>
+          <p:cNvPr id="10" name="TextBox 9"/>
           <p:cNvSpPr txBox="1"/>
           <p:nvPr/>
         </p:nvSpPr>
@@ -8337,7 +9310,7 @@
                 </a:solidFill>
                 <a:latin typeface="Montserrat"/>
               </a:rPr>
-              <a:t>technician reading manual next to gas meter</a:t>
+              <a:t>stack of technical standard manuals on desk</a:t>
             </a:r>
           </a:p>
         </p:txBody>
@@ -8434,7 +9407,7 @@
                 </a:solidFill>
                 <a:latin typeface="Montserrat"/>
               </a:rPr>
-              <a:t>006 / 014</a:t>
+              <a:t>006 / 015</a:t>
             </a:r>
           </a:p>
         </p:txBody>
@@ -8482,7 +9455,7 @@
         <p:spPr>
           <a:xfrm>
             <a:off x="822960" y="457200"/>
-            <a:ext cx="8229600" cy="365760"/>
+            <a:ext cx="10058400" cy="365760"/>
           </a:xfrm>
           <a:prstGeom prst="rect">
             <a:avLst/>
@@ -8496,13 +9469,13 @@
           <a:lstStyle/>
           <a:p>
             <a:r>
-              <a:rPr sz="1200" b="1" i="0">
-                <a:solidFill>
-                  <a:srgbClr val="64748B"/>
-                </a:solidFill>
-                <a:latin typeface="Montserrat"/>
-              </a:rPr>
-              <a:t>PARTE 1 · NOVEDAD</a:t>
+              <a:rPr sz="1300" b="1" i="0">
+                <a:solidFill>
+                  <a:srgbClr val="E8801A"/>
+                </a:solidFill>
+                <a:latin typeface="Montserrat"/>
+              </a:rPr>
+              <a:t>UNE 60670 · GUÍA RÁPIDA</a:t>
             </a:r>
           </a:p>
         </p:txBody>
@@ -8530,26 +9503,70 @@
           <a:lstStyle/>
           <a:p>
             <a:r>
-              <a:rPr sz="2700" b="1" i="0">
+              <a:rPr sz="2800" b="1" i="0">
                 <a:solidFill>
                   <a:srgbClr val="1E2761"/>
                 </a:solidFill>
                 <a:latin typeface="Montserrat"/>
               </a:rPr>
-              <a:t>El Anexo A, tu índice de normas</a:t>
-            </a:r>
-          </a:p>
-        </p:txBody>
-      </p:sp>
-      <p:sp>
-        <p:nvSpPr>
-          <p:cNvPr id="7" name="TextBox 6"/>
+              <a:t>Dónde mirar cada cosa</a:t>
+            </a:r>
+          </a:p>
+        </p:txBody>
+      </p:sp>
+      <p:sp>
+        <p:nvSpPr>
+          <p:cNvPr id="7" name="Rounded Rectangle 6"/>
+          <p:cNvSpPr/>
+          <p:nvPr/>
+        </p:nvSpPr>
+        <p:spPr>
+          <a:xfrm>
+            <a:off x="868680" y="1627632"/>
+            <a:ext cx="2011680" cy="73152"/>
+          </a:xfrm>
+          <a:prstGeom prst="roundRect">
+            <a:avLst/>
+          </a:prstGeom>
+          <a:solidFill>
+            <a:srgbClr val="E8801A"/>
+          </a:solidFill>
+          <a:ln>
+            <a:noFill/>
+          </a:ln>
+          <a:effectLst/>
+        </p:spPr>
+        <p:style>
+          <a:lnRef idx="1">
+            <a:schemeClr val="accent1"/>
+          </a:lnRef>
+          <a:fillRef idx="3">
+            <a:schemeClr val="accent1"/>
+          </a:fillRef>
+          <a:effectRef idx="2">
+            <a:schemeClr val="accent1"/>
+          </a:effectRef>
+          <a:fontRef idx="minor">
+            <a:schemeClr val="lt1"/>
+          </a:fontRef>
+        </p:style>
+        <p:txBody>
+          <a:bodyPr rtlCol="0" anchor="ctr"/>
+          <a:lstStyle/>
+          <a:p>
+            <a:pPr algn="ctr"/>
+          </a:p>
+        </p:txBody>
+      </p:sp>
+      <p:sp>
+        <p:nvSpPr>
+          <p:cNvPr id="8" name="TextBox 7"/>
           <p:cNvSpPr txBox="1"/>
           <p:nvPr/>
         </p:nvSpPr>
         <p:spPr>
           <a:xfrm>
-            <a:off x="822960" y="1920240"/>
+            <a:off x="822960" y="1965960"/>
             <a:ext cx="4983480" cy="4206240"/>
           </a:xfrm>
           <a:prstGeom prst="rect">
@@ -8565,17 +9582,17 @@
           <a:p>
             <a:pPr>
               <a:spcAft>
-                <a:spcPts val="1000"/>
+                <a:spcPts val="1100"/>
               </a:spcAft>
             </a:pPr>
             <a:r>
               <a:rPr sz="1600" b="1" i="0">
                 <a:solidFill>
-                  <a:srgbClr val="2E3A80"/>
-                </a:solidFill>
-                <a:latin typeface="Montserrat"/>
-              </a:rPr>
-              <a:t>•  </a:t>
+                  <a:srgbClr val="E8801A"/>
+                </a:solidFill>
+                <a:latin typeface="Montserrat"/>
+              </a:rPr>
+              <a:t>▸  </a:t>
             </a:r>
             <a:r>
               <a:rPr sz="1600" b="0" i="0">
@@ -8584,23 +9601,23 @@
                 </a:solidFill>
                 <a:latin typeface="Montserrat"/>
               </a:rPr>
-              <a:t>Lista de normas de consulta</a:t>
+              <a:t>Estanquidad de entrega → parte 8</a:t>
             </a:r>
           </a:p>
           <a:p>
             <a:pPr>
               <a:spcAft>
-                <a:spcPts val="1000"/>
+                <a:spcPts val="1100"/>
               </a:spcAft>
             </a:pPr>
             <a:r>
               <a:rPr sz="1600" b="1" i="0">
                 <a:solidFill>
-                  <a:srgbClr val="2E3A80"/>
-                </a:solidFill>
-                <a:latin typeface="Montserrat"/>
-              </a:rPr>
-              <a:t>•  </a:t>
+                  <a:srgbClr val="E8801A"/>
+                </a:solidFill>
+                <a:latin typeface="Montserrat"/>
+              </a:rPr>
+              <a:t>▸  </a:t>
             </a:r>
             <a:r>
               <a:rPr sz="1600" b="0" i="0">
@@ -8609,23 +9626,23 @@
                 </a:solidFill>
                 <a:latin typeface="Montserrat"/>
               </a:rPr>
-              <a:t>Cubre las 13 partes</a:t>
+              <a:t>Puesta en servicio → parte 9</a:t>
             </a:r>
           </a:p>
           <a:p>
             <a:pPr>
               <a:spcAft>
-                <a:spcPts val="1000"/>
+                <a:spcPts val="1100"/>
               </a:spcAft>
             </a:pPr>
             <a:r>
               <a:rPr sz="1600" b="1" i="0">
                 <a:solidFill>
-                  <a:srgbClr val="2E3A80"/>
-                </a:solidFill>
-                <a:latin typeface="Montserrat"/>
-              </a:rPr>
-              <a:t>•  </a:t>
+                  <a:srgbClr val="E8801A"/>
+                </a:solidFill>
+                <a:latin typeface="Montserrat"/>
+              </a:rPr>
+              <a:t>▸  </a:t>
             </a:r>
             <a:r>
               <a:rPr sz="1600" b="0" i="0">
@@ -8634,14 +9651,14 @@
                 </a:solidFill>
                 <a:latin typeface="Montserrat"/>
               </a:rPr>
-              <a:t>Es informativo, no obliga</a:t>
-            </a:r>
-          </a:p>
-        </p:txBody>
-      </p:sp>
-      <p:sp>
-        <p:nvSpPr>
-          <p:cNvPr id="8" name="imgph" descr="IMGQ:index page of technical document close up"/>
+              <a:t>Control periódico → partes 12 y 13</a:t>
+            </a:r>
+          </a:p>
+        </p:txBody>
+      </p:sp>
+      <p:sp>
+        <p:nvSpPr>
+          <p:cNvPr id="9" name="imgph" descr="IMGQ:technician reading manual next to gas meter"/>
           <p:cNvSpPr/>
           <p:nvPr/>
         </p:nvSpPr>
@@ -8687,7 +9704,7 @@
       </p:sp>
       <p:sp>
         <p:nvSpPr>
-          <p:cNvPr id="9" name="TextBox 8"/>
+          <p:cNvPr id="10" name="TextBox 9"/>
           <p:cNvSpPr txBox="1"/>
           <p:nvPr/>
         </p:nvSpPr>
@@ -8727,7 +9744,7 @@
                 </a:solidFill>
                 <a:latin typeface="Montserrat"/>
               </a:rPr>
-              <a:t>index page of technical document close up</a:t>
+              <a:t>technician reading manual next to gas meter</a:t>
             </a:r>
           </a:p>
         </p:txBody>
@@ -8824,7 +9841,7 @@
                 </a:solidFill>
                 <a:latin typeface="Montserrat"/>
               </a:rPr>
-              <a:t>007 / 014</a:t>
+              <a:t>007 / 015</a:t>
             </a:r>
           </a:p>
         </p:txBody>
@@ -8872,7 +9889,7 @@
         <p:spPr>
           <a:xfrm>
             <a:off x="822960" y="457200"/>
-            <a:ext cx="8229600" cy="365760"/>
+            <a:ext cx="10058400" cy="365760"/>
           </a:xfrm>
           <a:prstGeom prst="rect">
             <a:avLst/>
@@ -8886,13 +9903,13 @@
           <a:lstStyle/>
           <a:p>
             <a:r>
-              <a:rPr sz="1200" b="1" i="0">
-                <a:solidFill>
-                  <a:srgbClr val="64748B"/>
-                </a:solidFill>
-                <a:latin typeface="Montserrat"/>
-              </a:rPr>
-              <a:t>PARTE 1 · OBJETO</a:t>
+              <a:rPr sz="1300" b="1" i="0">
+                <a:solidFill>
+                  <a:srgbClr val="E8801A"/>
+                </a:solidFill>
+                <a:latin typeface="Montserrat"/>
+              </a:rPr>
+              <a:t>PARTE 1 · NOVEDAD</a:t>
             </a:r>
           </a:p>
         </p:txBody>
@@ -8920,26 +9937,70 @@
           <a:lstStyle/>
           <a:p>
             <a:r>
-              <a:rPr sz="2700" b="1" i="0">
+              <a:rPr sz="2800" b="1" i="0">
                 <a:solidFill>
                   <a:srgbClr val="1E2761"/>
                 </a:solidFill>
                 <a:latin typeface="Montserrat"/>
               </a:rPr>
-              <a:t>Qué hace la Parte 1</a:t>
-            </a:r>
-          </a:p>
-        </p:txBody>
-      </p:sp>
-      <p:sp>
-        <p:nvSpPr>
-          <p:cNvPr id="7" name="TextBox 6"/>
+              <a:t>El Anexo A, tu índice de normas</a:t>
+            </a:r>
+          </a:p>
+        </p:txBody>
+      </p:sp>
+      <p:sp>
+        <p:nvSpPr>
+          <p:cNvPr id="7" name="Rounded Rectangle 6"/>
+          <p:cNvSpPr/>
+          <p:nvPr/>
+        </p:nvSpPr>
+        <p:spPr>
+          <a:xfrm>
+            <a:off x="868680" y="1627632"/>
+            <a:ext cx="2011680" cy="73152"/>
+          </a:xfrm>
+          <a:prstGeom prst="roundRect">
+            <a:avLst/>
+          </a:prstGeom>
+          <a:solidFill>
+            <a:srgbClr val="E8801A"/>
+          </a:solidFill>
+          <a:ln>
+            <a:noFill/>
+          </a:ln>
+          <a:effectLst/>
+        </p:spPr>
+        <p:style>
+          <a:lnRef idx="1">
+            <a:schemeClr val="accent1"/>
+          </a:lnRef>
+          <a:fillRef idx="3">
+            <a:schemeClr val="accent1"/>
+          </a:fillRef>
+          <a:effectRef idx="2">
+            <a:schemeClr val="accent1"/>
+          </a:effectRef>
+          <a:fontRef idx="minor">
+            <a:schemeClr val="lt1"/>
+          </a:fontRef>
+        </p:style>
+        <p:txBody>
+          <a:bodyPr rtlCol="0" anchor="ctr"/>
+          <a:lstStyle/>
+          <a:p>
+            <a:pPr algn="ctr"/>
+          </a:p>
+        </p:txBody>
+      </p:sp>
+      <p:sp>
+        <p:nvSpPr>
+          <p:cNvPr id="8" name="TextBox 7"/>
           <p:cNvSpPr txBox="1"/>
           <p:nvPr/>
         </p:nvSpPr>
         <p:spPr>
           <a:xfrm>
-            <a:off x="822960" y="1920240"/>
+            <a:off x="822960" y="1965960"/>
             <a:ext cx="4983480" cy="4206240"/>
           </a:xfrm>
           <a:prstGeom prst="rect">
@@ -8955,17 +10016,17 @@
           <a:p>
             <a:pPr>
               <a:spcAft>
-                <a:spcPts val="1000"/>
+                <a:spcPts val="1100"/>
               </a:spcAft>
             </a:pPr>
             <a:r>
               <a:rPr sz="1600" b="1" i="0">
                 <a:solidFill>
-                  <a:srgbClr val="2E3A80"/>
-                </a:solidFill>
-                <a:latin typeface="Montserrat"/>
-              </a:rPr>
-              <a:t>•  </a:t>
+                  <a:srgbClr val="E8801A"/>
+                </a:solidFill>
+                <a:latin typeface="Montserrat"/>
+              </a:rPr>
+              <a:t>▸  </a:t>
             </a:r>
             <a:r>
               <a:rPr sz="1600" b="0" i="0">
@@ -8974,23 +10035,23 @@
                 </a:solidFill>
                 <a:latin typeface="Montserrat"/>
               </a:rPr>
-              <a:t>Define la instalación receptora</a:t>
+              <a:t>Lista de normas de consulta</a:t>
             </a:r>
           </a:p>
           <a:p>
             <a:pPr>
               <a:spcAft>
-                <a:spcPts val="1000"/>
+                <a:spcPts val="1100"/>
               </a:spcAft>
             </a:pPr>
             <a:r>
               <a:rPr sz="1600" b="1" i="0">
                 <a:solidFill>
-                  <a:srgbClr val="2E3A80"/>
-                </a:solidFill>
-                <a:latin typeface="Montserrat"/>
-              </a:rPr>
-              <a:t>•  </a:t>
+                  <a:srgbClr val="E8801A"/>
+                </a:solidFill>
+                <a:latin typeface="Montserrat"/>
+              </a:rPr>
+              <a:t>▸  </a:t>
             </a:r>
             <a:r>
               <a:rPr sz="1600" b="0" i="0">
@@ -8999,23 +10060,23 @@
                 </a:solidFill>
                 <a:latin typeface="Montserrat"/>
               </a:rPr>
-              <a:t>La clasifica en clases</a:t>
+              <a:t>Cubre las 13 partes</a:t>
             </a:r>
           </a:p>
           <a:p>
             <a:pPr>
               <a:spcAft>
-                <a:spcPts val="1000"/>
+                <a:spcPts val="1100"/>
               </a:spcAft>
             </a:pPr>
             <a:r>
               <a:rPr sz="1600" b="1" i="0">
                 <a:solidFill>
-                  <a:srgbClr val="2E3A80"/>
-                </a:solidFill>
-                <a:latin typeface="Montserrat"/>
-              </a:rPr>
-              <a:t>•  </a:t>
+                  <a:srgbClr val="E8801A"/>
+                </a:solidFill>
+                <a:latin typeface="Montserrat"/>
+              </a:rPr>
+              <a:t>▸  </a:t>
             </a:r>
             <a:r>
               <a:rPr sz="1600" b="0" i="0">
@@ -9024,39 +10085,14 @@
                 </a:solidFill>
                 <a:latin typeface="Montserrat"/>
               </a:rPr>
-              <a:t>Fija sus requisitos generales</a:t>
-            </a:r>
-          </a:p>
-          <a:p>
-            <a:pPr>
-              <a:spcAft>
-                <a:spcPts val="1000"/>
-              </a:spcAft>
-            </a:pPr>
-            <a:r>
-              <a:rPr sz="1600" b="1" i="0">
-                <a:solidFill>
-                  <a:srgbClr val="2E3A80"/>
-                </a:solidFill>
-                <a:latin typeface="Montserrat"/>
-              </a:rPr>
-              <a:t>•  </a:t>
-            </a:r>
-            <a:r>
-              <a:rPr sz="1600" b="0" i="0">
-                <a:solidFill>
-                  <a:srgbClr val="1B2330"/>
-                </a:solidFill>
-                <a:latin typeface="Montserrat"/>
-              </a:rPr>
-              <a:t>Desarrolla la UNE-EN 1775</a:t>
-            </a:r>
-          </a:p>
-        </p:txBody>
-      </p:sp>
-      <p:sp>
-        <p:nvSpPr>
-          <p:cNvPr id="8" name="imgph" descr="IMGQ:engineer drawing gas installation plan"/>
+              <a:t>Es informativo, no obliga</a:t>
+            </a:r>
+          </a:p>
+        </p:txBody>
+      </p:sp>
+      <p:sp>
+        <p:nvSpPr>
+          <p:cNvPr id="9" name="imgph" descr="IMGQ:index page of technical document close up"/>
           <p:cNvSpPr/>
           <p:nvPr/>
         </p:nvSpPr>
@@ -9102,7 +10138,7 @@
       </p:sp>
       <p:sp>
         <p:nvSpPr>
-          <p:cNvPr id="9" name="TextBox 8"/>
+          <p:cNvPr id="10" name="TextBox 9"/>
           <p:cNvSpPr txBox="1"/>
           <p:nvPr/>
         </p:nvSpPr>
@@ -9142,7 +10178,7 @@
                 </a:solidFill>
                 <a:latin typeface="Montserrat"/>
               </a:rPr>
-              <a:t>engineer drawing gas installation plan</a:t>
+              <a:t>index page of technical document close up</a:t>
             </a:r>
           </a:p>
         </p:txBody>
@@ -9239,7 +10275,7 @@
                 </a:solidFill>
                 <a:latin typeface="Montserrat"/>
               </a:rPr>
-              <a:t>008 / 014</a:t>
+              <a:t>008 / 015</a:t>
             </a:r>
           </a:p>
         </p:txBody>
@@ -9287,7 +10323,7 @@
         <p:spPr>
           <a:xfrm>
             <a:off x="822960" y="457200"/>
-            <a:ext cx="8229600" cy="365760"/>
+            <a:ext cx="10058400" cy="365760"/>
           </a:xfrm>
           <a:prstGeom prst="rect">
             <a:avLst/>
@@ -9301,13 +10337,13 @@
           <a:lstStyle/>
           <a:p>
             <a:r>
-              <a:rPr sz="1200" b="1" i="0">
-                <a:solidFill>
-                  <a:srgbClr val="64748B"/>
-                </a:solidFill>
-                <a:latin typeface="Montserrat"/>
-              </a:rPr>
-              <a:t>DEFINICIÓN · CLAVE</a:t>
+              <a:rPr sz="1300" b="1" i="0">
+                <a:solidFill>
+                  <a:srgbClr val="E8801A"/>
+                </a:solidFill>
+                <a:latin typeface="Montserrat"/>
+              </a:rPr>
+              <a:t>PARTE 1 · OBJETO</a:t>
             </a:r>
           </a:p>
         </p:txBody>
@@ -9335,26 +10371,70 @@
           <a:lstStyle/>
           <a:p>
             <a:r>
-              <a:rPr sz="2700" b="1" i="0">
+              <a:rPr sz="2800" b="1" i="0">
                 <a:solidFill>
                   <a:srgbClr val="1E2761"/>
                 </a:solidFill>
                 <a:latin typeface="Montserrat"/>
               </a:rPr>
-              <a:t>¿Qué es instalación receptora?</a:t>
-            </a:r>
-          </a:p>
-        </p:txBody>
-      </p:sp>
-      <p:sp>
-        <p:nvSpPr>
-          <p:cNvPr id="7" name="TextBox 6"/>
+              <a:t>Qué hace la Parte 1</a:t>
+            </a:r>
+          </a:p>
+        </p:txBody>
+      </p:sp>
+      <p:sp>
+        <p:nvSpPr>
+          <p:cNvPr id="7" name="Rounded Rectangle 6"/>
+          <p:cNvSpPr/>
+          <p:nvPr/>
+        </p:nvSpPr>
+        <p:spPr>
+          <a:xfrm>
+            <a:off x="868680" y="1627632"/>
+            <a:ext cx="2011680" cy="73152"/>
+          </a:xfrm>
+          <a:prstGeom prst="roundRect">
+            <a:avLst/>
+          </a:prstGeom>
+          <a:solidFill>
+            <a:srgbClr val="E8801A"/>
+          </a:solidFill>
+          <a:ln>
+            <a:noFill/>
+          </a:ln>
+          <a:effectLst/>
+        </p:spPr>
+        <p:style>
+          <a:lnRef idx="1">
+            <a:schemeClr val="accent1"/>
+          </a:lnRef>
+          <a:fillRef idx="3">
+            <a:schemeClr val="accent1"/>
+          </a:fillRef>
+          <a:effectRef idx="2">
+            <a:schemeClr val="accent1"/>
+          </a:effectRef>
+          <a:fontRef idx="minor">
+            <a:schemeClr val="lt1"/>
+          </a:fontRef>
+        </p:style>
+        <p:txBody>
+          <a:bodyPr rtlCol="0" anchor="ctr"/>
+          <a:lstStyle/>
+          <a:p>
+            <a:pPr algn="ctr"/>
+          </a:p>
+        </p:txBody>
+      </p:sp>
+      <p:sp>
+        <p:nvSpPr>
+          <p:cNvPr id="8" name="TextBox 7"/>
           <p:cNvSpPr txBox="1"/>
           <p:nvPr/>
         </p:nvSpPr>
         <p:spPr>
           <a:xfrm>
-            <a:off x="822960" y="1920240"/>
+            <a:off x="822960" y="1965960"/>
             <a:ext cx="4983480" cy="4206240"/>
           </a:xfrm>
           <a:prstGeom prst="rect">
@@ -9370,17 +10450,17 @@
           <a:p>
             <a:pPr>
               <a:spcAft>
-                <a:spcPts val="1000"/>
+                <a:spcPts val="1100"/>
               </a:spcAft>
             </a:pPr>
             <a:r>
               <a:rPr sz="1600" b="1" i="0">
                 <a:solidFill>
-                  <a:srgbClr val="2E3A80"/>
-                </a:solidFill>
-                <a:latin typeface="Montserrat"/>
-              </a:rPr>
-              <a:t>•  </a:t>
+                  <a:srgbClr val="E8801A"/>
+                </a:solidFill>
+                <a:latin typeface="Montserrat"/>
+              </a:rPr>
+              <a:t>▸  </a:t>
             </a:r>
             <a:r>
               <a:rPr sz="1600" b="0" i="0">
@@ -9389,23 +10469,23 @@
                 </a:solidFill>
                 <a:latin typeface="Montserrat"/>
               </a:rPr>
-              <a:t>Gas de familia normalizada</a:t>
+              <a:t>Define la instalación receptora</a:t>
             </a:r>
           </a:p>
           <a:p>
             <a:pPr>
               <a:spcAft>
-                <a:spcPts val="1000"/>
+                <a:spcPts val="1100"/>
               </a:spcAft>
             </a:pPr>
             <a:r>
               <a:rPr sz="1600" b="1" i="0">
                 <a:solidFill>
-                  <a:srgbClr val="2E3A80"/>
-                </a:solidFill>
-                <a:latin typeface="Montserrat"/>
-              </a:rPr>
-              <a:t>•  </a:t>
+                  <a:srgbClr val="E8801A"/>
+                </a:solidFill>
+                <a:latin typeface="Montserrat"/>
+              </a:rPr>
+              <a:t>▸  </a:t>
             </a:r>
             <a:r>
               <a:rPr sz="1600" b="0" i="0">
@@ -9414,23 +10494,23 @@
                 </a:solidFill>
                 <a:latin typeface="Montserrat"/>
               </a:rPr>
-              <a:t>MOP ≤ 5 bar</a:t>
+              <a:t>La clasifica en clases</a:t>
             </a:r>
           </a:p>
           <a:p>
             <a:pPr>
               <a:spcAft>
-                <a:spcPts val="1000"/>
+                <a:spcPts val="1100"/>
               </a:spcAft>
             </a:pPr>
             <a:r>
               <a:rPr sz="1600" b="1" i="0">
                 <a:solidFill>
-                  <a:srgbClr val="2E3A80"/>
-                </a:solidFill>
-                <a:latin typeface="Montserrat"/>
-              </a:rPr>
-              <a:t>•  </a:t>
+                  <a:srgbClr val="E8801A"/>
+                </a:solidFill>
+                <a:latin typeface="Montserrat"/>
+              </a:rPr>
+              <a:t>▸  </a:t>
             </a:r>
             <a:r>
               <a:rPr sz="1600" b="0" i="0">
@@ -9439,23 +10519,23 @@
                 </a:solidFill>
                 <a:latin typeface="Montserrat"/>
               </a:rPr>
-              <a:t>Sirve a aparatos de gas</a:t>
+              <a:t>Fija sus requisitos generales</a:t>
             </a:r>
           </a:p>
           <a:p>
             <a:pPr>
               <a:spcAft>
-                <a:spcPts val="1000"/>
+                <a:spcPts val="1100"/>
               </a:spcAft>
             </a:pPr>
             <a:r>
               <a:rPr sz="1600" b="1" i="0">
                 <a:solidFill>
-                  <a:srgbClr val="2E3A80"/>
-                </a:solidFill>
-                <a:latin typeface="Montserrat"/>
-              </a:rPr>
-              <a:t>•  </a:t>
+                  <a:srgbClr val="E8801A"/>
+                </a:solidFill>
+                <a:latin typeface="Montserrat"/>
+              </a:rPr>
+              <a:t>▸  </a:t>
             </a:r>
             <a:r>
               <a:rPr sz="1600" b="0" i="0">
@@ -9464,14 +10544,14 @@
                 </a:solidFill>
                 <a:latin typeface="Montserrat"/>
               </a:rPr>
-              <a:t>Las tres condiciones a la vez</a:t>
-            </a:r>
-          </a:p>
-        </p:txBody>
-      </p:sp>
-      <p:sp>
-        <p:nvSpPr>
-          <p:cNvPr id="8" name="imgph" descr="IMGQ:copper gas pipe on wall with valve"/>
+              <a:t>Desarrolla la UNE-EN 1775</a:t>
+            </a:r>
+          </a:p>
+        </p:txBody>
+      </p:sp>
+      <p:sp>
+        <p:nvSpPr>
+          <p:cNvPr id="9" name="imgph" descr="IMGQ:engineer drawing gas installation plan"/>
           <p:cNvSpPr/>
           <p:nvPr/>
         </p:nvSpPr>
@@ -9517,7 +10597,7 @@
       </p:sp>
       <p:sp>
         <p:nvSpPr>
-          <p:cNvPr id="9" name="TextBox 8"/>
+          <p:cNvPr id="10" name="TextBox 9"/>
           <p:cNvSpPr txBox="1"/>
           <p:nvPr/>
         </p:nvSpPr>
@@ -9557,7 +10637,7 @@
                 </a:solidFill>
                 <a:latin typeface="Montserrat"/>
               </a:rPr>
-              <a:t>copper gas pipe on wall with valve</a:t>
+              <a:t>engineer drawing gas installation plan</a:t>
             </a:r>
           </a:p>
         </p:txBody>
@@ -9654,7 +10734,7 @@
                 </a:solidFill>
                 <a:latin typeface="Montserrat"/>
               </a:rPr>
-              <a:t>009 / 014</a:t>
+              <a:t>009 / 015</a:t>
             </a:r>
           </a:p>
         </p:txBody>
@@ -9702,7 +10782,7 @@
         <p:spPr>
           <a:xfrm>
             <a:off x="822960" y="457200"/>
-            <a:ext cx="8229600" cy="365760"/>
+            <a:ext cx="10058400" cy="365760"/>
           </a:xfrm>
           <a:prstGeom prst="rect">
             <a:avLst/>
@@ -9716,13 +10796,13 @@
           <a:lstStyle/>
           <a:p>
             <a:r>
-              <a:rPr sz="1200" b="1" i="0">
-                <a:solidFill>
-                  <a:srgbClr val="64748B"/>
-                </a:solidFill>
-                <a:latin typeface="Montserrat"/>
-              </a:rPr>
-              <a:t>DEFINICIÓN · EXCEPCIONES</a:t>
+              <a:rPr sz="1300" b="1" i="0">
+                <a:solidFill>
+                  <a:srgbClr val="E8801A"/>
+                </a:solidFill>
+                <a:latin typeface="Montserrat"/>
+              </a:rPr>
+              <a:t>DEFINICIÓN · CLAVE</a:t>
             </a:r>
           </a:p>
         </p:txBody>
@@ -9750,26 +10830,70 @@
           <a:lstStyle/>
           <a:p>
             <a:r>
-              <a:rPr sz="2700" b="1" i="0">
+              <a:rPr sz="2800" b="1" i="0">
                 <a:solidFill>
                   <a:srgbClr val="1E2761"/>
                 </a:solidFill>
                 <a:latin typeface="Montserrat"/>
               </a:rPr>
-              <a:t>Qué NO es instalación receptora</a:t>
-            </a:r>
-          </a:p>
-        </p:txBody>
-      </p:sp>
-      <p:sp>
-        <p:nvSpPr>
-          <p:cNvPr id="7" name="TextBox 6"/>
+              <a:t>¿Qué es instalación receptora?</a:t>
+            </a:r>
+          </a:p>
+        </p:txBody>
+      </p:sp>
+      <p:sp>
+        <p:nvSpPr>
+          <p:cNvPr id="7" name="Rounded Rectangle 6"/>
+          <p:cNvSpPr/>
+          <p:nvPr/>
+        </p:nvSpPr>
+        <p:spPr>
+          <a:xfrm>
+            <a:off x="868680" y="1627632"/>
+            <a:ext cx="2011680" cy="73152"/>
+          </a:xfrm>
+          <a:prstGeom prst="roundRect">
+            <a:avLst/>
+          </a:prstGeom>
+          <a:solidFill>
+            <a:srgbClr val="E8801A"/>
+          </a:solidFill>
+          <a:ln>
+            <a:noFill/>
+          </a:ln>
+          <a:effectLst/>
+        </p:spPr>
+        <p:style>
+          <a:lnRef idx="1">
+            <a:schemeClr val="accent1"/>
+          </a:lnRef>
+          <a:fillRef idx="3">
+            <a:schemeClr val="accent1"/>
+          </a:fillRef>
+          <a:effectRef idx="2">
+            <a:schemeClr val="accent1"/>
+          </a:effectRef>
+          <a:fontRef idx="minor">
+            <a:schemeClr val="lt1"/>
+          </a:fontRef>
+        </p:style>
+        <p:txBody>
+          <a:bodyPr rtlCol="0" anchor="ctr"/>
+          <a:lstStyle/>
+          <a:p>
+            <a:pPr algn="ctr"/>
+          </a:p>
+        </p:txBody>
+      </p:sp>
+      <p:sp>
+        <p:nvSpPr>
+          <p:cNvPr id="8" name="TextBox 7"/>
           <p:cNvSpPr txBox="1"/>
           <p:nvPr/>
         </p:nvSpPr>
         <p:spPr>
           <a:xfrm>
-            <a:off x="822960" y="1920240"/>
+            <a:off x="822960" y="1965960"/>
             <a:ext cx="4983480" cy="4206240"/>
           </a:xfrm>
           <a:prstGeom prst="rect">
@@ -9785,17 +10909,17 @@
           <a:p>
             <a:pPr>
               <a:spcAft>
-                <a:spcPts val="1000"/>
+                <a:spcPts val="1100"/>
               </a:spcAft>
             </a:pPr>
             <a:r>
               <a:rPr sz="1600" b="1" i="0">
                 <a:solidFill>
-                  <a:srgbClr val="2E3A80"/>
-                </a:solidFill>
-                <a:latin typeface="Montserrat"/>
-              </a:rPr>
-              <a:t>•  </a:t>
+                  <a:srgbClr val="E8801A"/>
+                </a:solidFill>
+                <a:latin typeface="Montserrat"/>
+              </a:rPr>
+              <a:t>▸  </a:t>
             </a:r>
             <a:r>
               <a:rPr sz="1600" b="0" i="0">
@@ -9804,23 +10928,23 @@
                 </a:solidFill>
                 <a:latin typeface="Montserrat"/>
               </a:rPr>
-              <a:t>Aparato móvil: envase &lt; 15 kg</a:t>
+              <a:t>Gas de familia normalizada</a:t>
             </a:r>
           </a:p>
           <a:p>
             <a:pPr>
               <a:spcAft>
-                <a:spcPts val="1000"/>
+                <a:spcPts val="1100"/>
               </a:spcAft>
             </a:pPr>
             <a:r>
               <a:rPr sz="1600" b="1" i="0">
                 <a:solidFill>
-                  <a:srgbClr val="2E3A80"/>
-                </a:solidFill>
-                <a:latin typeface="Montserrat"/>
-              </a:rPr>
-              <a:t>•  </a:t>
+                  <a:srgbClr val="E8801A"/>
+                </a:solidFill>
+                <a:latin typeface="Montserrat"/>
+              </a:rPr>
+              <a:t>▸  </a:t>
             </a:r>
             <a:r>
               <a:rPr sz="1600" b="0" i="0">
@@ -9829,23 +10953,23 @@
                 </a:solidFill>
                 <a:latin typeface="Montserrat"/>
               </a:rPr>
-              <a:t>Aparato popular: envase ≤ 3 kg</a:t>
+              <a:t>MOP ≤ 5 bar</a:t>
             </a:r>
           </a:p>
           <a:p>
             <a:pPr>
               <a:spcAft>
-                <a:spcPts val="1000"/>
+                <a:spcPts val="1100"/>
               </a:spcAft>
             </a:pPr>
             <a:r>
               <a:rPr sz="1600" b="1" i="0">
                 <a:solidFill>
-                  <a:srgbClr val="2E3A80"/>
-                </a:solidFill>
-                <a:latin typeface="Montserrat"/>
-              </a:rPr>
-              <a:t>•  </a:t>
+                  <a:srgbClr val="E8801A"/>
+                </a:solidFill>
+                <a:latin typeface="Montserrat"/>
+              </a:rPr>
+              <a:t>▸  </a:t>
             </a:r>
             <a:r>
               <a:rPr sz="1600" b="0" i="0">
@@ -9854,23 +10978,23 @@
                 </a:solidFill>
                 <a:latin typeface="Montserrat"/>
               </a:rPr>
-              <a:t>Conectado a un solo aparato</a:t>
+              <a:t>Sirve a aparatos de gas</a:t>
             </a:r>
           </a:p>
           <a:p>
             <a:pPr>
               <a:spcAft>
-                <a:spcPts val="1000"/>
+                <a:spcPts val="1100"/>
               </a:spcAft>
             </a:pPr>
             <a:r>
               <a:rPr sz="1600" b="1" i="0">
                 <a:solidFill>
-                  <a:srgbClr val="2E3A80"/>
-                </a:solidFill>
-                <a:latin typeface="Montserrat"/>
-              </a:rPr>
-              <a:t>•  </a:t>
+                  <a:srgbClr val="E8801A"/>
+                </a:solidFill>
+                <a:latin typeface="Montserrat"/>
+              </a:rPr>
+              <a:t>▸  </a:t>
             </a:r>
             <a:r>
               <a:rPr sz="1600" b="0" i="0">
@@ -9879,14 +11003,14 @@
                 </a:solidFill>
                 <a:latin typeface="Montserrat"/>
               </a:rPr>
-              <a:t>Pero: su conexión sí se regula</a:t>
-            </a:r>
-          </a:p>
-        </p:txBody>
-      </p:sp>
-      <p:sp>
-        <p:nvSpPr>
-          <p:cNvPr id="8" name="imgph" descr="IMGQ:portable butane gas heater with cylinder"/>
+              <a:t>Las tres condiciones a la vez</a:t>
+            </a:r>
+          </a:p>
+        </p:txBody>
+      </p:sp>
+      <p:sp>
+        <p:nvSpPr>
+          <p:cNvPr id="9" name="imgph" descr="IMGQ:copper gas pipe on wall with valve"/>
           <p:cNvSpPr/>
           <p:nvPr/>
         </p:nvSpPr>
@@ -9932,7 +11056,7 @@
       </p:sp>
       <p:sp>
         <p:nvSpPr>
-          <p:cNvPr id="9" name="TextBox 8"/>
+          <p:cNvPr id="10" name="TextBox 9"/>
           <p:cNvSpPr txBox="1"/>
           <p:nvPr/>
         </p:nvSpPr>
@@ -9972,7 +11096,7 @@
                 </a:solidFill>
                 <a:latin typeface="Montserrat"/>
               </a:rPr>
-              <a:t>portable butane gas heater with cylinder</a:t>
+              <a:t>copper gas pipe on wall with valve</a:t>
             </a:r>
           </a:p>
         </p:txBody>

--- a/Curso Gas B/09 - UNE 60670 - Generalidades y terminologia/09 - UNE 60670 - Generalidades y terminologia - Vídeo 1.pptx
+++ b/Curso Gas B/09 - UNE 60670 - Generalidades y terminologia/09 - UNE 60670 - Generalidades y terminologia - Vídeo 1.pptx
@@ -20,6 +20,14 @@
     <p:sldId id="268" r:id="rId20"/>
     <p:sldId id="269" r:id="rId21"/>
     <p:sldId id="270" r:id="rId22"/>
+    <p:sldId id="271" r:id="rId23"/>
+    <p:sldId id="272" r:id="rId24"/>
+    <p:sldId id="273" r:id="rId25"/>
+    <p:sldId id="274" r:id="rId26"/>
+    <p:sldId id="275" r:id="rId27"/>
+    <p:sldId id="276" r:id="rId28"/>
+    <p:sldId id="277" r:id="rId29"/>
+    <p:sldId id="278" r:id="rId30"/>
   </p:sldIdLst>
   <p:sldSz cx="12191695" cy="6858000" type="screen4x3"/>
   <p:notesSz cx="6858000" cy="9144000"/>
@@ -591,12 +599,12 @@
           <a:lstStyle/>
           <a:p>
             <a:r>
-              <a:t>N1: Entonces la estufa de butano de casa, ¿no cuenta?</a:t>
-            </a:r>
-          </a:p>
-          <a:p>
-            <a:r>
-              <a:t>N2: Buen ejemplo. Esa estufa, con una sola bombona pequeña, por debajo de quince kilos, conectada a un solo aparato, no es instalación receptora: no se legaliza como tal. Es lo que la norma llama aparato móvil. Y hay una versión todavía más pequeña, el aparato popular, que es el infiernillo de camping: solo admite envase de hasta tres kilos. Pero ojo, que no valga todo: aunque no sea instalación receptora, la norma sí manda en cómo la conectas, dónde la pones, cómo la ventilas y cómo la enciendes. Frase de examen: no es instalación receptora, pero su conexión, ubicación, ventilación y puesta en marcha sí se rigen por la norma. El número que separa móvil de popular son tres kilos.</a:t>
+              <a:t>N1: ¿Cualquier tubo de gas es una instalación receptora?</a:t>
+            </a:r>
+          </a:p>
+          <a:p>
+            <a:r>
+              <a:t>N2: No, y esto es clave. Tienen que darse tres condiciones a la vez, como las tres patas de un taburete: si falta una, se cae. Una, que use un gas de los normalizados, de las familias reconocidas en la norma UNE-EN cuatrocientos treinta y siete. Dos, que la presión máxima de operación no pase de cinco bar. Y tres, que esté hecha para dar servicio a aparatos de gas, sea una cocina, una caldera o un calentador. Regla de bolsillo: gas normalizado, poca presión y para dar de comer a aparatos. Si se cumplen las tres, es instalación receptora; si falla una, no lo es a efectos de esta norma.</a:t>
             </a:r>
           </a:p>
         </p:txBody>
@@ -666,12 +674,12 @@
           <a:lstStyle/>
           <a:p>
             <a:r>
-              <a:t>N1: ¿Y por qué importa de dónde venga el gas?</a:t>
-            </a:r>
-          </a:p>
-          <a:p>
-            <a:r>
-              <a:t>N2: Porque cambia con quién hablas y dónde empieza lo tuyo. Hay tres clases. Canalizado: el gas llega por una red de distribución, como el agua del grifo; ahí el gas y la llave de acometida los pone la compañía distribuidora. Granel: el gas está en un depósito fijo en la parcela, o en envases grandes de más de quince kilos; tu punto de partida es la salida del depósito. Y envases: bombonas pequeñas de menos de quince kilos; empiezas en el regulador acoplado a la bombona. No es una etiqueta de adorno: equivocarte de clase es equivocarte de interlocutor y del punto donde arranca tu instalación.</a:t>
+              <a:t>N1: Va la primera, y con truco: ¿qué hace que un montaje sea de verdad instalación receptora?</a:t>
+            </a:r>
+          </a:p>
+          <a:p>
+            <a:r>
+              <a:t>N2: Piensa en las tres patas de un taburete; si falta una, se cae. Gas normalizado, poca presión y para dar de comer a aparatos.</a:t>
             </a:r>
           </a:p>
         </p:txBody>
@@ -741,12 +749,12 @@
           <a:lstStyle/>
           <a:p>
             <a:r>
-              <a:t>N1: ¿Por dónde va el gas una vez dentro?</a:t>
-            </a:r>
-          </a:p>
-          <a:p>
-            <a:r>
-              <a:t>N2: Sigue el camino y lo entiendes de un tirón. El gas entra por la acometida interior, el primer tramo tras la llave de acometida. Luego sube por la instalación común, que es el montante que comparten los vecinos. Y termina en la instalación individual, lo que entra en cada vivienda hasta los aparatos. Ahora bien, no siempre están las tres. En un chalé con el contador en la valla puede que solo haya instalación individual; por eso la norma dice en general. Y esto importa en la práctica: la parte común es de la comunidad y la individual es del usuario, así que sabes qué tramo certificas y a quién avisas cuando algo falla. Las definiciones exactas de cada tramo las vemos en el vídeo dos.</a:t>
+              <a:t>N1: ¿Por qué la A?</a:t>
+            </a:r>
+          </a:p>
+          <a:p>
+            <a:r>
+              <a:t>N2: Porque las tres condiciones van juntas: gas de una familia reconocida, presión máxima de operación no superior a cinco bar y servir a aparatos de gas. Si falla una sola, ya no es instalación receptora a efectos de la norma. El truco para no fallar: gas normalizado, poca presión y para aparatos.</a:t>
             </a:r>
           </a:p>
         </p:txBody>
@@ -816,12 +824,12 @@
           <a:lstStyle/>
           <a:p>
             <a:r>
-              <a:t>N1: Con tantas exigencias, ¿hay alguna idea que las resuma?</a:t>
-            </a:r>
-          </a:p>
-          <a:p>
-            <a:r>
-              <a:t>N2: Sí, y es muy útil tenerla clara. Todo lo que la norma te va a pedir después, materiales, uniones, pruebas, ventilación, persigue solo dos cosas. Una: que llegue gas suficiente a los aparatos, para que no se ahoguen. Dos: que llegue con seguridad, sin fugas ni riesgos. Nada más. Cuando dudes por qué la norma exige algo, casi siempre la respuesta es una de esas dos. Y en avería es igual de útil: si un aparato da mala combustión y se apaga, seguramente falla la aportación, el tubo va justo; si hueles gas, falla la conducción, hay fuga. Estos dos objetivos son la causa raíz de media avería.</a:t>
+              <a:t>N1: Entonces la estufa de butano de casa, ¿no cuenta?</a:t>
+            </a:r>
+          </a:p>
+          <a:p>
+            <a:r>
+              <a:t>N2: Buen ejemplo. Esa estufa, con una sola bombona pequeña, por debajo de quince kilos, conectada a un solo aparato, no es instalación receptora: no se legaliza como tal. Es lo que la norma llama aparato móvil. Y hay una versión todavía más pequeña, el aparato popular, que es el infiernillo de camping: solo admite envase de hasta tres kilos. Pero ojo, que no valga todo: aunque no sea instalación receptora, la norma sí manda en cómo la conectas, dónde la pones, cómo la ventilas y cómo la enciendes. Frase de examen: no es instalación receptora, pero su conexión, ubicación, ventilación y puesta en marcha sí se rigen por la norma. El número que separa móvil de popular son tres kilos.</a:t>
             </a:r>
           </a:p>
         </p:txBody>
@@ -891,12 +899,12 @@
           <a:lstStyle/>
           <a:p>
             <a:r>
-              <a:t>N1: Y saber si es receptora o no, ¿para qué me sirve en el día a día?</a:t>
-            </a:r>
-          </a:p>
-          <a:p>
-            <a:r>
-              <a:t>N2: Para lo más importante: decide si hay papeleo o no. En cuanto hay tubería fija, varios aparatos o más carga de gas, ya es instalación receptora, y eso obliga a un certificado de instalación, lo que todos llamamos el boletín, en los modelos oficiales tipo I R G. Ese papel lo firma la empresa instaladora habilitada de categoría B, la tuya, y se entrega a la empresa distribuidora, con copia para el titular. Sin ese documento, la distribuidora no da gas. La chapuza típica es justo esa: una instalación fija montada como si fuera camping-gas, sin boletín y sin prueba de estanquidad. Ahí tienes la fuga esperando a pasar.</a:t>
+              <a:t>N1: ¿Y por qué importa de dónde venga el gas?</a:t>
+            </a:r>
+          </a:p>
+          <a:p>
+            <a:r>
+              <a:t>N2: Porque cambia con quién hablas y dónde empieza lo tuyo. Hay tres clases. Canalizado: el gas llega por una red de distribución, como el agua del grifo; ahí el gas y la llave de acometida los pone la compañía distribuidora. Granel: el gas está en un depósito fijo en la parcela, o en envases grandes de más de quince kilos; tu punto de partida es la salida del depósito. Y envases: bombonas pequeñas de menos de quince kilos; empiezas en el regulador acoplado a la bombona. No es una etiqueta de adorno: equivocarte de clase es equivocarte de interlocutor y del punto donde arranca tu instalación.</a:t>
             </a:r>
           </a:p>
         </p:txBody>
@@ -966,22 +974,312 @@
           <a:lstStyle/>
           <a:p>
             <a:r>
-              <a:t>N1: Cerramos. Si me quedo con lo esencial, ¿qué me llevo?</a:t>
-            </a:r>
-          </a:p>
-          <a:p>
-            <a:r>
-              <a:t>N2: Reconstruyamos el hilo, que se ve clarísimo. Uno: la UNE sesenta mil seiscientos setenta es tu norma de cabecera, trece partes, y solo manda cuando la presión no pasa de cinco bar; la uno y la dos son el mapa. Dos: para que algo sea instalación receptora tienen que darse tres condiciones a la vez, gas normalizado, poca presión y servir a aparatos; y por debajo de quince kilos con un solo aparato ya no lo es, aunque su conexión y su ventilación sí se cuiden. Tres: hay tres clases según el suministro, canalizado, granel y envases, y tres partes en fila, acometida interior, común e individual. Y cuatro: todo, absolutamente todo, persigue dos cosas, que llegue gas suficiente y que llegue seguro.</a:t>
-            </a:r>
-          </a:p>
-          <a:p>
-            <a:r>
-              <a:t>N1: ¿Y esto cómo cae en el examen y en la obra?</a:t>
-            </a:r>
-          </a:p>
-          <a:p>
-            <a:r>
-              <a:t>N2: En el examen te lo cruzan: te dan un caso y te preguntan si es receptora, de qué clase o en qué parte se trata; con lo de hoy lo colocas sin dudar. Y en obra decide lo más serio: si hay que hacer boletín y quién firma. Una instalación fija sin certificado y sin prueba de estanquidad es una fuga esperando. Hoy ya eres más gasista que ayer: tienes el mapa completo. En el siguiente vídeo abrimos el diccionario, la parte dos, y le ponemos nombre exacto a cada pieza. Te espero allí.</a:t>
+              <a:t>N1: ¿Por qué me importa de dónde viene el gas?</a:t>
+            </a:r>
+          </a:p>
+          <a:p>
+            <a:r>
+              <a:t>N2: Porque cambia con quién hablas y dónde empieza lo tuyo. Léela fila a fila. Canalizado: el gas llega por una red de distribución, como el agua del grifo, y ahí el gas y la llave de acometida los pone la distribuidora. Granel: el gas está en un depósito fijo en la parcela, o en envases grandes de más de quince kilos, y tu punto de partida es la salida del depósito. Envases: bombonas pequeñas de menos de quince kilos, y arrancas en el regulador acoplado a la bombona. Ejemplo de obra: un chalé con depósito de GLP en el jardín es granel, no canalizado; equivocar la clase es equivocar el interlocutor.</a:t>
+            </a:r>
+          </a:p>
+        </p:txBody>
+      </p:sp>
+      <p:sp>
+        <p:nvSpPr>
+          <p:cNvPr id="4" name="Slide Number Placeholder 3"/>
+          <p:cNvSpPr>
+            <a:spLocks noGrp="1"/>
+          </p:cNvSpPr>
+          <p:nvPr>
+            <p:ph type="sldNum" idx="5" sz="quarter"/>
+          </p:nvPr>
+        </p:nvSpPr>
+        <p:spPr/>
+      </p:sp>
+    </p:spTree>
+  </p:cSld>
+  <p:clrMapOvr>
+    <a:masterClrMapping/>
+  </p:clrMapOvr>
+</p:notes>
+</file>
+
+<file path=ppt/notesSlides/notesSlide16.xml><?xml version="1.0" encoding="utf-8"?>
+<p:notes xmlns:a="http://schemas.openxmlformats.org/drawingml/2006/main" xmlns:p="http://schemas.openxmlformats.org/presentationml/2006/main" xmlns:r="http://schemas.openxmlformats.org/officeDocument/2006/relationships">
+  <p:cSld>
+    <p:spTree>
+      <p:nvGrpSpPr>
+        <p:cNvPr id="1" name=""/>
+        <p:cNvGrpSpPr/>
+        <p:nvPr/>
+      </p:nvGrpSpPr>
+      <p:grpSpPr>
+        <a:xfrm>
+          <a:off x="0" y="0"/>
+          <a:ext cx="0" cy="0"/>
+          <a:chOff x="0" y="0"/>
+          <a:chExt cx="0" cy="0"/>
+        </a:xfrm>
+      </p:grpSpPr>
+      <p:sp>
+        <p:nvSpPr>
+          <p:cNvPr id="2" name="Slide Image Placeholder 1"/>
+          <p:cNvSpPr>
+            <a:spLocks noGrp="1"/>
+          </p:cNvSpPr>
+          <p:nvPr>
+            <p:ph type="sldImg" idx="2"/>
+          </p:nvPr>
+        </p:nvSpPr>
+        <p:spPr/>
+      </p:sp>
+      <p:sp>
+        <p:nvSpPr>
+          <p:cNvPr id="3" name="Notes Placeholder 2"/>
+          <p:cNvSpPr>
+            <a:spLocks noGrp="1"/>
+          </p:cNvSpPr>
+          <p:nvPr>
+            <p:ph type="body" idx="3" sz="quarter"/>
+          </p:nvPr>
+        </p:nvSpPr>
+        <p:spPr/>
+        <p:txBody>
+          <a:bodyPr/>
+          <a:lstStyle/>
+          <a:p>
+            <a:r>
+              <a:t>N1: Fácil de confundir: el depósito de GLP del jardín, ¿qué clase es?</a:t>
+            </a:r>
+          </a:p>
+          <a:p>
+            <a:r>
+              <a:t>N2: Pista: no llega por red, y tampoco es una bombona pequeña. ¿Dónde encaja?</a:t>
+            </a:r>
+          </a:p>
+        </p:txBody>
+      </p:sp>
+      <p:sp>
+        <p:nvSpPr>
+          <p:cNvPr id="4" name="Slide Number Placeholder 3"/>
+          <p:cNvSpPr>
+            <a:spLocks noGrp="1"/>
+          </p:cNvSpPr>
+          <p:nvPr>
+            <p:ph type="sldNum" idx="5" sz="quarter"/>
+          </p:nvPr>
+        </p:nvSpPr>
+        <p:spPr/>
+      </p:sp>
+    </p:spTree>
+  </p:cSld>
+  <p:clrMapOvr>
+    <a:masterClrMapping/>
+  </p:clrMapOvr>
+</p:notes>
+</file>
+
+<file path=ppt/notesSlides/notesSlide17.xml><?xml version="1.0" encoding="utf-8"?>
+<p:notes xmlns:a="http://schemas.openxmlformats.org/drawingml/2006/main" xmlns:p="http://schemas.openxmlformats.org/presentationml/2006/main" xmlns:r="http://schemas.openxmlformats.org/officeDocument/2006/relationships">
+  <p:cSld>
+    <p:spTree>
+      <p:nvGrpSpPr>
+        <p:cNvPr id="1" name=""/>
+        <p:cNvGrpSpPr/>
+        <p:nvPr/>
+      </p:nvGrpSpPr>
+      <p:grpSpPr>
+        <a:xfrm>
+          <a:off x="0" y="0"/>
+          <a:ext cx="0" cy="0"/>
+          <a:chOff x="0" y="0"/>
+          <a:chExt cx="0" cy="0"/>
+        </a:xfrm>
+      </p:grpSpPr>
+      <p:sp>
+        <p:nvSpPr>
+          <p:cNvPr id="2" name="Slide Image Placeholder 1"/>
+          <p:cNvSpPr>
+            <a:spLocks noGrp="1"/>
+          </p:cNvSpPr>
+          <p:nvPr>
+            <p:ph type="sldImg" idx="2"/>
+          </p:nvPr>
+        </p:nvSpPr>
+        <p:spPr/>
+      </p:sp>
+      <p:sp>
+        <p:nvSpPr>
+          <p:cNvPr id="3" name="Notes Placeholder 2"/>
+          <p:cNvSpPr>
+            <a:spLocks noGrp="1"/>
+          </p:cNvSpPr>
+          <p:nvPr>
+            <p:ph type="body" idx="3" sz="quarter"/>
+          </p:nvPr>
+        </p:nvSpPr>
+        <p:spPr/>
+        <p:txBody>
+          <a:bodyPr/>
+          <a:lstStyle/>
+          <a:p>
+            <a:r>
+              <a:t>N1: ¿Por qué granel?</a:t>
+            </a:r>
+          </a:p>
+          <a:p>
+            <a:r>
+              <a:t>N2: Porque granel es el suministro desde depósitos fijos de GLP o desde envases de carga superior a quince kilos. Canalizado sería por red de distribución, y envases serían las bombonas pequeñas por debajo de quince kilos. El truco: depósito fijo o envase grande, siempre granel.</a:t>
+            </a:r>
+          </a:p>
+        </p:txBody>
+      </p:sp>
+      <p:sp>
+        <p:nvSpPr>
+          <p:cNvPr id="4" name="Slide Number Placeholder 3"/>
+          <p:cNvSpPr>
+            <a:spLocks noGrp="1"/>
+          </p:cNvSpPr>
+          <p:nvPr>
+            <p:ph type="sldNum" idx="5" sz="quarter"/>
+          </p:nvPr>
+        </p:nvSpPr>
+        <p:spPr/>
+      </p:sp>
+    </p:spTree>
+  </p:cSld>
+  <p:clrMapOvr>
+    <a:masterClrMapping/>
+  </p:clrMapOvr>
+</p:notes>
+</file>
+
+<file path=ppt/notesSlides/notesSlide18.xml><?xml version="1.0" encoding="utf-8"?>
+<p:notes xmlns:a="http://schemas.openxmlformats.org/drawingml/2006/main" xmlns:p="http://schemas.openxmlformats.org/presentationml/2006/main" xmlns:r="http://schemas.openxmlformats.org/officeDocument/2006/relationships">
+  <p:cSld>
+    <p:spTree>
+      <p:nvGrpSpPr>
+        <p:cNvPr id="1" name=""/>
+        <p:cNvGrpSpPr/>
+        <p:nvPr/>
+      </p:nvGrpSpPr>
+      <p:grpSpPr>
+        <a:xfrm>
+          <a:off x="0" y="0"/>
+          <a:ext cx="0" cy="0"/>
+          <a:chOff x="0" y="0"/>
+          <a:chExt cx="0" cy="0"/>
+        </a:xfrm>
+      </p:grpSpPr>
+      <p:sp>
+        <p:nvSpPr>
+          <p:cNvPr id="2" name="Slide Image Placeholder 1"/>
+          <p:cNvSpPr>
+            <a:spLocks noGrp="1"/>
+          </p:cNvSpPr>
+          <p:nvPr>
+            <p:ph type="sldImg" idx="2"/>
+          </p:nvPr>
+        </p:nvSpPr>
+        <p:spPr/>
+      </p:sp>
+      <p:sp>
+        <p:nvSpPr>
+          <p:cNvPr id="3" name="Notes Placeholder 2"/>
+          <p:cNvSpPr>
+            <a:spLocks noGrp="1"/>
+          </p:cNvSpPr>
+          <p:nvPr>
+            <p:ph type="body" idx="3" sz="quarter"/>
+          </p:nvPr>
+        </p:nvSpPr>
+        <p:spPr/>
+        <p:txBody>
+          <a:bodyPr/>
+          <a:lstStyle/>
+          <a:p>
+            <a:r>
+              <a:t>N1: ¿Por dónde va el gas una vez dentro?</a:t>
+            </a:r>
+          </a:p>
+          <a:p>
+            <a:r>
+              <a:t>N2: Sigue el camino y lo entiendes de un tirón. El gas entra por la acometida interior, el primer tramo tras la llave de acometida. Luego sube por la instalación común, que es el montante que comparten los vecinos. Y termina en la instalación individual, lo que entra en cada vivienda hasta los aparatos. Ahora bien, no siempre están las tres. En un chalé con el contador en la valla puede que solo haya instalación individual; por eso la norma dice en general. Y esto importa en la práctica: la parte común es de la comunidad y la individual es del usuario, así que sabes qué tramo certificas y a quién avisas cuando algo falla. Las definiciones exactas de cada tramo las vemos en el vídeo dos.</a:t>
+            </a:r>
+          </a:p>
+        </p:txBody>
+      </p:sp>
+      <p:sp>
+        <p:nvSpPr>
+          <p:cNvPr id="4" name="Slide Number Placeholder 3"/>
+          <p:cNvSpPr>
+            <a:spLocks noGrp="1"/>
+          </p:cNvSpPr>
+          <p:nvPr>
+            <p:ph type="sldNum" idx="5" sz="quarter"/>
+          </p:nvPr>
+        </p:nvSpPr>
+        <p:spPr/>
+      </p:sp>
+    </p:spTree>
+  </p:cSld>
+  <p:clrMapOvr>
+    <a:masterClrMapping/>
+  </p:clrMapOvr>
+</p:notes>
+</file>
+
+<file path=ppt/notesSlides/notesSlide19.xml><?xml version="1.0" encoding="utf-8"?>
+<p:notes xmlns:a="http://schemas.openxmlformats.org/drawingml/2006/main" xmlns:p="http://schemas.openxmlformats.org/presentationml/2006/main" xmlns:r="http://schemas.openxmlformats.org/officeDocument/2006/relationships">
+  <p:cSld>
+    <p:spTree>
+      <p:nvGrpSpPr>
+        <p:cNvPr id="1" name=""/>
+        <p:cNvGrpSpPr/>
+        <p:nvPr/>
+      </p:nvGrpSpPr>
+      <p:grpSpPr>
+        <a:xfrm>
+          <a:off x="0" y="0"/>
+          <a:ext cx="0" cy="0"/>
+          <a:chOff x="0" y="0"/>
+          <a:chExt cx="0" cy="0"/>
+        </a:xfrm>
+      </p:grpSpPr>
+      <p:sp>
+        <p:nvSpPr>
+          <p:cNvPr id="2" name="Slide Image Placeholder 1"/>
+          <p:cNvSpPr>
+            <a:spLocks noGrp="1"/>
+          </p:cNvSpPr>
+          <p:nvPr>
+            <p:ph type="sldImg" idx="2"/>
+          </p:nvPr>
+        </p:nvSpPr>
+        <p:spPr/>
+      </p:sp>
+      <p:sp>
+        <p:nvSpPr>
+          <p:cNvPr id="3" name="Notes Placeholder 2"/>
+          <p:cNvSpPr>
+            <a:spLocks noGrp="1"/>
+          </p:cNvSpPr>
+          <p:nvPr>
+            <p:ph type="body" idx="3" sz="quarter"/>
+          </p:nvPr>
+        </p:nvSpPr>
+        <p:spPr/>
+        <p:txBody>
+          <a:bodyPr/>
+          <a:lstStyle/>
+          <a:p>
+            <a:r>
+              <a:t>N1: Con tantas exigencias, ¿hay alguna idea que las resuma?</a:t>
+            </a:r>
+          </a:p>
+          <a:p>
+            <a:r>
+              <a:t>N2: Sí, y es muy útil tenerla clara. Todo lo que la norma te va a pedir después, materiales, uniones, pruebas, ventilación, persigue solo dos cosas. Una: que llegue gas suficiente a los aparatos, para que no se ahoguen. Dos: que llegue con seguridad, sin fugas ni riesgos. Nada más. Cuando dudes por qué la norma exige algo, casi siempre la respuesta es una de esas dos. Y en avería es igual de útil: si un aparato da mala combustión y se apaga, seguramente falla la aportación, el tubo va justo; si hueles gas, falla la conducción, hay fuga. Estos dos objetivos son la causa raíz de media avería.</a:t>
             </a:r>
           </a:p>
         </p:txBody>
@@ -1081,6 +1379,316 @@
 </p:notes>
 </file>
 
+<file path=ppt/notesSlides/notesSlide20.xml><?xml version="1.0" encoding="utf-8"?>
+<p:notes xmlns:a="http://schemas.openxmlformats.org/drawingml/2006/main" xmlns:p="http://schemas.openxmlformats.org/presentationml/2006/main" xmlns:r="http://schemas.openxmlformats.org/officeDocument/2006/relationships">
+  <p:cSld>
+    <p:spTree>
+      <p:nvGrpSpPr>
+        <p:cNvPr id="1" name=""/>
+        <p:cNvGrpSpPr/>
+        <p:nvPr/>
+      </p:nvGrpSpPr>
+      <p:grpSpPr>
+        <a:xfrm>
+          <a:off x="0" y="0"/>
+          <a:ext cx="0" cy="0"/>
+          <a:chOff x="0" y="0"/>
+          <a:chExt cx="0" cy="0"/>
+        </a:xfrm>
+      </p:grpSpPr>
+      <p:sp>
+        <p:nvSpPr>
+          <p:cNvPr id="2" name="Slide Image Placeholder 1"/>
+          <p:cNvSpPr>
+            <a:spLocks noGrp="1"/>
+          </p:cNvSpPr>
+          <p:nvPr>
+            <p:ph type="sldImg" idx="2"/>
+          </p:nvPr>
+        </p:nvSpPr>
+        <p:spPr/>
+      </p:sp>
+      <p:sp>
+        <p:nvSpPr>
+          <p:cNvPr id="3" name="Notes Placeholder 2"/>
+          <p:cNvSpPr>
+            <a:spLocks noGrp="1"/>
+          </p:cNvSpPr>
+          <p:nvPr>
+            <p:ph type="body" idx="3" sz="quarter"/>
+          </p:nvPr>
+        </p:nvSpPr>
+        <p:spPr/>
+        <p:txBody>
+          <a:bodyPr/>
+          <a:lstStyle/>
+          <a:p>
+            <a:r>
+              <a:t>N1: Y saber si es receptora o no, ¿para qué me sirve en el día a día?</a:t>
+            </a:r>
+          </a:p>
+          <a:p>
+            <a:r>
+              <a:t>N2: Para lo más importante: decide si hay papeleo o no. En cuanto hay tubería fija, varios aparatos o más carga de gas, ya es instalación receptora, y eso obliga a un certificado de instalación, lo que todos llamamos el boletín, en los modelos oficiales tipo I R G. Ese papel lo firma la empresa instaladora habilitada de categoría B, la tuya, y se entrega a la empresa distribuidora, con copia para el titular. Sin ese documento, la distribuidora no da gas. La chapuza típica es justo esa: una instalación fija montada como si fuera camping-gas, sin boletín y sin prueba de estanquidad. Ahí tienes la fuga esperando a pasar.</a:t>
+            </a:r>
+          </a:p>
+        </p:txBody>
+      </p:sp>
+      <p:sp>
+        <p:nvSpPr>
+          <p:cNvPr id="4" name="Slide Number Placeholder 3"/>
+          <p:cNvSpPr>
+            <a:spLocks noGrp="1"/>
+          </p:cNvSpPr>
+          <p:nvPr>
+            <p:ph type="sldNum" idx="5" sz="quarter"/>
+          </p:nvPr>
+        </p:nvSpPr>
+        <p:spPr/>
+      </p:sp>
+    </p:spTree>
+  </p:cSld>
+  <p:clrMapOvr>
+    <a:masterClrMapping/>
+  </p:clrMapOvr>
+</p:notes>
+</file>
+
+<file path=ppt/notesSlides/notesSlide21.xml><?xml version="1.0" encoding="utf-8"?>
+<p:notes xmlns:a="http://schemas.openxmlformats.org/drawingml/2006/main" xmlns:p="http://schemas.openxmlformats.org/presentationml/2006/main" xmlns:r="http://schemas.openxmlformats.org/officeDocument/2006/relationships">
+  <p:cSld>
+    <p:spTree>
+      <p:nvGrpSpPr>
+        <p:cNvPr id="1" name=""/>
+        <p:cNvGrpSpPr/>
+        <p:nvPr/>
+      </p:nvGrpSpPr>
+      <p:grpSpPr>
+        <a:xfrm>
+          <a:off x="0" y="0"/>
+          <a:ext cx="0" cy="0"/>
+          <a:chOff x="0" y="0"/>
+          <a:chExt cx="0" cy="0"/>
+        </a:xfrm>
+      </p:grpSpPr>
+      <p:sp>
+        <p:nvSpPr>
+          <p:cNvPr id="2" name="Slide Image Placeholder 1"/>
+          <p:cNvSpPr>
+            <a:spLocks noGrp="1"/>
+          </p:cNvSpPr>
+          <p:nvPr>
+            <p:ph type="sldImg" idx="2"/>
+          </p:nvPr>
+        </p:nvSpPr>
+        <p:spPr/>
+      </p:sp>
+      <p:sp>
+        <p:nvSpPr>
+          <p:cNvPr id="3" name="Notes Placeholder 2"/>
+          <p:cNvSpPr>
+            <a:spLocks noGrp="1"/>
+          </p:cNvSpPr>
+          <p:nvPr>
+            <p:ph type="body" idx="3" sz="quarter"/>
+          </p:nvPr>
+        </p:nvSpPr>
+        <p:spPr/>
+        <p:txBody>
+          <a:bodyPr/>
+          <a:lstStyle/>
+          <a:p>
+            <a:r>
+              <a:t>N1: Última del vídeo: acabas la instalación y... ¿qué papel te pide la distribuidora?</a:t>
+            </a:r>
+          </a:p>
+          <a:p>
+            <a:r>
+              <a:t>N2: Pista: es el documento que firma tu empresa habilitada y sin el cual no entra gas.</a:t>
+            </a:r>
+          </a:p>
+        </p:txBody>
+      </p:sp>
+      <p:sp>
+        <p:nvSpPr>
+          <p:cNvPr id="4" name="Slide Number Placeholder 3"/>
+          <p:cNvSpPr>
+            <a:spLocks noGrp="1"/>
+          </p:cNvSpPr>
+          <p:nvPr>
+            <p:ph type="sldNum" idx="5" sz="quarter"/>
+          </p:nvPr>
+        </p:nvSpPr>
+        <p:spPr/>
+      </p:sp>
+    </p:spTree>
+  </p:cSld>
+  <p:clrMapOvr>
+    <a:masterClrMapping/>
+  </p:clrMapOvr>
+</p:notes>
+</file>
+
+<file path=ppt/notesSlides/notesSlide22.xml><?xml version="1.0" encoding="utf-8"?>
+<p:notes xmlns:a="http://schemas.openxmlformats.org/drawingml/2006/main" xmlns:p="http://schemas.openxmlformats.org/presentationml/2006/main" xmlns:r="http://schemas.openxmlformats.org/officeDocument/2006/relationships">
+  <p:cSld>
+    <p:spTree>
+      <p:nvGrpSpPr>
+        <p:cNvPr id="1" name=""/>
+        <p:cNvGrpSpPr/>
+        <p:nvPr/>
+      </p:nvGrpSpPr>
+      <p:grpSpPr>
+        <a:xfrm>
+          <a:off x="0" y="0"/>
+          <a:ext cx="0" cy="0"/>
+          <a:chOff x="0" y="0"/>
+          <a:chExt cx="0" cy="0"/>
+        </a:xfrm>
+      </p:grpSpPr>
+      <p:sp>
+        <p:nvSpPr>
+          <p:cNvPr id="2" name="Slide Image Placeholder 1"/>
+          <p:cNvSpPr>
+            <a:spLocks noGrp="1"/>
+          </p:cNvSpPr>
+          <p:nvPr>
+            <p:ph type="sldImg" idx="2"/>
+          </p:nvPr>
+        </p:nvSpPr>
+        <p:spPr/>
+      </p:sp>
+      <p:sp>
+        <p:nvSpPr>
+          <p:cNvPr id="3" name="Notes Placeholder 2"/>
+          <p:cNvSpPr>
+            <a:spLocks noGrp="1"/>
+          </p:cNvSpPr>
+          <p:nvPr>
+            <p:ph type="body" idx="3" sz="quarter"/>
+          </p:nvPr>
+        </p:nvSpPr>
+        <p:spPr/>
+        <p:txBody>
+          <a:bodyPr/>
+          <a:lstStyle/>
+          <a:p>
+            <a:r>
+              <a:t>N1: ¿Por qué la A?</a:t>
+            </a:r>
+          </a:p>
+          <a:p>
+            <a:r>
+              <a:t>N2: Porque toda instalación receptora obliga a un certificado de instalación, el boletín, que firma la empresa instaladora habilitada de categoría B y se entrega a la distribuidora, con copia para el titular. Sin ese documento no hay suministro. El truco: si es receptora, hay boletín, y lo firma tu empresa, no el ayuntamiento ni el fabricante.</a:t>
+            </a:r>
+          </a:p>
+        </p:txBody>
+      </p:sp>
+      <p:sp>
+        <p:nvSpPr>
+          <p:cNvPr id="4" name="Slide Number Placeholder 3"/>
+          <p:cNvSpPr>
+            <a:spLocks noGrp="1"/>
+          </p:cNvSpPr>
+          <p:nvPr>
+            <p:ph type="sldNum" idx="5" sz="quarter"/>
+          </p:nvPr>
+        </p:nvSpPr>
+        <p:spPr/>
+      </p:sp>
+    </p:spTree>
+  </p:cSld>
+  <p:clrMapOvr>
+    <a:masterClrMapping/>
+  </p:clrMapOvr>
+</p:notes>
+</file>
+
+<file path=ppt/notesSlides/notesSlide23.xml><?xml version="1.0" encoding="utf-8"?>
+<p:notes xmlns:a="http://schemas.openxmlformats.org/drawingml/2006/main" xmlns:p="http://schemas.openxmlformats.org/presentationml/2006/main" xmlns:r="http://schemas.openxmlformats.org/officeDocument/2006/relationships">
+  <p:cSld>
+    <p:spTree>
+      <p:nvGrpSpPr>
+        <p:cNvPr id="1" name=""/>
+        <p:cNvGrpSpPr/>
+        <p:nvPr/>
+      </p:nvGrpSpPr>
+      <p:grpSpPr>
+        <a:xfrm>
+          <a:off x="0" y="0"/>
+          <a:ext cx="0" cy="0"/>
+          <a:chOff x="0" y="0"/>
+          <a:chExt cx="0" cy="0"/>
+        </a:xfrm>
+      </p:grpSpPr>
+      <p:sp>
+        <p:nvSpPr>
+          <p:cNvPr id="2" name="Slide Image Placeholder 1"/>
+          <p:cNvSpPr>
+            <a:spLocks noGrp="1"/>
+          </p:cNvSpPr>
+          <p:nvPr>
+            <p:ph type="sldImg" idx="2"/>
+          </p:nvPr>
+        </p:nvSpPr>
+        <p:spPr/>
+      </p:sp>
+      <p:sp>
+        <p:nvSpPr>
+          <p:cNvPr id="3" name="Notes Placeholder 2"/>
+          <p:cNvSpPr>
+            <a:spLocks noGrp="1"/>
+          </p:cNvSpPr>
+          <p:nvPr>
+            <p:ph type="body" idx="3" sz="quarter"/>
+          </p:nvPr>
+        </p:nvSpPr>
+        <p:spPr/>
+        <p:txBody>
+          <a:bodyPr/>
+          <a:lstStyle/>
+          <a:p>
+            <a:r>
+              <a:t>N1: Cerramos. Si me quedo con lo esencial, ¿qué me llevo?</a:t>
+            </a:r>
+          </a:p>
+          <a:p>
+            <a:r>
+              <a:t>N2: Reconstruyamos el hilo, que se ve clarísimo. Uno: la UNE sesenta mil seiscientos setenta es tu norma de cabecera, trece partes, y solo manda cuando la presión no pasa de cinco bar; la uno y la dos son el mapa. Dos: para que algo sea instalación receptora tienen que darse tres condiciones a la vez, gas normalizado, poca presión y servir a aparatos; y por debajo de quince kilos con un solo aparato ya no lo es, aunque su conexión y su ventilación sí se cuiden. Tres: hay tres clases según el suministro, canalizado, granel y envases, y tres partes en fila, acometida interior, común e individual. Y cuatro: todo, absolutamente todo, persigue dos cosas, que llegue gas suficiente y que llegue seguro.</a:t>
+            </a:r>
+          </a:p>
+          <a:p>
+            <a:r>
+              <a:t>N1: ¿Y esto cómo cae en el examen y en la obra?</a:t>
+            </a:r>
+          </a:p>
+          <a:p>
+            <a:r>
+              <a:t>N2: En el examen te lo cruzan: te dan un caso y te preguntan si es receptora, de qué clase o en qué parte se trata; con lo de hoy lo colocas sin dudar. Y en obra decide lo más serio: si hay que hacer boletín y quién firma. Una instalación fija sin certificado y sin prueba de estanquidad es una fuga esperando. Hoy ya eres más gasista que ayer: tienes el mapa completo. En el siguiente vídeo abrimos el diccionario, la parte dos, y le ponemos nombre exacto a cada pieza. Te espero allí.</a:t>
+            </a:r>
+          </a:p>
+        </p:txBody>
+      </p:sp>
+      <p:sp>
+        <p:nvSpPr>
+          <p:cNvPr id="4" name="Slide Number Placeholder 3"/>
+          <p:cNvSpPr>
+            <a:spLocks noGrp="1"/>
+          </p:cNvSpPr>
+          <p:nvPr>
+            <p:ph type="sldNum" idx="5" sz="quarter"/>
+          </p:nvPr>
+        </p:nvSpPr>
+        <p:spPr/>
+      </p:sp>
+    </p:spTree>
+  </p:cSld>
+  <p:clrMapOvr>
+    <a:masterClrMapping/>
+  </p:clrMapOvr>
+</p:notes>
+</file>
+
 <file path=ppt/notesSlides/notesSlide3.xml><?xml version="1.0" encoding="utf-8"?>
 <p:notes xmlns:a="http://schemas.openxmlformats.org/drawingml/2006/main" xmlns:p="http://schemas.openxmlformats.org/presentationml/2006/main" xmlns:r="http://schemas.openxmlformats.org/officeDocument/2006/relationships">
   <p:cSld>
@@ -1342,12 +1950,12 @@
           <a:lstStyle/>
           <a:p>
             <a:r>
-              <a:t>N1: Vale, pero en el examen o en obra, ¿cómo sé a qué parte ir?</a:t>
-            </a:r>
-          </a:p>
-          <a:p>
-            <a:r>
-              <a:t>N2: Aquí va un truco que vale oro. Cuando pienses en pruebas de estanquidad para entregar la instalación, o sea, comprobar que no se escapa gas antes de entregarla, esa es la parte ocho. Cuando pienses en meter gas por primera vez, la puesta en servicio, esa es la nueve. Y cuando pienses en las revisiones cada cierto tiempo, el control periódico, son dos: la doce para la instalación y la trece para los aparatos. Si te preguntan en qué parte se trata algo, colócalo en su bloque y aciertas. En obra es igual: sabes exactamente qué capítulo abrir sin dar vueltas.</a:t>
+              <a:t>N1: ¿Hace falta aprenderse las trece partes de memoria?</a:t>
+            </a:r>
+          </a:p>
+          <a:p>
+            <a:r>
+              <a:t>N2: No, tranquilo, pero sí saber qué hay en cada bloque para ir directo a lo que necesitas. Léela como un manual de trece capítulos. Las dos primeras te colocan todo: la parte uno, generalidades, y la parte dos, el diccionario. De la tres a la trece está el detalle técnico: tuberías, diseño, contadores, ventilación, pruebas, puesta en servicio y control periódico. Truco de obra fila a fila: pruebas de estanquidad para entregar, parte ocho; puesta en servicio, parte nueve; control periódico, la doce para la instalación y la trece para los aparatos. Ejemplo: te preguntan dónde se tratan las pruebas de estanquidad y respondes parte ocho sin dudar.</a:t>
             </a:r>
           </a:p>
         </p:txBody>
@@ -1417,12 +2025,12 @@
           <a:lstStyle/>
           <a:p>
             <a:r>
-              <a:t>N1: ¿Qué es eso del Anexo A? ¿Hay que empollárselo?</a:t>
-            </a:r>
-          </a:p>
-          <a:p>
-            <a:r>
-              <a:t>N2: Nada de empollar. El único cambio de fondo de esta parte uno es que se ha actualizado ese anexo. Y es simplemente una lista: todas las otras normas que se citan a lo largo de las trece partes, tubos, llaves, reguladores, contadores, chimeneas, detectores. Es como la bibliografía al final de un libro: te dice dónde mirar cada cosa, pero no manda nada por sí mismo; por eso decimos que es informativo. Lo que tienes que saber para el examen es solo eso: que existe y que es informativo. Punto.</a:t>
+              <a:t>N1: Vale, pero en el examen o en obra, ¿cómo sé a qué parte ir?</a:t>
+            </a:r>
+          </a:p>
+          <a:p>
+            <a:r>
+              <a:t>N2: Aquí va un truco que vale oro. Cuando pienses en pruebas de estanquidad para entregar la instalación, o sea, comprobar que no se escapa gas antes de entregarla, esa es la parte ocho. Cuando pienses en meter gas por primera vez, la puesta en servicio, esa es la nueve. Y cuando pienses en las revisiones cada cierto tiempo, el control periódico, son dos: la doce para la instalación y la trece para los aparatos. Si te preguntan en qué parte se trata algo, colócalo en su bloque y aciertas. En obra es igual: sabes exactamente qué capítulo abrir sin dar vueltas.</a:t>
             </a:r>
           </a:p>
         </p:txBody>
@@ -1492,12 +2100,12 @@
           <a:lstStyle/>
           <a:p>
             <a:r>
-              <a:t>N1: Y esta parte uno concreta, ¿de qué se ocupa?</a:t>
-            </a:r>
-          </a:p>
-          <a:p>
-            <a:r>
-              <a:t>N2: De tres cosas muy claras, y te las digo en orden. Primero, define: pone negro sobre blanco qué es una instalación receptora, para que todos hablemos de lo mismo. Segundo, clasifica: la ordena en grupos según cómo llega el gas. Y tercero, marca los requisitos generales, las reglas de mínimos que debe cumplir cualquier instalación. Además, no se lo inventa: desarrolla una norma europea, la UNE-EN mil setecientos setenta y cinco, que da las recomendaciones de fondo para las redes de gas en edificios. O sea, la europea pone la idea general y la nuestra pone el detalle para España.</a:t>
+              <a:t>N1: ¿Qué es eso del Anexo A? ¿Hay que empollárselo?</a:t>
+            </a:r>
+          </a:p>
+          <a:p>
+            <a:r>
+              <a:t>N2: Nada de empollar. El único cambio de fondo de esta parte uno es que se ha actualizado ese anexo. Y es simplemente una lista: todas las otras normas que se citan a lo largo de las trece partes, tubos, llaves, reguladores, contadores, chimeneas, detectores. Es como la bibliografía al final de un libro: te dice dónde mirar cada cosa, pero no manda nada por sí mismo; por eso decimos que es informativo. Lo que tienes que saber para el examen es solo eso: que existe y que es informativo. Punto.</a:t>
             </a:r>
           </a:p>
         </p:txBody>
@@ -1567,12 +2175,12 @@
           <a:lstStyle/>
           <a:p>
             <a:r>
-              <a:t>N1: ¿Cualquier tubo de gas es una instalación receptora?</a:t>
-            </a:r>
-          </a:p>
-          <a:p>
-            <a:r>
-              <a:t>N2: No, y esto es clave. Tienen que darse tres condiciones a la vez, como las tres patas de un taburete: si falta una, se cae. Una, que use un gas de los normalizados, de las familias reconocidas en la norma UNE-EN cuatrocientos treinta y siete. Dos, que la presión máxima de operación no pase de cinco bar. Y tres, que esté hecha para dar servicio a aparatos de gas, sea una cocina, una caldera o un calentador. Regla de bolsillo: gas normalizado, poca presión y para dar de comer a aparatos. Si se cumplen las tres, es instalación receptora; si falla una, no lo es a efectos de esta norma.</a:t>
+              <a:t>N1: Y esta parte uno concreta, ¿de qué se ocupa?</a:t>
+            </a:r>
+          </a:p>
+          <a:p>
+            <a:r>
+              <a:t>N2: De tres cosas muy claras, y te las digo en orden. Primero, define: pone negro sobre blanco qué es una instalación receptora, para que todos hablemos de lo mismo. Segundo, clasifica: la ordena en grupos según cómo llega el gas. Y tercero, marca los requisitos generales, las reglas de mínimos que debe cumplir cualquier instalación. Además, no se lo inventa: desarrolla una norma europea, la UNE-EN mil setecientos setenta y cinco, que da las recomendaciones de fondo para las redes de gas en edificios. O sea, la europea pone la idea general y la nuestra pone el detalle para España.</a:t>
             </a:r>
           </a:p>
         </p:txBody>
@@ -4658,7 +5266,7 @@
       </p:sp>
       <p:sp>
         <p:nvSpPr>
-          <p:cNvPr id="4" name="Rounded Rectangle 3"/>
+          <p:cNvPr id="4" name="Rectangle 3"/>
           <p:cNvSpPr/>
           <p:nvPr/>
         </p:nvSpPr>
@@ -4667,7 +5275,7 @@
             <a:off x="868680" y="2057400"/>
             <a:ext cx="1463040" cy="82296"/>
           </a:xfrm>
-          <a:prstGeom prst="roundRect">
+          <a:prstGeom prst="rect">
             <a:avLst/>
           </a:prstGeom>
           <a:solidFill>
@@ -4784,6 +5392,18 @@
   <p:clrMapOvr>
     <a:masterClrMapping/>
   </p:clrMapOvr>
+  <mc:AlternateContent xmlns:mc="http://schemas.openxmlformats.org/markup-compatibility/2006">
+    <mc:Choice xmlns:p14="http://schemas.microsoft.com/office/powerpoint/2010/main" Requires="p14">
+      <p:transition spd="med" p14:dur="700">
+        <p14:cube dir="l"/>
+      </p:transition>
+    </mc:Choice>
+    <mc:Fallback>
+      <p:transition spd="med">
+        <p:push dir="l"/>
+      </p:transition>
+    </mc:Fallback>
+  </mc:AlternateContent>
 </p:sld>
 </file>
 
@@ -4871,7 +5491,7 @@
                 </a:solidFill>
                 <a:latin typeface="Montserrat"/>
               </a:rPr>
-              <a:t>010 / 015</a:t>
+              <a:t>010 / 023</a:t>
             </a:r>
           </a:p>
         </p:txBody>
@@ -4939,7 +5559,7 @@
                 </a:solidFill>
                 <a:latin typeface="Montserrat"/>
               </a:rPr>
-              <a:t>DEFINICIÓN · EXCEPCIONES</a:t>
+              <a:t>DEFINICIÓN · CLAVE</a:t>
             </a:r>
           </a:p>
         </p:txBody>
@@ -4973,14 +5593,14 @@
                 </a:solidFill>
                 <a:latin typeface="Montserrat"/>
               </a:rPr>
-              <a:t>Qué NO es instalación receptora</a:t>
-            </a:r>
-          </a:p>
-        </p:txBody>
-      </p:sp>
-      <p:sp>
-        <p:nvSpPr>
-          <p:cNvPr id="7" name="Rounded Rectangle 6"/>
+              <a:t>¿Qué es instalación receptora?</a:t>
+            </a:r>
+          </a:p>
+        </p:txBody>
+      </p:sp>
+      <p:sp>
+        <p:nvSpPr>
+          <p:cNvPr id="7" name="Rectangle 6"/>
           <p:cNvSpPr/>
           <p:nvPr/>
         </p:nvSpPr>
@@ -4989,7 +5609,7 @@
             <a:off x="868680" y="1627632"/>
             <a:ext cx="2011680" cy="73152"/>
           </a:xfrm>
-          <a:prstGeom prst="roundRect">
+          <a:prstGeom prst="rect">
             <a:avLst/>
           </a:prstGeom>
           <a:solidFill>
@@ -5030,8 +5650,8 @@
         </p:nvSpPr>
         <p:spPr>
           <a:xfrm>
-            <a:off x="822960" y="1965960"/>
-            <a:ext cx="4983480" cy="4206240"/>
+            <a:off x="6355080" y="1965960"/>
+            <a:ext cx="5029200" cy="4206240"/>
           </a:xfrm>
           <a:prstGeom prst="rect">
             <a:avLst/>
@@ -5065,7 +5685,7 @@
                 </a:solidFill>
                 <a:latin typeface="Montserrat"/>
               </a:rPr>
-              <a:t>Aparato móvil: envase &lt; 15 kg</a:t>
+              <a:t>Gas de familia normalizada</a:t>
             </a:r>
           </a:p>
           <a:p>
@@ -5090,7 +5710,7 @@
                 </a:solidFill>
                 <a:latin typeface="Montserrat"/>
               </a:rPr>
-              <a:t>Aparato popular: envase ≤ 3 kg</a:t>
+              <a:t>MOP ≤ 5 bar</a:t>
             </a:r>
           </a:p>
           <a:p>
@@ -5115,7 +5735,7 @@
                 </a:solidFill>
                 <a:latin typeface="Montserrat"/>
               </a:rPr>
-              <a:t>Conectado a un solo aparato</a:t>
+              <a:t>Sirve a aparatos de gas</a:t>
             </a:r>
           </a:p>
           <a:p>
@@ -5140,21 +5760,21 @@
                 </a:solidFill>
                 <a:latin typeface="Montserrat"/>
               </a:rPr>
-              <a:t>Pero: su conexión sí se regula</a:t>
-            </a:r>
-          </a:p>
-        </p:txBody>
-      </p:sp>
-      <p:sp>
-        <p:nvSpPr>
-          <p:cNvPr id="9" name="imgph" descr="IMGQ:portable butane gas heater with cylinder"/>
+              <a:t>Las tres condiciones a la vez</a:t>
+            </a:r>
+          </a:p>
+        </p:txBody>
+      </p:sp>
+      <p:sp>
+        <p:nvSpPr>
+          <p:cNvPr id="9" name="imgph" descr="IMGQ:copper gas pipe on wall with valve"/>
           <p:cNvSpPr/>
           <p:nvPr/>
         </p:nvSpPr>
         <p:spPr>
           <a:xfrm>
-            <a:off x="5806440" y="1051560"/>
-            <a:ext cx="5298947" cy="4629150"/>
+            <a:off x="822960" y="1965960"/>
+            <a:ext cx="5303520" cy="4572000"/>
           </a:xfrm>
           <a:prstGeom prst="roundRect">
             <a:avLst/>
@@ -5199,8 +5819,8 @@
         </p:nvSpPr>
         <p:spPr>
           <a:xfrm>
-            <a:off x="6080760" y="2726055"/>
-            <a:ext cx="4750307" cy="1280160"/>
+            <a:off x="1097280" y="3611880"/>
+            <a:ext cx="4754880" cy="1280160"/>
           </a:xfrm>
           <a:prstGeom prst="rect">
             <a:avLst/>
@@ -5221,7 +5841,7 @@
                 </a:solidFill>
                 <a:latin typeface="Montserrat"/>
               </a:rPr>
-              <a:t>IMAGEN REALISTA</a:t>
+              <a:t>IMAGEN</a:t>
             </a:r>
           </a:p>
           <a:p>
@@ -5233,7 +5853,7 @@
                 </a:solidFill>
                 <a:latin typeface="Montserrat"/>
               </a:rPr>
-              <a:t>portable butane gas heater with cylinder</a:t>
+              <a:t>copper gas pipe on wall with valve</a:t>
             </a:r>
           </a:p>
         </p:txBody>
@@ -5243,6 +5863,18 @@
   <p:clrMapOvr>
     <a:masterClrMapping/>
   </p:clrMapOvr>
+  <mc:AlternateContent xmlns:mc="http://schemas.openxmlformats.org/markup-compatibility/2006">
+    <mc:Choice xmlns:p14="http://schemas.microsoft.com/office/powerpoint/2010/main" Requires="p14">
+      <p:transition spd="med" p14:dur="700">
+        <p14:cube dir="r"/>
+      </p:transition>
+    </mc:Choice>
+    <mc:Fallback>
+      <p:transition spd="med">
+        <p:push dir="r"/>
+      </p:transition>
+    </mc:Fallback>
+  </mc:AlternateContent>
 </p:sld>
 </file>
 
@@ -5330,7 +5962,7 @@
                 </a:solidFill>
                 <a:latin typeface="Montserrat"/>
               </a:rPr>
-              <a:t>011 / 015</a:t>
+              <a:t>011 / 023</a:t>
             </a:r>
           </a:p>
         </p:txBody>
@@ -5371,84 +6003,16 @@
       </p:sp>
       <p:sp>
         <p:nvSpPr>
-          <p:cNvPr id="5" name="TextBox 4"/>
-          <p:cNvSpPr txBox="1"/>
-          <p:nvPr/>
-        </p:nvSpPr>
-        <p:spPr>
-          <a:xfrm>
-            <a:off x="822960" y="457200"/>
-            <a:ext cx="10058400" cy="365760"/>
-          </a:xfrm>
-          <a:prstGeom prst="rect">
-            <a:avLst/>
-          </a:prstGeom>
-          <a:noFill/>
-        </p:spPr>
-        <p:txBody>
-          <a:bodyPr wrap="square">
-            <a:spAutoFit/>
-          </a:bodyPr>
-          <a:lstStyle/>
-          <a:p>
-            <a:r>
-              <a:rPr sz="1300" b="1" i="0">
-                <a:solidFill>
-                  <a:srgbClr val="E8801A"/>
-                </a:solidFill>
-                <a:latin typeface="Montserrat"/>
-              </a:rPr>
-              <a:t>CLASIFICACIÓN · SUMINISTRO</a:t>
-            </a:r>
-          </a:p>
-        </p:txBody>
-      </p:sp>
-      <p:sp>
-        <p:nvSpPr>
-          <p:cNvPr id="6" name="TextBox 5"/>
-          <p:cNvSpPr txBox="1"/>
-          <p:nvPr/>
-        </p:nvSpPr>
-        <p:spPr>
-          <a:xfrm>
-            <a:off x="822960" y="868680"/>
-            <a:ext cx="10515600" cy="914400"/>
-          </a:xfrm>
-          <a:prstGeom prst="rect">
-            <a:avLst/>
-          </a:prstGeom>
-          <a:noFill/>
-        </p:spPr>
-        <p:txBody>
-          <a:bodyPr wrap="square">
-            <a:spAutoFit/>
-          </a:bodyPr>
-          <a:lstStyle/>
-          <a:p>
-            <a:r>
-              <a:rPr sz="2800" b="1" i="0">
-                <a:solidFill>
-                  <a:srgbClr val="1E2761"/>
-                </a:solidFill>
-                <a:latin typeface="Montserrat"/>
-              </a:rPr>
-              <a:t>Tres clases según el gas</a:t>
-            </a:r>
-          </a:p>
-        </p:txBody>
-      </p:sp>
-      <p:sp>
-        <p:nvSpPr>
-          <p:cNvPr id="7" name="Rounded Rectangle 6"/>
+          <p:cNvPr id="5" name="Rectangle 4"/>
           <p:cNvSpPr/>
           <p:nvPr/>
         </p:nvSpPr>
         <p:spPr>
           <a:xfrm>
-            <a:off x="868680" y="1627632"/>
-            <a:ext cx="2011680" cy="73152"/>
-          </a:xfrm>
-          <a:prstGeom prst="roundRect">
+            <a:off x="0" y="0"/>
+            <a:ext cx="12191695" cy="1143000"/>
+          </a:xfrm>
+          <a:prstGeom prst="rect">
             <a:avLst/>
           </a:prstGeom>
           <a:solidFill>
@@ -5483,14 +6047,14 @@
       </p:sp>
       <p:sp>
         <p:nvSpPr>
-          <p:cNvPr id="8" name="TextBox 7"/>
+          <p:cNvPr id="6" name="TextBox 5"/>
           <p:cNvSpPr txBox="1"/>
           <p:nvPr/>
         </p:nvSpPr>
         <p:spPr>
           <a:xfrm>
-            <a:off x="822960" y="1965960"/>
-            <a:ext cx="4983480" cy="4206240"/>
+            <a:off x="822960" y="274320"/>
+            <a:ext cx="10515600" cy="640080"/>
           </a:xfrm>
           <a:prstGeom prst="rect">
             <a:avLst/>
@@ -5503,92 +6067,62 @@
           </a:bodyPr>
           <a:lstStyle/>
           <a:p>
-            <a:pPr>
-              <a:spcAft>
-                <a:spcPts val="1100"/>
-              </a:spcAft>
-            </a:pPr>
-            <a:r>
-              <a:rPr sz="1600" b="1" i="0">
-                <a:solidFill>
-                  <a:srgbClr val="E8801A"/>
-                </a:solidFill>
-                <a:latin typeface="Montserrat"/>
-              </a:rPr>
-              <a:t>▸  </a:t>
-            </a:r>
-            <a:r>
-              <a:rPr sz="1600" b="0" i="0">
-                <a:solidFill>
-                  <a:srgbClr val="1B2330"/>
-                </a:solidFill>
-                <a:latin typeface="Montserrat"/>
-              </a:rPr>
-              <a:t>Canalizado: red de distribución</a:t>
-            </a:r>
-          </a:p>
-          <a:p>
-            <a:pPr>
-              <a:spcAft>
-                <a:spcPts val="1100"/>
-              </a:spcAft>
-            </a:pPr>
-            <a:r>
-              <a:rPr sz="1600" b="1" i="0">
-                <a:solidFill>
-                  <a:srgbClr val="E8801A"/>
-                </a:solidFill>
-                <a:latin typeface="Montserrat"/>
-              </a:rPr>
-              <a:t>▸  </a:t>
-            </a:r>
-            <a:r>
-              <a:rPr sz="1600" b="0" i="0">
-                <a:solidFill>
-                  <a:srgbClr val="1B2330"/>
-                </a:solidFill>
-                <a:latin typeface="Montserrat"/>
-              </a:rPr>
-              <a:t>Granel: depósito fijo o &gt; 15 kg</a:t>
-            </a:r>
-          </a:p>
-          <a:p>
-            <a:pPr>
-              <a:spcAft>
-                <a:spcPts val="1100"/>
-              </a:spcAft>
-            </a:pPr>
-            <a:r>
-              <a:rPr sz="1600" b="1" i="0">
-                <a:solidFill>
-                  <a:srgbClr val="E8801A"/>
-                </a:solidFill>
-                <a:latin typeface="Montserrat"/>
-              </a:rPr>
-              <a:t>▸  </a:t>
-            </a:r>
-            <a:r>
-              <a:rPr sz="1600" b="0" i="0">
-                <a:solidFill>
-                  <a:srgbClr val="1B2330"/>
-                </a:solidFill>
-                <a:latin typeface="Montserrat"/>
-              </a:rPr>
-              <a:t>Envases: envase &lt; 15 kg</a:t>
-            </a:r>
-          </a:p>
-        </p:txBody>
-      </p:sp>
-      <p:sp>
-        <p:nvSpPr>
-          <p:cNvPr id="9" name="imgph" descr="IMGQ:outdoor LPG storage tank in garden"/>
+            <a:r>
+              <a:rPr sz="2400" b="1" i="0">
+                <a:solidFill>
+                  <a:srgbClr val="FFFFFF"/>
+                </a:solidFill>
+                <a:latin typeface="Montserrat"/>
+              </a:rPr>
+              <a:t>⚡  PREGUNTA RÁPIDA</a:t>
+            </a:r>
+          </a:p>
+        </p:txBody>
+      </p:sp>
+      <p:sp>
+        <p:nvSpPr>
+          <p:cNvPr id="7" name="TextBox 6"/>
+          <p:cNvSpPr txBox="1"/>
+          <p:nvPr/>
+        </p:nvSpPr>
+        <p:spPr>
+          <a:xfrm>
+            <a:off x="822960" y="1508760"/>
+            <a:ext cx="10515600" cy="1371600"/>
+          </a:xfrm>
+          <a:prstGeom prst="rect">
+            <a:avLst/>
+          </a:prstGeom>
+          <a:noFill/>
+        </p:spPr>
+        <p:txBody>
+          <a:bodyPr wrap="square">
+            <a:spAutoFit/>
+          </a:bodyPr>
+          <a:lstStyle/>
+          <a:p>
+            <a:r>
+              <a:rPr sz="2400" b="1" i="0">
+                <a:solidFill>
+                  <a:srgbClr val="1E2761"/>
+                </a:solidFill>
+                <a:latin typeface="Montserrat"/>
+              </a:rPr>
+              <a:t>¿Cuándo es una instalación una 'instalación receptora' según la UNE 60670?</a:t>
+            </a:r>
+          </a:p>
+        </p:txBody>
+      </p:sp>
+      <p:sp>
+        <p:nvSpPr>
+          <p:cNvPr id="8" name="Rounded Rectangle 7"/>
           <p:cNvSpPr/>
           <p:nvPr/>
         </p:nvSpPr>
         <p:spPr>
           <a:xfrm>
-            <a:off x="5806440" y="1051560"/>
-            <a:ext cx="5298947" cy="4629150"/>
+            <a:off x="822960" y="3291840"/>
+            <a:ext cx="4983480" cy="1143000"/>
           </a:xfrm>
           <a:prstGeom prst="roundRect">
             <a:avLst/>
@@ -5627,14 +6161,58 @@
       </p:sp>
       <p:sp>
         <p:nvSpPr>
+          <p:cNvPr id="9" name="Rectangle 8"/>
+          <p:cNvSpPr/>
+          <p:nvPr/>
+        </p:nvSpPr>
+        <p:spPr>
+          <a:xfrm>
+            <a:off x="822960" y="3291840"/>
+            <a:ext cx="640080" cy="1143000"/>
+          </a:xfrm>
+          <a:prstGeom prst="rect">
+            <a:avLst/>
+          </a:prstGeom>
+          <a:solidFill>
+            <a:srgbClr val="1E2761"/>
+          </a:solidFill>
+          <a:ln>
+            <a:noFill/>
+          </a:ln>
+          <a:effectLst/>
+        </p:spPr>
+        <p:style>
+          <a:lnRef idx="1">
+            <a:schemeClr val="accent1"/>
+          </a:lnRef>
+          <a:fillRef idx="3">
+            <a:schemeClr val="accent1"/>
+          </a:fillRef>
+          <a:effectRef idx="2">
+            <a:schemeClr val="accent1"/>
+          </a:effectRef>
+          <a:fontRef idx="minor">
+            <a:schemeClr val="lt1"/>
+          </a:fontRef>
+        </p:style>
+        <p:txBody>
+          <a:bodyPr rtlCol="0" anchor="ctr"/>
+          <a:lstStyle/>
+          <a:p>
+            <a:pPr algn="ctr"/>
+          </a:p>
+        </p:txBody>
+      </p:sp>
+      <p:sp>
+        <p:nvSpPr>
           <p:cNvPr id="10" name="TextBox 9"/>
           <p:cNvSpPr txBox="1"/>
           <p:nvPr/>
         </p:nvSpPr>
         <p:spPr>
           <a:xfrm>
-            <a:off x="6080760" y="2726055"/>
-            <a:ext cx="4750307" cy="1280160"/>
+            <a:off x="822960" y="3611880"/>
+            <a:ext cx="640080" cy="548640"/>
           </a:xfrm>
           <a:prstGeom prst="rect">
             <a:avLst/>
@@ -5649,25 +6227,524 @@
           <a:p>
             <a:pPr algn="ctr"/>
             <a:r>
-              <a:rPr sz="1400" b="1" i="0">
-                <a:solidFill>
-                  <a:srgbClr val="64748B"/>
-                </a:solidFill>
-                <a:latin typeface="Montserrat"/>
-              </a:rPr>
-              <a:t>IMAGEN REALISTA</a:t>
-            </a:r>
-          </a:p>
+              <a:rPr sz="2200" b="1" i="0">
+                <a:solidFill>
+                  <a:srgbClr val="FFFFFF"/>
+                </a:solidFill>
+                <a:latin typeface="Montserrat"/>
+              </a:rPr>
+              <a:t>A</a:t>
+            </a:r>
+          </a:p>
+        </p:txBody>
+      </p:sp>
+      <p:sp>
+        <p:nvSpPr>
+          <p:cNvPr id="11" name="TextBox 10"/>
+          <p:cNvSpPr txBox="1"/>
+          <p:nvPr/>
+        </p:nvSpPr>
+        <p:spPr>
+          <a:xfrm>
+            <a:off x="1600200" y="3474720"/>
+            <a:ext cx="4114800" cy="868680"/>
+          </a:xfrm>
+          <a:prstGeom prst="rect">
+            <a:avLst/>
+          </a:prstGeom>
+          <a:noFill/>
+        </p:spPr>
+        <p:txBody>
+          <a:bodyPr wrap="square">
+            <a:spAutoFit/>
+          </a:bodyPr>
+          <a:lstStyle/>
+          <a:p>
+            <a:r>
+              <a:rPr sz="1400" b="0" i="0">
+                <a:solidFill>
+                  <a:srgbClr val="1B2330"/>
+                </a:solidFill>
+                <a:latin typeface="Montserrat"/>
+              </a:rPr>
+              <a:t>Cuando usa gas de familia normalizada, MOP ≤ 5 bar y sirve a aparatos de gas</a:t>
+            </a:r>
+          </a:p>
+        </p:txBody>
+      </p:sp>
+      <p:sp>
+        <p:nvSpPr>
+          <p:cNvPr id="12" name="Rounded Rectangle 11"/>
+          <p:cNvSpPr/>
+          <p:nvPr/>
+        </p:nvSpPr>
+        <p:spPr>
+          <a:xfrm>
+            <a:off x="6355080" y="3291840"/>
+            <a:ext cx="4983480" cy="1143000"/>
+          </a:xfrm>
+          <a:prstGeom prst="roundRect">
+            <a:avLst/>
+          </a:prstGeom>
+          <a:solidFill>
+            <a:srgbClr val="F3F6FB"/>
+          </a:solidFill>
+          <a:ln w="12700">
+            <a:solidFill>
+              <a:srgbClr val="C7D2E6"/>
+            </a:solidFill>
+          </a:ln>
+          <a:effectLst/>
+        </p:spPr>
+        <p:style>
+          <a:lnRef idx="1">
+            <a:schemeClr val="accent1"/>
+          </a:lnRef>
+          <a:fillRef idx="3">
+            <a:schemeClr val="accent1"/>
+          </a:fillRef>
+          <a:effectRef idx="2">
+            <a:schemeClr val="accent1"/>
+          </a:effectRef>
+          <a:fontRef idx="minor">
+            <a:schemeClr val="lt1"/>
+          </a:fontRef>
+        </p:style>
+        <p:txBody>
+          <a:bodyPr rtlCol="0" anchor="ctr"/>
+          <a:lstStyle/>
           <a:p>
             <a:pPr algn="ctr"/>
-            <a:r>
-              <a:rPr sz="1100" b="0" i="1">
-                <a:solidFill>
-                  <a:srgbClr val="64748B"/>
-                </a:solidFill>
-                <a:latin typeface="Montserrat"/>
-              </a:rPr>
-              <a:t>outdoor LPG storage tank in garden</a:t>
+          </a:p>
+        </p:txBody>
+      </p:sp>
+      <p:sp>
+        <p:nvSpPr>
+          <p:cNvPr id="13" name="Rectangle 12"/>
+          <p:cNvSpPr/>
+          <p:nvPr/>
+        </p:nvSpPr>
+        <p:spPr>
+          <a:xfrm>
+            <a:off x="6355080" y="3291840"/>
+            <a:ext cx="640080" cy="1143000"/>
+          </a:xfrm>
+          <a:prstGeom prst="rect">
+            <a:avLst/>
+          </a:prstGeom>
+          <a:solidFill>
+            <a:srgbClr val="1E2761"/>
+          </a:solidFill>
+          <a:ln>
+            <a:noFill/>
+          </a:ln>
+          <a:effectLst/>
+        </p:spPr>
+        <p:style>
+          <a:lnRef idx="1">
+            <a:schemeClr val="accent1"/>
+          </a:lnRef>
+          <a:fillRef idx="3">
+            <a:schemeClr val="accent1"/>
+          </a:fillRef>
+          <a:effectRef idx="2">
+            <a:schemeClr val="accent1"/>
+          </a:effectRef>
+          <a:fontRef idx="minor">
+            <a:schemeClr val="lt1"/>
+          </a:fontRef>
+        </p:style>
+        <p:txBody>
+          <a:bodyPr rtlCol="0" anchor="ctr"/>
+          <a:lstStyle/>
+          <a:p>
+            <a:pPr algn="ctr"/>
+          </a:p>
+        </p:txBody>
+      </p:sp>
+      <p:sp>
+        <p:nvSpPr>
+          <p:cNvPr id="14" name="TextBox 13"/>
+          <p:cNvSpPr txBox="1"/>
+          <p:nvPr/>
+        </p:nvSpPr>
+        <p:spPr>
+          <a:xfrm>
+            <a:off x="6355080" y="3611880"/>
+            <a:ext cx="640080" cy="548640"/>
+          </a:xfrm>
+          <a:prstGeom prst="rect">
+            <a:avLst/>
+          </a:prstGeom>
+          <a:noFill/>
+        </p:spPr>
+        <p:txBody>
+          <a:bodyPr wrap="square">
+            <a:spAutoFit/>
+          </a:bodyPr>
+          <a:lstStyle/>
+          <a:p>
+            <a:pPr algn="ctr"/>
+            <a:r>
+              <a:rPr sz="2200" b="1" i="0">
+                <a:solidFill>
+                  <a:srgbClr val="FFFFFF"/>
+                </a:solidFill>
+                <a:latin typeface="Montserrat"/>
+              </a:rPr>
+              <a:t>B</a:t>
+            </a:r>
+          </a:p>
+        </p:txBody>
+      </p:sp>
+      <p:sp>
+        <p:nvSpPr>
+          <p:cNvPr id="15" name="TextBox 14"/>
+          <p:cNvSpPr txBox="1"/>
+          <p:nvPr/>
+        </p:nvSpPr>
+        <p:spPr>
+          <a:xfrm>
+            <a:off x="7132320" y="3474720"/>
+            <a:ext cx="4114800" cy="868680"/>
+          </a:xfrm>
+          <a:prstGeom prst="rect">
+            <a:avLst/>
+          </a:prstGeom>
+          <a:noFill/>
+        </p:spPr>
+        <p:txBody>
+          <a:bodyPr wrap="square">
+            <a:spAutoFit/>
+          </a:bodyPr>
+          <a:lstStyle/>
+          <a:p>
+            <a:r>
+              <a:rPr sz="1400" b="0" i="0">
+                <a:solidFill>
+                  <a:srgbClr val="1B2330"/>
+                </a:solidFill>
+                <a:latin typeface="Montserrat"/>
+              </a:rPr>
+              <a:t>Cuando la presión supera los 5 bar y hay varios aparatos conectados</a:t>
+            </a:r>
+          </a:p>
+        </p:txBody>
+      </p:sp>
+      <p:sp>
+        <p:nvSpPr>
+          <p:cNvPr id="16" name="Rounded Rectangle 15"/>
+          <p:cNvSpPr/>
+          <p:nvPr/>
+        </p:nvSpPr>
+        <p:spPr>
+          <a:xfrm>
+            <a:off x="822960" y="4617720"/>
+            <a:ext cx="4983480" cy="1143000"/>
+          </a:xfrm>
+          <a:prstGeom prst="roundRect">
+            <a:avLst/>
+          </a:prstGeom>
+          <a:solidFill>
+            <a:srgbClr val="F3F6FB"/>
+          </a:solidFill>
+          <a:ln w="12700">
+            <a:solidFill>
+              <a:srgbClr val="C7D2E6"/>
+            </a:solidFill>
+          </a:ln>
+          <a:effectLst/>
+        </p:spPr>
+        <p:style>
+          <a:lnRef idx="1">
+            <a:schemeClr val="accent1"/>
+          </a:lnRef>
+          <a:fillRef idx="3">
+            <a:schemeClr val="accent1"/>
+          </a:fillRef>
+          <a:effectRef idx="2">
+            <a:schemeClr val="accent1"/>
+          </a:effectRef>
+          <a:fontRef idx="minor">
+            <a:schemeClr val="lt1"/>
+          </a:fontRef>
+        </p:style>
+        <p:txBody>
+          <a:bodyPr rtlCol="0" anchor="ctr"/>
+          <a:lstStyle/>
+          <a:p>
+            <a:pPr algn="ctr"/>
+          </a:p>
+        </p:txBody>
+      </p:sp>
+      <p:sp>
+        <p:nvSpPr>
+          <p:cNvPr id="17" name="Rectangle 16"/>
+          <p:cNvSpPr/>
+          <p:nvPr/>
+        </p:nvSpPr>
+        <p:spPr>
+          <a:xfrm>
+            <a:off x="822960" y="4617720"/>
+            <a:ext cx="640080" cy="1143000"/>
+          </a:xfrm>
+          <a:prstGeom prst="rect">
+            <a:avLst/>
+          </a:prstGeom>
+          <a:solidFill>
+            <a:srgbClr val="1E2761"/>
+          </a:solidFill>
+          <a:ln>
+            <a:noFill/>
+          </a:ln>
+          <a:effectLst/>
+        </p:spPr>
+        <p:style>
+          <a:lnRef idx="1">
+            <a:schemeClr val="accent1"/>
+          </a:lnRef>
+          <a:fillRef idx="3">
+            <a:schemeClr val="accent1"/>
+          </a:fillRef>
+          <a:effectRef idx="2">
+            <a:schemeClr val="accent1"/>
+          </a:effectRef>
+          <a:fontRef idx="minor">
+            <a:schemeClr val="lt1"/>
+          </a:fontRef>
+        </p:style>
+        <p:txBody>
+          <a:bodyPr rtlCol="0" anchor="ctr"/>
+          <a:lstStyle/>
+          <a:p>
+            <a:pPr algn="ctr"/>
+          </a:p>
+        </p:txBody>
+      </p:sp>
+      <p:sp>
+        <p:nvSpPr>
+          <p:cNvPr id="18" name="TextBox 17"/>
+          <p:cNvSpPr txBox="1"/>
+          <p:nvPr/>
+        </p:nvSpPr>
+        <p:spPr>
+          <a:xfrm>
+            <a:off x="822960" y="4937760"/>
+            <a:ext cx="640080" cy="548640"/>
+          </a:xfrm>
+          <a:prstGeom prst="rect">
+            <a:avLst/>
+          </a:prstGeom>
+          <a:noFill/>
+        </p:spPr>
+        <p:txBody>
+          <a:bodyPr wrap="square">
+            <a:spAutoFit/>
+          </a:bodyPr>
+          <a:lstStyle/>
+          <a:p>
+            <a:pPr algn="ctr"/>
+            <a:r>
+              <a:rPr sz="2200" b="1" i="0">
+                <a:solidFill>
+                  <a:srgbClr val="FFFFFF"/>
+                </a:solidFill>
+                <a:latin typeface="Montserrat"/>
+              </a:rPr>
+              <a:t>C</a:t>
+            </a:r>
+          </a:p>
+        </p:txBody>
+      </p:sp>
+      <p:sp>
+        <p:nvSpPr>
+          <p:cNvPr id="19" name="TextBox 18"/>
+          <p:cNvSpPr txBox="1"/>
+          <p:nvPr/>
+        </p:nvSpPr>
+        <p:spPr>
+          <a:xfrm>
+            <a:off x="1600200" y="4800600"/>
+            <a:ext cx="4114800" cy="868680"/>
+          </a:xfrm>
+          <a:prstGeom prst="rect">
+            <a:avLst/>
+          </a:prstGeom>
+          <a:noFill/>
+        </p:spPr>
+        <p:txBody>
+          <a:bodyPr wrap="square">
+            <a:spAutoFit/>
+          </a:bodyPr>
+          <a:lstStyle/>
+          <a:p>
+            <a:r>
+              <a:rPr sz="1400" b="0" i="0">
+                <a:solidFill>
+                  <a:srgbClr val="1B2330"/>
+                </a:solidFill>
+                <a:latin typeface="Montserrat"/>
+              </a:rPr>
+              <a:t>Siempre que haya una bombona conectada a un aparato móvil</a:t>
+            </a:r>
+          </a:p>
+        </p:txBody>
+      </p:sp>
+      <p:sp>
+        <p:nvSpPr>
+          <p:cNvPr id="20" name="Rounded Rectangle 19"/>
+          <p:cNvSpPr/>
+          <p:nvPr/>
+        </p:nvSpPr>
+        <p:spPr>
+          <a:xfrm>
+            <a:off x="6355080" y="4617720"/>
+            <a:ext cx="4983480" cy="1143000"/>
+          </a:xfrm>
+          <a:prstGeom prst="roundRect">
+            <a:avLst/>
+          </a:prstGeom>
+          <a:solidFill>
+            <a:srgbClr val="F3F6FB"/>
+          </a:solidFill>
+          <a:ln w="12700">
+            <a:solidFill>
+              <a:srgbClr val="C7D2E6"/>
+            </a:solidFill>
+          </a:ln>
+          <a:effectLst/>
+        </p:spPr>
+        <p:style>
+          <a:lnRef idx="1">
+            <a:schemeClr val="accent1"/>
+          </a:lnRef>
+          <a:fillRef idx="3">
+            <a:schemeClr val="accent1"/>
+          </a:fillRef>
+          <a:effectRef idx="2">
+            <a:schemeClr val="accent1"/>
+          </a:effectRef>
+          <a:fontRef idx="minor">
+            <a:schemeClr val="lt1"/>
+          </a:fontRef>
+        </p:style>
+        <p:txBody>
+          <a:bodyPr rtlCol="0" anchor="ctr"/>
+          <a:lstStyle/>
+          <a:p>
+            <a:pPr algn="ctr"/>
+          </a:p>
+        </p:txBody>
+      </p:sp>
+      <p:sp>
+        <p:nvSpPr>
+          <p:cNvPr id="21" name="Rectangle 20"/>
+          <p:cNvSpPr/>
+          <p:nvPr/>
+        </p:nvSpPr>
+        <p:spPr>
+          <a:xfrm>
+            <a:off x="6355080" y="4617720"/>
+            <a:ext cx="640080" cy="1143000"/>
+          </a:xfrm>
+          <a:prstGeom prst="rect">
+            <a:avLst/>
+          </a:prstGeom>
+          <a:solidFill>
+            <a:srgbClr val="1E2761"/>
+          </a:solidFill>
+          <a:ln>
+            <a:noFill/>
+          </a:ln>
+          <a:effectLst/>
+        </p:spPr>
+        <p:style>
+          <a:lnRef idx="1">
+            <a:schemeClr val="accent1"/>
+          </a:lnRef>
+          <a:fillRef idx="3">
+            <a:schemeClr val="accent1"/>
+          </a:fillRef>
+          <a:effectRef idx="2">
+            <a:schemeClr val="accent1"/>
+          </a:effectRef>
+          <a:fontRef idx="minor">
+            <a:schemeClr val="lt1"/>
+          </a:fontRef>
+        </p:style>
+        <p:txBody>
+          <a:bodyPr rtlCol="0" anchor="ctr"/>
+          <a:lstStyle/>
+          <a:p>
+            <a:pPr algn="ctr"/>
+          </a:p>
+        </p:txBody>
+      </p:sp>
+      <p:sp>
+        <p:nvSpPr>
+          <p:cNvPr id="22" name="TextBox 21"/>
+          <p:cNvSpPr txBox="1"/>
+          <p:nvPr/>
+        </p:nvSpPr>
+        <p:spPr>
+          <a:xfrm>
+            <a:off x="6355080" y="4937760"/>
+            <a:ext cx="640080" cy="548640"/>
+          </a:xfrm>
+          <a:prstGeom prst="rect">
+            <a:avLst/>
+          </a:prstGeom>
+          <a:noFill/>
+        </p:spPr>
+        <p:txBody>
+          <a:bodyPr wrap="square">
+            <a:spAutoFit/>
+          </a:bodyPr>
+          <a:lstStyle/>
+          <a:p>
+            <a:pPr algn="ctr"/>
+            <a:r>
+              <a:rPr sz="2200" b="1" i="0">
+                <a:solidFill>
+                  <a:srgbClr val="FFFFFF"/>
+                </a:solidFill>
+                <a:latin typeface="Montserrat"/>
+              </a:rPr>
+              <a:t>D</a:t>
+            </a:r>
+          </a:p>
+        </p:txBody>
+      </p:sp>
+      <p:sp>
+        <p:nvSpPr>
+          <p:cNvPr id="23" name="TextBox 22"/>
+          <p:cNvSpPr txBox="1"/>
+          <p:nvPr/>
+        </p:nvSpPr>
+        <p:spPr>
+          <a:xfrm>
+            <a:off x="7132320" y="4800600"/>
+            <a:ext cx="4114800" cy="868680"/>
+          </a:xfrm>
+          <a:prstGeom prst="rect">
+            <a:avLst/>
+          </a:prstGeom>
+          <a:noFill/>
+        </p:spPr>
+        <p:txBody>
+          <a:bodyPr wrap="square">
+            <a:spAutoFit/>
+          </a:bodyPr>
+          <a:lstStyle/>
+          <a:p>
+            <a:r>
+              <a:rPr sz="1400" b="0" i="0">
+                <a:solidFill>
+                  <a:srgbClr val="1B2330"/>
+                </a:solidFill>
+                <a:latin typeface="Montserrat"/>
+              </a:rPr>
+              <a:t>Cuando la instalación es de gas natural, sea cual sea la presión</a:t>
             </a:r>
           </a:p>
         </p:txBody>
@@ -5677,6 +6754,18 @@
   <p:clrMapOvr>
     <a:masterClrMapping/>
   </p:clrMapOvr>
+  <mc:AlternateContent xmlns:mc="http://schemas.openxmlformats.org/markup-compatibility/2006">
+    <mc:Choice xmlns:p14="http://schemas.microsoft.com/office/powerpoint/2010/main" Requires="p14">
+      <p:transition spd="med" p14:dur="700">
+        <p14:cube dir="l"/>
+      </p:transition>
+    </mc:Choice>
+    <mc:Fallback>
+      <p:transition spd="med">
+        <p:push dir="l"/>
+      </p:transition>
+    </mc:Fallback>
+  </mc:AlternateContent>
 </p:sld>
 </file>
 
@@ -5764,7 +6853,7 @@
                 </a:solidFill>
                 <a:latin typeface="Montserrat"/>
               </a:rPr>
-              <a:t>012 / 015</a:t>
+              <a:t>012 / 023</a:t>
             </a:r>
           </a:p>
         </p:txBody>
@@ -5805,88 +6894,20 @@
       </p:sp>
       <p:sp>
         <p:nvSpPr>
-          <p:cNvPr id="5" name="TextBox 4"/>
-          <p:cNvSpPr txBox="1"/>
-          <p:nvPr/>
-        </p:nvSpPr>
-        <p:spPr>
-          <a:xfrm>
-            <a:off x="822960" y="457200"/>
-            <a:ext cx="10058400" cy="365760"/>
-          </a:xfrm>
-          <a:prstGeom prst="rect">
-            <a:avLst/>
-          </a:prstGeom>
-          <a:noFill/>
-        </p:spPr>
-        <p:txBody>
-          <a:bodyPr wrap="square">
-            <a:spAutoFit/>
-          </a:bodyPr>
-          <a:lstStyle/>
-          <a:p>
-            <a:r>
-              <a:rPr sz="1300" b="1" i="0">
-                <a:solidFill>
-                  <a:srgbClr val="E8801A"/>
-                </a:solidFill>
-                <a:latin typeface="Montserrat"/>
-              </a:rPr>
-              <a:t>PARTES · ESTRUCTURA FÍSICA</a:t>
-            </a:r>
-          </a:p>
-        </p:txBody>
-      </p:sp>
-      <p:sp>
-        <p:nvSpPr>
-          <p:cNvPr id="6" name="TextBox 5"/>
-          <p:cNvSpPr txBox="1"/>
-          <p:nvPr/>
-        </p:nvSpPr>
-        <p:spPr>
-          <a:xfrm>
-            <a:off x="822960" y="868680"/>
-            <a:ext cx="10515600" cy="914400"/>
-          </a:xfrm>
-          <a:prstGeom prst="rect">
-            <a:avLst/>
-          </a:prstGeom>
-          <a:noFill/>
-        </p:spPr>
-        <p:txBody>
-          <a:bodyPr wrap="square">
-            <a:spAutoFit/>
-          </a:bodyPr>
-          <a:lstStyle/>
-          <a:p>
-            <a:r>
-              <a:rPr sz="2800" b="1" i="0">
-                <a:solidFill>
-                  <a:srgbClr val="1E2761"/>
-                </a:solidFill>
-                <a:latin typeface="Montserrat"/>
-              </a:rPr>
-              <a:t>Las tres partes, en fila</a:t>
-            </a:r>
-          </a:p>
-        </p:txBody>
-      </p:sp>
-      <p:sp>
-        <p:nvSpPr>
-          <p:cNvPr id="7" name="Rounded Rectangle 6"/>
+          <p:cNvPr id="5" name="Rectangle 4"/>
           <p:cNvSpPr/>
           <p:nvPr/>
         </p:nvSpPr>
         <p:spPr>
           <a:xfrm>
-            <a:off x="868680" y="1627632"/>
-            <a:ext cx="2011680" cy="73152"/>
-          </a:xfrm>
-          <a:prstGeom prst="roundRect">
+            <a:off x="0" y="0"/>
+            <a:ext cx="12191695" cy="1143000"/>
+          </a:xfrm>
+          <a:prstGeom prst="rect">
             <a:avLst/>
           </a:prstGeom>
           <a:solidFill>
-            <a:srgbClr val="E8801A"/>
+            <a:srgbClr val="1E8E4B"/>
           </a:solidFill>
           <a:ln>
             <a:noFill/>
@@ -5917,14 +6938,14 @@
       </p:sp>
       <p:sp>
         <p:nvSpPr>
-          <p:cNvPr id="8" name="TextBox 7"/>
+          <p:cNvPr id="6" name="TextBox 5"/>
           <p:cNvSpPr txBox="1"/>
           <p:nvPr/>
         </p:nvSpPr>
         <p:spPr>
           <a:xfrm>
-            <a:off x="822960" y="1965960"/>
-            <a:ext cx="4983480" cy="4206240"/>
+            <a:off x="822960" y="274320"/>
+            <a:ext cx="10515600" cy="640080"/>
           </a:xfrm>
           <a:prstGeom prst="rect">
             <a:avLst/>
@@ -5937,127 +6958,72 @@
           </a:bodyPr>
           <a:lstStyle/>
           <a:p>
-            <a:pPr>
-              <a:spcAft>
-                <a:spcPts val="1100"/>
-              </a:spcAft>
-            </a:pPr>
-            <a:r>
-              <a:rPr sz="1600" b="1" i="0">
-                <a:solidFill>
-                  <a:srgbClr val="E8801A"/>
-                </a:solidFill>
-                <a:latin typeface="Montserrat"/>
-              </a:rPr>
-              <a:t>▸  </a:t>
-            </a:r>
-            <a:r>
-              <a:rPr sz="1600" b="0" i="0">
-                <a:solidFill>
-                  <a:srgbClr val="1B2330"/>
-                </a:solidFill>
-                <a:latin typeface="Montserrat"/>
-              </a:rPr>
-              <a:t>Acometida interior</a:t>
-            </a:r>
-          </a:p>
-          <a:p>
-            <a:pPr>
-              <a:spcAft>
-                <a:spcPts val="1100"/>
-              </a:spcAft>
-            </a:pPr>
-            <a:r>
-              <a:rPr sz="1600" b="1" i="0">
-                <a:solidFill>
-                  <a:srgbClr val="E8801A"/>
-                </a:solidFill>
-                <a:latin typeface="Montserrat"/>
-              </a:rPr>
-              <a:t>▸  </a:t>
-            </a:r>
-            <a:r>
-              <a:rPr sz="1600" b="0" i="0">
-                <a:solidFill>
-                  <a:srgbClr val="1B2330"/>
-                </a:solidFill>
-                <a:latin typeface="Montserrat"/>
-              </a:rPr>
-              <a:t>Instalación común</a:t>
-            </a:r>
-          </a:p>
-          <a:p>
-            <a:pPr>
-              <a:spcAft>
-                <a:spcPts val="1100"/>
-              </a:spcAft>
-            </a:pPr>
-            <a:r>
-              <a:rPr sz="1600" b="1" i="0">
-                <a:solidFill>
-                  <a:srgbClr val="E8801A"/>
-                </a:solidFill>
-                <a:latin typeface="Montserrat"/>
-              </a:rPr>
-              <a:t>▸  </a:t>
-            </a:r>
-            <a:r>
-              <a:rPr sz="1600" b="0" i="0">
-                <a:solidFill>
-                  <a:srgbClr val="1B2330"/>
-                </a:solidFill>
-                <a:latin typeface="Montserrat"/>
-              </a:rPr>
-              <a:t>Instalación individual</a:t>
-            </a:r>
-          </a:p>
-          <a:p>
-            <a:pPr>
-              <a:spcAft>
-                <a:spcPts val="1100"/>
-              </a:spcAft>
-            </a:pPr>
-            <a:r>
-              <a:rPr sz="1600" b="1" i="0">
-                <a:solidFill>
-                  <a:srgbClr val="E8801A"/>
-                </a:solidFill>
-                <a:latin typeface="Montserrat"/>
-              </a:rPr>
-              <a:t>▸  </a:t>
-            </a:r>
-            <a:r>
-              <a:rPr sz="1600" b="0" i="0">
-                <a:solidFill>
-                  <a:srgbClr val="1B2330"/>
-                </a:solidFill>
-                <a:latin typeface="Montserrat"/>
-              </a:rPr>
-              <a:t>No siempre están las tres</a:t>
-            </a:r>
-          </a:p>
-        </p:txBody>
-      </p:sp>
-      <p:sp>
-        <p:nvSpPr>
-          <p:cNvPr id="9" name="imgph" descr="IMGQ:gas meter cabinet in apartment building"/>
+            <a:r>
+              <a:rPr sz="2400" b="1" i="0">
+                <a:solidFill>
+                  <a:srgbClr val="FFFFFF"/>
+                </a:solidFill>
+                <a:latin typeface="Montserrat"/>
+              </a:rPr>
+              <a:t>✔  RESPUESTA:  A</a:t>
+            </a:r>
+          </a:p>
+        </p:txBody>
+      </p:sp>
+      <p:sp>
+        <p:nvSpPr>
+          <p:cNvPr id="7" name="TextBox 6"/>
+          <p:cNvSpPr txBox="1"/>
+          <p:nvPr/>
+        </p:nvSpPr>
+        <p:spPr>
+          <a:xfrm>
+            <a:off x="822960" y="1417320"/>
+            <a:ext cx="10515600" cy="914400"/>
+          </a:xfrm>
+          <a:prstGeom prst="rect">
+            <a:avLst/>
+          </a:prstGeom>
+          <a:noFill/>
+        </p:spPr>
+        <p:txBody>
+          <a:bodyPr wrap="square">
+            <a:spAutoFit/>
+          </a:bodyPr>
+          <a:lstStyle/>
+          <a:p>
+            <a:r>
+              <a:rPr sz="1800" b="1" i="0">
+                <a:solidFill>
+                  <a:srgbClr val="64748B"/>
+                </a:solidFill>
+                <a:latin typeface="Montserrat"/>
+              </a:rPr>
+              <a:t>¿Cuándo es una instalación una 'instalación receptora' según la UNE 60670?</a:t>
+            </a:r>
+          </a:p>
+        </p:txBody>
+      </p:sp>
+      <p:sp>
+        <p:nvSpPr>
+          <p:cNvPr id="8" name="Rounded Rectangle 7"/>
           <p:cNvSpPr/>
           <p:nvPr/>
         </p:nvSpPr>
         <p:spPr>
           <a:xfrm>
-            <a:off x="5806440" y="1051560"/>
-            <a:ext cx="5298947" cy="4629150"/>
+            <a:off x="822960" y="2514600"/>
+            <a:ext cx="10515600" cy="914400"/>
           </a:xfrm>
           <a:prstGeom prst="roundRect">
             <a:avLst/>
           </a:prstGeom>
           <a:solidFill>
-            <a:srgbClr val="F3F6FB"/>
+            <a:srgbClr val="E9F6EE"/>
           </a:solidFill>
           <a:ln w="12700">
             <a:solidFill>
-              <a:srgbClr val="C7D2E6"/>
+              <a:srgbClr val="1E8E4B"/>
             </a:solidFill>
           </a:ln>
           <a:effectLst/>
@@ -6086,14 +7052,14 @@
       </p:sp>
       <p:sp>
         <p:nvSpPr>
-          <p:cNvPr id="10" name="TextBox 9"/>
+          <p:cNvPr id="9" name="TextBox 8"/>
           <p:cNvSpPr txBox="1"/>
           <p:nvPr/>
         </p:nvSpPr>
         <p:spPr>
           <a:xfrm>
-            <a:off x="6080760" y="2726055"/>
-            <a:ext cx="4750307" cy="1280160"/>
+            <a:off x="1097280" y="2697480"/>
+            <a:ext cx="10058400" cy="640080"/>
           </a:xfrm>
           <a:prstGeom prst="rect">
             <a:avLst/>
@@ -6106,27 +7072,66 @@
           </a:bodyPr>
           <a:lstStyle/>
           <a:p>
-            <a:pPr algn="ctr"/>
-            <a:r>
-              <a:rPr sz="1400" b="1" i="0">
-                <a:solidFill>
-                  <a:srgbClr val="64748B"/>
-                </a:solidFill>
-                <a:latin typeface="Montserrat"/>
-              </a:rPr>
-              <a:t>IMAGEN REALISTA</a:t>
-            </a:r>
-          </a:p>
-          <a:p>
-            <a:pPr algn="ctr"/>
-            <a:r>
-              <a:rPr sz="1100" b="0" i="1">
-                <a:solidFill>
-                  <a:srgbClr val="64748B"/>
-                </a:solidFill>
-                <a:latin typeface="Montserrat"/>
-              </a:rPr>
-              <a:t>gas meter cabinet in apartment building</a:t>
+            <a:r>
+              <a:rPr sz="1800" b="1" i="0">
+                <a:solidFill>
+                  <a:srgbClr val="1E8E4B"/>
+                </a:solidFill>
+                <a:latin typeface="Montserrat"/>
+              </a:rPr>
+              <a:t>A.  </a:t>
+            </a:r>
+            <a:r>
+              <a:rPr sz="1800" b="1" i="0">
+                <a:solidFill>
+                  <a:srgbClr val="1E2761"/>
+                </a:solidFill>
+                <a:latin typeface="Montserrat"/>
+              </a:rPr>
+              <a:t>Cuando usa gas de familia normalizada, MOP ≤ 5 bar y sirve a aparatos de gas</a:t>
+            </a:r>
+          </a:p>
+        </p:txBody>
+      </p:sp>
+      <p:sp>
+        <p:nvSpPr>
+          <p:cNvPr id="10" name="TextBox 9"/>
+          <p:cNvSpPr txBox="1"/>
+          <p:nvPr/>
+        </p:nvSpPr>
+        <p:spPr>
+          <a:xfrm>
+            <a:off x="822960" y="3749039"/>
+            <a:ext cx="10515600" cy="2194560"/>
+          </a:xfrm>
+          <a:prstGeom prst="rect">
+            <a:avLst/>
+          </a:prstGeom>
+          <a:noFill/>
+        </p:spPr>
+        <p:txBody>
+          <a:bodyPr wrap="square">
+            <a:spAutoFit/>
+          </a:bodyPr>
+          <a:lstStyle/>
+          <a:p>
+            <a:r>
+              <a:rPr sz="1500" b="1" i="0">
+                <a:solidFill>
+                  <a:srgbClr val="E8801A"/>
+                </a:solidFill>
+                <a:latin typeface="Montserrat"/>
+              </a:rPr>
+              <a:t>Por qué:  </a:t>
+            </a:r>
+            <a:r>
+              <a:rPr sz="1500" b="0" i="0">
+                <a:solidFill>
+                  <a:srgbClr val="1B2330"/>
+                </a:solidFill>
+                <a:latin typeface="Montserrat"/>
+              </a:rPr>
+              <a:t>Deben darse las tres condiciones a la vez: gas de familia normalizada, MOP no superior a 5 bar y destino a aparatos de gas.</a:t>
             </a:r>
           </a:p>
         </p:txBody>
@@ -6136,6 +7141,18 @@
   <p:clrMapOvr>
     <a:masterClrMapping/>
   </p:clrMapOvr>
+  <mc:AlternateContent xmlns:mc="http://schemas.openxmlformats.org/markup-compatibility/2006">
+    <mc:Choice xmlns:p14="http://schemas.microsoft.com/office/powerpoint/2010/main" Requires="p14">
+      <p:transition spd="med" p14:dur="700">
+        <p14:cube dir="r"/>
+      </p:transition>
+    </mc:Choice>
+    <mc:Fallback>
+      <p:transition spd="med">
+        <p:push dir="r"/>
+      </p:transition>
+    </mc:Fallback>
+  </mc:AlternateContent>
 </p:sld>
 </file>
 
@@ -6223,7 +7240,7 @@
                 </a:solidFill>
                 <a:latin typeface="Montserrat"/>
               </a:rPr>
-              <a:t>013 / 015</a:t>
+              <a:t>013 / 023</a:t>
             </a:r>
           </a:p>
         </p:txBody>
@@ -6291,7 +7308,7 @@
                 </a:solidFill>
                 <a:latin typeface="Montserrat"/>
               </a:rPr>
-              <a:t>REQUISITOS · OBJETIVOS</a:t>
+              <a:t>DEFINICIÓN · EXCEPCIONES</a:t>
             </a:r>
           </a:p>
         </p:txBody>
@@ -6325,14 +7342,14 @@
                 </a:solidFill>
                 <a:latin typeface="Montserrat"/>
               </a:rPr>
-              <a:t>Dos objetivos de fondo</a:t>
-            </a:r>
-          </a:p>
-        </p:txBody>
-      </p:sp>
-      <p:sp>
-        <p:nvSpPr>
-          <p:cNvPr id="7" name="Rounded Rectangle 6"/>
+              <a:t>Qué NO es instalación receptora</a:t>
+            </a:r>
+          </a:p>
+        </p:txBody>
+      </p:sp>
+      <p:sp>
+        <p:nvSpPr>
+          <p:cNvPr id="7" name="Rectangle 6"/>
           <p:cNvSpPr/>
           <p:nvPr/>
         </p:nvSpPr>
@@ -6341,7 +7358,7 @@
             <a:off x="868680" y="1627632"/>
             <a:ext cx="2011680" cy="73152"/>
           </a:xfrm>
-          <a:prstGeom prst="roundRect">
+          <a:prstGeom prst="rect">
             <a:avLst/>
           </a:prstGeom>
           <a:solidFill>
@@ -6383,7 +7400,7 @@
         <p:spPr>
           <a:xfrm>
             <a:off x="822960" y="1965960"/>
-            <a:ext cx="4983480" cy="4206240"/>
+            <a:ext cx="5029200" cy="4206240"/>
           </a:xfrm>
           <a:prstGeom prst="rect">
             <a:avLst/>
@@ -6417,7 +7434,7 @@
                 </a:solidFill>
                 <a:latin typeface="Montserrat"/>
               </a:rPr>
-              <a:t>Aportación adecuada de gas</a:t>
+              <a:t>Aparato móvil: envase &lt; 15 kg</a:t>
             </a:r>
           </a:p>
           <a:p>
@@ -6442,7 +7459,7 @@
                 </a:solidFill>
                 <a:latin typeface="Montserrat"/>
               </a:rPr>
-              <a:t>Seguridad en la conducción</a:t>
+              <a:t>Aparato popular: envase ≤ 3 kg</a:t>
             </a:r>
           </a:p>
           <a:p>
@@ -6467,21 +7484,46 @@
                 </a:solidFill>
                 <a:latin typeface="Montserrat"/>
               </a:rPr>
-              <a:t>Todo lo demás sale de aquí</a:t>
-            </a:r>
-          </a:p>
-        </p:txBody>
-      </p:sp>
-      <p:sp>
-        <p:nvSpPr>
-          <p:cNvPr id="9" name="imgph" descr="IMGQ:blue gas flame on burner"/>
+              <a:t>Conectado a un solo aparato</a:t>
+            </a:r>
+          </a:p>
+          <a:p>
+            <a:pPr>
+              <a:spcAft>
+                <a:spcPts val="1100"/>
+              </a:spcAft>
+            </a:pPr>
+            <a:r>
+              <a:rPr sz="1600" b="1" i="0">
+                <a:solidFill>
+                  <a:srgbClr val="E8801A"/>
+                </a:solidFill>
+                <a:latin typeface="Montserrat"/>
+              </a:rPr>
+              <a:t>▸  </a:t>
+            </a:r>
+            <a:r>
+              <a:rPr sz="1600" b="0" i="0">
+                <a:solidFill>
+                  <a:srgbClr val="1B2330"/>
+                </a:solidFill>
+                <a:latin typeface="Montserrat"/>
+              </a:rPr>
+              <a:t>Pero: su conexión sí se regula</a:t>
+            </a:r>
+          </a:p>
+        </p:txBody>
+      </p:sp>
+      <p:sp>
+        <p:nvSpPr>
+          <p:cNvPr id="9" name="imgph" descr="IMGQ:portable butane gas heater with cylinder"/>
           <p:cNvSpPr/>
           <p:nvPr/>
         </p:nvSpPr>
         <p:spPr>
           <a:xfrm>
-            <a:off x="5806440" y="1051560"/>
-            <a:ext cx="5298947" cy="4629150"/>
+            <a:off x="6080760" y="1965960"/>
+            <a:ext cx="5303520" cy="4572000"/>
           </a:xfrm>
           <a:prstGeom prst="roundRect">
             <a:avLst/>
@@ -6526,8 +7568,8 @@
         </p:nvSpPr>
         <p:spPr>
           <a:xfrm>
-            <a:off x="6080760" y="2726055"/>
-            <a:ext cx="4750307" cy="1280160"/>
+            <a:off x="6355080" y="3611880"/>
+            <a:ext cx="4754880" cy="1280160"/>
           </a:xfrm>
           <a:prstGeom prst="rect">
             <a:avLst/>
@@ -6548,7 +7590,7 @@
                 </a:solidFill>
                 <a:latin typeface="Montserrat"/>
               </a:rPr>
-              <a:t>IMAGEN REALISTA</a:t>
+              <a:t>IMAGEN</a:t>
             </a:r>
           </a:p>
           <a:p>
@@ -6560,7 +7602,7 @@
                 </a:solidFill>
                 <a:latin typeface="Montserrat"/>
               </a:rPr>
-              <a:t>blue gas flame on burner</a:t>
+              <a:t>portable butane gas heater with cylinder</a:t>
             </a:r>
           </a:p>
         </p:txBody>
@@ -6570,6 +7612,18 @@
   <p:clrMapOvr>
     <a:masterClrMapping/>
   </p:clrMapOvr>
+  <mc:AlternateContent xmlns:mc="http://schemas.openxmlformats.org/markup-compatibility/2006">
+    <mc:Choice xmlns:p14="http://schemas.microsoft.com/office/powerpoint/2010/main" Requires="p14">
+      <p:transition spd="med" p14:dur="700">
+        <p14:cube dir="l"/>
+      </p:transition>
+    </mc:Choice>
+    <mc:Fallback>
+      <p:transition spd="med">
+        <p:push dir="l"/>
+      </p:transition>
+    </mc:Fallback>
+  </mc:AlternateContent>
 </p:sld>
 </file>
 
@@ -6657,7 +7711,7 @@
                 </a:solidFill>
                 <a:latin typeface="Montserrat"/>
               </a:rPr>
-              <a:t>014 / 015</a:t>
+              <a:t>014 / 023</a:t>
             </a:r>
           </a:p>
         </p:txBody>
@@ -6725,7 +7779,7 @@
                 </a:solidFill>
                 <a:latin typeface="Montserrat"/>
               </a:rPr>
-              <a:t>OBRA · LEGALIZACIÓN</a:t>
+              <a:t>CLASIFICACIÓN · SUMINISTRO</a:t>
             </a:r>
           </a:p>
         </p:txBody>
@@ -6759,14 +7813,14 @@
                 </a:solidFill>
                 <a:latin typeface="Montserrat"/>
               </a:rPr>
-              <a:t>¿Hay boletín o no?</a:t>
-            </a:r>
-          </a:p>
-        </p:txBody>
-      </p:sp>
-      <p:sp>
-        <p:nvSpPr>
-          <p:cNvPr id="7" name="Rounded Rectangle 6"/>
+              <a:t>Tres clases según el gas</a:t>
+            </a:r>
+          </a:p>
+        </p:txBody>
+      </p:sp>
+      <p:sp>
+        <p:nvSpPr>
+          <p:cNvPr id="7" name="Rectangle 6"/>
           <p:cNvSpPr/>
           <p:nvPr/>
         </p:nvSpPr>
@@ -6775,7 +7829,7 @@
             <a:off x="868680" y="1627632"/>
             <a:ext cx="2011680" cy="73152"/>
           </a:xfrm>
-          <a:prstGeom prst="roundRect">
+          <a:prstGeom prst="rect">
             <a:avLst/>
           </a:prstGeom>
           <a:solidFill>
@@ -6816,8 +7870,8 @@
         </p:nvSpPr>
         <p:spPr>
           <a:xfrm>
-            <a:off x="822960" y="1965960"/>
-            <a:ext cx="4983480" cy="4206240"/>
+            <a:off x="6355080" y="1965960"/>
+            <a:ext cx="5029200" cy="4206240"/>
           </a:xfrm>
           <a:prstGeom prst="rect">
             <a:avLst/>
@@ -6851,7 +7905,7 @@
                 </a:solidFill>
                 <a:latin typeface="Montserrat"/>
               </a:rPr>
-              <a:t>Receptora → certificado obligatorio</a:t>
+              <a:t>Canalizado: red de distribución</a:t>
             </a:r>
           </a:p>
           <a:p>
@@ -6876,7 +7930,7 @@
                 </a:solidFill>
                 <a:latin typeface="Montserrat"/>
               </a:rPr>
-              <a:t>Lo firma la empresa de categoría B</a:t>
+              <a:t>Granel: depósito fijo o &gt; 15 kg</a:t>
             </a:r>
           </a:p>
           <a:p>
@@ -6901,46 +7955,21 @@
                 </a:solidFill>
                 <a:latin typeface="Montserrat"/>
               </a:rPr>
-              <a:t>Se entrega a la distribuidora</a:t>
-            </a:r>
-          </a:p>
-          <a:p>
-            <a:pPr>
-              <a:spcAft>
-                <a:spcPts val="1100"/>
-              </a:spcAft>
-            </a:pPr>
-            <a:r>
-              <a:rPr sz="1600" b="1" i="0">
-                <a:solidFill>
-                  <a:srgbClr val="E8801A"/>
-                </a:solidFill>
-                <a:latin typeface="Montserrat"/>
-              </a:rPr>
-              <a:t>▸  </a:t>
-            </a:r>
-            <a:r>
-              <a:rPr sz="1600" b="0" i="0">
-                <a:solidFill>
-                  <a:srgbClr val="1B2330"/>
-                </a:solidFill>
-                <a:latin typeface="Montserrat"/>
-              </a:rPr>
-              <a:t>Sin él, no hay suministro</a:t>
-            </a:r>
-          </a:p>
-        </p:txBody>
-      </p:sp>
-      <p:sp>
-        <p:nvSpPr>
-          <p:cNvPr id="9" name="imgph" descr="IMGQ:technician filling installation certificate paperwork"/>
+              <a:t>Envases: envase &lt; 15 kg</a:t>
+            </a:r>
+          </a:p>
+        </p:txBody>
+      </p:sp>
+      <p:sp>
+        <p:nvSpPr>
+          <p:cNvPr id="9" name="imgph" descr="IMGQ:outdoor LPG storage tank in garden"/>
           <p:cNvSpPr/>
           <p:nvPr/>
         </p:nvSpPr>
         <p:spPr>
           <a:xfrm>
-            <a:off x="5806440" y="1051560"/>
-            <a:ext cx="5298947" cy="4629150"/>
+            <a:off x="822960" y="1965960"/>
+            <a:ext cx="5303520" cy="4572000"/>
           </a:xfrm>
           <a:prstGeom prst="roundRect">
             <a:avLst/>
@@ -6985,8 +8014,8 @@
         </p:nvSpPr>
         <p:spPr>
           <a:xfrm>
-            <a:off x="6080760" y="2726055"/>
-            <a:ext cx="4750307" cy="1280160"/>
+            <a:off x="1097280" y="3611880"/>
+            <a:ext cx="4754880" cy="1280160"/>
           </a:xfrm>
           <a:prstGeom prst="rect">
             <a:avLst/>
@@ -7007,7 +8036,7 @@
                 </a:solidFill>
                 <a:latin typeface="Montserrat"/>
               </a:rPr>
-              <a:t>IMAGEN REALISTA</a:t>
+              <a:t>IMAGEN</a:t>
             </a:r>
           </a:p>
           <a:p>
@@ -7019,7 +8048,7 @@
                 </a:solidFill>
                 <a:latin typeface="Montserrat"/>
               </a:rPr>
-              <a:t>technician filling installation certificate paperwork</a:t>
+              <a:t>outdoor LPG storage tank in garden</a:t>
             </a:r>
           </a:p>
         </p:txBody>
@@ -7029,6 +8058,18 @@
   <p:clrMapOvr>
     <a:masterClrMapping/>
   </p:clrMapOvr>
+  <mc:AlternateContent xmlns:mc="http://schemas.openxmlformats.org/markup-compatibility/2006">
+    <mc:Choice xmlns:p14="http://schemas.microsoft.com/office/powerpoint/2010/main" Requires="p14">
+      <p:transition spd="med" p14:dur="700">
+        <p14:cube dir="r"/>
+      </p:transition>
+    </mc:Choice>
+    <mc:Fallback>
+      <p:transition spd="med">
+        <p:push dir="r"/>
+      </p:transition>
+    </mc:Fallback>
+  </mc:AlternateContent>
 </p:sld>
 </file>
 
@@ -7057,7 +8098,7 @@
             <a:avLst/>
           </a:prstGeom>
           <a:solidFill>
-            <a:srgbClr val="1E2761"/>
+            <a:srgbClr val="FFFFFF"/>
           </a:solidFill>
           <a:ln>
             <a:noFill/>
@@ -7094,8 +8135,8 @@
         </p:nvSpPr>
         <p:spPr>
           <a:xfrm>
-            <a:off x="822960" y="640080"/>
-            <a:ext cx="10515600" cy="457200"/>
+            <a:off x="10607040" y="320040"/>
+            <a:ext cx="1371600" cy="365760"/>
           </a:xfrm>
           <a:prstGeom prst="rect">
             <a:avLst/>
@@ -7108,30 +8149,133 @@
           </a:bodyPr>
           <a:lstStyle/>
           <a:p>
-            <a:r>
-              <a:rPr sz="1400" b="1" i="0">
-                <a:solidFill>
-                  <a:srgbClr val="F4A24C"/>
-                </a:solidFill>
-                <a:latin typeface="Montserrat"/>
-              </a:rPr>
-              <a:t>LO QUE YA DOMINAS</a:t>
-            </a:r>
-          </a:p>
-        </p:txBody>
-      </p:sp>
-      <p:sp>
-        <p:nvSpPr>
-          <p:cNvPr id="4" name="Rounded Rectangle 3"/>
+            <a:pPr algn="r"/>
+            <a:r>
+              <a:rPr sz="1000" b="1" i="0">
+                <a:solidFill>
+                  <a:srgbClr val="64748B"/>
+                </a:solidFill>
+                <a:latin typeface="Montserrat"/>
+              </a:rPr>
+              <a:t>015 / 023</a:t>
+            </a:r>
+          </a:p>
+        </p:txBody>
+      </p:sp>
+      <p:sp>
+        <p:nvSpPr>
+          <p:cNvPr id="4" name="TextBox 3"/>
+          <p:cNvSpPr txBox="1"/>
+          <p:nvPr/>
+        </p:nvSpPr>
+        <p:spPr>
+          <a:xfrm>
+            <a:off x="457200" y="6419088"/>
+            <a:ext cx="8229600" cy="365760"/>
+          </a:xfrm>
+          <a:prstGeom prst="rect">
+            <a:avLst/>
+          </a:prstGeom>
+          <a:noFill/>
+        </p:spPr>
+        <p:txBody>
+          <a:bodyPr wrap="square">
+            <a:spAutoFit/>
+          </a:bodyPr>
+          <a:lstStyle/>
+          <a:p>
+            <a:r>
+              <a:rPr sz="900" b="0" i="0">
+                <a:solidFill>
+                  <a:srgbClr val="64748B"/>
+                </a:solidFill>
+                <a:latin typeface="Montserrat"/>
+              </a:rPr>
+              <a:t>Curso Gas B · Tema 09 · UNE 60670-1 y -2</a:t>
+            </a:r>
+          </a:p>
+        </p:txBody>
+      </p:sp>
+      <p:sp>
+        <p:nvSpPr>
+          <p:cNvPr id="5" name="TextBox 4"/>
+          <p:cNvSpPr txBox="1"/>
+          <p:nvPr/>
+        </p:nvSpPr>
+        <p:spPr>
+          <a:xfrm>
+            <a:off x="822960" y="411480"/>
+            <a:ext cx="10058400" cy="365760"/>
+          </a:xfrm>
+          <a:prstGeom prst="rect">
+            <a:avLst/>
+          </a:prstGeom>
+          <a:noFill/>
+        </p:spPr>
+        <p:txBody>
+          <a:bodyPr wrap="square">
+            <a:spAutoFit/>
+          </a:bodyPr>
+          <a:lstStyle/>
+          <a:p>
+            <a:r>
+              <a:rPr sz="1300" b="1" i="0">
+                <a:solidFill>
+                  <a:srgbClr val="E8801A"/>
+                </a:solidFill>
+                <a:latin typeface="Montserrat"/>
+              </a:rPr>
+              <a:t>CLASIFICACIÓN · SUMINISTRO</a:t>
+            </a:r>
+          </a:p>
+        </p:txBody>
+      </p:sp>
+      <p:sp>
+        <p:nvSpPr>
+          <p:cNvPr id="6" name="TextBox 5"/>
+          <p:cNvSpPr txBox="1"/>
+          <p:nvPr/>
+        </p:nvSpPr>
+        <p:spPr>
+          <a:xfrm>
+            <a:off x="822960" y="777240"/>
+            <a:ext cx="10515600" cy="822960"/>
+          </a:xfrm>
+          <a:prstGeom prst="rect">
+            <a:avLst/>
+          </a:prstGeom>
+          <a:noFill/>
+        </p:spPr>
+        <p:txBody>
+          <a:bodyPr wrap="square">
+            <a:spAutoFit/>
+          </a:bodyPr>
+          <a:lstStyle/>
+          <a:p>
+            <a:r>
+              <a:rPr sz="2600" b="1" i="0">
+                <a:solidFill>
+                  <a:srgbClr val="1E2761"/>
+                </a:solidFill>
+                <a:latin typeface="Montserrat"/>
+              </a:rPr>
+              <a:t>Las tres clases de suministro</a:t>
+            </a:r>
+          </a:p>
+        </p:txBody>
+      </p:sp>
+      <p:sp>
+        <p:nvSpPr>
+          <p:cNvPr id="7" name="Rectangle 6"/>
           <p:cNvSpPr/>
           <p:nvPr/>
         </p:nvSpPr>
         <p:spPr>
           <a:xfrm>
-            <a:off x="868680" y="1051560"/>
-            <a:ext cx="1463040" cy="82296"/>
-          </a:xfrm>
-          <a:prstGeom prst="roundRect">
+            <a:off x="868680" y="1481328"/>
+            <a:ext cx="2011680" cy="73152"/>
+          </a:xfrm>
+          <a:prstGeom prst="rect">
             <a:avLst/>
           </a:prstGeom>
           <a:solidFill>
@@ -7164,16 +8308,272 @@
           </a:p>
         </p:txBody>
       </p:sp>
-      <p:sp>
-        <p:nvSpPr>
-          <p:cNvPr id="5" name="TextBox 4"/>
+      <p:graphicFrame>
+        <p:nvGraphicFramePr>
+          <p:cNvPr id="8" name="Table 7"/>
+          <p:cNvGraphicFramePr>
+            <a:graphicFrameLocks noGrp="1"/>
+          </p:cNvGraphicFramePr>
+          <p:nvPr/>
+        </p:nvGraphicFramePr>
+        <p:xfrm>
+          <a:off x="548640" y="1783080"/>
+          <a:ext cx="11091672" cy="4023360"/>
+        </p:xfrm>
+        <a:graphic>
+          <a:graphicData uri="http://schemas.openxmlformats.org/drawingml/2006/table">
+            <a:tbl>
+              <a:tblPr firstRow="1" bandRow="1">
+                <a:tableStyleId>{5C22544A-7EE6-4342-B048-85BDC9FD1C3A}</a:tableStyleId>
+              </a:tblPr>
+              <a:tblGrid>
+                <a:gridCol w="5545836"/>
+                <a:gridCol w="5545836"/>
+              </a:tblGrid>
+              <a:tr h="1005840">
+                <a:tc>
+                  <a:txBody>
+                    <a:bodyPr/>
+                    <a:lstStyle/>
+                    <a:p>
+                      <a:r>
+                        <a:rPr sz="1200" b="1" i="0">
+                          <a:solidFill>
+                            <a:srgbClr val="FFFFFF"/>
+                          </a:solidFill>
+                          <a:latin typeface="Montserrat"/>
+                        </a:rPr>
+                        <a:t>Clase</a:t>
+                      </a:r>
+                    </a:p>
+                  </a:txBody>
+                  <a:tcPr>
+                    <a:solidFill>
+                      <a:srgbClr val="1E2761"/>
+                    </a:solidFill>
+                  </a:tcPr>
+                </a:tc>
+                <a:tc>
+                  <a:txBody>
+                    <a:bodyPr/>
+                    <a:lstStyle/>
+                    <a:p>
+                      <a:r>
+                        <a:rPr sz="1200" b="1" i="0">
+                          <a:solidFill>
+                            <a:srgbClr val="FFFFFF"/>
+                          </a:solidFill>
+                          <a:latin typeface="Montserrat"/>
+                        </a:rPr>
+                        <a:t>Origen del gas</a:t>
+                      </a:r>
+                    </a:p>
+                  </a:txBody>
+                  <a:tcPr>
+                    <a:solidFill>
+                      <a:srgbClr val="1E2761"/>
+                    </a:solidFill>
+                  </a:tcPr>
+                </a:tc>
+              </a:tr>
+              <a:tr h="1005840">
+                <a:tc>
+                  <a:txBody>
+                    <a:bodyPr/>
+                    <a:lstStyle/>
+                    <a:p>
+                      <a:r>
+                        <a:rPr sz="1200" b="0" i="0">
+                          <a:solidFill>
+                            <a:srgbClr val="1B2330"/>
+                          </a:solidFill>
+                          <a:latin typeface="Montserrat"/>
+                        </a:rPr>
+                        <a:t>Canalizado</a:t>
+                      </a:r>
+                    </a:p>
+                  </a:txBody>
+                  <a:tcPr>
+                    <a:solidFill>
+                      <a:srgbClr val="F6F8FC"/>
+                    </a:solidFill>
+                  </a:tcPr>
+                </a:tc>
+                <a:tc>
+                  <a:txBody>
+                    <a:bodyPr/>
+                    <a:lstStyle/>
+                    <a:p>
+                      <a:r>
+                        <a:rPr sz="1200" b="0" i="0">
+                          <a:solidFill>
+                            <a:srgbClr val="1B2330"/>
+                          </a:solidFill>
+                          <a:latin typeface="Montserrat"/>
+                        </a:rPr>
+                        <a:t>Suministradas desde una red de distribución</a:t>
+                      </a:r>
+                    </a:p>
+                  </a:txBody>
+                  <a:tcPr>
+                    <a:solidFill>
+                      <a:srgbClr val="F6F8FC"/>
+                    </a:solidFill>
+                  </a:tcPr>
+                </a:tc>
+              </a:tr>
+              <a:tr h="1005840">
+                <a:tc>
+                  <a:txBody>
+                    <a:bodyPr/>
+                    <a:lstStyle/>
+                    <a:p>
+                      <a:r>
+                        <a:rPr sz="1200" b="0" i="0">
+                          <a:solidFill>
+                            <a:srgbClr val="1B2330"/>
+                          </a:solidFill>
+                          <a:latin typeface="Montserrat"/>
+                        </a:rPr>
+                        <a:t>Granel</a:t>
+                      </a:r>
+                    </a:p>
+                  </a:txBody>
+                  <a:tcPr>
+                    <a:solidFill>
+                      <a:srgbClr val="FFFFFF"/>
+                    </a:solidFill>
+                  </a:tcPr>
+                </a:tc>
+                <a:tc>
+                  <a:txBody>
+                    <a:bodyPr/>
+                    <a:lstStyle/>
+                    <a:p>
+                      <a:r>
+                        <a:rPr sz="1200" b="0" i="0">
+                          <a:solidFill>
+                            <a:srgbClr val="1B2330"/>
+                          </a:solidFill>
+                          <a:latin typeface="Montserrat"/>
+                        </a:rPr>
+                        <a:t>Suministradas desde depósitos de GLP fijos (granel) o envases de carga unitaria superior a 15 kg</a:t>
+                      </a:r>
+                    </a:p>
+                  </a:txBody>
+                  <a:tcPr>
+                    <a:solidFill>
+                      <a:srgbClr val="FFFFFF"/>
+                    </a:solidFill>
+                  </a:tcPr>
+                </a:tc>
+              </a:tr>
+              <a:tr h="1005840">
+                <a:tc>
+                  <a:txBody>
+                    <a:bodyPr/>
+                    <a:lstStyle/>
+                    <a:p>
+                      <a:r>
+                        <a:rPr sz="1200" b="0" i="0">
+                          <a:solidFill>
+                            <a:srgbClr val="1B2330"/>
+                          </a:solidFill>
+                          <a:latin typeface="Montserrat"/>
+                        </a:rPr>
+                        <a:t>Envases</a:t>
+                      </a:r>
+                    </a:p>
+                  </a:txBody>
+                  <a:tcPr>
+                    <a:solidFill>
+                      <a:srgbClr val="F6F8FC"/>
+                    </a:solidFill>
+                  </a:tcPr>
+                </a:tc>
+                <a:tc>
+                  <a:txBody>
+                    <a:bodyPr/>
+                    <a:lstStyle/>
+                    <a:p>
+                      <a:r>
+                        <a:rPr sz="1200" b="0" i="0">
+                          <a:solidFill>
+                            <a:srgbClr val="1B2330"/>
+                          </a:solidFill>
+                          <a:latin typeface="Montserrat"/>
+                        </a:rPr>
+                        <a:t>Suministradas desde envases de GLP de carga unitaria inferior a 15 kg</a:t>
+                      </a:r>
+                    </a:p>
+                  </a:txBody>
+                  <a:tcPr>
+                    <a:solidFill>
+                      <a:srgbClr val="F6F8FC"/>
+                    </a:solidFill>
+                  </a:tcPr>
+                </a:tc>
+              </a:tr>
+            </a:tbl>
+          </a:graphicData>
+        </a:graphic>
+      </p:graphicFrame>
+      <p:sp>
+        <p:nvSpPr>
+          <p:cNvPr id="9" name="Rounded Rectangle 8"/>
+          <p:cNvSpPr/>
+          <p:nvPr/>
+        </p:nvSpPr>
+        <p:spPr>
+          <a:xfrm>
+            <a:off x="548640" y="5943600"/>
+            <a:ext cx="11091672" cy="384048"/>
+          </a:xfrm>
+          <a:prstGeom prst="roundRect">
+            <a:avLst/>
+          </a:prstGeom>
+          <a:solidFill>
+            <a:srgbClr val="F3F6FB"/>
+          </a:solidFill>
+          <a:ln w="12700">
+            <a:solidFill>
+              <a:srgbClr val="D7DEEA"/>
+            </a:solidFill>
+          </a:ln>
+          <a:effectLst/>
+        </p:spPr>
+        <p:style>
+          <a:lnRef idx="1">
+            <a:schemeClr val="accent1"/>
+          </a:lnRef>
+          <a:fillRef idx="3">
+            <a:schemeClr val="accent1"/>
+          </a:fillRef>
+          <a:effectRef idx="2">
+            <a:schemeClr val="accent1"/>
+          </a:effectRef>
+          <a:fontRef idx="minor">
+            <a:schemeClr val="lt1"/>
+          </a:fontRef>
+        </p:style>
+        <p:txBody>
+          <a:bodyPr rtlCol="0" anchor="ctr"/>
+          <a:lstStyle/>
+          <a:p>
+            <a:pPr algn="ctr"/>
+          </a:p>
+        </p:txBody>
+      </p:sp>
+      <p:sp>
+        <p:nvSpPr>
+          <p:cNvPr id="10" name="TextBox 9"/>
           <p:cNvSpPr txBox="1"/>
           <p:nvPr/>
         </p:nvSpPr>
         <p:spPr>
           <a:xfrm>
-            <a:off x="822960" y="1234440"/>
-            <a:ext cx="10515600" cy="1097280"/>
+            <a:off x="731520" y="5961888"/>
+            <a:ext cx="10789920" cy="365760"/>
           </a:xfrm>
           <a:prstGeom prst="rect">
             <a:avLst/>
@@ -7187,27 +8587,110 @@
           <a:lstStyle/>
           <a:p>
             <a:r>
-              <a:rPr sz="3400" b="1" i="0">
-                <a:solidFill>
-                  <a:srgbClr val="FFFFFF"/>
-                </a:solidFill>
-                <a:latin typeface="Montserrat"/>
-              </a:rPr>
-              <a:t>Ya tienes el mapa de la norma</a:t>
-            </a:r>
-          </a:p>
-        </p:txBody>
-      </p:sp>
-      <p:sp>
-        <p:nvSpPr>
-          <p:cNvPr id="6" name="TextBox 5"/>
+              <a:rPr sz="1100" b="1" i="0">
+                <a:solidFill>
+                  <a:srgbClr val="E8801A"/>
+                </a:solidFill>
+                <a:latin typeface="Montserrat"/>
+              </a:rPr>
+              <a:t>Qué significa:  </a:t>
+            </a:r>
+            <a:r>
+              <a:rPr sz="1100" b="0" i="0">
+                <a:solidFill>
+                  <a:srgbClr val="1B2330"/>
+                </a:solidFill>
+                <a:latin typeface="Montserrat"/>
+              </a:rPr>
+              <a:t>Clasifica la instalación según cómo llega el gas: por red (canalizado), desde depósito fijo o envase grande (granel) o desde bombonas pequeñas (envases).</a:t>
+            </a:r>
+          </a:p>
+        </p:txBody>
+      </p:sp>
+    </p:spTree>
+  </p:cSld>
+  <p:clrMapOvr>
+    <a:masterClrMapping/>
+  </p:clrMapOvr>
+  <mc:AlternateContent xmlns:mc="http://schemas.openxmlformats.org/markup-compatibility/2006">
+    <mc:Choice xmlns:p14="http://schemas.microsoft.com/office/powerpoint/2010/main" Requires="p14">
+      <p:transition spd="med" p14:dur="700">
+        <p14:cube dir="l"/>
+      </p:transition>
+    </mc:Choice>
+    <mc:Fallback>
+      <p:transition spd="med">
+        <p:push dir="l"/>
+      </p:transition>
+    </mc:Fallback>
+  </mc:AlternateContent>
+</p:sld>
+</file>
+
+<file path=ppt/slides/slide16.xml><?xml version="1.0" encoding="utf-8"?>
+<p:sld xmlns:a="http://schemas.openxmlformats.org/drawingml/2006/main" xmlns:p="http://schemas.openxmlformats.org/presentationml/2006/main" xmlns:r="http://schemas.openxmlformats.org/officeDocument/2006/relationships">
+  <p:cSld>
+    <p:spTree>
+      <p:nvGrpSpPr>
+        <p:cNvPr id="1" name=""/>
+        <p:cNvGrpSpPr/>
+        <p:nvPr/>
+      </p:nvGrpSpPr>
+      <p:grpSpPr/>
+      <p:sp>
+        <p:nvSpPr>
+          <p:cNvPr id="2" name="Rectangle 1"/>
+          <p:cNvSpPr/>
+          <p:nvPr/>
+        </p:nvSpPr>
+        <p:spPr>
+          <a:xfrm>
+            <a:off x="0" y="0"/>
+            <a:ext cx="12191695" cy="6858000"/>
+          </a:xfrm>
+          <a:prstGeom prst="rect">
+            <a:avLst/>
+          </a:prstGeom>
+          <a:solidFill>
+            <a:srgbClr val="FFFFFF"/>
+          </a:solidFill>
+          <a:ln>
+            <a:noFill/>
+          </a:ln>
+          <a:effectLst/>
+        </p:spPr>
+        <p:style>
+          <a:lnRef idx="1">
+            <a:schemeClr val="accent1"/>
+          </a:lnRef>
+          <a:fillRef idx="3">
+            <a:schemeClr val="accent1"/>
+          </a:fillRef>
+          <a:effectRef idx="2">
+            <a:schemeClr val="accent1"/>
+          </a:effectRef>
+          <a:fontRef idx="minor">
+            <a:schemeClr val="lt1"/>
+          </a:fontRef>
+        </p:style>
+        <p:txBody>
+          <a:bodyPr rtlCol="0" anchor="ctr"/>
+          <a:lstStyle/>
+          <a:p>
+            <a:pPr algn="ctr"/>
+          </a:p>
+        </p:txBody>
+      </p:sp>
+      <p:sp>
+        <p:nvSpPr>
+          <p:cNvPr id="3" name="TextBox 2"/>
           <p:cNvSpPr txBox="1"/>
           <p:nvPr/>
         </p:nvSpPr>
         <p:spPr>
           <a:xfrm>
-            <a:off x="822960" y="2606040"/>
-            <a:ext cx="10515600" cy="2743200"/>
+            <a:off x="10607040" y="320040"/>
+            <a:ext cx="1371600" cy="365760"/>
           </a:xfrm>
           <a:prstGeom prst="rect">
             <a:avLst/>
@@ -7220,119 +8703,65 @@
           </a:bodyPr>
           <a:lstStyle/>
           <a:p>
-            <a:pPr>
-              <a:spcAft>
-                <a:spcPts val="1200"/>
-              </a:spcAft>
-            </a:pPr>
-            <a:r>
-              <a:rPr sz="2000" b="1" i="0">
-                <a:solidFill>
-                  <a:srgbClr val="F4A24C"/>
-                </a:solidFill>
-                <a:latin typeface="Montserrat"/>
-              </a:rPr>
-              <a:t>✓  </a:t>
-            </a:r>
-            <a:r>
-              <a:rPr sz="1900" b="0" i="0">
-                <a:solidFill>
-                  <a:srgbClr val="FFFFFF"/>
-                </a:solidFill>
-                <a:latin typeface="Montserrat"/>
-              </a:rPr>
-              <a:t>La UNE 60670: 13 partes y MOP ≤ 5 bar</a:t>
-            </a:r>
-          </a:p>
-          <a:p>
-            <a:pPr>
-              <a:spcAft>
-                <a:spcPts val="1200"/>
-              </a:spcAft>
-            </a:pPr>
-            <a:r>
-              <a:rPr sz="2000" b="1" i="0">
-                <a:solidFill>
-                  <a:srgbClr val="F4A24C"/>
-                </a:solidFill>
-                <a:latin typeface="Montserrat"/>
-              </a:rPr>
-              <a:t>✓  </a:t>
-            </a:r>
-            <a:r>
-              <a:rPr sz="1900" b="0" i="0">
-                <a:solidFill>
-                  <a:srgbClr val="FFFFFF"/>
-                </a:solidFill>
-                <a:latin typeface="Montserrat"/>
-              </a:rPr>
-              <a:t>Receptora: tres condiciones y el límite de 15 kg</a:t>
-            </a:r>
-          </a:p>
-          <a:p>
-            <a:pPr>
-              <a:spcAft>
-                <a:spcPts val="1200"/>
-              </a:spcAft>
-            </a:pPr>
-            <a:r>
-              <a:rPr sz="2000" b="1" i="0">
-                <a:solidFill>
-                  <a:srgbClr val="F4A24C"/>
-                </a:solidFill>
-                <a:latin typeface="Montserrat"/>
-              </a:rPr>
-              <a:t>✓  </a:t>
-            </a:r>
-            <a:r>
-              <a:rPr sz="1900" b="0" i="0">
-                <a:solidFill>
-                  <a:srgbClr val="FFFFFF"/>
-                </a:solidFill>
-                <a:latin typeface="Montserrat"/>
-              </a:rPr>
-              <a:t>Tres clases y tres partes encajadas</a:t>
-            </a:r>
-          </a:p>
-          <a:p>
-            <a:pPr>
-              <a:spcAft>
-                <a:spcPts val="1200"/>
-              </a:spcAft>
-            </a:pPr>
-            <a:r>
-              <a:rPr sz="2000" b="1" i="0">
-                <a:solidFill>
-                  <a:srgbClr val="F4A24C"/>
-                </a:solidFill>
-                <a:latin typeface="Montserrat"/>
-              </a:rPr>
-              <a:t>✓  </a:t>
-            </a:r>
-            <a:r>
-              <a:rPr sz="1900" b="0" i="0">
-                <a:solidFill>
-                  <a:srgbClr val="FFFFFF"/>
-                </a:solidFill>
-                <a:latin typeface="Montserrat"/>
-              </a:rPr>
-              <a:t>Todo busca gas suficiente y seguro</a:t>
-            </a:r>
-          </a:p>
-        </p:txBody>
-      </p:sp>
-      <p:sp>
-        <p:nvSpPr>
-          <p:cNvPr id="7" name="Rounded Rectangle 6"/>
+            <a:pPr algn="r"/>
+            <a:r>
+              <a:rPr sz="1000" b="1" i="0">
+                <a:solidFill>
+                  <a:srgbClr val="64748B"/>
+                </a:solidFill>
+                <a:latin typeface="Montserrat"/>
+              </a:rPr>
+              <a:t>016 / 023</a:t>
+            </a:r>
+          </a:p>
+        </p:txBody>
+      </p:sp>
+      <p:sp>
+        <p:nvSpPr>
+          <p:cNvPr id="4" name="TextBox 3"/>
+          <p:cNvSpPr txBox="1"/>
+          <p:nvPr/>
+        </p:nvSpPr>
+        <p:spPr>
+          <a:xfrm>
+            <a:off x="457200" y="6419088"/>
+            <a:ext cx="8229600" cy="365760"/>
+          </a:xfrm>
+          <a:prstGeom prst="rect">
+            <a:avLst/>
+          </a:prstGeom>
+          <a:noFill/>
+        </p:spPr>
+        <p:txBody>
+          <a:bodyPr wrap="square">
+            <a:spAutoFit/>
+          </a:bodyPr>
+          <a:lstStyle/>
+          <a:p>
+            <a:r>
+              <a:rPr sz="900" b="0" i="0">
+                <a:solidFill>
+                  <a:srgbClr val="64748B"/>
+                </a:solidFill>
+                <a:latin typeface="Montserrat"/>
+              </a:rPr>
+              <a:t>Curso Gas B · Tema 09 · UNE 60670-1 y -2</a:t>
+            </a:r>
+          </a:p>
+        </p:txBody>
+      </p:sp>
+      <p:sp>
+        <p:nvSpPr>
+          <p:cNvPr id="5" name="Rectangle 4"/>
           <p:cNvSpPr/>
           <p:nvPr/>
         </p:nvSpPr>
         <p:spPr>
           <a:xfrm>
-            <a:off x="822960" y="5532120"/>
-            <a:ext cx="10515600" cy="822960"/>
-          </a:xfrm>
-          <a:prstGeom prst="roundRect">
+            <a:off x="0" y="0"/>
+            <a:ext cx="12191695" cy="1143000"/>
+          </a:xfrm>
+          <a:prstGeom prst="rect">
             <a:avLst/>
           </a:prstGeom>
           <a:solidFill>
@@ -7367,14 +8796,14 @@
       </p:sp>
       <p:sp>
         <p:nvSpPr>
-          <p:cNvPr id="8" name="TextBox 7"/>
+          <p:cNvPr id="6" name="TextBox 5"/>
           <p:cNvSpPr txBox="1"/>
           <p:nvPr/>
         </p:nvSpPr>
         <p:spPr>
           <a:xfrm>
-            <a:off x="1051560" y="5623560"/>
-            <a:ext cx="10058400" cy="640080"/>
+            <a:off x="822960" y="274320"/>
+            <a:ext cx="10515600" cy="640080"/>
           </a:xfrm>
           <a:prstGeom prst="rect">
             <a:avLst/>
@@ -7388,13 +8817,683 @@
           <a:lstStyle/>
           <a:p>
             <a:r>
-              <a:rPr sz="1500" b="1" i="1">
+              <a:rPr sz="2400" b="1" i="0">
+                <a:solidFill>
+                  <a:srgbClr val="FFFFFF"/>
+                </a:solidFill>
+                <a:latin typeface="Montserrat"/>
+              </a:rPr>
+              <a:t>⚡  PREGUNTA RÁPIDA</a:t>
+            </a:r>
+          </a:p>
+        </p:txBody>
+      </p:sp>
+      <p:sp>
+        <p:nvSpPr>
+          <p:cNvPr id="7" name="TextBox 6"/>
+          <p:cNvSpPr txBox="1"/>
+          <p:nvPr/>
+        </p:nvSpPr>
+        <p:spPr>
+          <a:xfrm>
+            <a:off x="822960" y="1508760"/>
+            <a:ext cx="10515600" cy="1371600"/>
+          </a:xfrm>
+          <a:prstGeom prst="rect">
+            <a:avLst/>
+          </a:prstGeom>
+          <a:noFill/>
+        </p:spPr>
+        <p:txBody>
+          <a:bodyPr wrap="square">
+            <a:spAutoFit/>
+          </a:bodyPr>
+          <a:lstStyle/>
+          <a:p>
+            <a:r>
+              <a:rPr sz="2400" b="1" i="0">
                 <a:solidFill>
                   <a:srgbClr val="1E2761"/>
                 </a:solidFill>
                 <a:latin typeface="Montserrat"/>
               </a:rPr>
-              <a:t>Hoy ya eres más gasista que ayer. Vamos a por el diccionario.</a:t>
+              <a:t>Un depósito fijo de GLP en la parcela, ¿a qué clase de suministro corresponde?</a:t>
+            </a:r>
+          </a:p>
+        </p:txBody>
+      </p:sp>
+      <p:sp>
+        <p:nvSpPr>
+          <p:cNvPr id="8" name="Rounded Rectangle 7"/>
+          <p:cNvSpPr/>
+          <p:nvPr/>
+        </p:nvSpPr>
+        <p:spPr>
+          <a:xfrm>
+            <a:off x="822960" y="3291840"/>
+            <a:ext cx="4983480" cy="1143000"/>
+          </a:xfrm>
+          <a:prstGeom prst="roundRect">
+            <a:avLst/>
+          </a:prstGeom>
+          <a:solidFill>
+            <a:srgbClr val="F3F6FB"/>
+          </a:solidFill>
+          <a:ln w="12700">
+            <a:solidFill>
+              <a:srgbClr val="C7D2E6"/>
+            </a:solidFill>
+          </a:ln>
+          <a:effectLst/>
+        </p:spPr>
+        <p:style>
+          <a:lnRef idx="1">
+            <a:schemeClr val="accent1"/>
+          </a:lnRef>
+          <a:fillRef idx="3">
+            <a:schemeClr val="accent1"/>
+          </a:fillRef>
+          <a:effectRef idx="2">
+            <a:schemeClr val="accent1"/>
+          </a:effectRef>
+          <a:fontRef idx="minor">
+            <a:schemeClr val="lt1"/>
+          </a:fontRef>
+        </p:style>
+        <p:txBody>
+          <a:bodyPr rtlCol="0" anchor="ctr"/>
+          <a:lstStyle/>
+          <a:p>
+            <a:pPr algn="ctr"/>
+          </a:p>
+        </p:txBody>
+      </p:sp>
+      <p:sp>
+        <p:nvSpPr>
+          <p:cNvPr id="9" name="Rectangle 8"/>
+          <p:cNvSpPr/>
+          <p:nvPr/>
+        </p:nvSpPr>
+        <p:spPr>
+          <a:xfrm>
+            <a:off x="822960" y="3291840"/>
+            <a:ext cx="640080" cy="1143000"/>
+          </a:xfrm>
+          <a:prstGeom prst="rect">
+            <a:avLst/>
+          </a:prstGeom>
+          <a:solidFill>
+            <a:srgbClr val="1E2761"/>
+          </a:solidFill>
+          <a:ln>
+            <a:noFill/>
+          </a:ln>
+          <a:effectLst/>
+        </p:spPr>
+        <p:style>
+          <a:lnRef idx="1">
+            <a:schemeClr val="accent1"/>
+          </a:lnRef>
+          <a:fillRef idx="3">
+            <a:schemeClr val="accent1"/>
+          </a:fillRef>
+          <a:effectRef idx="2">
+            <a:schemeClr val="accent1"/>
+          </a:effectRef>
+          <a:fontRef idx="minor">
+            <a:schemeClr val="lt1"/>
+          </a:fontRef>
+        </p:style>
+        <p:txBody>
+          <a:bodyPr rtlCol="0" anchor="ctr"/>
+          <a:lstStyle/>
+          <a:p>
+            <a:pPr algn="ctr"/>
+          </a:p>
+        </p:txBody>
+      </p:sp>
+      <p:sp>
+        <p:nvSpPr>
+          <p:cNvPr id="10" name="TextBox 9"/>
+          <p:cNvSpPr txBox="1"/>
+          <p:nvPr/>
+        </p:nvSpPr>
+        <p:spPr>
+          <a:xfrm>
+            <a:off x="822960" y="3611880"/>
+            <a:ext cx="640080" cy="548640"/>
+          </a:xfrm>
+          <a:prstGeom prst="rect">
+            <a:avLst/>
+          </a:prstGeom>
+          <a:noFill/>
+        </p:spPr>
+        <p:txBody>
+          <a:bodyPr wrap="square">
+            <a:spAutoFit/>
+          </a:bodyPr>
+          <a:lstStyle/>
+          <a:p>
+            <a:pPr algn="ctr"/>
+            <a:r>
+              <a:rPr sz="2200" b="1" i="0">
+                <a:solidFill>
+                  <a:srgbClr val="FFFFFF"/>
+                </a:solidFill>
+                <a:latin typeface="Montserrat"/>
+              </a:rPr>
+              <a:t>A</a:t>
+            </a:r>
+          </a:p>
+        </p:txBody>
+      </p:sp>
+      <p:sp>
+        <p:nvSpPr>
+          <p:cNvPr id="11" name="TextBox 10"/>
+          <p:cNvSpPr txBox="1"/>
+          <p:nvPr/>
+        </p:nvSpPr>
+        <p:spPr>
+          <a:xfrm>
+            <a:off x="1600200" y="3474720"/>
+            <a:ext cx="4114800" cy="868680"/>
+          </a:xfrm>
+          <a:prstGeom prst="rect">
+            <a:avLst/>
+          </a:prstGeom>
+          <a:noFill/>
+        </p:spPr>
+        <p:txBody>
+          <a:bodyPr wrap="square">
+            <a:spAutoFit/>
+          </a:bodyPr>
+          <a:lstStyle/>
+          <a:p>
+            <a:r>
+              <a:rPr sz="1400" b="0" i="0">
+                <a:solidFill>
+                  <a:srgbClr val="1B2330"/>
+                </a:solidFill>
+                <a:latin typeface="Montserrat"/>
+              </a:rPr>
+              <a:t>Canalizado</a:t>
+            </a:r>
+          </a:p>
+        </p:txBody>
+      </p:sp>
+      <p:sp>
+        <p:nvSpPr>
+          <p:cNvPr id="12" name="Rounded Rectangle 11"/>
+          <p:cNvSpPr/>
+          <p:nvPr/>
+        </p:nvSpPr>
+        <p:spPr>
+          <a:xfrm>
+            <a:off x="6355080" y="3291840"/>
+            <a:ext cx="4983480" cy="1143000"/>
+          </a:xfrm>
+          <a:prstGeom prst="roundRect">
+            <a:avLst/>
+          </a:prstGeom>
+          <a:solidFill>
+            <a:srgbClr val="F3F6FB"/>
+          </a:solidFill>
+          <a:ln w="12700">
+            <a:solidFill>
+              <a:srgbClr val="C7D2E6"/>
+            </a:solidFill>
+          </a:ln>
+          <a:effectLst/>
+        </p:spPr>
+        <p:style>
+          <a:lnRef idx="1">
+            <a:schemeClr val="accent1"/>
+          </a:lnRef>
+          <a:fillRef idx="3">
+            <a:schemeClr val="accent1"/>
+          </a:fillRef>
+          <a:effectRef idx="2">
+            <a:schemeClr val="accent1"/>
+          </a:effectRef>
+          <a:fontRef idx="minor">
+            <a:schemeClr val="lt1"/>
+          </a:fontRef>
+        </p:style>
+        <p:txBody>
+          <a:bodyPr rtlCol="0" anchor="ctr"/>
+          <a:lstStyle/>
+          <a:p>
+            <a:pPr algn="ctr"/>
+          </a:p>
+        </p:txBody>
+      </p:sp>
+      <p:sp>
+        <p:nvSpPr>
+          <p:cNvPr id="13" name="Rectangle 12"/>
+          <p:cNvSpPr/>
+          <p:nvPr/>
+        </p:nvSpPr>
+        <p:spPr>
+          <a:xfrm>
+            <a:off x="6355080" y="3291840"/>
+            <a:ext cx="640080" cy="1143000"/>
+          </a:xfrm>
+          <a:prstGeom prst="rect">
+            <a:avLst/>
+          </a:prstGeom>
+          <a:solidFill>
+            <a:srgbClr val="1E2761"/>
+          </a:solidFill>
+          <a:ln>
+            <a:noFill/>
+          </a:ln>
+          <a:effectLst/>
+        </p:spPr>
+        <p:style>
+          <a:lnRef idx="1">
+            <a:schemeClr val="accent1"/>
+          </a:lnRef>
+          <a:fillRef idx="3">
+            <a:schemeClr val="accent1"/>
+          </a:fillRef>
+          <a:effectRef idx="2">
+            <a:schemeClr val="accent1"/>
+          </a:effectRef>
+          <a:fontRef idx="minor">
+            <a:schemeClr val="lt1"/>
+          </a:fontRef>
+        </p:style>
+        <p:txBody>
+          <a:bodyPr rtlCol="0" anchor="ctr"/>
+          <a:lstStyle/>
+          <a:p>
+            <a:pPr algn="ctr"/>
+          </a:p>
+        </p:txBody>
+      </p:sp>
+      <p:sp>
+        <p:nvSpPr>
+          <p:cNvPr id="14" name="TextBox 13"/>
+          <p:cNvSpPr txBox="1"/>
+          <p:nvPr/>
+        </p:nvSpPr>
+        <p:spPr>
+          <a:xfrm>
+            <a:off x="6355080" y="3611880"/>
+            <a:ext cx="640080" cy="548640"/>
+          </a:xfrm>
+          <a:prstGeom prst="rect">
+            <a:avLst/>
+          </a:prstGeom>
+          <a:noFill/>
+        </p:spPr>
+        <p:txBody>
+          <a:bodyPr wrap="square">
+            <a:spAutoFit/>
+          </a:bodyPr>
+          <a:lstStyle/>
+          <a:p>
+            <a:pPr algn="ctr"/>
+            <a:r>
+              <a:rPr sz="2200" b="1" i="0">
+                <a:solidFill>
+                  <a:srgbClr val="FFFFFF"/>
+                </a:solidFill>
+                <a:latin typeface="Montserrat"/>
+              </a:rPr>
+              <a:t>B</a:t>
+            </a:r>
+          </a:p>
+        </p:txBody>
+      </p:sp>
+      <p:sp>
+        <p:nvSpPr>
+          <p:cNvPr id="15" name="TextBox 14"/>
+          <p:cNvSpPr txBox="1"/>
+          <p:nvPr/>
+        </p:nvSpPr>
+        <p:spPr>
+          <a:xfrm>
+            <a:off x="7132320" y="3474720"/>
+            <a:ext cx="4114800" cy="868680"/>
+          </a:xfrm>
+          <a:prstGeom prst="rect">
+            <a:avLst/>
+          </a:prstGeom>
+          <a:noFill/>
+        </p:spPr>
+        <p:txBody>
+          <a:bodyPr wrap="square">
+            <a:spAutoFit/>
+          </a:bodyPr>
+          <a:lstStyle/>
+          <a:p>
+            <a:r>
+              <a:rPr sz="1400" b="0" i="0">
+                <a:solidFill>
+                  <a:srgbClr val="1B2330"/>
+                </a:solidFill>
+                <a:latin typeface="Montserrat"/>
+              </a:rPr>
+              <a:t>Granel</a:t>
+            </a:r>
+          </a:p>
+        </p:txBody>
+      </p:sp>
+      <p:sp>
+        <p:nvSpPr>
+          <p:cNvPr id="16" name="Rounded Rectangle 15"/>
+          <p:cNvSpPr/>
+          <p:nvPr/>
+        </p:nvSpPr>
+        <p:spPr>
+          <a:xfrm>
+            <a:off x="822960" y="4617720"/>
+            <a:ext cx="4983480" cy="1143000"/>
+          </a:xfrm>
+          <a:prstGeom prst="roundRect">
+            <a:avLst/>
+          </a:prstGeom>
+          <a:solidFill>
+            <a:srgbClr val="F3F6FB"/>
+          </a:solidFill>
+          <a:ln w="12700">
+            <a:solidFill>
+              <a:srgbClr val="C7D2E6"/>
+            </a:solidFill>
+          </a:ln>
+          <a:effectLst/>
+        </p:spPr>
+        <p:style>
+          <a:lnRef idx="1">
+            <a:schemeClr val="accent1"/>
+          </a:lnRef>
+          <a:fillRef idx="3">
+            <a:schemeClr val="accent1"/>
+          </a:fillRef>
+          <a:effectRef idx="2">
+            <a:schemeClr val="accent1"/>
+          </a:effectRef>
+          <a:fontRef idx="minor">
+            <a:schemeClr val="lt1"/>
+          </a:fontRef>
+        </p:style>
+        <p:txBody>
+          <a:bodyPr rtlCol="0" anchor="ctr"/>
+          <a:lstStyle/>
+          <a:p>
+            <a:pPr algn="ctr"/>
+          </a:p>
+        </p:txBody>
+      </p:sp>
+      <p:sp>
+        <p:nvSpPr>
+          <p:cNvPr id="17" name="Rectangle 16"/>
+          <p:cNvSpPr/>
+          <p:nvPr/>
+        </p:nvSpPr>
+        <p:spPr>
+          <a:xfrm>
+            <a:off x="822960" y="4617720"/>
+            <a:ext cx="640080" cy="1143000"/>
+          </a:xfrm>
+          <a:prstGeom prst="rect">
+            <a:avLst/>
+          </a:prstGeom>
+          <a:solidFill>
+            <a:srgbClr val="1E2761"/>
+          </a:solidFill>
+          <a:ln>
+            <a:noFill/>
+          </a:ln>
+          <a:effectLst/>
+        </p:spPr>
+        <p:style>
+          <a:lnRef idx="1">
+            <a:schemeClr val="accent1"/>
+          </a:lnRef>
+          <a:fillRef idx="3">
+            <a:schemeClr val="accent1"/>
+          </a:fillRef>
+          <a:effectRef idx="2">
+            <a:schemeClr val="accent1"/>
+          </a:effectRef>
+          <a:fontRef idx="minor">
+            <a:schemeClr val="lt1"/>
+          </a:fontRef>
+        </p:style>
+        <p:txBody>
+          <a:bodyPr rtlCol="0" anchor="ctr"/>
+          <a:lstStyle/>
+          <a:p>
+            <a:pPr algn="ctr"/>
+          </a:p>
+        </p:txBody>
+      </p:sp>
+      <p:sp>
+        <p:nvSpPr>
+          <p:cNvPr id="18" name="TextBox 17"/>
+          <p:cNvSpPr txBox="1"/>
+          <p:nvPr/>
+        </p:nvSpPr>
+        <p:spPr>
+          <a:xfrm>
+            <a:off x="822960" y="4937760"/>
+            <a:ext cx="640080" cy="548640"/>
+          </a:xfrm>
+          <a:prstGeom prst="rect">
+            <a:avLst/>
+          </a:prstGeom>
+          <a:noFill/>
+        </p:spPr>
+        <p:txBody>
+          <a:bodyPr wrap="square">
+            <a:spAutoFit/>
+          </a:bodyPr>
+          <a:lstStyle/>
+          <a:p>
+            <a:pPr algn="ctr"/>
+            <a:r>
+              <a:rPr sz="2200" b="1" i="0">
+                <a:solidFill>
+                  <a:srgbClr val="FFFFFF"/>
+                </a:solidFill>
+                <a:latin typeface="Montserrat"/>
+              </a:rPr>
+              <a:t>C</a:t>
+            </a:r>
+          </a:p>
+        </p:txBody>
+      </p:sp>
+      <p:sp>
+        <p:nvSpPr>
+          <p:cNvPr id="19" name="TextBox 18"/>
+          <p:cNvSpPr txBox="1"/>
+          <p:nvPr/>
+        </p:nvSpPr>
+        <p:spPr>
+          <a:xfrm>
+            <a:off x="1600200" y="4800600"/>
+            <a:ext cx="4114800" cy="868680"/>
+          </a:xfrm>
+          <a:prstGeom prst="rect">
+            <a:avLst/>
+          </a:prstGeom>
+          <a:noFill/>
+        </p:spPr>
+        <p:txBody>
+          <a:bodyPr wrap="square">
+            <a:spAutoFit/>
+          </a:bodyPr>
+          <a:lstStyle/>
+          <a:p>
+            <a:r>
+              <a:rPr sz="1400" b="0" i="0">
+                <a:solidFill>
+                  <a:srgbClr val="1B2330"/>
+                </a:solidFill>
+                <a:latin typeface="Montserrat"/>
+              </a:rPr>
+              <a:t>Envases</a:t>
+            </a:r>
+          </a:p>
+        </p:txBody>
+      </p:sp>
+      <p:sp>
+        <p:nvSpPr>
+          <p:cNvPr id="20" name="Rounded Rectangle 19"/>
+          <p:cNvSpPr/>
+          <p:nvPr/>
+        </p:nvSpPr>
+        <p:spPr>
+          <a:xfrm>
+            <a:off x="6355080" y="4617720"/>
+            <a:ext cx="4983480" cy="1143000"/>
+          </a:xfrm>
+          <a:prstGeom prst="roundRect">
+            <a:avLst/>
+          </a:prstGeom>
+          <a:solidFill>
+            <a:srgbClr val="F3F6FB"/>
+          </a:solidFill>
+          <a:ln w="12700">
+            <a:solidFill>
+              <a:srgbClr val="C7D2E6"/>
+            </a:solidFill>
+          </a:ln>
+          <a:effectLst/>
+        </p:spPr>
+        <p:style>
+          <a:lnRef idx="1">
+            <a:schemeClr val="accent1"/>
+          </a:lnRef>
+          <a:fillRef idx="3">
+            <a:schemeClr val="accent1"/>
+          </a:fillRef>
+          <a:effectRef idx="2">
+            <a:schemeClr val="accent1"/>
+          </a:effectRef>
+          <a:fontRef idx="minor">
+            <a:schemeClr val="lt1"/>
+          </a:fontRef>
+        </p:style>
+        <p:txBody>
+          <a:bodyPr rtlCol="0" anchor="ctr"/>
+          <a:lstStyle/>
+          <a:p>
+            <a:pPr algn="ctr"/>
+          </a:p>
+        </p:txBody>
+      </p:sp>
+      <p:sp>
+        <p:nvSpPr>
+          <p:cNvPr id="21" name="Rectangle 20"/>
+          <p:cNvSpPr/>
+          <p:nvPr/>
+        </p:nvSpPr>
+        <p:spPr>
+          <a:xfrm>
+            <a:off x="6355080" y="4617720"/>
+            <a:ext cx="640080" cy="1143000"/>
+          </a:xfrm>
+          <a:prstGeom prst="rect">
+            <a:avLst/>
+          </a:prstGeom>
+          <a:solidFill>
+            <a:srgbClr val="1E2761"/>
+          </a:solidFill>
+          <a:ln>
+            <a:noFill/>
+          </a:ln>
+          <a:effectLst/>
+        </p:spPr>
+        <p:style>
+          <a:lnRef idx="1">
+            <a:schemeClr val="accent1"/>
+          </a:lnRef>
+          <a:fillRef idx="3">
+            <a:schemeClr val="accent1"/>
+          </a:fillRef>
+          <a:effectRef idx="2">
+            <a:schemeClr val="accent1"/>
+          </a:effectRef>
+          <a:fontRef idx="minor">
+            <a:schemeClr val="lt1"/>
+          </a:fontRef>
+        </p:style>
+        <p:txBody>
+          <a:bodyPr rtlCol="0" anchor="ctr"/>
+          <a:lstStyle/>
+          <a:p>
+            <a:pPr algn="ctr"/>
+          </a:p>
+        </p:txBody>
+      </p:sp>
+      <p:sp>
+        <p:nvSpPr>
+          <p:cNvPr id="22" name="TextBox 21"/>
+          <p:cNvSpPr txBox="1"/>
+          <p:nvPr/>
+        </p:nvSpPr>
+        <p:spPr>
+          <a:xfrm>
+            <a:off x="6355080" y="4937760"/>
+            <a:ext cx="640080" cy="548640"/>
+          </a:xfrm>
+          <a:prstGeom prst="rect">
+            <a:avLst/>
+          </a:prstGeom>
+          <a:noFill/>
+        </p:spPr>
+        <p:txBody>
+          <a:bodyPr wrap="square">
+            <a:spAutoFit/>
+          </a:bodyPr>
+          <a:lstStyle/>
+          <a:p>
+            <a:pPr algn="ctr"/>
+            <a:r>
+              <a:rPr sz="2200" b="1" i="0">
+                <a:solidFill>
+                  <a:srgbClr val="FFFFFF"/>
+                </a:solidFill>
+                <a:latin typeface="Montserrat"/>
+              </a:rPr>
+              <a:t>D</a:t>
+            </a:r>
+          </a:p>
+        </p:txBody>
+      </p:sp>
+      <p:sp>
+        <p:nvSpPr>
+          <p:cNvPr id="23" name="TextBox 22"/>
+          <p:cNvSpPr txBox="1"/>
+          <p:nvPr/>
+        </p:nvSpPr>
+        <p:spPr>
+          <a:xfrm>
+            <a:off x="7132320" y="4800600"/>
+            <a:ext cx="4114800" cy="868680"/>
+          </a:xfrm>
+          <a:prstGeom prst="rect">
+            <a:avLst/>
+          </a:prstGeom>
+          <a:noFill/>
+        </p:spPr>
+        <p:txBody>
+          <a:bodyPr wrap="square">
+            <a:spAutoFit/>
+          </a:bodyPr>
+          <a:lstStyle/>
+          <a:p>
+            <a:r>
+              <a:rPr sz="1400" b="0" i="0">
+                <a:solidFill>
+                  <a:srgbClr val="1B2330"/>
+                </a:solidFill>
+                <a:latin typeface="Montserrat"/>
+              </a:rPr>
+              <a:t>Intemperie</a:t>
             </a:r>
           </a:p>
         </p:txBody>
@@ -7404,6 +9503,1322 @@
   <p:clrMapOvr>
     <a:masterClrMapping/>
   </p:clrMapOvr>
+  <mc:AlternateContent xmlns:mc="http://schemas.openxmlformats.org/markup-compatibility/2006">
+    <mc:Choice xmlns:p14="http://schemas.microsoft.com/office/powerpoint/2010/main" Requires="p14">
+      <p:transition spd="med" p14:dur="700">
+        <p14:cube dir="r"/>
+      </p:transition>
+    </mc:Choice>
+    <mc:Fallback>
+      <p:transition spd="med">
+        <p:push dir="r"/>
+      </p:transition>
+    </mc:Fallback>
+  </mc:AlternateContent>
+</p:sld>
+</file>
+
+<file path=ppt/slides/slide17.xml><?xml version="1.0" encoding="utf-8"?>
+<p:sld xmlns:a="http://schemas.openxmlformats.org/drawingml/2006/main" xmlns:p="http://schemas.openxmlformats.org/presentationml/2006/main" xmlns:r="http://schemas.openxmlformats.org/officeDocument/2006/relationships">
+  <p:cSld>
+    <p:spTree>
+      <p:nvGrpSpPr>
+        <p:cNvPr id="1" name=""/>
+        <p:cNvGrpSpPr/>
+        <p:nvPr/>
+      </p:nvGrpSpPr>
+      <p:grpSpPr/>
+      <p:sp>
+        <p:nvSpPr>
+          <p:cNvPr id="2" name="Rectangle 1"/>
+          <p:cNvSpPr/>
+          <p:nvPr/>
+        </p:nvSpPr>
+        <p:spPr>
+          <a:xfrm>
+            <a:off x="0" y="0"/>
+            <a:ext cx="12191695" cy="6858000"/>
+          </a:xfrm>
+          <a:prstGeom prst="rect">
+            <a:avLst/>
+          </a:prstGeom>
+          <a:solidFill>
+            <a:srgbClr val="FFFFFF"/>
+          </a:solidFill>
+          <a:ln>
+            <a:noFill/>
+          </a:ln>
+          <a:effectLst/>
+        </p:spPr>
+        <p:style>
+          <a:lnRef idx="1">
+            <a:schemeClr val="accent1"/>
+          </a:lnRef>
+          <a:fillRef idx="3">
+            <a:schemeClr val="accent1"/>
+          </a:fillRef>
+          <a:effectRef idx="2">
+            <a:schemeClr val="accent1"/>
+          </a:effectRef>
+          <a:fontRef idx="minor">
+            <a:schemeClr val="lt1"/>
+          </a:fontRef>
+        </p:style>
+        <p:txBody>
+          <a:bodyPr rtlCol="0" anchor="ctr"/>
+          <a:lstStyle/>
+          <a:p>
+            <a:pPr algn="ctr"/>
+          </a:p>
+        </p:txBody>
+      </p:sp>
+      <p:sp>
+        <p:nvSpPr>
+          <p:cNvPr id="3" name="TextBox 2"/>
+          <p:cNvSpPr txBox="1"/>
+          <p:nvPr/>
+        </p:nvSpPr>
+        <p:spPr>
+          <a:xfrm>
+            <a:off x="10607040" y="320040"/>
+            <a:ext cx="1371600" cy="365760"/>
+          </a:xfrm>
+          <a:prstGeom prst="rect">
+            <a:avLst/>
+          </a:prstGeom>
+          <a:noFill/>
+        </p:spPr>
+        <p:txBody>
+          <a:bodyPr wrap="square">
+            <a:spAutoFit/>
+          </a:bodyPr>
+          <a:lstStyle/>
+          <a:p>
+            <a:pPr algn="r"/>
+            <a:r>
+              <a:rPr sz="1000" b="1" i="0">
+                <a:solidFill>
+                  <a:srgbClr val="64748B"/>
+                </a:solidFill>
+                <a:latin typeface="Montserrat"/>
+              </a:rPr>
+              <a:t>017 / 023</a:t>
+            </a:r>
+          </a:p>
+        </p:txBody>
+      </p:sp>
+      <p:sp>
+        <p:nvSpPr>
+          <p:cNvPr id="4" name="TextBox 3"/>
+          <p:cNvSpPr txBox="1"/>
+          <p:nvPr/>
+        </p:nvSpPr>
+        <p:spPr>
+          <a:xfrm>
+            <a:off x="457200" y="6419088"/>
+            <a:ext cx="8229600" cy="365760"/>
+          </a:xfrm>
+          <a:prstGeom prst="rect">
+            <a:avLst/>
+          </a:prstGeom>
+          <a:noFill/>
+        </p:spPr>
+        <p:txBody>
+          <a:bodyPr wrap="square">
+            <a:spAutoFit/>
+          </a:bodyPr>
+          <a:lstStyle/>
+          <a:p>
+            <a:r>
+              <a:rPr sz="900" b="0" i="0">
+                <a:solidFill>
+                  <a:srgbClr val="64748B"/>
+                </a:solidFill>
+                <a:latin typeface="Montserrat"/>
+              </a:rPr>
+              <a:t>Curso Gas B · Tema 09 · UNE 60670-1 y -2</a:t>
+            </a:r>
+          </a:p>
+        </p:txBody>
+      </p:sp>
+      <p:sp>
+        <p:nvSpPr>
+          <p:cNvPr id="5" name="Rectangle 4"/>
+          <p:cNvSpPr/>
+          <p:nvPr/>
+        </p:nvSpPr>
+        <p:spPr>
+          <a:xfrm>
+            <a:off x="0" y="0"/>
+            <a:ext cx="12191695" cy="1143000"/>
+          </a:xfrm>
+          <a:prstGeom prst="rect">
+            <a:avLst/>
+          </a:prstGeom>
+          <a:solidFill>
+            <a:srgbClr val="1E8E4B"/>
+          </a:solidFill>
+          <a:ln>
+            <a:noFill/>
+          </a:ln>
+          <a:effectLst/>
+        </p:spPr>
+        <p:style>
+          <a:lnRef idx="1">
+            <a:schemeClr val="accent1"/>
+          </a:lnRef>
+          <a:fillRef idx="3">
+            <a:schemeClr val="accent1"/>
+          </a:fillRef>
+          <a:effectRef idx="2">
+            <a:schemeClr val="accent1"/>
+          </a:effectRef>
+          <a:fontRef idx="minor">
+            <a:schemeClr val="lt1"/>
+          </a:fontRef>
+        </p:style>
+        <p:txBody>
+          <a:bodyPr rtlCol="0" anchor="ctr"/>
+          <a:lstStyle/>
+          <a:p>
+            <a:pPr algn="ctr"/>
+          </a:p>
+        </p:txBody>
+      </p:sp>
+      <p:sp>
+        <p:nvSpPr>
+          <p:cNvPr id="6" name="TextBox 5"/>
+          <p:cNvSpPr txBox="1"/>
+          <p:nvPr/>
+        </p:nvSpPr>
+        <p:spPr>
+          <a:xfrm>
+            <a:off x="822960" y="274320"/>
+            <a:ext cx="10515600" cy="640080"/>
+          </a:xfrm>
+          <a:prstGeom prst="rect">
+            <a:avLst/>
+          </a:prstGeom>
+          <a:noFill/>
+        </p:spPr>
+        <p:txBody>
+          <a:bodyPr wrap="square">
+            <a:spAutoFit/>
+          </a:bodyPr>
+          <a:lstStyle/>
+          <a:p>
+            <a:r>
+              <a:rPr sz="2400" b="1" i="0">
+                <a:solidFill>
+                  <a:srgbClr val="FFFFFF"/>
+                </a:solidFill>
+                <a:latin typeface="Montserrat"/>
+              </a:rPr>
+              <a:t>✔  RESPUESTA:  B</a:t>
+            </a:r>
+          </a:p>
+        </p:txBody>
+      </p:sp>
+      <p:sp>
+        <p:nvSpPr>
+          <p:cNvPr id="7" name="TextBox 6"/>
+          <p:cNvSpPr txBox="1"/>
+          <p:nvPr/>
+        </p:nvSpPr>
+        <p:spPr>
+          <a:xfrm>
+            <a:off x="822960" y="1417320"/>
+            <a:ext cx="10515600" cy="914400"/>
+          </a:xfrm>
+          <a:prstGeom prst="rect">
+            <a:avLst/>
+          </a:prstGeom>
+          <a:noFill/>
+        </p:spPr>
+        <p:txBody>
+          <a:bodyPr wrap="square">
+            <a:spAutoFit/>
+          </a:bodyPr>
+          <a:lstStyle/>
+          <a:p>
+            <a:r>
+              <a:rPr sz="1800" b="1" i="0">
+                <a:solidFill>
+                  <a:srgbClr val="64748B"/>
+                </a:solidFill>
+                <a:latin typeface="Montserrat"/>
+              </a:rPr>
+              <a:t>Un depósito fijo de GLP en la parcela, ¿a qué clase de suministro corresponde?</a:t>
+            </a:r>
+          </a:p>
+        </p:txBody>
+      </p:sp>
+      <p:sp>
+        <p:nvSpPr>
+          <p:cNvPr id="8" name="Rounded Rectangle 7"/>
+          <p:cNvSpPr/>
+          <p:nvPr/>
+        </p:nvSpPr>
+        <p:spPr>
+          <a:xfrm>
+            <a:off x="822960" y="2514600"/>
+            <a:ext cx="10515600" cy="914400"/>
+          </a:xfrm>
+          <a:prstGeom prst="roundRect">
+            <a:avLst/>
+          </a:prstGeom>
+          <a:solidFill>
+            <a:srgbClr val="E9F6EE"/>
+          </a:solidFill>
+          <a:ln w="12700">
+            <a:solidFill>
+              <a:srgbClr val="1E8E4B"/>
+            </a:solidFill>
+          </a:ln>
+          <a:effectLst/>
+        </p:spPr>
+        <p:style>
+          <a:lnRef idx="1">
+            <a:schemeClr val="accent1"/>
+          </a:lnRef>
+          <a:fillRef idx="3">
+            <a:schemeClr val="accent1"/>
+          </a:fillRef>
+          <a:effectRef idx="2">
+            <a:schemeClr val="accent1"/>
+          </a:effectRef>
+          <a:fontRef idx="minor">
+            <a:schemeClr val="lt1"/>
+          </a:fontRef>
+        </p:style>
+        <p:txBody>
+          <a:bodyPr rtlCol="0" anchor="ctr"/>
+          <a:lstStyle/>
+          <a:p>
+            <a:pPr algn="ctr"/>
+          </a:p>
+        </p:txBody>
+      </p:sp>
+      <p:sp>
+        <p:nvSpPr>
+          <p:cNvPr id="9" name="TextBox 8"/>
+          <p:cNvSpPr txBox="1"/>
+          <p:nvPr/>
+        </p:nvSpPr>
+        <p:spPr>
+          <a:xfrm>
+            <a:off x="1097280" y="2697480"/>
+            <a:ext cx="10058400" cy="640080"/>
+          </a:xfrm>
+          <a:prstGeom prst="rect">
+            <a:avLst/>
+          </a:prstGeom>
+          <a:noFill/>
+        </p:spPr>
+        <p:txBody>
+          <a:bodyPr wrap="square">
+            <a:spAutoFit/>
+          </a:bodyPr>
+          <a:lstStyle/>
+          <a:p>
+            <a:r>
+              <a:rPr sz="1800" b="1" i="0">
+                <a:solidFill>
+                  <a:srgbClr val="1E8E4B"/>
+                </a:solidFill>
+                <a:latin typeface="Montserrat"/>
+              </a:rPr>
+              <a:t>B.  </a:t>
+            </a:r>
+            <a:r>
+              <a:rPr sz="1800" b="1" i="0">
+                <a:solidFill>
+                  <a:srgbClr val="1E2761"/>
+                </a:solidFill>
+                <a:latin typeface="Montserrat"/>
+              </a:rPr>
+              <a:t>Granel</a:t>
+            </a:r>
+          </a:p>
+        </p:txBody>
+      </p:sp>
+      <p:sp>
+        <p:nvSpPr>
+          <p:cNvPr id="10" name="TextBox 9"/>
+          <p:cNvSpPr txBox="1"/>
+          <p:nvPr/>
+        </p:nvSpPr>
+        <p:spPr>
+          <a:xfrm>
+            <a:off x="822960" y="3749039"/>
+            <a:ext cx="10515600" cy="2194560"/>
+          </a:xfrm>
+          <a:prstGeom prst="rect">
+            <a:avLst/>
+          </a:prstGeom>
+          <a:noFill/>
+        </p:spPr>
+        <p:txBody>
+          <a:bodyPr wrap="square">
+            <a:spAutoFit/>
+          </a:bodyPr>
+          <a:lstStyle/>
+          <a:p>
+            <a:r>
+              <a:rPr sz="1500" b="1" i="0">
+                <a:solidFill>
+                  <a:srgbClr val="E8801A"/>
+                </a:solidFill>
+                <a:latin typeface="Montserrat"/>
+              </a:rPr>
+              <a:t>Por qué:  </a:t>
+            </a:r>
+            <a:r>
+              <a:rPr sz="1500" b="0" i="0">
+                <a:solidFill>
+                  <a:srgbClr val="1B2330"/>
+                </a:solidFill>
+                <a:latin typeface="Montserrat"/>
+              </a:rPr>
+              <a:t>El suministro desde depósitos fijos de GLP, o desde envases de carga superior a 15 kg, es de clase granel.</a:t>
+            </a:r>
+          </a:p>
+        </p:txBody>
+      </p:sp>
+    </p:spTree>
+  </p:cSld>
+  <p:clrMapOvr>
+    <a:masterClrMapping/>
+  </p:clrMapOvr>
+  <mc:AlternateContent xmlns:mc="http://schemas.openxmlformats.org/markup-compatibility/2006">
+    <mc:Choice xmlns:p14="http://schemas.microsoft.com/office/powerpoint/2010/main" Requires="p14">
+      <p:transition spd="med" p14:dur="700">
+        <p14:cube dir="l"/>
+      </p:transition>
+    </mc:Choice>
+    <mc:Fallback>
+      <p:transition spd="med">
+        <p:push dir="l"/>
+      </p:transition>
+    </mc:Fallback>
+  </mc:AlternateContent>
+</p:sld>
+</file>
+
+<file path=ppt/slides/slide18.xml><?xml version="1.0" encoding="utf-8"?>
+<p:sld xmlns:a="http://schemas.openxmlformats.org/drawingml/2006/main" xmlns:p="http://schemas.openxmlformats.org/presentationml/2006/main" xmlns:r="http://schemas.openxmlformats.org/officeDocument/2006/relationships">
+  <p:cSld>
+    <p:spTree>
+      <p:nvGrpSpPr>
+        <p:cNvPr id="1" name=""/>
+        <p:cNvGrpSpPr/>
+        <p:nvPr/>
+      </p:nvGrpSpPr>
+      <p:grpSpPr/>
+      <p:sp>
+        <p:nvSpPr>
+          <p:cNvPr id="2" name="Rectangle 1"/>
+          <p:cNvSpPr/>
+          <p:nvPr/>
+        </p:nvSpPr>
+        <p:spPr>
+          <a:xfrm>
+            <a:off x="0" y="0"/>
+            <a:ext cx="12191695" cy="6858000"/>
+          </a:xfrm>
+          <a:prstGeom prst="rect">
+            <a:avLst/>
+          </a:prstGeom>
+          <a:solidFill>
+            <a:srgbClr val="FFFFFF"/>
+          </a:solidFill>
+          <a:ln>
+            <a:noFill/>
+          </a:ln>
+          <a:effectLst/>
+        </p:spPr>
+        <p:style>
+          <a:lnRef idx="1">
+            <a:schemeClr val="accent1"/>
+          </a:lnRef>
+          <a:fillRef idx="3">
+            <a:schemeClr val="accent1"/>
+          </a:fillRef>
+          <a:effectRef idx="2">
+            <a:schemeClr val="accent1"/>
+          </a:effectRef>
+          <a:fontRef idx="minor">
+            <a:schemeClr val="lt1"/>
+          </a:fontRef>
+        </p:style>
+        <p:txBody>
+          <a:bodyPr rtlCol="0" anchor="ctr"/>
+          <a:lstStyle/>
+          <a:p>
+            <a:pPr algn="ctr"/>
+          </a:p>
+        </p:txBody>
+      </p:sp>
+      <p:sp>
+        <p:nvSpPr>
+          <p:cNvPr id="3" name="TextBox 2"/>
+          <p:cNvSpPr txBox="1"/>
+          <p:nvPr/>
+        </p:nvSpPr>
+        <p:spPr>
+          <a:xfrm>
+            <a:off x="10607040" y="320040"/>
+            <a:ext cx="1371600" cy="365760"/>
+          </a:xfrm>
+          <a:prstGeom prst="rect">
+            <a:avLst/>
+          </a:prstGeom>
+          <a:noFill/>
+        </p:spPr>
+        <p:txBody>
+          <a:bodyPr wrap="square">
+            <a:spAutoFit/>
+          </a:bodyPr>
+          <a:lstStyle/>
+          <a:p>
+            <a:pPr algn="r"/>
+            <a:r>
+              <a:rPr sz="1000" b="1" i="0">
+                <a:solidFill>
+                  <a:srgbClr val="64748B"/>
+                </a:solidFill>
+                <a:latin typeface="Montserrat"/>
+              </a:rPr>
+              <a:t>018 / 023</a:t>
+            </a:r>
+          </a:p>
+        </p:txBody>
+      </p:sp>
+      <p:sp>
+        <p:nvSpPr>
+          <p:cNvPr id="4" name="TextBox 3"/>
+          <p:cNvSpPr txBox="1"/>
+          <p:nvPr/>
+        </p:nvSpPr>
+        <p:spPr>
+          <a:xfrm>
+            <a:off x="457200" y="6419088"/>
+            <a:ext cx="8229600" cy="365760"/>
+          </a:xfrm>
+          <a:prstGeom prst="rect">
+            <a:avLst/>
+          </a:prstGeom>
+          <a:noFill/>
+        </p:spPr>
+        <p:txBody>
+          <a:bodyPr wrap="square">
+            <a:spAutoFit/>
+          </a:bodyPr>
+          <a:lstStyle/>
+          <a:p>
+            <a:r>
+              <a:rPr sz="900" b="0" i="0">
+                <a:solidFill>
+                  <a:srgbClr val="64748B"/>
+                </a:solidFill>
+                <a:latin typeface="Montserrat"/>
+              </a:rPr>
+              <a:t>Curso Gas B · Tema 09 · UNE 60670-1 y -2</a:t>
+            </a:r>
+          </a:p>
+        </p:txBody>
+      </p:sp>
+      <p:sp>
+        <p:nvSpPr>
+          <p:cNvPr id="5" name="TextBox 4"/>
+          <p:cNvSpPr txBox="1"/>
+          <p:nvPr/>
+        </p:nvSpPr>
+        <p:spPr>
+          <a:xfrm>
+            <a:off x="822960" y="457200"/>
+            <a:ext cx="10058400" cy="365760"/>
+          </a:xfrm>
+          <a:prstGeom prst="rect">
+            <a:avLst/>
+          </a:prstGeom>
+          <a:noFill/>
+        </p:spPr>
+        <p:txBody>
+          <a:bodyPr wrap="square">
+            <a:spAutoFit/>
+          </a:bodyPr>
+          <a:lstStyle/>
+          <a:p>
+            <a:r>
+              <a:rPr sz="1300" b="1" i="0">
+                <a:solidFill>
+                  <a:srgbClr val="E8801A"/>
+                </a:solidFill>
+                <a:latin typeface="Montserrat"/>
+              </a:rPr>
+              <a:t>PARTES · ESTRUCTURA FÍSICA</a:t>
+            </a:r>
+          </a:p>
+        </p:txBody>
+      </p:sp>
+      <p:sp>
+        <p:nvSpPr>
+          <p:cNvPr id="6" name="TextBox 5"/>
+          <p:cNvSpPr txBox="1"/>
+          <p:nvPr/>
+        </p:nvSpPr>
+        <p:spPr>
+          <a:xfrm>
+            <a:off x="822960" y="868680"/>
+            <a:ext cx="10515600" cy="914400"/>
+          </a:xfrm>
+          <a:prstGeom prst="rect">
+            <a:avLst/>
+          </a:prstGeom>
+          <a:noFill/>
+        </p:spPr>
+        <p:txBody>
+          <a:bodyPr wrap="square">
+            <a:spAutoFit/>
+          </a:bodyPr>
+          <a:lstStyle/>
+          <a:p>
+            <a:r>
+              <a:rPr sz="2800" b="1" i="0">
+                <a:solidFill>
+                  <a:srgbClr val="1E2761"/>
+                </a:solidFill>
+                <a:latin typeface="Montserrat"/>
+              </a:rPr>
+              <a:t>Las tres partes, en fila</a:t>
+            </a:r>
+          </a:p>
+        </p:txBody>
+      </p:sp>
+      <p:sp>
+        <p:nvSpPr>
+          <p:cNvPr id="7" name="Rectangle 6"/>
+          <p:cNvSpPr/>
+          <p:nvPr/>
+        </p:nvSpPr>
+        <p:spPr>
+          <a:xfrm>
+            <a:off x="868680" y="1627632"/>
+            <a:ext cx="2011680" cy="73152"/>
+          </a:xfrm>
+          <a:prstGeom prst="rect">
+            <a:avLst/>
+          </a:prstGeom>
+          <a:solidFill>
+            <a:srgbClr val="E8801A"/>
+          </a:solidFill>
+          <a:ln>
+            <a:noFill/>
+          </a:ln>
+          <a:effectLst/>
+        </p:spPr>
+        <p:style>
+          <a:lnRef idx="1">
+            <a:schemeClr val="accent1"/>
+          </a:lnRef>
+          <a:fillRef idx="3">
+            <a:schemeClr val="accent1"/>
+          </a:fillRef>
+          <a:effectRef idx="2">
+            <a:schemeClr val="accent1"/>
+          </a:effectRef>
+          <a:fontRef idx="minor">
+            <a:schemeClr val="lt1"/>
+          </a:fontRef>
+        </p:style>
+        <p:txBody>
+          <a:bodyPr rtlCol="0" anchor="ctr"/>
+          <a:lstStyle/>
+          <a:p>
+            <a:pPr algn="ctr"/>
+          </a:p>
+        </p:txBody>
+      </p:sp>
+      <p:sp>
+        <p:nvSpPr>
+          <p:cNvPr id="8" name="TextBox 7"/>
+          <p:cNvSpPr txBox="1"/>
+          <p:nvPr/>
+        </p:nvSpPr>
+        <p:spPr>
+          <a:xfrm>
+            <a:off x="822960" y="1965960"/>
+            <a:ext cx="5029200" cy="4206240"/>
+          </a:xfrm>
+          <a:prstGeom prst="rect">
+            <a:avLst/>
+          </a:prstGeom>
+          <a:noFill/>
+        </p:spPr>
+        <p:txBody>
+          <a:bodyPr wrap="square">
+            <a:spAutoFit/>
+          </a:bodyPr>
+          <a:lstStyle/>
+          <a:p>
+            <a:pPr>
+              <a:spcAft>
+                <a:spcPts val="1100"/>
+              </a:spcAft>
+            </a:pPr>
+            <a:r>
+              <a:rPr sz="1600" b="1" i="0">
+                <a:solidFill>
+                  <a:srgbClr val="E8801A"/>
+                </a:solidFill>
+                <a:latin typeface="Montserrat"/>
+              </a:rPr>
+              <a:t>▸  </a:t>
+            </a:r>
+            <a:r>
+              <a:rPr sz="1600" b="0" i="0">
+                <a:solidFill>
+                  <a:srgbClr val="1B2330"/>
+                </a:solidFill>
+                <a:latin typeface="Montserrat"/>
+              </a:rPr>
+              <a:t>Acometida interior</a:t>
+            </a:r>
+          </a:p>
+          <a:p>
+            <a:pPr>
+              <a:spcAft>
+                <a:spcPts val="1100"/>
+              </a:spcAft>
+            </a:pPr>
+            <a:r>
+              <a:rPr sz="1600" b="1" i="0">
+                <a:solidFill>
+                  <a:srgbClr val="E8801A"/>
+                </a:solidFill>
+                <a:latin typeface="Montserrat"/>
+              </a:rPr>
+              <a:t>▸  </a:t>
+            </a:r>
+            <a:r>
+              <a:rPr sz="1600" b="0" i="0">
+                <a:solidFill>
+                  <a:srgbClr val="1B2330"/>
+                </a:solidFill>
+                <a:latin typeface="Montserrat"/>
+              </a:rPr>
+              <a:t>Instalación común</a:t>
+            </a:r>
+          </a:p>
+          <a:p>
+            <a:pPr>
+              <a:spcAft>
+                <a:spcPts val="1100"/>
+              </a:spcAft>
+            </a:pPr>
+            <a:r>
+              <a:rPr sz="1600" b="1" i="0">
+                <a:solidFill>
+                  <a:srgbClr val="E8801A"/>
+                </a:solidFill>
+                <a:latin typeface="Montserrat"/>
+              </a:rPr>
+              <a:t>▸  </a:t>
+            </a:r>
+            <a:r>
+              <a:rPr sz="1600" b="0" i="0">
+                <a:solidFill>
+                  <a:srgbClr val="1B2330"/>
+                </a:solidFill>
+                <a:latin typeface="Montserrat"/>
+              </a:rPr>
+              <a:t>Instalación individual</a:t>
+            </a:r>
+          </a:p>
+          <a:p>
+            <a:pPr>
+              <a:spcAft>
+                <a:spcPts val="1100"/>
+              </a:spcAft>
+            </a:pPr>
+            <a:r>
+              <a:rPr sz="1600" b="1" i="0">
+                <a:solidFill>
+                  <a:srgbClr val="E8801A"/>
+                </a:solidFill>
+                <a:latin typeface="Montserrat"/>
+              </a:rPr>
+              <a:t>▸  </a:t>
+            </a:r>
+            <a:r>
+              <a:rPr sz="1600" b="0" i="0">
+                <a:solidFill>
+                  <a:srgbClr val="1B2330"/>
+                </a:solidFill>
+                <a:latin typeface="Montserrat"/>
+              </a:rPr>
+              <a:t>No siempre están las tres</a:t>
+            </a:r>
+          </a:p>
+        </p:txBody>
+      </p:sp>
+      <p:sp>
+        <p:nvSpPr>
+          <p:cNvPr id="9" name="imgph" descr="IMGQ:gas meter cabinet in apartment building"/>
+          <p:cNvSpPr/>
+          <p:nvPr/>
+        </p:nvSpPr>
+        <p:spPr>
+          <a:xfrm>
+            <a:off x="6080760" y="1965960"/>
+            <a:ext cx="5303520" cy="4572000"/>
+          </a:xfrm>
+          <a:prstGeom prst="roundRect">
+            <a:avLst/>
+          </a:prstGeom>
+          <a:solidFill>
+            <a:srgbClr val="F3F6FB"/>
+          </a:solidFill>
+          <a:ln w="12700">
+            <a:solidFill>
+              <a:srgbClr val="C7D2E6"/>
+            </a:solidFill>
+          </a:ln>
+          <a:effectLst/>
+        </p:spPr>
+        <p:style>
+          <a:lnRef idx="1">
+            <a:schemeClr val="accent1"/>
+          </a:lnRef>
+          <a:fillRef idx="3">
+            <a:schemeClr val="accent1"/>
+          </a:fillRef>
+          <a:effectRef idx="2">
+            <a:schemeClr val="accent1"/>
+          </a:effectRef>
+          <a:fontRef idx="minor">
+            <a:schemeClr val="lt1"/>
+          </a:fontRef>
+        </p:style>
+        <p:txBody>
+          <a:bodyPr rtlCol="0" anchor="ctr"/>
+          <a:lstStyle/>
+          <a:p>
+            <a:pPr algn="ctr"/>
+          </a:p>
+        </p:txBody>
+      </p:sp>
+      <p:sp>
+        <p:nvSpPr>
+          <p:cNvPr id="10" name="TextBox 9"/>
+          <p:cNvSpPr txBox="1"/>
+          <p:nvPr/>
+        </p:nvSpPr>
+        <p:spPr>
+          <a:xfrm>
+            <a:off x="6355080" y="3611880"/>
+            <a:ext cx="4754880" cy="1280160"/>
+          </a:xfrm>
+          <a:prstGeom prst="rect">
+            <a:avLst/>
+          </a:prstGeom>
+          <a:noFill/>
+        </p:spPr>
+        <p:txBody>
+          <a:bodyPr wrap="square">
+            <a:spAutoFit/>
+          </a:bodyPr>
+          <a:lstStyle/>
+          <a:p>
+            <a:pPr algn="ctr"/>
+            <a:r>
+              <a:rPr sz="1400" b="1" i="0">
+                <a:solidFill>
+                  <a:srgbClr val="64748B"/>
+                </a:solidFill>
+                <a:latin typeface="Montserrat"/>
+              </a:rPr>
+              <a:t>IMAGEN</a:t>
+            </a:r>
+          </a:p>
+          <a:p>
+            <a:pPr algn="ctr"/>
+            <a:r>
+              <a:rPr sz="1100" b="0" i="1">
+                <a:solidFill>
+                  <a:srgbClr val="64748B"/>
+                </a:solidFill>
+                <a:latin typeface="Montserrat"/>
+              </a:rPr>
+              <a:t>gas meter cabinet in apartment building</a:t>
+            </a:r>
+          </a:p>
+        </p:txBody>
+      </p:sp>
+    </p:spTree>
+  </p:cSld>
+  <p:clrMapOvr>
+    <a:masterClrMapping/>
+  </p:clrMapOvr>
+  <mc:AlternateContent xmlns:mc="http://schemas.openxmlformats.org/markup-compatibility/2006">
+    <mc:Choice xmlns:p14="http://schemas.microsoft.com/office/powerpoint/2010/main" Requires="p14">
+      <p:transition spd="med" p14:dur="700">
+        <p14:cube dir="r"/>
+      </p:transition>
+    </mc:Choice>
+    <mc:Fallback>
+      <p:transition spd="med">
+        <p:push dir="r"/>
+      </p:transition>
+    </mc:Fallback>
+  </mc:AlternateContent>
+</p:sld>
+</file>
+
+<file path=ppt/slides/slide19.xml><?xml version="1.0" encoding="utf-8"?>
+<p:sld xmlns:a="http://schemas.openxmlformats.org/drawingml/2006/main" xmlns:p="http://schemas.openxmlformats.org/presentationml/2006/main" xmlns:r="http://schemas.openxmlformats.org/officeDocument/2006/relationships">
+  <p:cSld>
+    <p:spTree>
+      <p:nvGrpSpPr>
+        <p:cNvPr id="1" name=""/>
+        <p:cNvGrpSpPr/>
+        <p:nvPr/>
+      </p:nvGrpSpPr>
+      <p:grpSpPr/>
+      <p:sp>
+        <p:nvSpPr>
+          <p:cNvPr id="2" name="Rectangle 1"/>
+          <p:cNvSpPr/>
+          <p:nvPr/>
+        </p:nvSpPr>
+        <p:spPr>
+          <a:xfrm>
+            <a:off x="0" y="0"/>
+            <a:ext cx="12191695" cy="6858000"/>
+          </a:xfrm>
+          <a:prstGeom prst="rect">
+            <a:avLst/>
+          </a:prstGeom>
+          <a:solidFill>
+            <a:srgbClr val="FFFFFF"/>
+          </a:solidFill>
+          <a:ln>
+            <a:noFill/>
+          </a:ln>
+          <a:effectLst/>
+        </p:spPr>
+        <p:style>
+          <a:lnRef idx="1">
+            <a:schemeClr val="accent1"/>
+          </a:lnRef>
+          <a:fillRef idx="3">
+            <a:schemeClr val="accent1"/>
+          </a:fillRef>
+          <a:effectRef idx="2">
+            <a:schemeClr val="accent1"/>
+          </a:effectRef>
+          <a:fontRef idx="minor">
+            <a:schemeClr val="lt1"/>
+          </a:fontRef>
+        </p:style>
+        <p:txBody>
+          <a:bodyPr rtlCol="0" anchor="ctr"/>
+          <a:lstStyle/>
+          <a:p>
+            <a:pPr algn="ctr"/>
+          </a:p>
+        </p:txBody>
+      </p:sp>
+      <p:sp>
+        <p:nvSpPr>
+          <p:cNvPr id="3" name="TextBox 2"/>
+          <p:cNvSpPr txBox="1"/>
+          <p:nvPr/>
+        </p:nvSpPr>
+        <p:spPr>
+          <a:xfrm>
+            <a:off x="10607040" y="320040"/>
+            <a:ext cx="1371600" cy="365760"/>
+          </a:xfrm>
+          <a:prstGeom prst="rect">
+            <a:avLst/>
+          </a:prstGeom>
+          <a:noFill/>
+        </p:spPr>
+        <p:txBody>
+          <a:bodyPr wrap="square">
+            <a:spAutoFit/>
+          </a:bodyPr>
+          <a:lstStyle/>
+          <a:p>
+            <a:pPr algn="r"/>
+            <a:r>
+              <a:rPr sz="1000" b="1" i="0">
+                <a:solidFill>
+                  <a:srgbClr val="64748B"/>
+                </a:solidFill>
+                <a:latin typeface="Montserrat"/>
+              </a:rPr>
+              <a:t>019 / 023</a:t>
+            </a:r>
+          </a:p>
+        </p:txBody>
+      </p:sp>
+      <p:sp>
+        <p:nvSpPr>
+          <p:cNvPr id="4" name="TextBox 3"/>
+          <p:cNvSpPr txBox="1"/>
+          <p:nvPr/>
+        </p:nvSpPr>
+        <p:spPr>
+          <a:xfrm>
+            <a:off x="457200" y="6419088"/>
+            <a:ext cx="8229600" cy="365760"/>
+          </a:xfrm>
+          <a:prstGeom prst="rect">
+            <a:avLst/>
+          </a:prstGeom>
+          <a:noFill/>
+        </p:spPr>
+        <p:txBody>
+          <a:bodyPr wrap="square">
+            <a:spAutoFit/>
+          </a:bodyPr>
+          <a:lstStyle/>
+          <a:p>
+            <a:r>
+              <a:rPr sz="900" b="0" i="0">
+                <a:solidFill>
+                  <a:srgbClr val="64748B"/>
+                </a:solidFill>
+                <a:latin typeface="Montserrat"/>
+              </a:rPr>
+              <a:t>Curso Gas B · Tema 09 · UNE 60670-1 y -2</a:t>
+            </a:r>
+          </a:p>
+        </p:txBody>
+      </p:sp>
+      <p:sp>
+        <p:nvSpPr>
+          <p:cNvPr id="5" name="TextBox 4"/>
+          <p:cNvSpPr txBox="1"/>
+          <p:nvPr/>
+        </p:nvSpPr>
+        <p:spPr>
+          <a:xfrm>
+            <a:off x="822960" y="457200"/>
+            <a:ext cx="10058400" cy="365760"/>
+          </a:xfrm>
+          <a:prstGeom prst="rect">
+            <a:avLst/>
+          </a:prstGeom>
+          <a:noFill/>
+        </p:spPr>
+        <p:txBody>
+          <a:bodyPr wrap="square">
+            <a:spAutoFit/>
+          </a:bodyPr>
+          <a:lstStyle/>
+          <a:p>
+            <a:r>
+              <a:rPr sz="1300" b="1" i="0">
+                <a:solidFill>
+                  <a:srgbClr val="E8801A"/>
+                </a:solidFill>
+                <a:latin typeface="Montserrat"/>
+              </a:rPr>
+              <a:t>REQUISITOS · OBJETIVOS</a:t>
+            </a:r>
+          </a:p>
+        </p:txBody>
+      </p:sp>
+      <p:sp>
+        <p:nvSpPr>
+          <p:cNvPr id="6" name="TextBox 5"/>
+          <p:cNvSpPr txBox="1"/>
+          <p:nvPr/>
+        </p:nvSpPr>
+        <p:spPr>
+          <a:xfrm>
+            <a:off x="822960" y="868680"/>
+            <a:ext cx="10515600" cy="914400"/>
+          </a:xfrm>
+          <a:prstGeom prst="rect">
+            <a:avLst/>
+          </a:prstGeom>
+          <a:noFill/>
+        </p:spPr>
+        <p:txBody>
+          <a:bodyPr wrap="square">
+            <a:spAutoFit/>
+          </a:bodyPr>
+          <a:lstStyle/>
+          <a:p>
+            <a:r>
+              <a:rPr sz="2800" b="1" i="0">
+                <a:solidFill>
+                  <a:srgbClr val="1E2761"/>
+                </a:solidFill>
+                <a:latin typeface="Montserrat"/>
+              </a:rPr>
+              <a:t>Dos objetivos de fondo</a:t>
+            </a:r>
+          </a:p>
+        </p:txBody>
+      </p:sp>
+      <p:sp>
+        <p:nvSpPr>
+          <p:cNvPr id="7" name="Rectangle 6"/>
+          <p:cNvSpPr/>
+          <p:nvPr/>
+        </p:nvSpPr>
+        <p:spPr>
+          <a:xfrm>
+            <a:off x="868680" y="1627632"/>
+            <a:ext cx="2011680" cy="73152"/>
+          </a:xfrm>
+          <a:prstGeom prst="rect">
+            <a:avLst/>
+          </a:prstGeom>
+          <a:solidFill>
+            <a:srgbClr val="E8801A"/>
+          </a:solidFill>
+          <a:ln>
+            <a:noFill/>
+          </a:ln>
+          <a:effectLst/>
+        </p:spPr>
+        <p:style>
+          <a:lnRef idx="1">
+            <a:schemeClr val="accent1"/>
+          </a:lnRef>
+          <a:fillRef idx="3">
+            <a:schemeClr val="accent1"/>
+          </a:fillRef>
+          <a:effectRef idx="2">
+            <a:schemeClr val="accent1"/>
+          </a:effectRef>
+          <a:fontRef idx="minor">
+            <a:schemeClr val="lt1"/>
+          </a:fontRef>
+        </p:style>
+        <p:txBody>
+          <a:bodyPr rtlCol="0" anchor="ctr"/>
+          <a:lstStyle/>
+          <a:p>
+            <a:pPr algn="ctr"/>
+          </a:p>
+        </p:txBody>
+      </p:sp>
+      <p:sp>
+        <p:nvSpPr>
+          <p:cNvPr id="8" name="TextBox 7"/>
+          <p:cNvSpPr txBox="1"/>
+          <p:nvPr/>
+        </p:nvSpPr>
+        <p:spPr>
+          <a:xfrm>
+            <a:off x="6355080" y="1965960"/>
+            <a:ext cx="5029200" cy="4206240"/>
+          </a:xfrm>
+          <a:prstGeom prst="rect">
+            <a:avLst/>
+          </a:prstGeom>
+          <a:noFill/>
+        </p:spPr>
+        <p:txBody>
+          <a:bodyPr wrap="square">
+            <a:spAutoFit/>
+          </a:bodyPr>
+          <a:lstStyle/>
+          <a:p>
+            <a:pPr>
+              <a:spcAft>
+                <a:spcPts val="1100"/>
+              </a:spcAft>
+            </a:pPr>
+            <a:r>
+              <a:rPr sz="1600" b="1" i="0">
+                <a:solidFill>
+                  <a:srgbClr val="E8801A"/>
+                </a:solidFill>
+                <a:latin typeface="Montserrat"/>
+              </a:rPr>
+              <a:t>▸  </a:t>
+            </a:r>
+            <a:r>
+              <a:rPr sz="1600" b="0" i="0">
+                <a:solidFill>
+                  <a:srgbClr val="1B2330"/>
+                </a:solidFill>
+                <a:latin typeface="Montserrat"/>
+              </a:rPr>
+              <a:t>Aportación adecuada de gas</a:t>
+            </a:r>
+          </a:p>
+          <a:p>
+            <a:pPr>
+              <a:spcAft>
+                <a:spcPts val="1100"/>
+              </a:spcAft>
+            </a:pPr>
+            <a:r>
+              <a:rPr sz="1600" b="1" i="0">
+                <a:solidFill>
+                  <a:srgbClr val="E8801A"/>
+                </a:solidFill>
+                <a:latin typeface="Montserrat"/>
+              </a:rPr>
+              <a:t>▸  </a:t>
+            </a:r>
+            <a:r>
+              <a:rPr sz="1600" b="0" i="0">
+                <a:solidFill>
+                  <a:srgbClr val="1B2330"/>
+                </a:solidFill>
+                <a:latin typeface="Montserrat"/>
+              </a:rPr>
+              <a:t>Seguridad en la conducción</a:t>
+            </a:r>
+          </a:p>
+          <a:p>
+            <a:pPr>
+              <a:spcAft>
+                <a:spcPts val="1100"/>
+              </a:spcAft>
+            </a:pPr>
+            <a:r>
+              <a:rPr sz="1600" b="1" i="0">
+                <a:solidFill>
+                  <a:srgbClr val="E8801A"/>
+                </a:solidFill>
+                <a:latin typeface="Montserrat"/>
+              </a:rPr>
+              <a:t>▸  </a:t>
+            </a:r>
+            <a:r>
+              <a:rPr sz="1600" b="0" i="0">
+                <a:solidFill>
+                  <a:srgbClr val="1B2330"/>
+                </a:solidFill>
+                <a:latin typeface="Montserrat"/>
+              </a:rPr>
+              <a:t>Todo lo demás sale de aquí</a:t>
+            </a:r>
+          </a:p>
+        </p:txBody>
+      </p:sp>
+      <p:sp>
+        <p:nvSpPr>
+          <p:cNvPr id="9" name="imgph" descr="IMGQ:blue gas flame on burner"/>
+          <p:cNvSpPr/>
+          <p:nvPr/>
+        </p:nvSpPr>
+        <p:spPr>
+          <a:xfrm>
+            <a:off x="822960" y="1965960"/>
+            <a:ext cx="5303520" cy="4572000"/>
+          </a:xfrm>
+          <a:prstGeom prst="roundRect">
+            <a:avLst/>
+          </a:prstGeom>
+          <a:solidFill>
+            <a:srgbClr val="F3F6FB"/>
+          </a:solidFill>
+          <a:ln w="12700">
+            <a:solidFill>
+              <a:srgbClr val="C7D2E6"/>
+            </a:solidFill>
+          </a:ln>
+          <a:effectLst/>
+        </p:spPr>
+        <p:style>
+          <a:lnRef idx="1">
+            <a:schemeClr val="accent1"/>
+          </a:lnRef>
+          <a:fillRef idx="3">
+            <a:schemeClr val="accent1"/>
+          </a:fillRef>
+          <a:effectRef idx="2">
+            <a:schemeClr val="accent1"/>
+          </a:effectRef>
+          <a:fontRef idx="minor">
+            <a:schemeClr val="lt1"/>
+          </a:fontRef>
+        </p:style>
+        <p:txBody>
+          <a:bodyPr rtlCol="0" anchor="ctr"/>
+          <a:lstStyle/>
+          <a:p>
+            <a:pPr algn="ctr"/>
+          </a:p>
+        </p:txBody>
+      </p:sp>
+      <p:sp>
+        <p:nvSpPr>
+          <p:cNvPr id="10" name="TextBox 9"/>
+          <p:cNvSpPr txBox="1"/>
+          <p:nvPr/>
+        </p:nvSpPr>
+        <p:spPr>
+          <a:xfrm>
+            <a:off x="1097280" y="3611880"/>
+            <a:ext cx="4754880" cy="1280160"/>
+          </a:xfrm>
+          <a:prstGeom prst="rect">
+            <a:avLst/>
+          </a:prstGeom>
+          <a:noFill/>
+        </p:spPr>
+        <p:txBody>
+          <a:bodyPr wrap="square">
+            <a:spAutoFit/>
+          </a:bodyPr>
+          <a:lstStyle/>
+          <a:p>
+            <a:pPr algn="ctr"/>
+            <a:r>
+              <a:rPr sz="1400" b="1" i="0">
+                <a:solidFill>
+                  <a:srgbClr val="64748B"/>
+                </a:solidFill>
+                <a:latin typeface="Montserrat"/>
+              </a:rPr>
+              <a:t>IMAGEN</a:t>
+            </a:r>
+          </a:p>
+          <a:p>
+            <a:pPr algn="ctr"/>
+            <a:r>
+              <a:rPr sz="1100" b="0" i="1">
+                <a:solidFill>
+                  <a:srgbClr val="64748B"/>
+                </a:solidFill>
+                <a:latin typeface="Montserrat"/>
+              </a:rPr>
+              <a:t>blue gas flame on burner</a:t>
+            </a:r>
+          </a:p>
+        </p:txBody>
+      </p:sp>
+    </p:spTree>
+  </p:cSld>
+  <p:clrMapOvr>
+    <a:masterClrMapping/>
+  </p:clrMapOvr>
+  <mc:AlternateContent xmlns:mc="http://schemas.openxmlformats.org/markup-compatibility/2006">
+    <mc:Choice xmlns:p14="http://schemas.microsoft.com/office/powerpoint/2010/main" Requires="p14">
+      <p:transition spd="med" p14:dur="700">
+        <p14:cube dir="l"/>
+      </p:transition>
+    </mc:Choice>
+    <mc:Fallback>
+      <p:transition spd="med">
+        <p:push dir="l"/>
+      </p:transition>
+    </mc:Fallback>
+  </mc:AlternateContent>
 </p:sld>
 </file>
 
@@ -7491,7 +10906,7 @@
                 </a:solidFill>
                 <a:latin typeface="Montserrat"/>
               </a:rPr>
-              <a:t>002 / 015</a:t>
+              <a:t>002 / 023</a:t>
             </a:r>
           </a:p>
         </p:txBody>
@@ -7566,7 +10981,7 @@
       </p:sp>
       <p:sp>
         <p:nvSpPr>
-          <p:cNvPr id="6" name="Rounded Rectangle 5"/>
+          <p:cNvPr id="6" name="Rectangle 5"/>
           <p:cNvSpPr/>
           <p:nvPr/>
         </p:nvSpPr>
@@ -7575,7 +10990,7 @@
             <a:off x="868680" y="1234440"/>
             <a:ext cx="1463040" cy="73152"/>
           </a:xfrm>
-          <a:prstGeom prst="roundRect">
+          <a:prstGeom prst="rect">
             <a:avLst/>
           </a:prstGeom>
           <a:solidFill>
@@ -7656,14 +11071,58 @@
       </p:sp>
       <p:sp>
         <p:nvSpPr>
-          <p:cNvPr id="8" name="TextBox 7"/>
+          <p:cNvPr id="8" name="Rectangle 7"/>
+          <p:cNvSpPr/>
+          <p:nvPr/>
+        </p:nvSpPr>
+        <p:spPr>
+          <a:xfrm>
+            <a:off x="822960" y="2011680"/>
+            <a:ext cx="3017520" cy="128016"/>
+          </a:xfrm>
+          <a:prstGeom prst="rect">
+            <a:avLst/>
+          </a:prstGeom>
+          <a:solidFill>
+            <a:srgbClr val="E8801A"/>
+          </a:solidFill>
+          <a:ln>
+            <a:noFill/>
+          </a:ln>
+          <a:effectLst/>
+        </p:spPr>
+        <p:style>
+          <a:lnRef idx="1">
+            <a:schemeClr val="accent1"/>
+          </a:lnRef>
+          <a:fillRef idx="3">
+            <a:schemeClr val="accent1"/>
+          </a:fillRef>
+          <a:effectRef idx="2">
+            <a:schemeClr val="accent1"/>
+          </a:effectRef>
+          <a:fontRef idx="minor">
+            <a:schemeClr val="lt1"/>
+          </a:fontRef>
+        </p:style>
+        <p:txBody>
+          <a:bodyPr rtlCol="0" anchor="ctr"/>
+          <a:lstStyle/>
+          <a:p>
+            <a:pPr algn="ctr"/>
+          </a:p>
+        </p:txBody>
+      </p:sp>
+      <p:sp>
+        <p:nvSpPr>
+          <p:cNvPr id="9" name="TextBox 8"/>
           <p:cNvSpPr txBox="1"/>
           <p:nvPr/>
         </p:nvSpPr>
         <p:spPr>
           <a:xfrm>
-            <a:off x="822960" y="2331720"/>
-            <a:ext cx="3017520" cy="1463040"/>
+            <a:off x="822960" y="2377440"/>
+            <a:ext cx="3017520" cy="1371600"/>
           </a:xfrm>
           <a:prstGeom prst="rect">
             <a:avLst/>
@@ -7678,7 +11137,7 @@
           <a:p>
             <a:pPr algn="ctr"/>
             <a:r>
-              <a:rPr sz="6000" b="1" i="0">
+              <a:rPr sz="5800" b="1" i="0">
                 <a:solidFill>
                   <a:srgbClr val="1E2761"/>
                 </a:solidFill>
@@ -7691,13 +11150,13 @@
       </p:sp>
       <p:sp>
         <p:nvSpPr>
-          <p:cNvPr id="9" name="TextBox 8"/>
+          <p:cNvPr id="10" name="TextBox 9"/>
           <p:cNvSpPr txBox="1"/>
           <p:nvPr/>
         </p:nvSpPr>
         <p:spPr>
           <a:xfrm>
-            <a:off x="1051560" y="3611880"/>
+            <a:off x="1051560" y="3657600"/>
             <a:ext cx="2560320" cy="1005840"/>
           </a:xfrm>
           <a:prstGeom prst="rect">
@@ -7726,7 +11185,7 @@
       </p:sp>
       <p:sp>
         <p:nvSpPr>
-          <p:cNvPr id="10" name="Rounded Rectangle 9"/>
+          <p:cNvPr id="11" name="Rounded Rectangle 10"/>
           <p:cNvSpPr/>
           <p:nvPr/>
         </p:nvSpPr>
@@ -7772,14 +11231,58 @@
       </p:sp>
       <p:sp>
         <p:nvSpPr>
-          <p:cNvPr id="11" name="TextBox 10"/>
+          <p:cNvPr id="12" name="Rectangle 11"/>
+          <p:cNvSpPr/>
+          <p:nvPr/>
+        </p:nvSpPr>
+        <p:spPr>
+          <a:xfrm>
+            <a:off x="4617720" y="2011680"/>
+            <a:ext cx="3017520" cy="128016"/>
+          </a:xfrm>
+          <a:prstGeom prst="rect">
+            <a:avLst/>
+          </a:prstGeom>
+          <a:solidFill>
+            <a:srgbClr val="E8801A"/>
+          </a:solidFill>
+          <a:ln>
+            <a:noFill/>
+          </a:ln>
+          <a:effectLst/>
+        </p:spPr>
+        <p:style>
+          <a:lnRef idx="1">
+            <a:schemeClr val="accent1"/>
+          </a:lnRef>
+          <a:fillRef idx="3">
+            <a:schemeClr val="accent1"/>
+          </a:fillRef>
+          <a:effectRef idx="2">
+            <a:schemeClr val="accent1"/>
+          </a:effectRef>
+          <a:fontRef idx="minor">
+            <a:schemeClr val="lt1"/>
+          </a:fontRef>
+        </p:style>
+        <p:txBody>
+          <a:bodyPr rtlCol="0" anchor="ctr"/>
+          <a:lstStyle/>
+          <a:p>
+            <a:pPr algn="ctr"/>
+          </a:p>
+        </p:txBody>
+      </p:sp>
+      <p:sp>
+        <p:nvSpPr>
+          <p:cNvPr id="13" name="TextBox 12"/>
           <p:cNvSpPr txBox="1"/>
           <p:nvPr/>
         </p:nvSpPr>
         <p:spPr>
           <a:xfrm>
-            <a:off x="4617720" y="2331720"/>
-            <a:ext cx="3017520" cy="1463040"/>
+            <a:off x="4617720" y="2377440"/>
+            <a:ext cx="3017520" cy="1371600"/>
           </a:xfrm>
           <a:prstGeom prst="rect">
             <a:avLst/>
@@ -7794,7 +11297,7 @@
           <a:p>
             <a:pPr algn="ctr"/>
             <a:r>
-              <a:rPr sz="6000" b="1" i="0">
+              <a:rPr sz="5800" b="1" i="0">
                 <a:solidFill>
                   <a:srgbClr val="1E2761"/>
                 </a:solidFill>
@@ -7807,13 +11310,13 @@
       </p:sp>
       <p:sp>
         <p:nvSpPr>
-          <p:cNvPr id="12" name="TextBox 11"/>
+          <p:cNvPr id="14" name="TextBox 13"/>
           <p:cNvSpPr txBox="1"/>
           <p:nvPr/>
         </p:nvSpPr>
         <p:spPr>
           <a:xfrm>
-            <a:off x="4846320" y="3611880"/>
+            <a:off x="4846320" y="3657600"/>
             <a:ext cx="2560320" cy="1005840"/>
           </a:xfrm>
           <a:prstGeom prst="rect">
@@ -7842,7 +11345,7 @@
       </p:sp>
       <p:sp>
         <p:nvSpPr>
-          <p:cNvPr id="13" name="Rounded Rectangle 12"/>
+          <p:cNvPr id="15" name="Rounded Rectangle 14"/>
           <p:cNvSpPr/>
           <p:nvPr/>
         </p:nvSpPr>
@@ -7888,14 +11391,58 @@
       </p:sp>
       <p:sp>
         <p:nvSpPr>
-          <p:cNvPr id="14" name="TextBox 13"/>
+          <p:cNvPr id="16" name="Rectangle 15"/>
+          <p:cNvSpPr/>
+          <p:nvPr/>
+        </p:nvSpPr>
+        <p:spPr>
+          <a:xfrm>
+            <a:off x="8412480" y="2011680"/>
+            <a:ext cx="3017520" cy="128016"/>
+          </a:xfrm>
+          <a:prstGeom prst="rect">
+            <a:avLst/>
+          </a:prstGeom>
+          <a:solidFill>
+            <a:srgbClr val="E8801A"/>
+          </a:solidFill>
+          <a:ln>
+            <a:noFill/>
+          </a:ln>
+          <a:effectLst/>
+        </p:spPr>
+        <p:style>
+          <a:lnRef idx="1">
+            <a:schemeClr val="accent1"/>
+          </a:lnRef>
+          <a:fillRef idx="3">
+            <a:schemeClr val="accent1"/>
+          </a:fillRef>
+          <a:effectRef idx="2">
+            <a:schemeClr val="accent1"/>
+          </a:effectRef>
+          <a:fontRef idx="minor">
+            <a:schemeClr val="lt1"/>
+          </a:fontRef>
+        </p:style>
+        <p:txBody>
+          <a:bodyPr rtlCol="0" anchor="ctr"/>
+          <a:lstStyle/>
+          <a:p>
+            <a:pPr algn="ctr"/>
+          </a:p>
+        </p:txBody>
+      </p:sp>
+      <p:sp>
+        <p:nvSpPr>
+          <p:cNvPr id="17" name="TextBox 16"/>
           <p:cNvSpPr txBox="1"/>
           <p:nvPr/>
         </p:nvSpPr>
         <p:spPr>
           <a:xfrm>
-            <a:off x="8412480" y="2331720"/>
-            <a:ext cx="3017520" cy="1463040"/>
+            <a:off x="8412480" y="2377440"/>
+            <a:ext cx="3017520" cy="1371600"/>
           </a:xfrm>
           <a:prstGeom prst="rect">
             <a:avLst/>
@@ -7910,7 +11457,7 @@
           <a:p>
             <a:pPr algn="ctr"/>
             <a:r>
-              <a:rPr sz="6000" b="1" i="0">
+              <a:rPr sz="5800" b="1" i="0">
                 <a:solidFill>
                   <a:srgbClr val="1E2761"/>
                 </a:solidFill>
@@ -7923,13 +11470,13 @@
       </p:sp>
       <p:sp>
         <p:nvSpPr>
-          <p:cNvPr id="15" name="TextBox 14"/>
+          <p:cNvPr id="18" name="TextBox 17"/>
           <p:cNvSpPr txBox="1"/>
           <p:nvPr/>
         </p:nvSpPr>
         <p:spPr>
           <a:xfrm>
-            <a:off x="8641080" y="3611880"/>
+            <a:off x="8641080" y="3657600"/>
             <a:ext cx="2560320" cy="1005840"/>
           </a:xfrm>
           <a:prstGeom prst="rect">
@@ -7961,6 +11508,2154 @@
   <p:clrMapOvr>
     <a:masterClrMapping/>
   </p:clrMapOvr>
+  <mc:AlternateContent xmlns:mc="http://schemas.openxmlformats.org/markup-compatibility/2006">
+    <mc:Choice xmlns:p14="http://schemas.microsoft.com/office/powerpoint/2010/main" Requires="p14">
+      <p:transition spd="med" p14:dur="700">
+        <p14:cube dir="r"/>
+      </p:transition>
+    </mc:Choice>
+    <mc:Fallback>
+      <p:transition spd="med">
+        <p:push dir="r"/>
+      </p:transition>
+    </mc:Fallback>
+  </mc:AlternateContent>
+</p:sld>
+</file>
+
+<file path=ppt/slides/slide20.xml><?xml version="1.0" encoding="utf-8"?>
+<p:sld xmlns:a="http://schemas.openxmlformats.org/drawingml/2006/main" xmlns:p="http://schemas.openxmlformats.org/presentationml/2006/main" xmlns:r="http://schemas.openxmlformats.org/officeDocument/2006/relationships">
+  <p:cSld>
+    <p:spTree>
+      <p:nvGrpSpPr>
+        <p:cNvPr id="1" name=""/>
+        <p:cNvGrpSpPr/>
+        <p:nvPr/>
+      </p:nvGrpSpPr>
+      <p:grpSpPr/>
+      <p:sp>
+        <p:nvSpPr>
+          <p:cNvPr id="2" name="Rectangle 1"/>
+          <p:cNvSpPr/>
+          <p:nvPr/>
+        </p:nvSpPr>
+        <p:spPr>
+          <a:xfrm>
+            <a:off x="0" y="0"/>
+            <a:ext cx="12191695" cy="6858000"/>
+          </a:xfrm>
+          <a:prstGeom prst="rect">
+            <a:avLst/>
+          </a:prstGeom>
+          <a:solidFill>
+            <a:srgbClr val="FFFFFF"/>
+          </a:solidFill>
+          <a:ln>
+            <a:noFill/>
+          </a:ln>
+          <a:effectLst/>
+        </p:spPr>
+        <p:style>
+          <a:lnRef idx="1">
+            <a:schemeClr val="accent1"/>
+          </a:lnRef>
+          <a:fillRef idx="3">
+            <a:schemeClr val="accent1"/>
+          </a:fillRef>
+          <a:effectRef idx="2">
+            <a:schemeClr val="accent1"/>
+          </a:effectRef>
+          <a:fontRef idx="minor">
+            <a:schemeClr val="lt1"/>
+          </a:fontRef>
+        </p:style>
+        <p:txBody>
+          <a:bodyPr rtlCol="0" anchor="ctr"/>
+          <a:lstStyle/>
+          <a:p>
+            <a:pPr algn="ctr"/>
+          </a:p>
+        </p:txBody>
+      </p:sp>
+      <p:sp>
+        <p:nvSpPr>
+          <p:cNvPr id="3" name="TextBox 2"/>
+          <p:cNvSpPr txBox="1"/>
+          <p:nvPr/>
+        </p:nvSpPr>
+        <p:spPr>
+          <a:xfrm>
+            <a:off x="10607040" y="320040"/>
+            <a:ext cx="1371600" cy="365760"/>
+          </a:xfrm>
+          <a:prstGeom prst="rect">
+            <a:avLst/>
+          </a:prstGeom>
+          <a:noFill/>
+        </p:spPr>
+        <p:txBody>
+          <a:bodyPr wrap="square">
+            <a:spAutoFit/>
+          </a:bodyPr>
+          <a:lstStyle/>
+          <a:p>
+            <a:pPr algn="r"/>
+            <a:r>
+              <a:rPr sz="1000" b="1" i="0">
+                <a:solidFill>
+                  <a:srgbClr val="64748B"/>
+                </a:solidFill>
+                <a:latin typeface="Montserrat"/>
+              </a:rPr>
+              <a:t>020 / 023</a:t>
+            </a:r>
+          </a:p>
+        </p:txBody>
+      </p:sp>
+      <p:sp>
+        <p:nvSpPr>
+          <p:cNvPr id="4" name="TextBox 3"/>
+          <p:cNvSpPr txBox="1"/>
+          <p:nvPr/>
+        </p:nvSpPr>
+        <p:spPr>
+          <a:xfrm>
+            <a:off x="457200" y="6419088"/>
+            <a:ext cx="8229600" cy="365760"/>
+          </a:xfrm>
+          <a:prstGeom prst="rect">
+            <a:avLst/>
+          </a:prstGeom>
+          <a:noFill/>
+        </p:spPr>
+        <p:txBody>
+          <a:bodyPr wrap="square">
+            <a:spAutoFit/>
+          </a:bodyPr>
+          <a:lstStyle/>
+          <a:p>
+            <a:r>
+              <a:rPr sz="900" b="0" i="0">
+                <a:solidFill>
+                  <a:srgbClr val="64748B"/>
+                </a:solidFill>
+                <a:latin typeface="Montserrat"/>
+              </a:rPr>
+              <a:t>Curso Gas B · Tema 09 · UNE 60670-1 y -2</a:t>
+            </a:r>
+          </a:p>
+        </p:txBody>
+      </p:sp>
+      <p:sp>
+        <p:nvSpPr>
+          <p:cNvPr id="5" name="TextBox 4"/>
+          <p:cNvSpPr txBox="1"/>
+          <p:nvPr/>
+        </p:nvSpPr>
+        <p:spPr>
+          <a:xfrm>
+            <a:off x="822960" y="457200"/>
+            <a:ext cx="10058400" cy="365760"/>
+          </a:xfrm>
+          <a:prstGeom prst="rect">
+            <a:avLst/>
+          </a:prstGeom>
+          <a:noFill/>
+        </p:spPr>
+        <p:txBody>
+          <a:bodyPr wrap="square">
+            <a:spAutoFit/>
+          </a:bodyPr>
+          <a:lstStyle/>
+          <a:p>
+            <a:r>
+              <a:rPr sz="1300" b="1" i="0">
+                <a:solidFill>
+                  <a:srgbClr val="E8801A"/>
+                </a:solidFill>
+                <a:latin typeface="Montserrat"/>
+              </a:rPr>
+              <a:t>OBRA · LEGALIZACIÓN</a:t>
+            </a:r>
+          </a:p>
+        </p:txBody>
+      </p:sp>
+      <p:sp>
+        <p:nvSpPr>
+          <p:cNvPr id="6" name="TextBox 5"/>
+          <p:cNvSpPr txBox="1"/>
+          <p:nvPr/>
+        </p:nvSpPr>
+        <p:spPr>
+          <a:xfrm>
+            <a:off x="822960" y="868680"/>
+            <a:ext cx="10515600" cy="914400"/>
+          </a:xfrm>
+          <a:prstGeom prst="rect">
+            <a:avLst/>
+          </a:prstGeom>
+          <a:noFill/>
+        </p:spPr>
+        <p:txBody>
+          <a:bodyPr wrap="square">
+            <a:spAutoFit/>
+          </a:bodyPr>
+          <a:lstStyle/>
+          <a:p>
+            <a:r>
+              <a:rPr sz="2800" b="1" i="0">
+                <a:solidFill>
+                  <a:srgbClr val="1E2761"/>
+                </a:solidFill>
+                <a:latin typeface="Montserrat"/>
+              </a:rPr>
+              <a:t>¿Hay boletín o no?</a:t>
+            </a:r>
+          </a:p>
+        </p:txBody>
+      </p:sp>
+      <p:sp>
+        <p:nvSpPr>
+          <p:cNvPr id="7" name="Rectangle 6"/>
+          <p:cNvSpPr/>
+          <p:nvPr/>
+        </p:nvSpPr>
+        <p:spPr>
+          <a:xfrm>
+            <a:off x="868680" y="1627632"/>
+            <a:ext cx="2011680" cy="73152"/>
+          </a:xfrm>
+          <a:prstGeom prst="rect">
+            <a:avLst/>
+          </a:prstGeom>
+          <a:solidFill>
+            <a:srgbClr val="E8801A"/>
+          </a:solidFill>
+          <a:ln>
+            <a:noFill/>
+          </a:ln>
+          <a:effectLst/>
+        </p:spPr>
+        <p:style>
+          <a:lnRef idx="1">
+            <a:schemeClr val="accent1"/>
+          </a:lnRef>
+          <a:fillRef idx="3">
+            <a:schemeClr val="accent1"/>
+          </a:fillRef>
+          <a:effectRef idx="2">
+            <a:schemeClr val="accent1"/>
+          </a:effectRef>
+          <a:fontRef idx="minor">
+            <a:schemeClr val="lt1"/>
+          </a:fontRef>
+        </p:style>
+        <p:txBody>
+          <a:bodyPr rtlCol="0" anchor="ctr"/>
+          <a:lstStyle/>
+          <a:p>
+            <a:pPr algn="ctr"/>
+          </a:p>
+        </p:txBody>
+      </p:sp>
+      <p:sp>
+        <p:nvSpPr>
+          <p:cNvPr id="8" name="TextBox 7"/>
+          <p:cNvSpPr txBox="1"/>
+          <p:nvPr/>
+        </p:nvSpPr>
+        <p:spPr>
+          <a:xfrm>
+            <a:off x="822960" y="1965960"/>
+            <a:ext cx="5029200" cy="4206240"/>
+          </a:xfrm>
+          <a:prstGeom prst="rect">
+            <a:avLst/>
+          </a:prstGeom>
+          <a:noFill/>
+        </p:spPr>
+        <p:txBody>
+          <a:bodyPr wrap="square">
+            <a:spAutoFit/>
+          </a:bodyPr>
+          <a:lstStyle/>
+          <a:p>
+            <a:pPr>
+              <a:spcAft>
+                <a:spcPts val="1100"/>
+              </a:spcAft>
+            </a:pPr>
+            <a:r>
+              <a:rPr sz="1600" b="1" i="0">
+                <a:solidFill>
+                  <a:srgbClr val="E8801A"/>
+                </a:solidFill>
+                <a:latin typeface="Montserrat"/>
+              </a:rPr>
+              <a:t>▸  </a:t>
+            </a:r>
+            <a:r>
+              <a:rPr sz="1600" b="0" i="0">
+                <a:solidFill>
+                  <a:srgbClr val="1B2330"/>
+                </a:solidFill>
+                <a:latin typeface="Montserrat"/>
+              </a:rPr>
+              <a:t>Receptora → certificado obligatorio</a:t>
+            </a:r>
+          </a:p>
+          <a:p>
+            <a:pPr>
+              <a:spcAft>
+                <a:spcPts val="1100"/>
+              </a:spcAft>
+            </a:pPr>
+            <a:r>
+              <a:rPr sz="1600" b="1" i="0">
+                <a:solidFill>
+                  <a:srgbClr val="E8801A"/>
+                </a:solidFill>
+                <a:latin typeface="Montserrat"/>
+              </a:rPr>
+              <a:t>▸  </a:t>
+            </a:r>
+            <a:r>
+              <a:rPr sz="1600" b="0" i="0">
+                <a:solidFill>
+                  <a:srgbClr val="1B2330"/>
+                </a:solidFill>
+                <a:latin typeface="Montserrat"/>
+              </a:rPr>
+              <a:t>Lo firma la empresa de categoría B</a:t>
+            </a:r>
+          </a:p>
+          <a:p>
+            <a:pPr>
+              <a:spcAft>
+                <a:spcPts val="1100"/>
+              </a:spcAft>
+            </a:pPr>
+            <a:r>
+              <a:rPr sz="1600" b="1" i="0">
+                <a:solidFill>
+                  <a:srgbClr val="E8801A"/>
+                </a:solidFill>
+                <a:latin typeface="Montserrat"/>
+              </a:rPr>
+              <a:t>▸  </a:t>
+            </a:r>
+            <a:r>
+              <a:rPr sz="1600" b="0" i="0">
+                <a:solidFill>
+                  <a:srgbClr val="1B2330"/>
+                </a:solidFill>
+                <a:latin typeface="Montserrat"/>
+              </a:rPr>
+              <a:t>Se entrega a la distribuidora</a:t>
+            </a:r>
+          </a:p>
+          <a:p>
+            <a:pPr>
+              <a:spcAft>
+                <a:spcPts val="1100"/>
+              </a:spcAft>
+            </a:pPr>
+            <a:r>
+              <a:rPr sz="1600" b="1" i="0">
+                <a:solidFill>
+                  <a:srgbClr val="E8801A"/>
+                </a:solidFill>
+                <a:latin typeface="Montserrat"/>
+              </a:rPr>
+              <a:t>▸  </a:t>
+            </a:r>
+            <a:r>
+              <a:rPr sz="1600" b="0" i="0">
+                <a:solidFill>
+                  <a:srgbClr val="1B2330"/>
+                </a:solidFill>
+                <a:latin typeface="Montserrat"/>
+              </a:rPr>
+              <a:t>Sin él, no hay suministro</a:t>
+            </a:r>
+          </a:p>
+        </p:txBody>
+      </p:sp>
+      <p:sp>
+        <p:nvSpPr>
+          <p:cNvPr id="9" name="imgph" descr="IMGQ:technician filling installation certificate paperwork"/>
+          <p:cNvSpPr/>
+          <p:nvPr/>
+        </p:nvSpPr>
+        <p:spPr>
+          <a:xfrm>
+            <a:off x="6080760" y="1965960"/>
+            <a:ext cx="5303520" cy="4572000"/>
+          </a:xfrm>
+          <a:prstGeom prst="roundRect">
+            <a:avLst/>
+          </a:prstGeom>
+          <a:solidFill>
+            <a:srgbClr val="F3F6FB"/>
+          </a:solidFill>
+          <a:ln w="12700">
+            <a:solidFill>
+              <a:srgbClr val="C7D2E6"/>
+            </a:solidFill>
+          </a:ln>
+          <a:effectLst/>
+        </p:spPr>
+        <p:style>
+          <a:lnRef idx="1">
+            <a:schemeClr val="accent1"/>
+          </a:lnRef>
+          <a:fillRef idx="3">
+            <a:schemeClr val="accent1"/>
+          </a:fillRef>
+          <a:effectRef idx="2">
+            <a:schemeClr val="accent1"/>
+          </a:effectRef>
+          <a:fontRef idx="minor">
+            <a:schemeClr val="lt1"/>
+          </a:fontRef>
+        </p:style>
+        <p:txBody>
+          <a:bodyPr rtlCol="0" anchor="ctr"/>
+          <a:lstStyle/>
+          <a:p>
+            <a:pPr algn="ctr"/>
+          </a:p>
+        </p:txBody>
+      </p:sp>
+      <p:sp>
+        <p:nvSpPr>
+          <p:cNvPr id="10" name="TextBox 9"/>
+          <p:cNvSpPr txBox="1"/>
+          <p:nvPr/>
+        </p:nvSpPr>
+        <p:spPr>
+          <a:xfrm>
+            <a:off x="6355080" y="3611880"/>
+            <a:ext cx="4754880" cy="1280160"/>
+          </a:xfrm>
+          <a:prstGeom prst="rect">
+            <a:avLst/>
+          </a:prstGeom>
+          <a:noFill/>
+        </p:spPr>
+        <p:txBody>
+          <a:bodyPr wrap="square">
+            <a:spAutoFit/>
+          </a:bodyPr>
+          <a:lstStyle/>
+          <a:p>
+            <a:pPr algn="ctr"/>
+            <a:r>
+              <a:rPr sz="1400" b="1" i="0">
+                <a:solidFill>
+                  <a:srgbClr val="64748B"/>
+                </a:solidFill>
+                <a:latin typeface="Montserrat"/>
+              </a:rPr>
+              <a:t>IMAGEN</a:t>
+            </a:r>
+          </a:p>
+          <a:p>
+            <a:pPr algn="ctr"/>
+            <a:r>
+              <a:rPr sz="1100" b="0" i="1">
+                <a:solidFill>
+                  <a:srgbClr val="64748B"/>
+                </a:solidFill>
+                <a:latin typeface="Montserrat"/>
+              </a:rPr>
+              <a:t>technician filling installation certificate paperwork</a:t>
+            </a:r>
+          </a:p>
+        </p:txBody>
+      </p:sp>
+    </p:spTree>
+  </p:cSld>
+  <p:clrMapOvr>
+    <a:masterClrMapping/>
+  </p:clrMapOvr>
+  <mc:AlternateContent xmlns:mc="http://schemas.openxmlformats.org/markup-compatibility/2006">
+    <mc:Choice xmlns:p14="http://schemas.microsoft.com/office/powerpoint/2010/main" Requires="p14">
+      <p:transition spd="med" p14:dur="700">
+        <p14:cube dir="r"/>
+      </p:transition>
+    </mc:Choice>
+    <mc:Fallback>
+      <p:transition spd="med">
+        <p:push dir="r"/>
+      </p:transition>
+    </mc:Fallback>
+  </mc:AlternateContent>
+</p:sld>
+</file>
+
+<file path=ppt/slides/slide21.xml><?xml version="1.0" encoding="utf-8"?>
+<p:sld xmlns:a="http://schemas.openxmlformats.org/drawingml/2006/main" xmlns:p="http://schemas.openxmlformats.org/presentationml/2006/main" xmlns:r="http://schemas.openxmlformats.org/officeDocument/2006/relationships">
+  <p:cSld>
+    <p:spTree>
+      <p:nvGrpSpPr>
+        <p:cNvPr id="1" name=""/>
+        <p:cNvGrpSpPr/>
+        <p:nvPr/>
+      </p:nvGrpSpPr>
+      <p:grpSpPr/>
+      <p:sp>
+        <p:nvSpPr>
+          <p:cNvPr id="2" name="Rectangle 1"/>
+          <p:cNvSpPr/>
+          <p:nvPr/>
+        </p:nvSpPr>
+        <p:spPr>
+          <a:xfrm>
+            <a:off x="0" y="0"/>
+            <a:ext cx="12191695" cy="6858000"/>
+          </a:xfrm>
+          <a:prstGeom prst="rect">
+            <a:avLst/>
+          </a:prstGeom>
+          <a:solidFill>
+            <a:srgbClr val="FFFFFF"/>
+          </a:solidFill>
+          <a:ln>
+            <a:noFill/>
+          </a:ln>
+          <a:effectLst/>
+        </p:spPr>
+        <p:style>
+          <a:lnRef idx="1">
+            <a:schemeClr val="accent1"/>
+          </a:lnRef>
+          <a:fillRef idx="3">
+            <a:schemeClr val="accent1"/>
+          </a:fillRef>
+          <a:effectRef idx="2">
+            <a:schemeClr val="accent1"/>
+          </a:effectRef>
+          <a:fontRef idx="minor">
+            <a:schemeClr val="lt1"/>
+          </a:fontRef>
+        </p:style>
+        <p:txBody>
+          <a:bodyPr rtlCol="0" anchor="ctr"/>
+          <a:lstStyle/>
+          <a:p>
+            <a:pPr algn="ctr"/>
+          </a:p>
+        </p:txBody>
+      </p:sp>
+      <p:sp>
+        <p:nvSpPr>
+          <p:cNvPr id="3" name="TextBox 2"/>
+          <p:cNvSpPr txBox="1"/>
+          <p:nvPr/>
+        </p:nvSpPr>
+        <p:spPr>
+          <a:xfrm>
+            <a:off x="10607040" y="320040"/>
+            <a:ext cx="1371600" cy="365760"/>
+          </a:xfrm>
+          <a:prstGeom prst="rect">
+            <a:avLst/>
+          </a:prstGeom>
+          <a:noFill/>
+        </p:spPr>
+        <p:txBody>
+          <a:bodyPr wrap="square">
+            <a:spAutoFit/>
+          </a:bodyPr>
+          <a:lstStyle/>
+          <a:p>
+            <a:pPr algn="r"/>
+            <a:r>
+              <a:rPr sz="1000" b="1" i="0">
+                <a:solidFill>
+                  <a:srgbClr val="64748B"/>
+                </a:solidFill>
+                <a:latin typeface="Montserrat"/>
+              </a:rPr>
+              <a:t>021 / 023</a:t>
+            </a:r>
+          </a:p>
+        </p:txBody>
+      </p:sp>
+      <p:sp>
+        <p:nvSpPr>
+          <p:cNvPr id="4" name="TextBox 3"/>
+          <p:cNvSpPr txBox="1"/>
+          <p:nvPr/>
+        </p:nvSpPr>
+        <p:spPr>
+          <a:xfrm>
+            <a:off x="457200" y="6419088"/>
+            <a:ext cx="8229600" cy="365760"/>
+          </a:xfrm>
+          <a:prstGeom prst="rect">
+            <a:avLst/>
+          </a:prstGeom>
+          <a:noFill/>
+        </p:spPr>
+        <p:txBody>
+          <a:bodyPr wrap="square">
+            <a:spAutoFit/>
+          </a:bodyPr>
+          <a:lstStyle/>
+          <a:p>
+            <a:r>
+              <a:rPr sz="900" b="0" i="0">
+                <a:solidFill>
+                  <a:srgbClr val="64748B"/>
+                </a:solidFill>
+                <a:latin typeface="Montserrat"/>
+              </a:rPr>
+              <a:t>Curso Gas B · Tema 09 · UNE 60670-1 y -2</a:t>
+            </a:r>
+          </a:p>
+        </p:txBody>
+      </p:sp>
+      <p:sp>
+        <p:nvSpPr>
+          <p:cNvPr id="5" name="Rectangle 4"/>
+          <p:cNvSpPr/>
+          <p:nvPr/>
+        </p:nvSpPr>
+        <p:spPr>
+          <a:xfrm>
+            <a:off x="0" y="0"/>
+            <a:ext cx="12191695" cy="1143000"/>
+          </a:xfrm>
+          <a:prstGeom prst="rect">
+            <a:avLst/>
+          </a:prstGeom>
+          <a:solidFill>
+            <a:srgbClr val="E8801A"/>
+          </a:solidFill>
+          <a:ln>
+            <a:noFill/>
+          </a:ln>
+          <a:effectLst/>
+        </p:spPr>
+        <p:style>
+          <a:lnRef idx="1">
+            <a:schemeClr val="accent1"/>
+          </a:lnRef>
+          <a:fillRef idx="3">
+            <a:schemeClr val="accent1"/>
+          </a:fillRef>
+          <a:effectRef idx="2">
+            <a:schemeClr val="accent1"/>
+          </a:effectRef>
+          <a:fontRef idx="minor">
+            <a:schemeClr val="lt1"/>
+          </a:fontRef>
+        </p:style>
+        <p:txBody>
+          <a:bodyPr rtlCol="0" anchor="ctr"/>
+          <a:lstStyle/>
+          <a:p>
+            <a:pPr algn="ctr"/>
+          </a:p>
+        </p:txBody>
+      </p:sp>
+      <p:sp>
+        <p:nvSpPr>
+          <p:cNvPr id="6" name="TextBox 5"/>
+          <p:cNvSpPr txBox="1"/>
+          <p:nvPr/>
+        </p:nvSpPr>
+        <p:spPr>
+          <a:xfrm>
+            <a:off x="822960" y="274320"/>
+            <a:ext cx="10515600" cy="640080"/>
+          </a:xfrm>
+          <a:prstGeom prst="rect">
+            <a:avLst/>
+          </a:prstGeom>
+          <a:noFill/>
+        </p:spPr>
+        <p:txBody>
+          <a:bodyPr wrap="square">
+            <a:spAutoFit/>
+          </a:bodyPr>
+          <a:lstStyle/>
+          <a:p>
+            <a:r>
+              <a:rPr sz="2400" b="1" i="0">
+                <a:solidFill>
+                  <a:srgbClr val="FFFFFF"/>
+                </a:solidFill>
+                <a:latin typeface="Montserrat"/>
+              </a:rPr>
+              <a:t>⚡  PREGUNTA RÁPIDA</a:t>
+            </a:r>
+          </a:p>
+        </p:txBody>
+      </p:sp>
+      <p:sp>
+        <p:nvSpPr>
+          <p:cNvPr id="7" name="TextBox 6"/>
+          <p:cNvSpPr txBox="1"/>
+          <p:nvPr/>
+        </p:nvSpPr>
+        <p:spPr>
+          <a:xfrm>
+            <a:off x="822960" y="1508760"/>
+            <a:ext cx="10515600" cy="1371600"/>
+          </a:xfrm>
+          <a:prstGeom prst="rect">
+            <a:avLst/>
+          </a:prstGeom>
+          <a:noFill/>
+        </p:spPr>
+        <p:txBody>
+          <a:bodyPr wrap="square">
+            <a:spAutoFit/>
+          </a:bodyPr>
+          <a:lstStyle/>
+          <a:p>
+            <a:r>
+              <a:rPr sz="2400" b="1" i="0">
+                <a:solidFill>
+                  <a:srgbClr val="1E2761"/>
+                </a:solidFill>
+                <a:latin typeface="Montserrat"/>
+              </a:rPr>
+              <a:t>En una instalación receptora nueva, ¿qué documento exige la distribuidora para dar suministro?</a:t>
+            </a:r>
+          </a:p>
+        </p:txBody>
+      </p:sp>
+      <p:sp>
+        <p:nvSpPr>
+          <p:cNvPr id="8" name="Rounded Rectangle 7"/>
+          <p:cNvSpPr/>
+          <p:nvPr/>
+        </p:nvSpPr>
+        <p:spPr>
+          <a:xfrm>
+            <a:off x="822960" y="3291840"/>
+            <a:ext cx="4983480" cy="1143000"/>
+          </a:xfrm>
+          <a:prstGeom prst="roundRect">
+            <a:avLst/>
+          </a:prstGeom>
+          <a:solidFill>
+            <a:srgbClr val="F3F6FB"/>
+          </a:solidFill>
+          <a:ln w="12700">
+            <a:solidFill>
+              <a:srgbClr val="C7D2E6"/>
+            </a:solidFill>
+          </a:ln>
+          <a:effectLst/>
+        </p:spPr>
+        <p:style>
+          <a:lnRef idx="1">
+            <a:schemeClr val="accent1"/>
+          </a:lnRef>
+          <a:fillRef idx="3">
+            <a:schemeClr val="accent1"/>
+          </a:fillRef>
+          <a:effectRef idx="2">
+            <a:schemeClr val="accent1"/>
+          </a:effectRef>
+          <a:fontRef idx="minor">
+            <a:schemeClr val="lt1"/>
+          </a:fontRef>
+        </p:style>
+        <p:txBody>
+          <a:bodyPr rtlCol="0" anchor="ctr"/>
+          <a:lstStyle/>
+          <a:p>
+            <a:pPr algn="ctr"/>
+          </a:p>
+        </p:txBody>
+      </p:sp>
+      <p:sp>
+        <p:nvSpPr>
+          <p:cNvPr id="9" name="Rectangle 8"/>
+          <p:cNvSpPr/>
+          <p:nvPr/>
+        </p:nvSpPr>
+        <p:spPr>
+          <a:xfrm>
+            <a:off x="822960" y="3291840"/>
+            <a:ext cx="640080" cy="1143000"/>
+          </a:xfrm>
+          <a:prstGeom prst="rect">
+            <a:avLst/>
+          </a:prstGeom>
+          <a:solidFill>
+            <a:srgbClr val="1E2761"/>
+          </a:solidFill>
+          <a:ln>
+            <a:noFill/>
+          </a:ln>
+          <a:effectLst/>
+        </p:spPr>
+        <p:style>
+          <a:lnRef idx="1">
+            <a:schemeClr val="accent1"/>
+          </a:lnRef>
+          <a:fillRef idx="3">
+            <a:schemeClr val="accent1"/>
+          </a:fillRef>
+          <a:effectRef idx="2">
+            <a:schemeClr val="accent1"/>
+          </a:effectRef>
+          <a:fontRef idx="minor">
+            <a:schemeClr val="lt1"/>
+          </a:fontRef>
+        </p:style>
+        <p:txBody>
+          <a:bodyPr rtlCol="0" anchor="ctr"/>
+          <a:lstStyle/>
+          <a:p>
+            <a:pPr algn="ctr"/>
+          </a:p>
+        </p:txBody>
+      </p:sp>
+      <p:sp>
+        <p:nvSpPr>
+          <p:cNvPr id="10" name="TextBox 9"/>
+          <p:cNvSpPr txBox="1"/>
+          <p:nvPr/>
+        </p:nvSpPr>
+        <p:spPr>
+          <a:xfrm>
+            <a:off x="822960" y="3611880"/>
+            <a:ext cx="640080" cy="548640"/>
+          </a:xfrm>
+          <a:prstGeom prst="rect">
+            <a:avLst/>
+          </a:prstGeom>
+          <a:noFill/>
+        </p:spPr>
+        <p:txBody>
+          <a:bodyPr wrap="square">
+            <a:spAutoFit/>
+          </a:bodyPr>
+          <a:lstStyle/>
+          <a:p>
+            <a:pPr algn="ctr"/>
+            <a:r>
+              <a:rPr sz="2200" b="1" i="0">
+                <a:solidFill>
+                  <a:srgbClr val="FFFFFF"/>
+                </a:solidFill>
+                <a:latin typeface="Montserrat"/>
+              </a:rPr>
+              <a:t>A</a:t>
+            </a:r>
+          </a:p>
+        </p:txBody>
+      </p:sp>
+      <p:sp>
+        <p:nvSpPr>
+          <p:cNvPr id="11" name="TextBox 10"/>
+          <p:cNvSpPr txBox="1"/>
+          <p:nvPr/>
+        </p:nvSpPr>
+        <p:spPr>
+          <a:xfrm>
+            <a:off x="1600200" y="3474720"/>
+            <a:ext cx="4114800" cy="868680"/>
+          </a:xfrm>
+          <a:prstGeom prst="rect">
+            <a:avLst/>
+          </a:prstGeom>
+          <a:noFill/>
+        </p:spPr>
+        <p:txBody>
+          <a:bodyPr wrap="square">
+            <a:spAutoFit/>
+          </a:bodyPr>
+          <a:lstStyle/>
+          <a:p>
+            <a:r>
+              <a:rPr sz="1400" b="0" i="0">
+                <a:solidFill>
+                  <a:srgbClr val="1B2330"/>
+                </a:solidFill>
+                <a:latin typeface="Montserrat"/>
+              </a:rPr>
+              <a:t>El certificado o boletín firmado por la empresa instaladora de categoría B</a:t>
+            </a:r>
+          </a:p>
+        </p:txBody>
+      </p:sp>
+      <p:sp>
+        <p:nvSpPr>
+          <p:cNvPr id="12" name="Rounded Rectangle 11"/>
+          <p:cNvSpPr/>
+          <p:nvPr/>
+        </p:nvSpPr>
+        <p:spPr>
+          <a:xfrm>
+            <a:off x="6355080" y="3291840"/>
+            <a:ext cx="4983480" cy="1143000"/>
+          </a:xfrm>
+          <a:prstGeom prst="roundRect">
+            <a:avLst/>
+          </a:prstGeom>
+          <a:solidFill>
+            <a:srgbClr val="F3F6FB"/>
+          </a:solidFill>
+          <a:ln w="12700">
+            <a:solidFill>
+              <a:srgbClr val="C7D2E6"/>
+            </a:solidFill>
+          </a:ln>
+          <a:effectLst/>
+        </p:spPr>
+        <p:style>
+          <a:lnRef idx="1">
+            <a:schemeClr val="accent1"/>
+          </a:lnRef>
+          <a:fillRef idx="3">
+            <a:schemeClr val="accent1"/>
+          </a:fillRef>
+          <a:effectRef idx="2">
+            <a:schemeClr val="accent1"/>
+          </a:effectRef>
+          <a:fontRef idx="minor">
+            <a:schemeClr val="lt1"/>
+          </a:fontRef>
+        </p:style>
+        <p:txBody>
+          <a:bodyPr rtlCol="0" anchor="ctr"/>
+          <a:lstStyle/>
+          <a:p>
+            <a:pPr algn="ctr"/>
+          </a:p>
+        </p:txBody>
+      </p:sp>
+      <p:sp>
+        <p:nvSpPr>
+          <p:cNvPr id="13" name="Rectangle 12"/>
+          <p:cNvSpPr/>
+          <p:nvPr/>
+        </p:nvSpPr>
+        <p:spPr>
+          <a:xfrm>
+            <a:off x="6355080" y="3291840"/>
+            <a:ext cx="640080" cy="1143000"/>
+          </a:xfrm>
+          <a:prstGeom prst="rect">
+            <a:avLst/>
+          </a:prstGeom>
+          <a:solidFill>
+            <a:srgbClr val="1E2761"/>
+          </a:solidFill>
+          <a:ln>
+            <a:noFill/>
+          </a:ln>
+          <a:effectLst/>
+        </p:spPr>
+        <p:style>
+          <a:lnRef idx="1">
+            <a:schemeClr val="accent1"/>
+          </a:lnRef>
+          <a:fillRef idx="3">
+            <a:schemeClr val="accent1"/>
+          </a:fillRef>
+          <a:effectRef idx="2">
+            <a:schemeClr val="accent1"/>
+          </a:effectRef>
+          <a:fontRef idx="minor">
+            <a:schemeClr val="lt1"/>
+          </a:fontRef>
+        </p:style>
+        <p:txBody>
+          <a:bodyPr rtlCol="0" anchor="ctr"/>
+          <a:lstStyle/>
+          <a:p>
+            <a:pPr algn="ctr"/>
+          </a:p>
+        </p:txBody>
+      </p:sp>
+      <p:sp>
+        <p:nvSpPr>
+          <p:cNvPr id="14" name="TextBox 13"/>
+          <p:cNvSpPr txBox="1"/>
+          <p:nvPr/>
+        </p:nvSpPr>
+        <p:spPr>
+          <a:xfrm>
+            <a:off x="6355080" y="3611880"/>
+            <a:ext cx="640080" cy="548640"/>
+          </a:xfrm>
+          <a:prstGeom prst="rect">
+            <a:avLst/>
+          </a:prstGeom>
+          <a:noFill/>
+        </p:spPr>
+        <p:txBody>
+          <a:bodyPr wrap="square">
+            <a:spAutoFit/>
+          </a:bodyPr>
+          <a:lstStyle/>
+          <a:p>
+            <a:pPr algn="ctr"/>
+            <a:r>
+              <a:rPr sz="2200" b="1" i="0">
+                <a:solidFill>
+                  <a:srgbClr val="FFFFFF"/>
+                </a:solidFill>
+                <a:latin typeface="Montserrat"/>
+              </a:rPr>
+              <a:t>B</a:t>
+            </a:r>
+          </a:p>
+        </p:txBody>
+      </p:sp>
+      <p:sp>
+        <p:nvSpPr>
+          <p:cNvPr id="15" name="TextBox 14"/>
+          <p:cNvSpPr txBox="1"/>
+          <p:nvPr/>
+        </p:nvSpPr>
+        <p:spPr>
+          <a:xfrm>
+            <a:off x="7132320" y="3474720"/>
+            <a:ext cx="4114800" cy="868680"/>
+          </a:xfrm>
+          <a:prstGeom prst="rect">
+            <a:avLst/>
+          </a:prstGeom>
+          <a:noFill/>
+        </p:spPr>
+        <p:txBody>
+          <a:bodyPr wrap="square">
+            <a:spAutoFit/>
+          </a:bodyPr>
+          <a:lstStyle/>
+          <a:p>
+            <a:r>
+              <a:rPr sz="1400" b="0" i="0">
+                <a:solidFill>
+                  <a:srgbClr val="1B2330"/>
+                </a:solidFill>
+                <a:latin typeface="Montserrat"/>
+              </a:rPr>
+              <a:t>Una autorización previa del ayuntamiento del municipio</a:t>
+            </a:r>
+          </a:p>
+        </p:txBody>
+      </p:sp>
+      <p:sp>
+        <p:nvSpPr>
+          <p:cNvPr id="16" name="Rounded Rectangle 15"/>
+          <p:cNvSpPr/>
+          <p:nvPr/>
+        </p:nvSpPr>
+        <p:spPr>
+          <a:xfrm>
+            <a:off x="822960" y="4617720"/>
+            <a:ext cx="4983480" cy="1143000"/>
+          </a:xfrm>
+          <a:prstGeom prst="roundRect">
+            <a:avLst/>
+          </a:prstGeom>
+          <a:solidFill>
+            <a:srgbClr val="F3F6FB"/>
+          </a:solidFill>
+          <a:ln w="12700">
+            <a:solidFill>
+              <a:srgbClr val="C7D2E6"/>
+            </a:solidFill>
+          </a:ln>
+          <a:effectLst/>
+        </p:spPr>
+        <p:style>
+          <a:lnRef idx="1">
+            <a:schemeClr val="accent1"/>
+          </a:lnRef>
+          <a:fillRef idx="3">
+            <a:schemeClr val="accent1"/>
+          </a:fillRef>
+          <a:effectRef idx="2">
+            <a:schemeClr val="accent1"/>
+          </a:effectRef>
+          <a:fontRef idx="minor">
+            <a:schemeClr val="lt1"/>
+          </a:fontRef>
+        </p:style>
+        <p:txBody>
+          <a:bodyPr rtlCol="0" anchor="ctr"/>
+          <a:lstStyle/>
+          <a:p>
+            <a:pPr algn="ctr"/>
+          </a:p>
+        </p:txBody>
+      </p:sp>
+      <p:sp>
+        <p:nvSpPr>
+          <p:cNvPr id="17" name="Rectangle 16"/>
+          <p:cNvSpPr/>
+          <p:nvPr/>
+        </p:nvSpPr>
+        <p:spPr>
+          <a:xfrm>
+            <a:off x="822960" y="4617720"/>
+            <a:ext cx="640080" cy="1143000"/>
+          </a:xfrm>
+          <a:prstGeom prst="rect">
+            <a:avLst/>
+          </a:prstGeom>
+          <a:solidFill>
+            <a:srgbClr val="1E2761"/>
+          </a:solidFill>
+          <a:ln>
+            <a:noFill/>
+          </a:ln>
+          <a:effectLst/>
+        </p:spPr>
+        <p:style>
+          <a:lnRef idx="1">
+            <a:schemeClr val="accent1"/>
+          </a:lnRef>
+          <a:fillRef idx="3">
+            <a:schemeClr val="accent1"/>
+          </a:fillRef>
+          <a:effectRef idx="2">
+            <a:schemeClr val="accent1"/>
+          </a:effectRef>
+          <a:fontRef idx="minor">
+            <a:schemeClr val="lt1"/>
+          </a:fontRef>
+        </p:style>
+        <p:txBody>
+          <a:bodyPr rtlCol="0" anchor="ctr"/>
+          <a:lstStyle/>
+          <a:p>
+            <a:pPr algn="ctr"/>
+          </a:p>
+        </p:txBody>
+      </p:sp>
+      <p:sp>
+        <p:nvSpPr>
+          <p:cNvPr id="18" name="TextBox 17"/>
+          <p:cNvSpPr txBox="1"/>
+          <p:nvPr/>
+        </p:nvSpPr>
+        <p:spPr>
+          <a:xfrm>
+            <a:off x="822960" y="4937760"/>
+            <a:ext cx="640080" cy="548640"/>
+          </a:xfrm>
+          <a:prstGeom prst="rect">
+            <a:avLst/>
+          </a:prstGeom>
+          <a:noFill/>
+        </p:spPr>
+        <p:txBody>
+          <a:bodyPr wrap="square">
+            <a:spAutoFit/>
+          </a:bodyPr>
+          <a:lstStyle/>
+          <a:p>
+            <a:pPr algn="ctr"/>
+            <a:r>
+              <a:rPr sz="2200" b="1" i="0">
+                <a:solidFill>
+                  <a:srgbClr val="FFFFFF"/>
+                </a:solidFill>
+                <a:latin typeface="Montserrat"/>
+              </a:rPr>
+              <a:t>C</a:t>
+            </a:r>
+          </a:p>
+        </p:txBody>
+      </p:sp>
+      <p:sp>
+        <p:nvSpPr>
+          <p:cNvPr id="19" name="TextBox 18"/>
+          <p:cNvSpPr txBox="1"/>
+          <p:nvPr/>
+        </p:nvSpPr>
+        <p:spPr>
+          <a:xfrm>
+            <a:off x="1600200" y="4800600"/>
+            <a:ext cx="4114800" cy="868680"/>
+          </a:xfrm>
+          <a:prstGeom prst="rect">
+            <a:avLst/>
+          </a:prstGeom>
+          <a:noFill/>
+        </p:spPr>
+        <p:txBody>
+          <a:bodyPr wrap="square">
+            <a:spAutoFit/>
+          </a:bodyPr>
+          <a:lstStyle/>
+          <a:p>
+            <a:r>
+              <a:rPr sz="1400" b="0" i="0">
+                <a:solidFill>
+                  <a:srgbClr val="1B2330"/>
+                </a:solidFill>
+                <a:latin typeface="Montserrat"/>
+              </a:rPr>
+              <a:t>La factura de compra de la caldera y los aparatos</a:t>
+            </a:r>
+          </a:p>
+        </p:txBody>
+      </p:sp>
+      <p:sp>
+        <p:nvSpPr>
+          <p:cNvPr id="20" name="Rounded Rectangle 19"/>
+          <p:cNvSpPr/>
+          <p:nvPr/>
+        </p:nvSpPr>
+        <p:spPr>
+          <a:xfrm>
+            <a:off x="6355080" y="4617720"/>
+            <a:ext cx="4983480" cy="1143000"/>
+          </a:xfrm>
+          <a:prstGeom prst="roundRect">
+            <a:avLst/>
+          </a:prstGeom>
+          <a:solidFill>
+            <a:srgbClr val="F3F6FB"/>
+          </a:solidFill>
+          <a:ln w="12700">
+            <a:solidFill>
+              <a:srgbClr val="C7D2E6"/>
+            </a:solidFill>
+          </a:ln>
+          <a:effectLst/>
+        </p:spPr>
+        <p:style>
+          <a:lnRef idx="1">
+            <a:schemeClr val="accent1"/>
+          </a:lnRef>
+          <a:fillRef idx="3">
+            <a:schemeClr val="accent1"/>
+          </a:fillRef>
+          <a:effectRef idx="2">
+            <a:schemeClr val="accent1"/>
+          </a:effectRef>
+          <a:fontRef idx="minor">
+            <a:schemeClr val="lt1"/>
+          </a:fontRef>
+        </p:style>
+        <p:txBody>
+          <a:bodyPr rtlCol="0" anchor="ctr"/>
+          <a:lstStyle/>
+          <a:p>
+            <a:pPr algn="ctr"/>
+          </a:p>
+        </p:txBody>
+      </p:sp>
+      <p:sp>
+        <p:nvSpPr>
+          <p:cNvPr id="21" name="Rectangle 20"/>
+          <p:cNvSpPr/>
+          <p:nvPr/>
+        </p:nvSpPr>
+        <p:spPr>
+          <a:xfrm>
+            <a:off x="6355080" y="4617720"/>
+            <a:ext cx="640080" cy="1143000"/>
+          </a:xfrm>
+          <a:prstGeom prst="rect">
+            <a:avLst/>
+          </a:prstGeom>
+          <a:solidFill>
+            <a:srgbClr val="1E2761"/>
+          </a:solidFill>
+          <a:ln>
+            <a:noFill/>
+          </a:ln>
+          <a:effectLst/>
+        </p:spPr>
+        <p:style>
+          <a:lnRef idx="1">
+            <a:schemeClr val="accent1"/>
+          </a:lnRef>
+          <a:fillRef idx="3">
+            <a:schemeClr val="accent1"/>
+          </a:fillRef>
+          <a:effectRef idx="2">
+            <a:schemeClr val="accent1"/>
+          </a:effectRef>
+          <a:fontRef idx="minor">
+            <a:schemeClr val="lt1"/>
+          </a:fontRef>
+        </p:style>
+        <p:txBody>
+          <a:bodyPr rtlCol="0" anchor="ctr"/>
+          <a:lstStyle/>
+          <a:p>
+            <a:pPr algn="ctr"/>
+          </a:p>
+        </p:txBody>
+      </p:sp>
+      <p:sp>
+        <p:nvSpPr>
+          <p:cNvPr id="22" name="TextBox 21"/>
+          <p:cNvSpPr txBox="1"/>
+          <p:nvPr/>
+        </p:nvSpPr>
+        <p:spPr>
+          <a:xfrm>
+            <a:off x="6355080" y="4937760"/>
+            <a:ext cx="640080" cy="548640"/>
+          </a:xfrm>
+          <a:prstGeom prst="rect">
+            <a:avLst/>
+          </a:prstGeom>
+          <a:noFill/>
+        </p:spPr>
+        <p:txBody>
+          <a:bodyPr wrap="square">
+            <a:spAutoFit/>
+          </a:bodyPr>
+          <a:lstStyle/>
+          <a:p>
+            <a:pPr algn="ctr"/>
+            <a:r>
+              <a:rPr sz="2200" b="1" i="0">
+                <a:solidFill>
+                  <a:srgbClr val="FFFFFF"/>
+                </a:solidFill>
+                <a:latin typeface="Montserrat"/>
+              </a:rPr>
+              <a:t>D</a:t>
+            </a:r>
+          </a:p>
+        </p:txBody>
+      </p:sp>
+      <p:sp>
+        <p:nvSpPr>
+          <p:cNvPr id="23" name="TextBox 22"/>
+          <p:cNvSpPr txBox="1"/>
+          <p:nvPr/>
+        </p:nvSpPr>
+        <p:spPr>
+          <a:xfrm>
+            <a:off x="7132320" y="4800600"/>
+            <a:ext cx="4114800" cy="868680"/>
+          </a:xfrm>
+          <a:prstGeom prst="rect">
+            <a:avLst/>
+          </a:prstGeom>
+          <a:noFill/>
+        </p:spPr>
+        <p:txBody>
+          <a:bodyPr wrap="square">
+            <a:spAutoFit/>
+          </a:bodyPr>
+          <a:lstStyle/>
+          <a:p>
+            <a:r>
+              <a:rPr sz="1400" b="0" i="0">
+                <a:solidFill>
+                  <a:srgbClr val="1B2330"/>
+                </a:solidFill>
+                <a:latin typeface="Montserrat"/>
+              </a:rPr>
+              <a:t>El manual de instrucciones del fabricante del aparato</a:t>
+            </a:r>
+          </a:p>
+        </p:txBody>
+      </p:sp>
+    </p:spTree>
+  </p:cSld>
+  <p:clrMapOvr>
+    <a:masterClrMapping/>
+  </p:clrMapOvr>
+  <mc:AlternateContent xmlns:mc="http://schemas.openxmlformats.org/markup-compatibility/2006">
+    <mc:Choice xmlns:p14="http://schemas.microsoft.com/office/powerpoint/2010/main" Requires="p14">
+      <p:transition spd="med" p14:dur="700">
+        <p14:cube dir="l"/>
+      </p:transition>
+    </mc:Choice>
+    <mc:Fallback>
+      <p:transition spd="med">
+        <p:push dir="l"/>
+      </p:transition>
+    </mc:Fallback>
+  </mc:AlternateContent>
+</p:sld>
+</file>
+
+<file path=ppt/slides/slide22.xml><?xml version="1.0" encoding="utf-8"?>
+<p:sld xmlns:a="http://schemas.openxmlformats.org/drawingml/2006/main" xmlns:p="http://schemas.openxmlformats.org/presentationml/2006/main" xmlns:r="http://schemas.openxmlformats.org/officeDocument/2006/relationships">
+  <p:cSld>
+    <p:spTree>
+      <p:nvGrpSpPr>
+        <p:cNvPr id="1" name=""/>
+        <p:cNvGrpSpPr/>
+        <p:nvPr/>
+      </p:nvGrpSpPr>
+      <p:grpSpPr/>
+      <p:sp>
+        <p:nvSpPr>
+          <p:cNvPr id="2" name="Rectangle 1"/>
+          <p:cNvSpPr/>
+          <p:nvPr/>
+        </p:nvSpPr>
+        <p:spPr>
+          <a:xfrm>
+            <a:off x="0" y="0"/>
+            <a:ext cx="12191695" cy="6858000"/>
+          </a:xfrm>
+          <a:prstGeom prst="rect">
+            <a:avLst/>
+          </a:prstGeom>
+          <a:solidFill>
+            <a:srgbClr val="FFFFFF"/>
+          </a:solidFill>
+          <a:ln>
+            <a:noFill/>
+          </a:ln>
+          <a:effectLst/>
+        </p:spPr>
+        <p:style>
+          <a:lnRef idx="1">
+            <a:schemeClr val="accent1"/>
+          </a:lnRef>
+          <a:fillRef idx="3">
+            <a:schemeClr val="accent1"/>
+          </a:fillRef>
+          <a:effectRef idx="2">
+            <a:schemeClr val="accent1"/>
+          </a:effectRef>
+          <a:fontRef idx="minor">
+            <a:schemeClr val="lt1"/>
+          </a:fontRef>
+        </p:style>
+        <p:txBody>
+          <a:bodyPr rtlCol="0" anchor="ctr"/>
+          <a:lstStyle/>
+          <a:p>
+            <a:pPr algn="ctr"/>
+          </a:p>
+        </p:txBody>
+      </p:sp>
+      <p:sp>
+        <p:nvSpPr>
+          <p:cNvPr id="3" name="TextBox 2"/>
+          <p:cNvSpPr txBox="1"/>
+          <p:nvPr/>
+        </p:nvSpPr>
+        <p:spPr>
+          <a:xfrm>
+            <a:off x="10607040" y="320040"/>
+            <a:ext cx="1371600" cy="365760"/>
+          </a:xfrm>
+          <a:prstGeom prst="rect">
+            <a:avLst/>
+          </a:prstGeom>
+          <a:noFill/>
+        </p:spPr>
+        <p:txBody>
+          <a:bodyPr wrap="square">
+            <a:spAutoFit/>
+          </a:bodyPr>
+          <a:lstStyle/>
+          <a:p>
+            <a:pPr algn="r"/>
+            <a:r>
+              <a:rPr sz="1000" b="1" i="0">
+                <a:solidFill>
+                  <a:srgbClr val="64748B"/>
+                </a:solidFill>
+                <a:latin typeface="Montserrat"/>
+              </a:rPr>
+              <a:t>022 / 023</a:t>
+            </a:r>
+          </a:p>
+        </p:txBody>
+      </p:sp>
+      <p:sp>
+        <p:nvSpPr>
+          <p:cNvPr id="4" name="TextBox 3"/>
+          <p:cNvSpPr txBox="1"/>
+          <p:nvPr/>
+        </p:nvSpPr>
+        <p:spPr>
+          <a:xfrm>
+            <a:off x="457200" y="6419088"/>
+            <a:ext cx="8229600" cy="365760"/>
+          </a:xfrm>
+          <a:prstGeom prst="rect">
+            <a:avLst/>
+          </a:prstGeom>
+          <a:noFill/>
+        </p:spPr>
+        <p:txBody>
+          <a:bodyPr wrap="square">
+            <a:spAutoFit/>
+          </a:bodyPr>
+          <a:lstStyle/>
+          <a:p>
+            <a:r>
+              <a:rPr sz="900" b="0" i="0">
+                <a:solidFill>
+                  <a:srgbClr val="64748B"/>
+                </a:solidFill>
+                <a:latin typeface="Montserrat"/>
+              </a:rPr>
+              <a:t>Curso Gas B · Tema 09 · UNE 60670-1 y -2</a:t>
+            </a:r>
+          </a:p>
+        </p:txBody>
+      </p:sp>
+      <p:sp>
+        <p:nvSpPr>
+          <p:cNvPr id="5" name="Rectangle 4"/>
+          <p:cNvSpPr/>
+          <p:nvPr/>
+        </p:nvSpPr>
+        <p:spPr>
+          <a:xfrm>
+            <a:off x="0" y="0"/>
+            <a:ext cx="12191695" cy="1143000"/>
+          </a:xfrm>
+          <a:prstGeom prst="rect">
+            <a:avLst/>
+          </a:prstGeom>
+          <a:solidFill>
+            <a:srgbClr val="1E8E4B"/>
+          </a:solidFill>
+          <a:ln>
+            <a:noFill/>
+          </a:ln>
+          <a:effectLst/>
+        </p:spPr>
+        <p:style>
+          <a:lnRef idx="1">
+            <a:schemeClr val="accent1"/>
+          </a:lnRef>
+          <a:fillRef idx="3">
+            <a:schemeClr val="accent1"/>
+          </a:fillRef>
+          <a:effectRef idx="2">
+            <a:schemeClr val="accent1"/>
+          </a:effectRef>
+          <a:fontRef idx="minor">
+            <a:schemeClr val="lt1"/>
+          </a:fontRef>
+        </p:style>
+        <p:txBody>
+          <a:bodyPr rtlCol="0" anchor="ctr"/>
+          <a:lstStyle/>
+          <a:p>
+            <a:pPr algn="ctr"/>
+          </a:p>
+        </p:txBody>
+      </p:sp>
+      <p:sp>
+        <p:nvSpPr>
+          <p:cNvPr id="6" name="TextBox 5"/>
+          <p:cNvSpPr txBox="1"/>
+          <p:nvPr/>
+        </p:nvSpPr>
+        <p:spPr>
+          <a:xfrm>
+            <a:off x="822960" y="274320"/>
+            <a:ext cx="10515600" cy="640080"/>
+          </a:xfrm>
+          <a:prstGeom prst="rect">
+            <a:avLst/>
+          </a:prstGeom>
+          <a:noFill/>
+        </p:spPr>
+        <p:txBody>
+          <a:bodyPr wrap="square">
+            <a:spAutoFit/>
+          </a:bodyPr>
+          <a:lstStyle/>
+          <a:p>
+            <a:r>
+              <a:rPr sz="2400" b="1" i="0">
+                <a:solidFill>
+                  <a:srgbClr val="FFFFFF"/>
+                </a:solidFill>
+                <a:latin typeface="Montserrat"/>
+              </a:rPr>
+              <a:t>✔  RESPUESTA:  A</a:t>
+            </a:r>
+          </a:p>
+        </p:txBody>
+      </p:sp>
+      <p:sp>
+        <p:nvSpPr>
+          <p:cNvPr id="7" name="TextBox 6"/>
+          <p:cNvSpPr txBox="1"/>
+          <p:nvPr/>
+        </p:nvSpPr>
+        <p:spPr>
+          <a:xfrm>
+            <a:off x="822960" y="1417320"/>
+            <a:ext cx="10515600" cy="914400"/>
+          </a:xfrm>
+          <a:prstGeom prst="rect">
+            <a:avLst/>
+          </a:prstGeom>
+          <a:noFill/>
+        </p:spPr>
+        <p:txBody>
+          <a:bodyPr wrap="square">
+            <a:spAutoFit/>
+          </a:bodyPr>
+          <a:lstStyle/>
+          <a:p>
+            <a:r>
+              <a:rPr sz="1800" b="1" i="0">
+                <a:solidFill>
+                  <a:srgbClr val="64748B"/>
+                </a:solidFill>
+                <a:latin typeface="Montserrat"/>
+              </a:rPr>
+              <a:t>En una instalación receptora nueva, ¿qué documento exige la distribuidora para dar suministro?</a:t>
+            </a:r>
+          </a:p>
+        </p:txBody>
+      </p:sp>
+      <p:sp>
+        <p:nvSpPr>
+          <p:cNvPr id="8" name="Rounded Rectangle 7"/>
+          <p:cNvSpPr/>
+          <p:nvPr/>
+        </p:nvSpPr>
+        <p:spPr>
+          <a:xfrm>
+            <a:off x="822960" y="2514600"/>
+            <a:ext cx="10515600" cy="914400"/>
+          </a:xfrm>
+          <a:prstGeom prst="roundRect">
+            <a:avLst/>
+          </a:prstGeom>
+          <a:solidFill>
+            <a:srgbClr val="E9F6EE"/>
+          </a:solidFill>
+          <a:ln w="12700">
+            <a:solidFill>
+              <a:srgbClr val="1E8E4B"/>
+            </a:solidFill>
+          </a:ln>
+          <a:effectLst/>
+        </p:spPr>
+        <p:style>
+          <a:lnRef idx="1">
+            <a:schemeClr val="accent1"/>
+          </a:lnRef>
+          <a:fillRef idx="3">
+            <a:schemeClr val="accent1"/>
+          </a:fillRef>
+          <a:effectRef idx="2">
+            <a:schemeClr val="accent1"/>
+          </a:effectRef>
+          <a:fontRef idx="minor">
+            <a:schemeClr val="lt1"/>
+          </a:fontRef>
+        </p:style>
+        <p:txBody>
+          <a:bodyPr rtlCol="0" anchor="ctr"/>
+          <a:lstStyle/>
+          <a:p>
+            <a:pPr algn="ctr"/>
+          </a:p>
+        </p:txBody>
+      </p:sp>
+      <p:sp>
+        <p:nvSpPr>
+          <p:cNvPr id="9" name="TextBox 8"/>
+          <p:cNvSpPr txBox="1"/>
+          <p:nvPr/>
+        </p:nvSpPr>
+        <p:spPr>
+          <a:xfrm>
+            <a:off x="1097280" y="2697480"/>
+            <a:ext cx="10058400" cy="640080"/>
+          </a:xfrm>
+          <a:prstGeom prst="rect">
+            <a:avLst/>
+          </a:prstGeom>
+          <a:noFill/>
+        </p:spPr>
+        <p:txBody>
+          <a:bodyPr wrap="square">
+            <a:spAutoFit/>
+          </a:bodyPr>
+          <a:lstStyle/>
+          <a:p>
+            <a:r>
+              <a:rPr sz="1800" b="1" i="0">
+                <a:solidFill>
+                  <a:srgbClr val="1E8E4B"/>
+                </a:solidFill>
+                <a:latin typeface="Montserrat"/>
+              </a:rPr>
+              <a:t>A.  </a:t>
+            </a:r>
+            <a:r>
+              <a:rPr sz="1800" b="1" i="0">
+                <a:solidFill>
+                  <a:srgbClr val="1E2761"/>
+                </a:solidFill>
+                <a:latin typeface="Montserrat"/>
+              </a:rPr>
+              <a:t>El certificado o boletín firmado por la empresa instaladora de categoría B</a:t>
+            </a:r>
+          </a:p>
+        </p:txBody>
+      </p:sp>
+      <p:sp>
+        <p:nvSpPr>
+          <p:cNvPr id="10" name="TextBox 9"/>
+          <p:cNvSpPr txBox="1"/>
+          <p:nvPr/>
+        </p:nvSpPr>
+        <p:spPr>
+          <a:xfrm>
+            <a:off x="822960" y="3749039"/>
+            <a:ext cx="10515600" cy="2194560"/>
+          </a:xfrm>
+          <a:prstGeom prst="rect">
+            <a:avLst/>
+          </a:prstGeom>
+          <a:noFill/>
+        </p:spPr>
+        <p:txBody>
+          <a:bodyPr wrap="square">
+            <a:spAutoFit/>
+          </a:bodyPr>
+          <a:lstStyle/>
+          <a:p>
+            <a:r>
+              <a:rPr sz="1500" b="1" i="0">
+                <a:solidFill>
+                  <a:srgbClr val="E8801A"/>
+                </a:solidFill>
+                <a:latin typeface="Montserrat"/>
+              </a:rPr>
+              <a:t>Por qué:  </a:t>
+            </a:r>
+            <a:r>
+              <a:rPr sz="1500" b="0" i="0">
+                <a:solidFill>
+                  <a:srgbClr val="1B2330"/>
+                </a:solidFill>
+                <a:latin typeface="Montserrat"/>
+              </a:rPr>
+              <a:t>Toda instalación receptora obliga a un certificado firmado por la empresa habilitada de categoría B; sin él, la distribuidora no da gas.</a:t>
+            </a:r>
+          </a:p>
+        </p:txBody>
+      </p:sp>
+    </p:spTree>
+  </p:cSld>
+  <p:clrMapOvr>
+    <a:masterClrMapping/>
+  </p:clrMapOvr>
+  <mc:AlternateContent xmlns:mc="http://schemas.openxmlformats.org/markup-compatibility/2006">
+    <mc:Choice xmlns:p14="http://schemas.microsoft.com/office/powerpoint/2010/main" Requires="p14">
+      <p:transition spd="med" p14:dur="700">
+        <p14:cube dir="r"/>
+      </p:transition>
+    </mc:Choice>
+    <mc:Fallback>
+      <p:transition spd="med">
+        <p:push dir="r"/>
+      </p:transition>
+    </mc:Fallback>
+  </mc:AlternateContent>
+</p:sld>
+</file>
+
+<file path=ppt/slides/slide23.xml><?xml version="1.0" encoding="utf-8"?>
+<p:sld xmlns:a="http://schemas.openxmlformats.org/drawingml/2006/main" xmlns:p="http://schemas.openxmlformats.org/presentationml/2006/main" xmlns:r="http://schemas.openxmlformats.org/officeDocument/2006/relationships">
+  <p:cSld>
+    <p:spTree>
+      <p:nvGrpSpPr>
+        <p:cNvPr id="1" name=""/>
+        <p:cNvGrpSpPr/>
+        <p:nvPr/>
+      </p:nvGrpSpPr>
+      <p:grpSpPr/>
+      <p:sp>
+        <p:nvSpPr>
+          <p:cNvPr id="2" name="Rectangle 1"/>
+          <p:cNvSpPr/>
+          <p:nvPr/>
+        </p:nvSpPr>
+        <p:spPr>
+          <a:xfrm>
+            <a:off x="0" y="0"/>
+            <a:ext cx="12191695" cy="6858000"/>
+          </a:xfrm>
+          <a:prstGeom prst="rect">
+            <a:avLst/>
+          </a:prstGeom>
+          <a:solidFill>
+            <a:srgbClr val="1E2761"/>
+          </a:solidFill>
+          <a:ln>
+            <a:noFill/>
+          </a:ln>
+          <a:effectLst/>
+        </p:spPr>
+        <p:style>
+          <a:lnRef idx="1">
+            <a:schemeClr val="accent1"/>
+          </a:lnRef>
+          <a:fillRef idx="3">
+            <a:schemeClr val="accent1"/>
+          </a:fillRef>
+          <a:effectRef idx="2">
+            <a:schemeClr val="accent1"/>
+          </a:effectRef>
+          <a:fontRef idx="minor">
+            <a:schemeClr val="lt1"/>
+          </a:fontRef>
+        </p:style>
+        <p:txBody>
+          <a:bodyPr rtlCol="0" anchor="ctr"/>
+          <a:lstStyle/>
+          <a:p>
+            <a:pPr algn="ctr"/>
+          </a:p>
+        </p:txBody>
+      </p:sp>
+      <p:sp>
+        <p:nvSpPr>
+          <p:cNvPr id="3" name="TextBox 2"/>
+          <p:cNvSpPr txBox="1"/>
+          <p:nvPr/>
+        </p:nvSpPr>
+        <p:spPr>
+          <a:xfrm>
+            <a:off x="822960" y="640080"/>
+            <a:ext cx="10515600" cy="457200"/>
+          </a:xfrm>
+          <a:prstGeom prst="rect">
+            <a:avLst/>
+          </a:prstGeom>
+          <a:noFill/>
+        </p:spPr>
+        <p:txBody>
+          <a:bodyPr wrap="square">
+            <a:spAutoFit/>
+          </a:bodyPr>
+          <a:lstStyle/>
+          <a:p>
+            <a:r>
+              <a:rPr sz="1400" b="1" i="0">
+                <a:solidFill>
+                  <a:srgbClr val="F4A24C"/>
+                </a:solidFill>
+                <a:latin typeface="Montserrat"/>
+              </a:rPr>
+              <a:t>LO QUE YA DOMINAS</a:t>
+            </a:r>
+          </a:p>
+        </p:txBody>
+      </p:sp>
+      <p:sp>
+        <p:nvSpPr>
+          <p:cNvPr id="4" name="Rectangle 3"/>
+          <p:cNvSpPr/>
+          <p:nvPr/>
+        </p:nvSpPr>
+        <p:spPr>
+          <a:xfrm>
+            <a:off x="868680" y="1051560"/>
+            <a:ext cx="1463040" cy="82296"/>
+          </a:xfrm>
+          <a:prstGeom prst="rect">
+            <a:avLst/>
+          </a:prstGeom>
+          <a:solidFill>
+            <a:srgbClr val="E8801A"/>
+          </a:solidFill>
+          <a:ln>
+            <a:noFill/>
+          </a:ln>
+          <a:effectLst/>
+        </p:spPr>
+        <p:style>
+          <a:lnRef idx="1">
+            <a:schemeClr val="accent1"/>
+          </a:lnRef>
+          <a:fillRef idx="3">
+            <a:schemeClr val="accent1"/>
+          </a:fillRef>
+          <a:effectRef idx="2">
+            <a:schemeClr val="accent1"/>
+          </a:effectRef>
+          <a:fontRef idx="minor">
+            <a:schemeClr val="lt1"/>
+          </a:fontRef>
+        </p:style>
+        <p:txBody>
+          <a:bodyPr rtlCol="0" anchor="ctr"/>
+          <a:lstStyle/>
+          <a:p>
+            <a:pPr algn="ctr"/>
+          </a:p>
+        </p:txBody>
+      </p:sp>
+      <p:sp>
+        <p:nvSpPr>
+          <p:cNvPr id="5" name="TextBox 4"/>
+          <p:cNvSpPr txBox="1"/>
+          <p:nvPr/>
+        </p:nvSpPr>
+        <p:spPr>
+          <a:xfrm>
+            <a:off x="822960" y="1234440"/>
+            <a:ext cx="10515600" cy="1097280"/>
+          </a:xfrm>
+          <a:prstGeom prst="rect">
+            <a:avLst/>
+          </a:prstGeom>
+          <a:noFill/>
+        </p:spPr>
+        <p:txBody>
+          <a:bodyPr wrap="square">
+            <a:spAutoFit/>
+          </a:bodyPr>
+          <a:lstStyle/>
+          <a:p>
+            <a:r>
+              <a:rPr sz="3400" b="1" i="0">
+                <a:solidFill>
+                  <a:srgbClr val="FFFFFF"/>
+                </a:solidFill>
+                <a:latin typeface="Montserrat"/>
+              </a:rPr>
+              <a:t>Ya tienes el mapa de la norma</a:t>
+            </a:r>
+          </a:p>
+        </p:txBody>
+      </p:sp>
+      <p:sp>
+        <p:nvSpPr>
+          <p:cNvPr id="6" name="TextBox 5"/>
+          <p:cNvSpPr txBox="1"/>
+          <p:nvPr/>
+        </p:nvSpPr>
+        <p:spPr>
+          <a:xfrm>
+            <a:off x="822960" y="2606040"/>
+            <a:ext cx="10515600" cy="2743200"/>
+          </a:xfrm>
+          <a:prstGeom prst="rect">
+            <a:avLst/>
+          </a:prstGeom>
+          <a:noFill/>
+        </p:spPr>
+        <p:txBody>
+          <a:bodyPr wrap="square">
+            <a:spAutoFit/>
+          </a:bodyPr>
+          <a:lstStyle/>
+          <a:p>
+            <a:pPr>
+              <a:spcAft>
+                <a:spcPts val="1200"/>
+              </a:spcAft>
+            </a:pPr>
+            <a:r>
+              <a:rPr sz="2000" b="1" i="0">
+                <a:solidFill>
+                  <a:srgbClr val="F4A24C"/>
+                </a:solidFill>
+                <a:latin typeface="Montserrat"/>
+              </a:rPr>
+              <a:t>✓  </a:t>
+            </a:r>
+            <a:r>
+              <a:rPr sz="1900" b="0" i="0">
+                <a:solidFill>
+                  <a:srgbClr val="FFFFFF"/>
+                </a:solidFill>
+                <a:latin typeface="Montserrat"/>
+              </a:rPr>
+              <a:t>La UNE 60670: 13 partes y MOP ≤ 5 bar</a:t>
+            </a:r>
+          </a:p>
+          <a:p>
+            <a:pPr>
+              <a:spcAft>
+                <a:spcPts val="1200"/>
+              </a:spcAft>
+            </a:pPr>
+            <a:r>
+              <a:rPr sz="2000" b="1" i="0">
+                <a:solidFill>
+                  <a:srgbClr val="F4A24C"/>
+                </a:solidFill>
+                <a:latin typeface="Montserrat"/>
+              </a:rPr>
+              <a:t>✓  </a:t>
+            </a:r>
+            <a:r>
+              <a:rPr sz="1900" b="0" i="0">
+                <a:solidFill>
+                  <a:srgbClr val="FFFFFF"/>
+                </a:solidFill>
+                <a:latin typeface="Montserrat"/>
+              </a:rPr>
+              <a:t>Receptora: tres condiciones y el límite de 15 kg</a:t>
+            </a:r>
+          </a:p>
+          <a:p>
+            <a:pPr>
+              <a:spcAft>
+                <a:spcPts val="1200"/>
+              </a:spcAft>
+            </a:pPr>
+            <a:r>
+              <a:rPr sz="2000" b="1" i="0">
+                <a:solidFill>
+                  <a:srgbClr val="F4A24C"/>
+                </a:solidFill>
+                <a:latin typeface="Montserrat"/>
+              </a:rPr>
+              <a:t>✓  </a:t>
+            </a:r>
+            <a:r>
+              <a:rPr sz="1900" b="0" i="0">
+                <a:solidFill>
+                  <a:srgbClr val="FFFFFF"/>
+                </a:solidFill>
+                <a:latin typeface="Montserrat"/>
+              </a:rPr>
+              <a:t>Tres clases y tres partes encajadas</a:t>
+            </a:r>
+          </a:p>
+          <a:p>
+            <a:pPr>
+              <a:spcAft>
+                <a:spcPts val="1200"/>
+              </a:spcAft>
+            </a:pPr>
+            <a:r>
+              <a:rPr sz="2000" b="1" i="0">
+                <a:solidFill>
+                  <a:srgbClr val="F4A24C"/>
+                </a:solidFill>
+                <a:latin typeface="Montserrat"/>
+              </a:rPr>
+              <a:t>✓  </a:t>
+            </a:r>
+            <a:r>
+              <a:rPr sz="1900" b="0" i="0">
+                <a:solidFill>
+                  <a:srgbClr val="FFFFFF"/>
+                </a:solidFill>
+                <a:latin typeface="Montserrat"/>
+              </a:rPr>
+              <a:t>Todo busca gas suficiente y seguro</a:t>
+            </a:r>
+          </a:p>
+        </p:txBody>
+      </p:sp>
+      <p:sp>
+        <p:nvSpPr>
+          <p:cNvPr id="7" name="Rounded Rectangle 6"/>
+          <p:cNvSpPr/>
+          <p:nvPr/>
+        </p:nvSpPr>
+        <p:spPr>
+          <a:xfrm>
+            <a:off x="822960" y="5532120"/>
+            <a:ext cx="10515600" cy="822960"/>
+          </a:xfrm>
+          <a:prstGeom prst="roundRect">
+            <a:avLst/>
+          </a:prstGeom>
+          <a:solidFill>
+            <a:srgbClr val="E8801A"/>
+          </a:solidFill>
+          <a:ln>
+            <a:noFill/>
+          </a:ln>
+          <a:effectLst/>
+        </p:spPr>
+        <p:style>
+          <a:lnRef idx="1">
+            <a:schemeClr val="accent1"/>
+          </a:lnRef>
+          <a:fillRef idx="3">
+            <a:schemeClr val="accent1"/>
+          </a:fillRef>
+          <a:effectRef idx="2">
+            <a:schemeClr val="accent1"/>
+          </a:effectRef>
+          <a:fontRef idx="minor">
+            <a:schemeClr val="lt1"/>
+          </a:fontRef>
+        </p:style>
+        <p:txBody>
+          <a:bodyPr rtlCol="0" anchor="ctr"/>
+          <a:lstStyle/>
+          <a:p>
+            <a:pPr algn="ctr"/>
+          </a:p>
+        </p:txBody>
+      </p:sp>
+      <p:sp>
+        <p:nvSpPr>
+          <p:cNvPr id="8" name="TextBox 7"/>
+          <p:cNvSpPr txBox="1"/>
+          <p:nvPr/>
+        </p:nvSpPr>
+        <p:spPr>
+          <a:xfrm>
+            <a:off x="1051560" y="5623560"/>
+            <a:ext cx="10058400" cy="640080"/>
+          </a:xfrm>
+          <a:prstGeom prst="rect">
+            <a:avLst/>
+          </a:prstGeom>
+          <a:noFill/>
+        </p:spPr>
+        <p:txBody>
+          <a:bodyPr wrap="square">
+            <a:spAutoFit/>
+          </a:bodyPr>
+          <a:lstStyle/>
+          <a:p>
+            <a:r>
+              <a:rPr sz="1500" b="1" i="1">
+                <a:solidFill>
+                  <a:srgbClr val="1E2761"/>
+                </a:solidFill>
+                <a:latin typeface="Montserrat"/>
+              </a:rPr>
+              <a:t>Hoy ya eres más gasista que ayer. Vamos a por el diccionario.</a:t>
+            </a:r>
+          </a:p>
+        </p:txBody>
+      </p:sp>
+    </p:spTree>
+  </p:cSld>
+  <p:clrMapOvr>
+    <a:masterClrMapping/>
+  </p:clrMapOvr>
+  <mc:AlternateContent xmlns:mc="http://schemas.openxmlformats.org/markup-compatibility/2006">
+    <mc:Choice xmlns:p14="http://schemas.microsoft.com/office/powerpoint/2010/main" Requires="p14">
+      <p:transition spd="med" p14:dur="700">
+        <p14:cube dir="l"/>
+      </p:transition>
+    </mc:Choice>
+    <mc:Fallback>
+      <p:transition spd="med">
+        <p:push dir="l"/>
+      </p:transition>
+    </mc:Fallback>
+  </mc:AlternateContent>
 </p:sld>
 </file>
 
@@ -8048,7 +13743,7 @@
                 </a:solidFill>
                 <a:latin typeface="Montserrat"/>
               </a:rPr>
-              <a:t>003 / 015</a:t>
+              <a:t>003 / 023</a:t>
             </a:r>
           </a:p>
         </p:txBody>
@@ -8157,7 +13852,7 @@
       </p:sp>
       <p:sp>
         <p:nvSpPr>
-          <p:cNvPr id="7" name="Rounded Rectangle 6"/>
+          <p:cNvPr id="7" name="Rectangle 6"/>
           <p:cNvSpPr/>
           <p:nvPr/>
         </p:nvSpPr>
@@ -8166,7 +13861,7 @@
             <a:off x="868680" y="1673352"/>
             <a:ext cx="2011680" cy="73152"/>
           </a:xfrm>
-          <a:prstGeom prst="roundRect">
+          <a:prstGeom prst="rect">
             <a:avLst/>
           </a:prstGeom>
           <a:solidFill>
@@ -8402,6 +14097,18 @@
   <p:clrMapOvr>
     <a:masterClrMapping/>
   </p:clrMapOvr>
+  <mc:AlternateContent xmlns:mc="http://schemas.openxmlformats.org/markup-compatibility/2006">
+    <mc:Choice xmlns:p14="http://schemas.microsoft.com/office/powerpoint/2010/main" Requires="p14">
+      <p:transition spd="med" p14:dur="700">
+        <p14:cube dir="l"/>
+      </p:transition>
+    </mc:Choice>
+    <mc:Fallback>
+      <p:transition spd="med">
+        <p:push dir="l"/>
+      </p:transition>
+    </mc:Fallback>
+  </mc:AlternateContent>
 </p:sld>
 </file>
 
@@ -8489,7 +14196,7 @@
                 </a:solidFill>
                 <a:latin typeface="Montserrat"/>
               </a:rPr>
-              <a:t>004 / 015</a:t>
+              <a:t>004 / 023</a:t>
             </a:r>
           </a:p>
         </p:txBody>
@@ -8598,7 +14305,7 @@
       </p:sp>
       <p:sp>
         <p:nvSpPr>
-          <p:cNvPr id="7" name="Rounded Rectangle 6"/>
+          <p:cNvPr id="7" name="Rectangle 6"/>
           <p:cNvSpPr/>
           <p:nvPr/>
         </p:nvSpPr>
@@ -8607,7 +14314,7 @@
             <a:off x="868680" y="1627632"/>
             <a:ext cx="2011680" cy="73152"/>
           </a:xfrm>
-          <a:prstGeom prst="roundRect">
+          <a:prstGeom prst="rect">
             <a:avLst/>
           </a:prstGeom>
           <a:solidFill>
@@ -8649,7 +14356,7 @@
         <p:spPr>
           <a:xfrm>
             <a:off x="822960" y="1965960"/>
-            <a:ext cx="4983480" cy="4206240"/>
+            <a:ext cx="5029200" cy="4206240"/>
           </a:xfrm>
           <a:prstGeom prst="rect">
             <a:avLst/>
@@ -8771,8 +14478,8 @@
         </p:nvSpPr>
         <p:spPr>
           <a:xfrm>
-            <a:off x="5806440" y="1051560"/>
-            <a:ext cx="5298947" cy="4629150"/>
+            <a:off x="6080760" y="1965960"/>
+            <a:ext cx="5303520" cy="4572000"/>
           </a:xfrm>
           <a:prstGeom prst="roundRect">
             <a:avLst/>
@@ -8817,8 +14524,8 @@
         </p:nvSpPr>
         <p:spPr>
           <a:xfrm>
-            <a:off x="6080760" y="2726055"/>
-            <a:ext cx="4750307" cy="1280160"/>
+            <a:off x="6355080" y="3611880"/>
+            <a:ext cx="4754880" cy="1280160"/>
           </a:xfrm>
           <a:prstGeom prst="rect">
             <a:avLst/>
@@ -8839,7 +14546,7 @@
                 </a:solidFill>
                 <a:latin typeface="Montserrat"/>
               </a:rPr>
-              <a:t>IMAGEN REALISTA</a:t>
+              <a:t>IMAGEN</a:t>
             </a:r>
           </a:p>
           <a:p>
@@ -8861,6 +14568,18 @@
   <p:clrMapOvr>
     <a:masterClrMapping/>
   </p:clrMapOvr>
+  <mc:AlternateContent xmlns:mc="http://schemas.openxmlformats.org/markup-compatibility/2006">
+    <mc:Choice xmlns:p14="http://schemas.microsoft.com/office/powerpoint/2010/main" Requires="p14">
+      <p:transition spd="med" p14:dur="700">
+        <p14:cube dir="r"/>
+      </p:transition>
+    </mc:Choice>
+    <mc:Fallback>
+      <p:transition spd="med">
+        <p:push dir="r"/>
+      </p:transition>
+    </mc:Fallback>
+  </mc:AlternateContent>
 </p:sld>
 </file>
 
@@ -8948,7 +14667,7 @@
                 </a:solidFill>
                 <a:latin typeface="Montserrat"/>
               </a:rPr>
-              <a:t>005 / 015</a:t>
+              <a:t>005 / 023</a:t>
             </a:r>
           </a:p>
         </p:txBody>
@@ -9057,7 +14776,7 @@
       </p:sp>
       <p:sp>
         <p:nvSpPr>
-          <p:cNvPr id="7" name="Rounded Rectangle 6"/>
+          <p:cNvPr id="7" name="Rectangle 6"/>
           <p:cNvSpPr/>
           <p:nvPr/>
         </p:nvSpPr>
@@ -9066,7 +14785,7 @@
             <a:off x="868680" y="1627632"/>
             <a:ext cx="2011680" cy="73152"/>
           </a:xfrm>
-          <a:prstGeom prst="roundRect">
+          <a:prstGeom prst="rect">
             <a:avLst/>
           </a:prstGeom>
           <a:solidFill>
@@ -9107,8 +14826,8 @@
         </p:nvSpPr>
         <p:spPr>
           <a:xfrm>
-            <a:off x="822960" y="1965960"/>
-            <a:ext cx="4983480" cy="4206240"/>
+            <a:off x="6355080" y="1965960"/>
+            <a:ext cx="5029200" cy="4206240"/>
           </a:xfrm>
           <a:prstGeom prst="rect">
             <a:avLst/>
@@ -9230,8 +14949,8 @@
         </p:nvSpPr>
         <p:spPr>
           <a:xfrm>
-            <a:off x="5806440" y="1051560"/>
-            <a:ext cx="5298947" cy="4629150"/>
+            <a:off x="822960" y="1965960"/>
+            <a:ext cx="5303520" cy="4572000"/>
           </a:xfrm>
           <a:prstGeom prst="roundRect">
             <a:avLst/>
@@ -9276,8 +14995,8 @@
         </p:nvSpPr>
         <p:spPr>
           <a:xfrm>
-            <a:off x="6080760" y="2726055"/>
-            <a:ext cx="4750307" cy="1280160"/>
+            <a:off x="1097280" y="3611880"/>
+            <a:ext cx="4754880" cy="1280160"/>
           </a:xfrm>
           <a:prstGeom prst="rect">
             <a:avLst/>
@@ -9298,7 +15017,7 @@
                 </a:solidFill>
                 <a:latin typeface="Montserrat"/>
               </a:rPr>
-              <a:t>IMAGEN REALISTA</a:t>
+              <a:t>IMAGEN</a:t>
             </a:r>
           </a:p>
           <a:p>
@@ -9320,6 +15039,18 @@
   <p:clrMapOvr>
     <a:masterClrMapping/>
   </p:clrMapOvr>
+  <mc:AlternateContent xmlns:mc="http://schemas.openxmlformats.org/markup-compatibility/2006">
+    <mc:Choice xmlns:p14="http://schemas.microsoft.com/office/powerpoint/2010/main" Requires="p14">
+      <p:transition spd="med" p14:dur="700">
+        <p14:cube dir="l"/>
+      </p:transition>
+    </mc:Choice>
+    <mc:Fallback>
+      <p:transition spd="med">
+        <p:push dir="l"/>
+      </p:transition>
+    </mc:Fallback>
+  </mc:AlternateContent>
 </p:sld>
 </file>
 
@@ -9407,7 +15138,7 @@
                 </a:solidFill>
                 <a:latin typeface="Montserrat"/>
               </a:rPr>
-              <a:t>006 / 015</a:t>
+              <a:t>006 / 023</a:t>
             </a:r>
           </a:p>
         </p:txBody>
@@ -9454,7 +15185,7 @@
         </p:nvSpPr>
         <p:spPr>
           <a:xfrm>
-            <a:off x="822960" y="457200"/>
+            <a:off x="822960" y="411480"/>
             <a:ext cx="10058400" cy="365760"/>
           </a:xfrm>
           <a:prstGeom prst="rect">
@@ -9475,7 +15206,7 @@
                 </a:solidFill>
                 <a:latin typeface="Montserrat"/>
               </a:rPr>
-              <a:t>UNE 60670 · GUÍA RÁPIDA</a:t>
+              <a:t>UNE 60670 · ESTRUCTURA</a:t>
             </a:r>
           </a:p>
         </p:txBody>
@@ -9488,8 +15219,8 @@
         </p:nvSpPr>
         <p:spPr>
           <a:xfrm>
-            <a:off x="822960" y="868680"/>
-            <a:ext cx="10515600" cy="914400"/>
+            <a:off x="822960" y="777240"/>
+            <a:ext cx="10515600" cy="822960"/>
           </a:xfrm>
           <a:prstGeom prst="rect">
             <a:avLst/>
@@ -9503,29 +15234,29 @@
           <a:lstStyle/>
           <a:p>
             <a:r>
-              <a:rPr sz="2800" b="1" i="0">
+              <a:rPr sz="2600" b="1" i="0">
                 <a:solidFill>
                   <a:srgbClr val="1E2761"/>
                 </a:solidFill>
                 <a:latin typeface="Montserrat"/>
               </a:rPr>
-              <a:t>Dónde mirar cada cosa</a:t>
-            </a:r>
-          </a:p>
-        </p:txBody>
-      </p:sp>
-      <p:sp>
-        <p:nvSpPr>
-          <p:cNvPr id="7" name="Rounded Rectangle 6"/>
+              <a:t>Las 13 partes de la norma</a:t>
+            </a:r>
+          </a:p>
+        </p:txBody>
+      </p:sp>
+      <p:sp>
+        <p:nvSpPr>
+          <p:cNvPr id="7" name="Rectangle 6"/>
           <p:cNvSpPr/>
           <p:nvPr/>
         </p:nvSpPr>
         <p:spPr>
           <a:xfrm>
-            <a:off x="868680" y="1627632"/>
+            <a:off x="868680" y="1481328"/>
             <a:ext cx="2011680" cy="73152"/>
           </a:xfrm>
-          <a:prstGeom prst="roundRect">
+          <a:prstGeom prst="rect">
             <a:avLst/>
           </a:prstGeom>
           <a:solidFill>
@@ -9558,114 +15289,686 @@
           </a:p>
         </p:txBody>
       </p:sp>
-      <p:sp>
-        <p:nvSpPr>
-          <p:cNvPr id="8" name="TextBox 7"/>
-          <p:cNvSpPr txBox="1"/>
-          <p:nvPr/>
-        </p:nvSpPr>
-        <p:spPr>
-          <a:xfrm>
-            <a:off x="822960" y="1965960"/>
-            <a:ext cx="4983480" cy="4206240"/>
-          </a:xfrm>
-          <a:prstGeom prst="rect">
-            <a:avLst/>
-          </a:prstGeom>
-          <a:noFill/>
-        </p:spPr>
-        <p:txBody>
-          <a:bodyPr wrap="square">
-            <a:spAutoFit/>
-          </a:bodyPr>
-          <a:lstStyle/>
-          <a:p>
-            <a:pPr>
-              <a:spcAft>
-                <a:spcPts val="1100"/>
-              </a:spcAft>
-            </a:pPr>
-            <a:r>
-              <a:rPr sz="1600" b="1" i="0">
-                <a:solidFill>
-                  <a:srgbClr val="E8801A"/>
-                </a:solidFill>
-                <a:latin typeface="Montserrat"/>
-              </a:rPr>
-              <a:t>▸  </a:t>
-            </a:r>
-            <a:r>
-              <a:rPr sz="1600" b="0" i="0">
-                <a:solidFill>
-                  <a:srgbClr val="1B2330"/>
-                </a:solidFill>
-                <a:latin typeface="Montserrat"/>
-              </a:rPr>
-              <a:t>Estanquidad de entrega → parte 8</a:t>
-            </a:r>
-          </a:p>
-          <a:p>
-            <a:pPr>
-              <a:spcAft>
-                <a:spcPts val="1100"/>
-              </a:spcAft>
-            </a:pPr>
-            <a:r>
-              <a:rPr sz="1600" b="1" i="0">
-                <a:solidFill>
-                  <a:srgbClr val="E8801A"/>
-                </a:solidFill>
-                <a:latin typeface="Montserrat"/>
-              </a:rPr>
-              <a:t>▸  </a:t>
-            </a:r>
-            <a:r>
-              <a:rPr sz="1600" b="0" i="0">
-                <a:solidFill>
-                  <a:srgbClr val="1B2330"/>
-                </a:solidFill>
-                <a:latin typeface="Montserrat"/>
-              </a:rPr>
-              <a:t>Puesta en servicio → parte 9</a:t>
-            </a:r>
-          </a:p>
-          <a:p>
-            <a:pPr>
-              <a:spcAft>
-                <a:spcPts val="1100"/>
-              </a:spcAft>
-            </a:pPr>
-            <a:r>
-              <a:rPr sz="1600" b="1" i="0">
-                <a:solidFill>
-                  <a:srgbClr val="E8801A"/>
-                </a:solidFill>
-                <a:latin typeface="Montserrat"/>
-              </a:rPr>
-              <a:t>▸  </a:t>
-            </a:r>
-            <a:r>
-              <a:rPr sz="1600" b="0" i="0">
-                <a:solidFill>
-                  <a:srgbClr val="1B2330"/>
-                </a:solidFill>
-                <a:latin typeface="Montserrat"/>
-              </a:rPr>
-              <a:t>Control periódico → partes 12 y 13</a:t>
-            </a:r>
-          </a:p>
-        </p:txBody>
-      </p:sp>
-      <p:sp>
-        <p:nvSpPr>
-          <p:cNvPr id="9" name="imgph" descr="IMGQ:technician reading manual next to gas meter"/>
+      <p:graphicFrame>
+        <p:nvGraphicFramePr>
+          <p:cNvPr id="8" name="Table 7"/>
+          <p:cNvGraphicFramePr>
+            <a:graphicFrameLocks noGrp="1"/>
+          </p:cNvGraphicFramePr>
+          <p:nvPr/>
+        </p:nvGraphicFramePr>
+        <p:xfrm>
+          <a:off x="548640" y="1783080"/>
+          <a:ext cx="11091672" cy="4023360"/>
+        </p:xfrm>
+        <a:graphic>
+          <a:graphicData uri="http://schemas.openxmlformats.org/drawingml/2006/table">
+            <a:tbl>
+              <a:tblPr firstRow="1" bandRow="1">
+                <a:tableStyleId>{5C22544A-7EE6-4342-B048-85BDC9FD1C3A}</a:tableStyleId>
+              </a:tblPr>
+              <a:tblGrid>
+                <a:gridCol w="5545836"/>
+                <a:gridCol w="5545836"/>
+              </a:tblGrid>
+              <a:tr h="287382">
+                <a:tc>
+                  <a:txBody>
+                    <a:bodyPr/>
+                    <a:lstStyle/>
+                    <a:p>
+                      <a:r>
+                        <a:rPr sz="1200" b="1" i="0">
+                          <a:solidFill>
+                            <a:srgbClr val="FFFFFF"/>
+                          </a:solidFill>
+                          <a:latin typeface="Montserrat"/>
+                        </a:rPr>
+                        <a:t>Parte</a:t>
+                      </a:r>
+                    </a:p>
+                  </a:txBody>
+                  <a:tcPr>
+                    <a:solidFill>
+                      <a:srgbClr val="1E2761"/>
+                    </a:solidFill>
+                  </a:tcPr>
+                </a:tc>
+                <a:tc>
+                  <a:txBody>
+                    <a:bodyPr/>
+                    <a:lstStyle/>
+                    <a:p>
+                      <a:r>
+                        <a:rPr sz="1200" b="1" i="0">
+                          <a:solidFill>
+                            <a:srgbClr val="FFFFFF"/>
+                          </a:solidFill>
+                          <a:latin typeface="Montserrat"/>
+                        </a:rPr>
+                        <a:t>Contenido</a:t>
+                      </a:r>
+                    </a:p>
+                  </a:txBody>
+                  <a:tcPr>
+                    <a:solidFill>
+                      <a:srgbClr val="1E2761"/>
+                    </a:solidFill>
+                  </a:tcPr>
+                </a:tc>
+              </a:tr>
+              <a:tr h="287382">
+                <a:tc>
+                  <a:txBody>
+                    <a:bodyPr/>
+                    <a:lstStyle/>
+                    <a:p>
+                      <a:r>
+                        <a:rPr sz="1200" b="0" i="0">
+                          <a:solidFill>
+                            <a:srgbClr val="1B2330"/>
+                          </a:solidFill>
+                          <a:latin typeface="Montserrat"/>
+                        </a:rPr>
+                        <a:t>1</a:t>
+                      </a:r>
+                    </a:p>
+                  </a:txBody>
+                  <a:tcPr>
+                    <a:solidFill>
+                      <a:srgbClr val="F6F8FC"/>
+                    </a:solidFill>
+                  </a:tcPr>
+                </a:tc>
+                <a:tc>
+                  <a:txBody>
+                    <a:bodyPr/>
+                    <a:lstStyle/>
+                    <a:p>
+                      <a:r>
+                        <a:rPr sz="1200" b="0" i="0">
+                          <a:solidFill>
+                            <a:srgbClr val="1B2330"/>
+                          </a:solidFill>
+                          <a:latin typeface="Montserrat"/>
+                        </a:rPr>
+                        <a:t>Generalidades</a:t>
+                      </a:r>
+                    </a:p>
+                  </a:txBody>
+                  <a:tcPr>
+                    <a:solidFill>
+                      <a:srgbClr val="F6F8FC"/>
+                    </a:solidFill>
+                  </a:tcPr>
+                </a:tc>
+              </a:tr>
+              <a:tr h="287382">
+                <a:tc>
+                  <a:txBody>
+                    <a:bodyPr/>
+                    <a:lstStyle/>
+                    <a:p>
+                      <a:r>
+                        <a:rPr sz="1200" b="0" i="0">
+                          <a:solidFill>
+                            <a:srgbClr val="1B2330"/>
+                          </a:solidFill>
+                          <a:latin typeface="Montserrat"/>
+                        </a:rPr>
+                        <a:t>2</a:t>
+                      </a:r>
+                    </a:p>
+                  </a:txBody>
+                  <a:tcPr>
+                    <a:solidFill>
+                      <a:srgbClr val="FFFFFF"/>
+                    </a:solidFill>
+                  </a:tcPr>
+                </a:tc>
+                <a:tc>
+                  <a:txBody>
+                    <a:bodyPr/>
+                    <a:lstStyle/>
+                    <a:p>
+                      <a:r>
+                        <a:rPr sz="1200" b="0" i="0">
+                          <a:solidFill>
+                            <a:srgbClr val="1B2330"/>
+                          </a:solidFill>
+                          <a:latin typeface="Montserrat"/>
+                        </a:rPr>
+                        <a:t>Terminología</a:t>
+                      </a:r>
+                    </a:p>
+                  </a:txBody>
+                  <a:tcPr>
+                    <a:solidFill>
+                      <a:srgbClr val="FFFFFF"/>
+                    </a:solidFill>
+                  </a:tcPr>
+                </a:tc>
+              </a:tr>
+              <a:tr h="287382">
+                <a:tc>
+                  <a:txBody>
+                    <a:bodyPr/>
+                    <a:lstStyle/>
+                    <a:p>
+                      <a:r>
+                        <a:rPr sz="1200" b="0" i="0">
+                          <a:solidFill>
+                            <a:srgbClr val="1B2330"/>
+                          </a:solidFill>
+                          <a:latin typeface="Montserrat"/>
+                        </a:rPr>
+                        <a:t>3</a:t>
+                      </a:r>
+                    </a:p>
+                  </a:txBody>
+                  <a:tcPr>
+                    <a:solidFill>
+                      <a:srgbClr val="F6F8FC"/>
+                    </a:solidFill>
+                  </a:tcPr>
+                </a:tc>
+                <a:tc>
+                  <a:txBody>
+                    <a:bodyPr/>
+                    <a:lstStyle/>
+                    <a:p>
+                      <a:r>
+                        <a:rPr sz="1200" b="0" i="0">
+                          <a:solidFill>
+                            <a:srgbClr val="1B2330"/>
+                          </a:solidFill>
+                          <a:latin typeface="Montserrat"/>
+                        </a:rPr>
+                        <a:t>Tuberías, elementos, accesorios y sus uniones</a:t>
+                      </a:r>
+                    </a:p>
+                  </a:txBody>
+                  <a:tcPr>
+                    <a:solidFill>
+                      <a:srgbClr val="F6F8FC"/>
+                    </a:solidFill>
+                  </a:tcPr>
+                </a:tc>
+              </a:tr>
+              <a:tr h="287382">
+                <a:tc>
+                  <a:txBody>
+                    <a:bodyPr/>
+                    <a:lstStyle/>
+                    <a:p>
+                      <a:r>
+                        <a:rPr sz="1200" b="0" i="0">
+                          <a:solidFill>
+                            <a:srgbClr val="1B2330"/>
+                          </a:solidFill>
+                          <a:latin typeface="Montserrat"/>
+                        </a:rPr>
+                        <a:t>4</a:t>
+                      </a:r>
+                    </a:p>
+                  </a:txBody>
+                  <a:tcPr>
+                    <a:solidFill>
+                      <a:srgbClr val="FFFFFF"/>
+                    </a:solidFill>
+                  </a:tcPr>
+                </a:tc>
+                <a:tc>
+                  <a:txBody>
+                    <a:bodyPr/>
+                    <a:lstStyle/>
+                    <a:p>
+                      <a:r>
+                        <a:rPr sz="1200" b="0" i="0">
+                          <a:solidFill>
+                            <a:srgbClr val="1B2330"/>
+                          </a:solidFill>
+                          <a:latin typeface="Montserrat"/>
+                        </a:rPr>
+                        <a:t>Diseño y construcción</a:t>
+                      </a:r>
+                    </a:p>
+                  </a:txBody>
+                  <a:tcPr>
+                    <a:solidFill>
+                      <a:srgbClr val="FFFFFF"/>
+                    </a:solidFill>
+                  </a:tcPr>
+                </a:tc>
+              </a:tr>
+              <a:tr h="287382">
+                <a:tc>
+                  <a:txBody>
+                    <a:bodyPr/>
+                    <a:lstStyle/>
+                    <a:p>
+                      <a:r>
+                        <a:rPr sz="1200" b="0" i="0">
+                          <a:solidFill>
+                            <a:srgbClr val="1B2330"/>
+                          </a:solidFill>
+                          <a:latin typeface="Montserrat"/>
+                        </a:rPr>
+                        <a:t>5</a:t>
+                      </a:r>
+                    </a:p>
+                  </a:txBody>
+                  <a:tcPr>
+                    <a:solidFill>
+                      <a:srgbClr val="F6F8FC"/>
+                    </a:solidFill>
+                  </a:tcPr>
+                </a:tc>
+                <a:tc>
+                  <a:txBody>
+                    <a:bodyPr/>
+                    <a:lstStyle/>
+                    <a:p>
+                      <a:r>
+                        <a:rPr sz="1200" b="0" i="0">
+                          <a:solidFill>
+                            <a:srgbClr val="1B2330"/>
+                          </a:solidFill>
+                          <a:latin typeface="Montserrat"/>
+                        </a:rPr>
+                        <a:t>Recintos destinados a la instalación de contadores de gas</a:t>
+                      </a:r>
+                    </a:p>
+                  </a:txBody>
+                  <a:tcPr>
+                    <a:solidFill>
+                      <a:srgbClr val="F6F8FC"/>
+                    </a:solidFill>
+                  </a:tcPr>
+                </a:tc>
+              </a:tr>
+              <a:tr h="287382">
+                <a:tc>
+                  <a:txBody>
+                    <a:bodyPr/>
+                    <a:lstStyle/>
+                    <a:p>
+                      <a:r>
+                        <a:rPr sz="1200" b="0" i="0">
+                          <a:solidFill>
+                            <a:srgbClr val="1B2330"/>
+                          </a:solidFill>
+                          <a:latin typeface="Montserrat"/>
+                        </a:rPr>
+                        <a:t>6</a:t>
+                      </a:r>
+                    </a:p>
+                  </a:txBody>
+                  <a:tcPr>
+                    <a:solidFill>
+                      <a:srgbClr val="FFFFFF"/>
+                    </a:solidFill>
+                  </a:tcPr>
+                </a:tc>
+                <a:tc>
+                  <a:txBody>
+                    <a:bodyPr/>
+                    <a:lstStyle/>
+                    <a:p>
+                      <a:r>
+                        <a:rPr sz="1200" b="0" i="0">
+                          <a:solidFill>
+                            <a:srgbClr val="1B2330"/>
+                          </a:solidFill>
+                          <a:latin typeface="Montserrat"/>
+                        </a:rPr>
+                        <a:t>Requisitos de configuración, ventilación y evacuación de los productos de la combustión en los locales destinados a contener los aparatos a gas</a:t>
+                      </a:r>
+                    </a:p>
+                  </a:txBody>
+                  <a:tcPr>
+                    <a:solidFill>
+                      <a:srgbClr val="FFFFFF"/>
+                    </a:solidFill>
+                  </a:tcPr>
+                </a:tc>
+              </a:tr>
+              <a:tr h="287382">
+                <a:tc>
+                  <a:txBody>
+                    <a:bodyPr/>
+                    <a:lstStyle/>
+                    <a:p>
+                      <a:r>
+                        <a:rPr sz="1200" b="0" i="0">
+                          <a:solidFill>
+                            <a:srgbClr val="1B2330"/>
+                          </a:solidFill>
+                          <a:latin typeface="Montserrat"/>
+                        </a:rPr>
+                        <a:t>7</a:t>
+                      </a:r>
+                    </a:p>
+                  </a:txBody>
+                  <a:tcPr>
+                    <a:solidFill>
+                      <a:srgbClr val="F6F8FC"/>
+                    </a:solidFill>
+                  </a:tcPr>
+                </a:tc>
+                <a:tc>
+                  <a:txBody>
+                    <a:bodyPr/>
+                    <a:lstStyle/>
+                    <a:p>
+                      <a:r>
+                        <a:rPr sz="1200" b="0" i="0">
+                          <a:solidFill>
+                            <a:srgbClr val="1B2330"/>
+                          </a:solidFill>
+                          <a:latin typeface="Montserrat"/>
+                        </a:rPr>
+                        <a:t>Requisitos de instalación y conexión de los aparatos a gas</a:t>
+                      </a:r>
+                    </a:p>
+                  </a:txBody>
+                  <a:tcPr>
+                    <a:solidFill>
+                      <a:srgbClr val="F6F8FC"/>
+                    </a:solidFill>
+                  </a:tcPr>
+                </a:tc>
+              </a:tr>
+              <a:tr h="287382">
+                <a:tc>
+                  <a:txBody>
+                    <a:bodyPr/>
+                    <a:lstStyle/>
+                    <a:p>
+                      <a:r>
+                        <a:rPr sz="1200" b="0" i="0">
+                          <a:solidFill>
+                            <a:srgbClr val="1B2330"/>
+                          </a:solidFill>
+                          <a:latin typeface="Montserrat"/>
+                        </a:rPr>
+                        <a:t>8</a:t>
+                      </a:r>
+                    </a:p>
+                  </a:txBody>
+                  <a:tcPr>
+                    <a:solidFill>
+                      <a:srgbClr val="FFFFFF"/>
+                    </a:solidFill>
+                  </a:tcPr>
+                </a:tc>
+                <a:tc>
+                  <a:txBody>
+                    <a:bodyPr/>
+                    <a:lstStyle/>
+                    <a:p>
+                      <a:r>
+                        <a:rPr sz="1200" b="0" i="0">
+                          <a:solidFill>
+                            <a:srgbClr val="1B2330"/>
+                          </a:solidFill>
+                          <a:latin typeface="Montserrat"/>
+                        </a:rPr>
+                        <a:t>Pruebas de estanquidad para la entrega de la instalación receptora</a:t>
+                      </a:r>
+                    </a:p>
+                  </a:txBody>
+                  <a:tcPr>
+                    <a:solidFill>
+                      <a:srgbClr val="FFFFFF"/>
+                    </a:solidFill>
+                  </a:tcPr>
+                </a:tc>
+              </a:tr>
+              <a:tr h="287382">
+                <a:tc>
+                  <a:txBody>
+                    <a:bodyPr/>
+                    <a:lstStyle/>
+                    <a:p>
+                      <a:r>
+                        <a:rPr sz="1200" b="0" i="0">
+                          <a:solidFill>
+                            <a:srgbClr val="1B2330"/>
+                          </a:solidFill>
+                          <a:latin typeface="Montserrat"/>
+                        </a:rPr>
+                        <a:t>9</a:t>
+                      </a:r>
+                    </a:p>
+                  </a:txBody>
+                  <a:tcPr>
+                    <a:solidFill>
+                      <a:srgbClr val="F6F8FC"/>
+                    </a:solidFill>
+                  </a:tcPr>
+                </a:tc>
+                <a:tc>
+                  <a:txBody>
+                    <a:bodyPr/>
+                    <a:lstStyle/>
+                    <a:p>
+                      <a:r>
+                        <a:rPr sz="1200" b="0" i="0">
+                          <a:solidFill>
+                            <a:srgbClr val="1B2330"/>
+                          </a:solidFill>
+                          <a:latin typeface="Montserrat"/>
+                        </a:rPr>
+                        <a:t>Pruebas previas al suministro y puesta en servicio</a:t>
+                      </a:r>
+                    </a:p>
+                  </a:txBody>
+                  <a:tcPr>
+                    <a:solidFill>
+                      <a:srgbClr val="F6F8FC"/>
+                    </a:solidFill>
+                  </a:tcPr>
+                </a:tc>
+              </a:tr>
+              <a:tr h="287382">
+                <a:tc>
+                  <a:txBody>
+                    <a:bodyPr/>
+                    <a:lstStyle/>
+                    <a:p>
+                      <a:r>
+                        <a:rPr sz="1200" b="0" i="0">
+                          <a:solidFill>
+                            <a:srgbClr val="1B2330"/>
+                          </a:solidFill>
+                          <a:latin typeface="Montserrat"/>
+                        </a:rPr>
+                        <a:t>10</a:t>
+                      </a:r>
+                    </a:p>
+                  </a:txBody>
+                  <a:tcPr>
+                    <a:solidFill>
+                      <a:srgbClr val="FFFFFF"/>
+                    </a:solidFill>
+                  </a:tcPr>
+                </a:tc>
+                <a:tc>
+                  <a:txBody>
+                    <a:bodyPr/>
+                    <a:lstStyle/>
+                    <a:p>
+                      <a:r>
+                        <a:rPr sz="1200" b="0" i="0">
+                          <a:solidFill>
+                            <a:srgbClr val="1B2330"/>
+                          </a:solidFill>
+                          <a:latin typeface="Montserrat"/>
+                        </a:rPr>
+                        <a:t>Comprobaciones para la puesta en marcha de los aparatos de gas o tras su adecuación por cambio de familia de gas</a:t>
+                      </a:r>
+                    </a:p>
+                  </a:txBody>
+                  <a:tcPr>
+                    <a:solidFill>
+                      <a:srgbClr val="FFFFFF"/>
+                    </a:solidFill>
+                  </a:tcPr>
+                </a:tc>
+              </a:tr>
+              <a:tr h="287382">
+                <a:tc>
+                  <a:txBody>
+                    <a:bodyPr/>
+                    <a:lstStyle/>
+                    <a:p>
+                      <a:r>
+                        <a:rPr sz="1200" b="0" i="0">
+                          <a:solidFill>
+                            <a:srgbClr val="1B2330"/>
+                          </a:solidFill>
+                          <a:latin typeface="Montserrat"/>
+                        </a:rPr>
+                        <a:t>11</a:t>
+                      </a:r>
+                    </a:p>
+                  </a:txBody>
+                  <a:tcPr>
+                    <a:solidFill>
+                      <a:srgbClr val="F6F8FC"/>
+                    </a:solidFill>
+                  </a:tcPr>
+                </a:tc>
+                <a:tc>
+                  <a:txBody>
+                    <a:bodyPr/>
+                    <a:lstStyle/>
+                    <a:p>
+                      <a:r>
+                        <a:rPr sz="1200" b="0" i="0">
+                          <a:solidFill>
+                            <a:srgbClr val="1B2330"/>
+                          </a:solidFill>
+                          <a:latin typeface="Montserrat"/>
+                        </a:rPr>
+                        <a:t>Operaciones en instalaciones receptoras en servicio</a:t>
+                      </a:r>
+                    </a:p>
+                  </a:txBody>
+                  <a:tcPr>
+                    <a:solidFill>
+                      <a:srgbClr val="F6F8FC"/>
+                    </a:solidFill>
+                  </a:tcPr>
+                </a:tc>
+              </a:tr>
+              <a:tr h="287382">
+                <a:tc>
+                  <a:txBody>
+                    <a:bodyPr/>
+                    <a:lstStyle/>
+                    <a:p>
+                      <a:r>
+                        <a:rPr sz="1200" b="0" i="0">
+                          <a:solidFill>
+                            <a:srgbClr val="1B2330"/>
+                          </a:solidFill>
+                          <a:latin typeface="Montserrat"/>
+                        </a:rPr>
+                        <a:t>12</a:t>
+                      </a:r>
+                    </a:p>
+                  </a:txBody>
+                  <a:tcPr>
+                    <a:solidFill>
+                      <a:srgbClr val="FFFFFF"/>
+                    </a:solidFill>
+                  </a:tcPr>
+                </a:tc>
+                <a:tc>
+                  <a:txBody>
+                    <a:bodyPr/>
+                    <a:lstStyle/>
+                    <a:p>
+                      <a:r>
+                        <a:rPr sz="1200" b="0" i="0">
+                          <a:solidFill>
+                            <a:srgbClr val="1B2330"/>
+                          </a:solidFill>
+                          <a:latin typeface="Montserrat"/>
+                        </a:rPr>
+                        <a:t>Criterios técnicos básicos para el control periódico de las instalaciones receptoras en servicio</a:t>
+                      </a:r>
+                    </a:p>
+                  </a:txBody>
+                  <a:tcPr>
+                    <a:solidFill>
+                      <a:srgbClr val="FFFFFF"/>
+                    </a:solidFill>
+                  </a:tcPr>
+                </a:tc>
+              </a:tr>
+              <a:tr h="287394">
+                <a:tc>
+                  <a:txBody>
+                    <a:bodyPr/>
+                    <a:lstStyle/>
+                    <a:p>
+                      <a:r>
+                        <a:rPr sz="1200" b="0" i="0">
+                          <a:solidFill>
+                            <a:srgbClr val="1B2330"/>
+                          </a:solidFill>
+                          <a:latin typeface="Montserrat"/>
+                        </a:rPr>
+                        <a:t>13</a:t>
+                      </a:r>
+                    </a:p>
+                  </a:txBody>
+                  <a:tcPr>
+                    <a:solidFill>
+                      <a:srgbClr val="F6F8FC"/>
+                    </a:solidFill>
+                  </a:tcPr>
+                </a:tc>
+                <a:tc>
+                  <a:txBody>
+                    <a:bodyPr/>
+                    <a:lstStyle/>
+                    <a:p>
+                      <a:r>
+                        <a:rPr sz="1200" b="0" i="0">
+                          <a:solidFill>
+                            <a:srgbClr val="1B2330"/>
+                          </a:solidFill>
+                          <a:latin typeface="Montserrat"/>
+                        </a:rPr>
+                        <a:t>Criterios técnicos básicos para el control periódico de los aparatos a gas de las instalaciones receptoras en servicio</a:t>
+                      </a:r>
+                    </a:p>
+                  </a:txBody>
+                  <a:tcPr>
+                    <a:solidFill>
+                      <a:srgbClr val="F6F8FC"/>
+                    </a:solidFill>
+                  </a:tcPr>
+                </a:tc>
+              </a:tr>
+            </a:tbl>
+          </a:graphicData>
+        </a:graphic>
+      </p:graphicFrame>
+      <p:sp>
+        <p:nvSpPr>
+          <p:cNvPr id="9" name="Rounded Rectangle 8"/>
           <p:cNvSpPr/>
           <p:nvPr/>
         </p:nvSpPr>
         <p:spPr>
           <a:xfrm>
-            <a:off x="5806440" y="1051560"/>
-            <a:ext cx="5298947" cy="4629150"/>
+            <a:off x="548640" y="5943600"/>
+            <a:ext cx="11091672" cy="384048"/>
           </a:xfrm>
           <a:prstGeom prst="roundRect">
             <a:avLst/>
@@ -9675,7 +15978,7 @@
           </a:solidFill>
           <a:ln w="12700">
             <a:solidFill>
-              <a:srgbClr val="C7D2E6"/>
+              <a:srgbClr val="D7DEEA"/>
             </a:solidFill>
           </a:ln>
           <a:effectLst/>
@@ -9710,8 +16013,8 @@
         </p:nvSpPr>
         <p:spPr>
           <a:xfrm>
-            <a:off x="6080760" y="2726055"/>
-            <a:ext cx="4750307" cy="1280160"/>
+            <a:off x="731520" y="5961888"/>
+            <a:ext cx="10789920" cy="365760"/>
           </a:xfrm>
           <a:prstGeom prst="rect">
             <a:avLst/>
@@ -9724,27 +16027,23 @@
           </a:bodyPr>
           <a:lstStyle/>
           <a:p>
-            <a:pPr algn="ctr"/>
-            <a:r>
-              <a:rPr sz="1400" b="1" i="0">
-                <a:solidFill>
-                  <a:srgbClr val="64748B"/>
-                </a:solidFill>
-                <a:latin typeface="Montserrat"/>
-              </a:rPr>
-              <a:t>IMAGEN REALISTA</a:t>
-            </a:r>
-          </a:p>
-          <a:p>
-            <a:pPr algn="ctr"/>
-            <a:r>
-              <a:rPr sz="1100" b="0" i="1">
-                <a:solidFill>
-                  <a:srgbClr val="64748B"/>
-                </a:solidFill>
-                <a:latin typeface="Montserrat"/>
-              </a:rPr>
-              <a:t>technician reading manual next to gas meter</a:t>
+            <a:r>
+              <a:rPr sz="1100" b="1" i="0">
+                <a:solidFill>
+                  <a:srgbClr val="E8801A"/>
+                </a:solidFill>
+                <a:latin typeface="Montserrat"/>
+              </a:rPr>
+              <a:t>Qué significa:  </a:t>
+            </a:r>
+            <a:r>
+              <a:rPr sz="1100" b="0" i="0">
+                <a:solidFill>
+                  <a:srgbClr val="1B2330"/>
+                </a:solidFill>
+                <a:latin typeface="Montserrat"/>
+              </a:rPr>
+              <a:t>Cada parte es un capítulo de la norma: la 1 y la 2 son el mapa, y de la 3 a la 13 va el detalle técnico.</a:t>
             </a:r>
           </a:p>
         </p:txBody>
@@ -9754,6 +16053,18 @@
   <p:clrMapOvr>
     <a:masterClrMapping/>
   </p:clrMapOvr>
+  <mc:AlternateContent xmlns:mc="http://schemas.openxmlformats.org/markup-compatibility/2006">
+    <mc:Choice xmlns:p14="http://schemas.microsoft.com/office/powerpoint/2010/main" Requires="p14">
+      <p:transition spd="med" p14:dur="700">
+        <p14:cube dir="r"/>
+      </p:transition>
+    </mc:Choice>
+    <mc:Fallback>
+      <p:transition spd="med">
+        <p:push dir="r"/>
+      </p:transition>
+    </mc:Fallback>
+  </mc:AlternateContent>
 </p:sld>
 </file>
 
@@ -9841,7 +16152,7 @@
                 </a:solidFill>
                 <a:latin typeface="Montserrat"/>
               </a:rPr>
-              <a:t>007 / 015</a:t>
+              <a:t>007 / 023</a:t>
             </a:r>
           </a:p>
         </p:txBody>
@@ -9909,7 +16220,7 @@
                 </a:solidFill>
                 <a:latin typeface="Montserrat"/>
               </a:rPr>
-              <a:t>PARTE 1 · NOVEDAD</a:t>
+              <a:t>UNE 60670 · GUÍA RÁPIDA</a:t>
             </a:r>
           </a:p>
         </p:txBody>
@@ -9943,14 +16254,14 @@
                 </a:solidFill>
                 <a:latin typeface="Montserrat"/>
               </a:rPr>
-              <a:t>El Anexo A, tu índice de normas</a:t>
-            </a:r>
-          </a:p>
-        </p:txBody>
-      </p:sp>
-      <p:sp>
-        <p:nvSpPr>
-          <p:cNvPr id="7" name="Rounded Rectangle 6"/>
+              <a:t>Dónde mirar cada cosa</a:t>
+            </a:r>
+          </a:p>
+        </p:txBody>
+      </p:sp>
+      <p:sp>
+        <p:nvSpPr>
+          <p:cNvPr id="7" name="Rectangle 6"/>
           <p:cNvSpPr/>
           <p:nvPr/>
         </p:nvSpPr>
@@ -9959,7 +16270,7 @@
             <a:off x="868680" y="1627632"/>
             <a:ext cx="2011680" cy="73152"/>
           </a:xfrm>
-          <a:prstGeom prst="roundRect">
+          <a:prstGeom prst="rect">
             <a:avLst/>
           </a:prstGeom>
           <a:solidFill>
@@ -10001,7 +16312,7 @@
         <p:spPr>
           <a:xfrm>
             <a:off x="822960" y="1965960"/>
-            <a:ext cx="4983480" cy="4206240"/>
+            <a:ext cx="5029200" cy="4206240"/>
           </a:xfrm>
           <a:prstGeom prst="rect">
             <a:avLst/>
@@ -10035,7 +16346,7 @@
                 </a:solidFill>
                 <a:latin typeface="Montserrat"/>
               </a:rPr>
-              <a:t>Lista de normas de consulta</a:t>
+              <a:t>Estanquidad de entrega → parte 8</a:t>
             </a:r>
           </a:p>
           <a:p>
@@ -10060,7 +16371,7 @@
                 </a:solidFill>
                 <a:latin typeface="Montserrat"/>
               </a:rPr>
-              <a:t>Cubre las 13 partes</a:t>
+              <a:t>Puesta en servicio → parte 9</a:t>
             </a:r>
           </a:p>
           <a:p>
@@ -10085,21 +16396,21 @@
                 </a:solidFill>
                 <a:latin typeface="Montserrat"/>
               </a:rPr>
-              <a:t>Es informativo, no obliga</a:t>
-            </a:r>
-          </a:p>
-        </p:txBody>
-      </p:sp>
-      <p:sp>
-        <p:nvSpPr>
-          <p:cNvPr id="9" name="imgph" descr="IMGQ:index page of technical document close up"/>
+              <a:t>Control periódico → partes 12 y 13</a:t>
+            </a:r>
+          </a:p>
+        </p:txBody>
+      </p:sp>
+      <p:sp>
+        <p:nvSpPr>
+          <p:cNvPr id="9" name="imgph" descr="IMGQ:technician reading manual next to gas meter"/>
           <p:cNvSpPr/>
           <p:nvPr/>
         </p:nvSpPr>
         <p:spPr>
           <a:xfrm>
-            <a:off x="5806440" y="1051560"/>
-            <a:ext cx="5298947" cy="4629150"/>
+            <a:off x="6080760" y="1965960"/>
+            <a:ext cx="5303520" cy="4572000"/>
           </a:xfrm>
           <a:prstGeom prst="roundRect">
             <a:avLst/>
@@ -10144,8 +16455,8 @@
         </p:nvSpPr>
         <p:spPr>
           <a:xfrm>
-            <a:off x="6080760" y="2726055"/>
-            <a:ext cx="4750307" cy="1280160"/>
+            <a:off x="6355080" y="3611880"/>
+            <a:ext cx="4754880" cy="1280160"/>
           </a:xfrm>
           <a:prstGeom prst="rect">
             <a:avLst/>
@@ -10166,7 +16477,7 @@
                 </a:solidFill>
                 <a:latin typeface="Montserrat"/>
               </a:rPr>
-              <a:t>IMAGEN REALISTA</a:t>
+              <a:t>IMAGEN</a:t>
             </a:r>
           </a:p>
           <a:p>
@@ -10178,7 +16489,7 @@
                 </a:solidFill>
                 <a:latin typeface="Montserrat"/>
               </a:rPr>
-              <a:t>index page of technical document close up</a:t>
+              <a:t>technician reading manual next to gas meter</a:t>
             </a:r>
           </a:p>
         </p:txBody>
@@ -10188,6 +16499,18 @@
   <p:clrMapOvr>
     <a:masterClrMapping/>
   </p:clrMapOvr>
+  <mc:AlternateContent xmlns:mc="http://schemas.openxmlformats.org/markup-compatibility/2006">
+    <mc:Choice xmlns:p14="http://schemas.microsoft.com/office/powerpoint/2010/main" Requires="p14">
+      <p:transition spd="med" p14:dur="700">
+        <p14:cube dir="l"/>
+      </p:transition>
+    </mc:Choice>
+    <mc:Fallback>
+      <p:transition spd="med">
+        <p:push dir="l"/>
+      </p:transition>
+    </mc:Fallback>
+  </mc:AlternateContent>
 </p:sld>
 </file>
 
@@ -10275,7 +16598,7 @@
                 </a:solidFill>
                 <a:latin typeface="Montserrat"/>
               </a:rPr>
-              <a:t>008 / 015</a:t>
+              <a:t>008 / 023</a:t>
             </a:r>
           </a:p>
         </p:txBody>
@@ -10343,7 +16666,7 @@
                 </a:solidFill>
                 <a:latin typeface="Montserrat"/>
               </a:rPr>
-              <a:t>PARTE 1 · OBJETO</a:t>
+              <a:t>PARTE 1 · NOVEDAD</a:t>
             </a:r>
           </a:p>
         </p:txBody>
@@ -10377,14 +16700,14 @@
                 </a:solidFill>
                 <a:latin typeface="Montserrat"/>
               </a:rPr>
-              <a:t>Qué hace la Parte 1</a:t>
-            </a:r>
-          </a:p>
-        </p:txBody>
-      </p:sp>
-      <p:sp>
-        <p:nvSpPr>
-          <p:cNvPr id="7" name="Rounded Rectangle 6"/>
+              <a:t>El Anexo A, tu índice de normas</a:t>
+            </a:r>
+          </a:p>
+        </p:txBody>
+      </p:sp>
+      <p:sp>
+        <p:nvSpPr>
+          <p:cNvPr id="7" name="Rectangle 6"/>
           <p:cNvSpPr/>
           <p:nvPr/>
         </p:nvSpPr>
@@ -10393,7 +16716,7 @@
             <a:off x="868680" y="1627632"/>
             <a:ext cx="2011680" cy="73152"/>
           </a:xfrm>
-          <a:prstGeom prst="roundRect">
+          <a:prstGeom prst="rect">
             <a:avLst/>
           </a:prstGeom>
           <a:solidFill>
@@ -10434,8 +16757,8 @@
         </p:nvSpPr>
         <p:spPr>
           <a:xfrm>
-            <a:off x="822960" y="1965960"/>
-            <a:ext cx="4983480" cy="4206240"/>
+            <a:off x="6355080" y="1965960"/>
+            <a:ext cx="5029200" cy="4206240"/>
           </a:xfrm>
           <a:prstGeom prst="rect">
             <a:avLst/>
@@ -10469,7 +16792,7 @@
                 </a:solidFill>
                 <a:latin typeface="Montserrat"/>
               </a:rPr>
-              <a:t>Define la instalación receptora</a:t>
+              <a:t>Lista de normas de consulta</a:t>
             </a:r>
           </a:p>
           <a:p>
@@ -10494,7 +16817,7 @@
                 </a:solidFill>
                 <a:latin typeface="Montserrat"/>
               </a:rPr>
-              <a:t>La clasifica en clases</a:t>
+              <a:t>Cubre las 13 partes</a:t>
             </a:r>
           </a:p>
           <a:p>
@@ -10519,46 +16842,21 @@
                 </a:solidFill>
                 <a:latin typeface="Montserrat"/>
               </a:rPr>
-              <a:t>Fija sus requisitos generales</a:t>
-            </a:r>
-          </a:p>
-          <a:p>
-            <a:pPr>
-              <a:spcAft>
-                <a:spcPts val="1100"/>
-              </a:spcAft>
-            </a:pPr>
-            <a:r>
-              <a:rPr sz="1600" b="1" i="0">
-                <a:solidFill>
-                  <a:srgbClr val="E8801A"/>
-                </a:solidFill>
-                <a:latin typeface="Montserrat"/>
-              </a:rPr>
-              <a:t>▸  </a:t>
-            </a:r>
-            <a:r>
-              <a:rPr sz="1600" b="0" i="0">
-                <a:solidFill>
-                  <a:srgbClr val="1B2330"/>
-                </a:solidFill>
-                <a:latin typeface="Montserrat"/>
-              </a:rPr>
-              <a:t>Desarrolla la UNE-EN 1775</a:t>
-            </a:r>
-          </a:p>
-        </p:txBody>
-      </p:sp>
-      <p:sp>
-        <p:nvSpPr>
-          <p:cNvPr id="9" name="imgph" descr="IMGQ:engineer drawing gas installation plan"/>
+              <a:t>Es informativo, no obliga</a:t>
+            </a:r>
+          </a:p>
+        </p:txBody>
+      </p:sp>
+      <p:sp>
+        <p:nvSpPr>
+          <p:cNvPr id="9" name="imgph" descr="IMGQ:index page of technical document close up"/>
           <p:cNvSpPr/>
           <p:nvPr/>
         </p:nvSpPr>
         <p:spPr>
           <a:xfrm>
-            <a:off x="5806440" y="1051560"/>
-            <a:ext cx="5298947" cy="4629150"/>
+            <a:off x="822960" y="1965960"/>
+            <a:ext cx="5303520" cy="4572000"/>
           </a:xfrm>
           <a:prstGeom prst="roundRect">
             <a:avLst/>
@@ -10603,8 +16901,8 @@
         </p:nvSpPr>
         <p:spPr>
           <a:xfrm>
-            <a:off x="6080760" y="2726055"/>
-            <a:ext cx="4750307" cy="1280160"/>
+            <a:off x="1097280" y="3611880"/>
+            <a:ext cx="4754880" cy="1280160"/>
           </a:xfrm>
           <a:prstGeom prst="rect">
             <a:avLst/>
@@ -10625,7 +16923,7 @@
                 </a:solidFill>
                 <a:latin typeface="Montserrat"/>
               </a:rPr>
-              <a:t>IMAGEN REALISTA</a:t>
+              <a:t>IMAGEN</a:t>
             </a:r>
           </a:p>
           <a:p>
@@ -10637,7 +16935,7 @@
                 </a:solidFill>
                 <a:latin typeface="Montserrat"/>
               </a:rPr>
-              <a:t>engineer drawing gas installation plan</a:t>
+              <a:t>index page of technical document close up</a:t>
             </a:r>
           </a:p>
         </p:txBody>
@@ -10647,6 +16945,18 @@
   <p:clrMapOvr>
     <a:masterClrMapping/>
   </p:clrMapOvr>
+  <mc:AlternateContent xmlns:mc="http://schemas.openxmlformats.org/markup-compatibility/2006">
+    <mc:Choice xmlns:p14="http://schemas.microsoft.com/office/powerpoint/2010/main" Requires="p14">
+      <p:transition spd="med" p14:dur="700">
+        <p14:cube dir="r"/>
+      </p:transition>
+    </mc:Choice>
+    <mc:Fallback>
+      <p:transition spd="med">
+        <p:push dir="r"/>
+      </p:transition>
+    </mc:Fallback>
+  </mc:AlternateContent>
 </p:sld>
 </file>
 
@@ -10734,7 +17044,7 @@
                 </a:solidFill>
                 <a:latin typeface="Montserrat"/>
               </a:rPr>
-              <a:t>009 / 015</a:t>
+              <a:t>009 / 023</a:t>
             </a:r>
           </a:p>
         </p:txBody>
@@ -10802,7 +17112,7 @@
                 </a:solidFill>
                 <a:latin typeface="Montserrat"/>
               </a:rPr>
-              <a:t>DEFINICIÓN · CLAVE</a:t>
+              <a:t>PARTE 1 · OBJETO</a:t>
             </a:r>
           </a:p>
         </p:txBody>
@@ -10836,14 +17146,14 @@
                 </a:solidFill>
                 <a:latin typeface="Montserrat"/>
               </a:rPr>
-              <a:t>¿Qué es instalación receptora?</a:t>
-            </a:r>
-          </a:p>
-        </p:txBody>
-      </p:sp>
-      <p:sp>
-        <p:nvSpPr>
-          <p:cNvPr id="7" name="Rounded Rectangle 6"/>
+              <a:t>Qué hace la Parte 1</a:t>
+            </a:r>
+          </a:p>
+        </p:txBody>
+      </p:sp>
+      <p:sp>
+        <p:nvSpPr>
+          <p:cNvPr id="7" name="Rectangle 6"/>
           <p:cNvSpPr/>
           <p:nvPr/>
         </p:nvSpPr>
@@ -10852,7 +17162,7 @@
             <a:off x="868680" y="1627632"/>
             <a:ext cx="2011680" cy="73152"/>
           </a:xfrm>
-          <a:prstGeom prst="roundRect">
+          <a:prstGeom prst="rect">
             <a:avLst/>
           </a:prstGeom>
           <a:solidFill>
@@ -10894,7 +17204,7 @@
         <p:spPr>
           <a:xfrm>
             <a:off x="822960" y="1965960"/>
-            <a:ext cx="4983480" cy="4206240"/>
+            <a:ext cx="5029200" cy="4206240"/>
           </a:xfrm>
           <a:prstGeom prst="rect">
             <a:avLst/>
@@ -10928,7 +17238,7 @@
                 </a:solidFill>
                 <a:latin typeface="Montserrat"/>
               </a:rPr>
-              <a:t>Gas de familia normalizada</a:t>
+              <a:t>Define la instalación receptora</a:t>
             </a:r>
           </a:p>
           <a:p>
@@ -10953,7 +17263,7 @@
                 </a:solidFill>
                 <a:latin typeface="Montserrat"/>
               </a:rPr>
-              <a:t>MOP ≤ 5 bar</a:t>
+              <a:t>La clasifica en clases</a:t>
             </a:r>
           </a:p>
           <a:p>
@@ -10978,7 +17288,7 @@
                 </a:solidFill>
                 <a:latin typeface="Montserrat"/>
               </a:rPr>
-              <a:t>Sirve a aparatos de gas</a:t>
+              <a:t>Fija sus requisitos generales</a:t>
             </a:r>
           </a:p>
           <a:p>
@@ -11003,21 +17313,21 @@
                 </a:solidFill>
                 <a:latin typeface="Montserrat"/>
               </a:rPr>
-              <a:t>Las tres condiciones a la vez</a:t>
-            </a:r>
-          </a:p>
-        </p:txBody>
-      </p:sp>
-      <p:sp>
-        <p:nvSpPr>
-          <p:cNvPr id="9" name="imgph" descr="IMGQ:copper gas pipe on wall with valve"/>
+              <a:t>Desarrolla la UNE-EN 1775</a:t>
+            </a:r>
+          </a:p>
+        </p:txBody>
+      </p:sp>
+      <p:sp>
+        <p:nvSpPr>
+          <p:cNvPr id="9" name="imgph" descr="IMGQ:engineer drawing gas installation plan"/>
           <p:cNvSpPr/>
           <p:nvPr/>
         </p:nvSpPr>
         <p:spPr>
           <a:xfrm>
-            <a:off x="5806440" y="1051560"/>
-            <a:ext cx="5298947" cy="4629150"/>
+            <a:off x="6080760" y="1965960"/>
+            <a:ext cx="5303520" cy="4572000"/>
           </a:xfrm>
           <a:prstGeom prst="roundRect">
             <a:avLst/>
@@ -11062,8 +17372,8 @@
         </p:nvSpPr>
         <p:spPr>
           <a:xfrm>
-            <a:off x="6080760" y="2726055"/>
-            <a:ext cx="4750307" cy="1280160"/>
+            <a:off x="6355080" y="3611880"/>
+            <a:ext cx="4754880" cy="1280160"/>
           </a:xfrm>
           <a:prstGeom prst="rect">
             <a:avLst/>
@@ -11084,7 +17394,7 @@
                 </a:solidFill>
                 <a:latin typeface="Montserrat"/>
               </a:rPr>
-              <a:t>IMAGEN REALISTA</a:t>
+              <a:t>IMAGEN</a:t>
             </a:r>
           </a:p>
           <a:p>
@@ -11096,7 +17406,7 @@
                 </a:solidFill>
                 <a:latin typeface="Montserrat"/>
               </a:rPr>
-              <a:t>copper gas pipe on wall with valve</a:t>
+              <a:t>engineer drawing gas installation plan</a:t>
             </a:r>
           </a:p>
         </p:txBody>
@@ -11106,6 +17416,18 @@
   <p:clrMapOvr>
     <a:masterClrMapping/>
   </p:clrMapOvr>
+  <mc:AlternateContent xmlns:mc="http://schemas.openxmlformats.org/markup-compatibility/2006">
+    <mc:Choice xmlns:p14="http://schemas.microsoft.com/office/powerpoint/2010/main" Requires="p14">
+      <p:transition spd="med" p14:dur="700">
+        <p14:cube dir="l"/>
+      </p:transition>
+    </mc:Choice>
+    <mc:Fallback>
+      <p:transition spd="med">
+        <p:push dir="l"/>
+      </p:transition>
+    </mc:Fallback>
+  </mc:AlternateContent>
 </p:sld>
 </file>
 

--- a/Curso Gas B/09 - UNE 60670 - Generalidades y terminologia/09 - UNE 60670 - Generalidades y terminologia - Vídeo 1.pptx
+++ b/Curso Gas B/09 - UNE 60670 - Generalidades y terminologia/09 - UNE 60670 - Generalidades y terminologia - Vídeo 1.pptx
@@ -674,12 +674,12 @@
           <a:lstStyle/>
           <a:p>
             <a:r>
-              <a:t>N1: Va la primera, y con truco: ¿qué hace que un montaje sea de verdad instalación receptora?</a:t>
-            </a:r>
-          </a:p>
-          <a:p>
-            <a:r>
-              <a:t>N2: Piensa en las tres patas de un taburete; si falta una, se cae. Gas normalizado, poca presión y para dar de comer a aparatos.</a:t>
+              <a:t>N1: Va la primera pregunta del vídeo, y te la leo entera para que juegues conmigo, solo con el oído. ¿Cuándo es una instalación una instalación receptora según la UNE sesenta mil seiscientos setenta? Escucha las cuatro opciones. Opción A: cuando usa gas de familia normalizada, presión máxima de operación que no pasa de cinco bar y sirve a aparatos de gas. Opción B: cuando la presión supera los cinco bar y hay varios aparatos conectados. Opción C: siempre que haya una bombona conectada a un aparato móvil. Opción D: cuando la instalación es de gas natural, sea cual sea la presión.</a:t>
+            </a:r>
+          </a:p>
+          <a:p>
+            <a:r>
+              <a:t>N2: Tómate un segundo y piénsalo. Acuérdate de las tres patas del taburete: gas normalizado, poca presión y para dar de comer a aparatos.</a:t>
             </a:r>
           </a:p>
         </p:txBody>
@@ -749,12 +749,12 @@
           <a:lstStyle/>
           <a:p>
             <a:r>
-              <a:t>N1: ¿Por qué la A?</a:t>
-            </a:r>
-          </a:p>
-          <a:p>
-            <a:r>
-              <a:t>N2: Porque las tres condiciones van juntas: gas de una familia reconocida, presión máxima de operación no superior a cinco bar y servir a aparatos de gas. Si falla una sola, ya no es instalación receptora a efectos de la norma. El truco para no fallar: gas normalizado, poca presión y para aparatos.</a:t>
+              <a:t>N2: La respuesta correcta es la opción A: cuando usa gas de familia normalizada, presión máxima de operación que no pasa de cinco bar y sirve a aparatos de gas. ¿Por qué? Porque las tres condiciones tienen que darse a la vez: gas de una familia reconocida, presión máxima de operación no superior a cinco bar y servir a aparatos de gas. Si falla una sola, ya no es instalación receptora a efectos de la norma. Por eso la B se cae, presión por encima de cinco bar; la C se queda corta, una bombona a un aparato móvil no es receptora; y la D se cuela, el gas natural a cualquier presión no vale. El truco para no fallar: gas normalizado, poca presión y para aparatos.</a:t>
+            </a:r>
+          </a:p>
+          <a:p>
+            <a:r>
+              <a:t>N1: Tres patas, y si falta una, se cae.</a:t>
             </a:r>
           </a:p>
         </p:txBody>
@@ -1049,12 +1049,12 @@
           <a:lstStyle/>
           <a:p>
             <a:r>
-              <a:t>N1: Fácil de confundir: el depósito de GLP del jardín, ¿qué clase es?</a:t>
-            </a:r>
-          </a:p>
-          <a:p>
-            <a:r>
-              <a:t>N2: Pista: no llega por red, y tampoco es una bombona pequeña. ¿Dónde encaja?</a:t>
+              <a:t>N1: Segunda pregunta, te la leo completa. Un depósito fijo de GLP en la parcela, ¿a qué clase de suministro corresponde? Escucha las cuatro opciones. Opción A: canalizado. Opción B: granel. Opción C: envases. Opción D: intemperie. Tómate un segundo para pensarlo.</a:t>
+            </a:r>
+          </a:p>
+          <a:p>
+            <a:r>
+              <a:t>N2: Pista: no llega por una red, y tampoco es una bombona pequeña. ¿Dónde encaja?</a:t>
             </a:r>
           </a:p>
         </p:txBody>
@@ -1124,12 +1124,12 @@
           <a:lstStyle/>
           <a:p>
             <a:r>
-              <a:t>N1: ¿Por qué granel?</a:t>
-            </a:r>
-          </a:p>
-          <a:p>
-            <a:r>
-              <a:t>N2: Porque granel es el suministro desde depósitos fijos de GLP o desde envases de carga superior a quince kilos. Canalizado sería por red de distribución, y envases serían las bombonas pequeñas por debajo de quince kilos. El truco: depósito fijo o envase grande, siempre granel.</a:t>
+              <a:t>N2: La respuesta correcta es la opción B: granel. ¿Por qué? Porque granel es el suministro desde depósitos fijos de GLP, o desde envases de carga superior a quince kilos. El canalizado sería por una red de distribución, y los envases serían las bombonas pequeñas, por debajo de quince kilos. Y la intemperie ni siquiera es una clase de suministro, es un despiste. El truco: depósito fijo o envase grande, siempre granel.</a:t>
+            </a:r>
+          </a:p>
+          <a:p>
+            <a:r>
+              <a:t>N1: Depósito en el jardín, granel, clavado.</a:t>
             </a:r>
           </a:p>
         </p:txBody>
@@ -1499,12 +1499,12 @@
           <a:lstStyle/>
           <a:p>
             <a:r>
-              <a:t>N1: Última del vídeo: acabas la instalación y... ¿qué papel te pide la distribuidora?</a:t>
-            </a:r>
-          </a:p>
-          <a:p>
-            <a:r>
-              <a:t>N2: Pista: es el documento que firma tu empresa habilitada y sin el cual no entra gas.</a:t>
+              <a:t>N1: Última pregunta del vídeo, atención que te la leo entera. En una instalación receptora nueva, ¿qué documento exige la distribuidora para dar suministro? Escucha las cuatro opciones. Opción A: el certificado o boletín firmado por la empresa instaladora de categoría B. Opción B: una autorización previa del ayuntamiento del municipio. Opción C: la factura de compra de la caldera y los aparatos. Opción D: el manual de instrucciones del fabricante del aparato. Piénsalo un momento.</a:t>
+            </a:r>
+          </a:p>
+          <a:p>
+            <a:r>
+              <a:t>N2: Pista: es el papel que firma tu empresa habilitada y sin el cual no entra gas.</a:t>
             </a:r>
           </a:p>
         </p:txBody>
@@ -1574,12 +1574,12 @@
           <a:lstStyle/>
           <a:p>
             <a:r>
-              <a:t>N1: ¿Por qué la A?</a:t>
-            </a:r>
-          </a:p>
-          <a:p>
-            <a:r>
-              <a:t>N2: Porque toda instalación receptora obliga a un certificado de instalación, el boletín, que firma la empresa instaladora habilitada de categoría B y se entrega a la distribuidora, con copia para el titular. Sin ese documento no hay suministro. El truco: si es receptora, hay boletín, y lo firma tu empresa, no el ayuntamiento ni el fabricante.</a:t>
+              <a:t>N2: La respuesta correcta es la opción A: el certificado o boletín firmado por la empresa instaladora de categoría B. ¿Por qué? Porque toda instalación receptora obliga a un certificado de instalación, el boletín, que firma tu empresa instaladora habilitada de categoría B y se entrega a la distribuidora, con copia para el titular. Sin ese documento no hay suministro. El ayuntamiento, la factura de la caldera o el manual del fabricante no pintan nada aquí. El truco: si es receptora, hay boletín, y lo firma tu empresa, no el ayuntamiento ni el fabricante.</a:t>
+            </a:r>
+          </a:p>
+          <a:p>
+            <a:r>
+              <a:t>N1: Sin boletín, no hay gas.</a:t>
             </a:r>
           </a:p>
         </p:txBody>
